--- a/docs/valletta_model_concept_2026-09-25.pptx
+++ b/docs/valletta_model_concept_2026-09-25.pptx
@@ -512,7 +512,7 @@
           <a:p>
             <a:r>
               <a:rPr lang="en-US" dirty="0"/>
-              <a:t>Brief: what the model is meant to be, and what has to be settled with the group before it is built.</a:t>
+              <a:t>The deck covers the intended model and the matters to be settled before its construction.</a:t>
             </a:r>
             <a:endParaRPr lang="en-US" dirty="0"/>
           </a:p>
@@ -600,7 +600,7 @@
           <a:p>
             <a:r>
               <a:rPr lang="en-US" dirty="0"/>
-              <a:t>These are the items that change what the study can be. Everything else can be resolved by working.</a:t>
+              <a:t>These items determine what the study can be. The remainder is resolvable by execution.</a:t>
             </a:r>
             <a:endParaRPr lang="en-US" dirty="0"/>
           </a:p>
@@ -776,7 +776,7 @@
           <a:p>
             <a:r>
               <a:rPr lang="en-US" dirty="0"/>
-              <a:t>One slide of context. The thesis contribution is framework reusability; Valletta is the harder and therefore better test.</a:t>
+              <a:t>Context. The thesis contribution is framework reusability, and Valletta constitutes the harder test.</a:t>
             </a:r>
             <a:endParaRPr lang="en-US" dirty="0"/>
           </a:p>
@@ -952,7 +952,7 @@
           <a:p>
             <a:r>
               <a:rPr lang="en-US" dirty="0"/>
-              <a:t>The three-stage chain is the organising idea of the whole study. It is also what sets the domain.</a:t>
+              <a:t>The three-stage chain organises the study and determines the domain.</a:t>
             </a:r>
             <a:endParaRPr lang="en-US" dirty="0"/>
           </a:p>
@@ -1040,7 +1040,7 @@
           <a:p>
             <a:r>
               <a:rPr lang="en-US" dirty="0"/>
-              <a:t>This is the slide that decides the domain. Ask whether the group's own harbour records show energy near 17 minutes.</a:t>
+              <a:t>The domain follows from this table. Whether the group's harbour records carry energy near 17 minutes is the first outstanding question.</a:t>
             </a:r>
             <a:endParaRPr lang="en-US" dirty="0"/>
           </a:p>
@@ -1216,7 +1216,7 @@
           <a:p>
             <a:r>
               <a:rPr lang="en-US" dirty="0"/>
-              <a:t>Deltares question: whether sigma holds from 15 m to 150 m, or whether z-sigma is indicated.</a:t>
+              <a:t>A question for Deltares concerns whether sigma holds from 15 m to 150 m, or whether a z-sigma hybrid is indicated.</a:t>
             </a:r>
             <a:endParaRPr lang="en-US" dirty="0"/>
           </a:p>
@@ -1392,7 +1392,7 @@
           <a:p>
             <a:r>
               <a:rPr lang="en-US" dirty="0"/>
-              <a:t>A sweep of six speeds by eight directions is forty-eight runs, barotropic and uncoupled, therefore cheap.</a:t>
+              <a:t>A sweep of six speeds by eight directions amounts to forty-eight runs, barotropic and uncoupled, and therefore inexpensive.</a:t>
             </a:r>
             <a:endParaRPr lang="en-US" dirty="0"/>
           </a:p>
@@ -2115,7 +2115,7 @@
                 <a:ea typeface="Calibri" pitchFamily="34" charset="-122"/>
                 <a:cs typeface="Calibri" pitchFamily="34" charset="-120"/>
               </a:rPr>
-              <a:t>WHAT WE NEED FROM THE GROUP</a:t>
+              <a:t>OUTSTANDING QUESTIONS</a:t>
             </a:r>
             <a:endParaRPr lang="en-US" sz="1200" dirty="0"/>
           </a:p>
@@ -2154,7 +2154,7 @@
                 <a:ea typeface="Cambria" pitchFamily="34" charset="-122"/>
                 <a:cs typeface="Cambria" pitchFamily="34" charset="-120"/>
               </a:rPr>
-              <a:t>Six questions, and why each one matters</a:t>
+              <a:t>Six questions and their bearing on the study</a:t>
             </a:r>
             <a:endParaRPr lang="en-US" sz="3200" dirty="0"/>
           </a:p>
@@ -3012,7 +3012,7 @@
                 <a:ea typeface="Calibri" pitchFamily="34" charset="-122"/>
                 <a:cs typeface="Calibri" pitchFamily="34" charset="-120"/>
               </a:rPr>
-              <a:t>Better asked now than discovered later.</a:t>
+              <a:t>Establishing this early avoids a duplication of intent.</a:t>
             </a:r>
             <a:endParaRPr lang="en-US" sz="1100" dirty="0"/>
           </a:p>
@@ -3105,7 +3105,7 @@
                 <a:ea typeface="Calibri" pitchFamily="34" charset="-122"/>
                 <a:cs typeface="Calibri" pitchFamily="34" charset="-120"/>
               </a:rPr>
-              <a:t>WHAT HAPPENS NEXT</a:t>
+              <a:t>IMMEDIATE SEQUENCE</a:t>
             </a:r>
             <a:endParaRPr lang="en-US" sz="1200" dirty="0"/>
           </a:p>
@@ -3245,7 +3245,7 @@
                 <a:ea typeface="Calibri" pitchFamily="34" charset="-122"/>
                 <a:cs typeface="Calibri" pitchFamily="34" charset="-120"/>
               </a:rPr>
-              <a:t>Seiche climatology from the Portomaso and PORTO archives. No model required.</a:t>
+              <a:t>Seiche climatology from the Portomaso and PORTO archives. No model is required.</a:t>
             </a:r>
             <a:endParaRPr lang="en-US" sz="1250" dirty="0"/>
           </a:p>
@@ -3752,7 +3752,7 @@
                 <a:ea typeface="Calibri" pitchFamily="34" charset="-122"/>
                 <a:cs typeface="Calibri" pitchFamily="34" charset="-120"/>
               </a:rPr>
-              <a:t>POINT OF DEPARTURE</a:t>
+              <a:t>ORIGIN</a:t>
             </a:r>
             <a:endParaRPr lang="en-US" sz="1200" dirty="0"/>
           </a:p>
@@ -5071,7 +5071,7 @@
                 <a:ea typeface="Calibri" pitchFamily="34" charset="-122"/>
                 <a:cs typeface="Calibri" pitchFamily="34" charset="-120"/>
               </a:rPr>
-              <a:t>ALREADY IN HAND</a:t>
+              <a:t>AVAILABLE DATA</a:t>
             </a:r>
             <a:endParaRPr lang="en-US" sz="1200" dirty="0"/>
           </a:p>
@@ -5500,7 +5500,7 @@
                 <a:ea typeface="Calibri" pitchFamily="34" charset="-122"/>
                 <a:cs typeface="Calibri" pitchFamily="34" charset="-120"/>
               </a:rPr>
-              <a:t>Two hazards already found
+              <a:t>Two coordinate hazards
 </a:t>
             </a:r>
             <a:endParaRPr lang="en-US" sz="1150" dirty="0"/>
@@ -5521,7 +5521,7 @@
                 <a:ea typeface="Calibri" pitchFamily="34" charset="-122"/>
                 <a:cs typeface="Calibri" pitchFamily="34" charset="-120"/>
               </a:rPr>
-              <a:t>The grids carry no datum. Read as WGS84 they land 197 m out, silently.
+              <a:t>The grids carry no datum. Interpreted as WGS84 they are displaced by 197 m, without error.
 </a:t>
             </a:r>
             <a:endParaRPr lang="en-US" sz="1150" dirty="0"/>
@@ -6438,7 +6438,7 @@
                 <a:ea typeface="Calibri" pitchFamily="34" charset="-122"/>
                 <a:cs typeface="Calibri" pitchFamily="34" charset="-120"/>
               </a:rPr>
-              <a:t>WHAT THE GEOMETRY SAYS</a:t>
+              <a:t>RESONANT PERIODS</a:t>
             </a:r>
             <a:endParaRPr lang="en-US" sz="1200" dirty="0"/>
           </a:p>
@@ -9696,7 +9696,7 @@
                 <a:ea typeface="Cambria" pitchFamily="34" charset="-122"/>
                 <a:cs typeface="Cambria" pitchFamily="34" charset="-120"/>
               </a:rPr>
-              <a:t>The plateau costs a tenth more cells</a:t>
+              <a:t>Extent over the plateau, and its cost</a:t>
             </a:r>
             <a:endParaRPr lang="en-US" sz="3200" dirty="0"/>
           </a:p>
@@ -9823,7 +9823,7 @@
                 <a:ea typeface="Cambria" pitchFamily="34" charset="-122"/>
                 <a:cs typeface="Cambria" pitchFamily="34" charset="-120"/>
               </a:rPr>
-              <a:t>Geometry sets the resolution, not the wave</a:t>
+              <a:t>The geometry sets the resolution</a:t>
             </a:r>
             <a:endParaRPr lang="en-US" sz="3200" dirty="0"/>
           </a:p>
@@ -11116,7 +11116,7 @@
                 <a:ea typeface="Calibri" pitchFamily="34" charset="-122"/>
                 <a:cs typeface="Calibri" pitchFamily="34" charset="-120"/>
               </a:rPr>
-              <a:t>WHAT THE STUDY ASKS</a:t>
+              <a:t>RESEARCH QUESTION</a:t>
             </a:r>
             <a:endParaRPr lang="en-US" sz="1200" dirty="0"/>
           </a:p>
@@ -11155,7 +11155,7 @@
                 <a:ea typeface="Cambria" pitchFamily="34" charset="-122"/>
                 <a:cs typeface="Cambria" pitchFamily="34" charset="-120"/>
               </a:rPr>
-              <a:t>Attribution, not verification</a:t>
+              <a:t>Attribution of amplification</a:t>
             </a:r>
             <a:endParaRPr lang="en-US" sz="3200" dirty="0"/>
           </a:p>
@@ -11258,7 +11258,7 @@
                 <a:ea typeface="Cambria" pitchFamily="34" charset="-122"/>
                 <a:cs typeface="Cambria" pitchFamily="34" charset="-120"/>
               </a:rPr>
-              <a:t>Why not the obvious question</a:t>
+              <a:t>The formulation it replaces</a:t>
             </a:r>
             <a:endParaRPr lang="en-US" sz="1400" dirty="0"/>
           </a:p>
@@ -11349,7 +11349,7 @@
                 <a:ea typeface="Calibri" pitchFamily="34" charset="-122"/>
                 <a:cs typeface="Calibri" pitchFamily="34" charset="-120"/>
               </a:rPr>
-              <a:t>It is now a section of the methods, where it belongs.</a:t>
+              <a:t>It is relocated to the methods.</a:t>
             </a:r>
             <a:endParaRPr lang="en-US" sz="1200" dirty="0"/>
           </a:p>
@@ -11388,7 +11388,7 @@
                 <a:ea typeface="Cambria" pitchFamily="34" charset="-122"/>
                 <a:cs typeface="Cambria" pitchFamily="34" charset="-120"/>
               </a:rPr>
-              <a:t>What the prior work already settled</a:t>
+              <a:t>Prior work to be cleared</a:t>
             </a:r>
             <a:endParaRPr lang="en-US" sz="1400" dirty="0"/>
           </a:p>
@@ -11479,7 +11479,7 @@
                 <a:ea typeface="Calibri" pitchFamily="34" charset="-122"/>
                 <a:cs typeface="Calibri" pitchFamily="34" charset="-120"/>
               </a:rPr>
-              <a:t>The generation side is untouched, because the prior work imposes the wave rather than producing it. That is the open ground.</a:t>
+              <a:t>The generation side is untouched, because the prior work imposes the wave rather than producing it, and it therefore remains unaddressed.</a:t>
             </a:r>
             <a:endParaRPr lang="en-US" sz="1200" dirty="0"/>
           </a:p>
@@ -11582,7 +11582,7 @@
                 <a:ea typeface="Cambria" pitchFamily="34" charset="-122"/>
                 <a:cs typeface="Cambria" pitchFamily="34" charset="-120"/>
               </a:rPr>
-              <a:t>A parametric sweep, not a hindcast</a:t>
+              <a:t>A parametric sweep in place of a hindcast</a:t>
             </a:r>
             <a:endParaRPr lang="en-US" sz="3200" dirty="0"/>
           </a:p>
@@ -12102,7 +12102,7 @@
                 <a:ea typeface="Cambria" pitchFamily="34" charset="-122"/>
                 <a:cs typeface="Cambria" pitchFamily="34" charset="-120"/>
               </a:rPr>
-              <a:t>Why this matters beyond the study</a:t>
+              <a:t>Bearing beyond the present study</a:t>
             </a:r>
             <a:endParaRPr lang="en-US" sz="1400" dirty="0"/>
           </a:p>

--- a/docs/valletta_model_concept_2026-09-25.pptx
+++ b/docs/valletta_model_concept_2026-09-25.pptx
@@ -1040,7 +1040,7 @@
           <a:p>
             <a:r>
               <a:rPr lang="en-US" dirty="0"/>
-              <a:t>The domain follows from this table. Whether the group's harbour records carry energy near 17 minutes is the first outstanding question.</a:t>
+              <a:t>The estimate was tested against its two plausible failures, the Helmholtz idealisation and excitation below resonance. The domain follows from this table. Whether the group's harbour records carry energy near 17 minutes is the first outstanding question.</a:t>
             </a:r>
             <a:endParaRPr lang="en-US" dirty="0"/>
           </a:p>
@@ -2297,7 +2297,7 @@
                 <a:ea typeface="Calibri" pitchFamily="34" charset="-122"/>
                 <a:cs typeface="Calibri" pitchFamily="34" charset="-120"/>
               </a:rPr>
-              <a:t>A spectrum would settle whether the basins carry energy near 17 minutes. The 0.2 to 2 cph band is observed at Mellieħa, on another coast, and the present analysis can only infer.</a:t>
+              <a:t>A spectrum would establish whether the basins carry energy near 17 minutes. The 0.2 to 2 cph band is observed at Mellieħa, on another coast, so the present analysis can only infer the Valletta response.</a:t>
             </a:r>
             <a:endParaRPr lang="en-US" sz="1100" dirty="0"/>
           </a:p>
@@ -2440,7 +2440,7 @@
                 <a:ea typeface="Calibri" pitchFamily="34" charset="-122"/>
                 <a:cs typeface="Calibri" pitchFamily="34" charset="-120"/>
               </a:rPr>
-              <a:t>The contribution rests on the generation side being open. That claim comes from a literature search, not from the authors, who are in this room.</a:t>
+              <a:t>The contribution rests on the generation side being unaddressed. That claim derives from a literature search rather than from consultation with its authors.</a:t>
             </a:r>
             <a:endParaRPr lang="en-US" sz="1100" dirty="0"/>
           </a:p>
@@ -2583,7 +2583,7 @@
                 <a:ea typeface="Calibri" pitchFamily="34" charset="-122"/>
                 <a:cs typeface="Calibri" pitchFamily="34" charset="-120"/>
               </a:rPr>
-              <a:t>The seiche band is 0.2 to 2 cph. Coarser than one minute and the model loses its observational target in its own frequency range.</a:t>
+              <a:t>The seiche band is 0.2 to 2 cph. At an interval coarser than one minute the model has no observational target within its own frequency range.</a:t>
             </a:r>
             <a:endParaRPr lang="en-US" sz="1100" dirty="0"/>
           </a:p>
@@ -2726,7 +2726,7 @@
                 <a:ea typeface="Calibri" pitchFamily="34" charset="-122"/>
                 <a:cs typeface="Calibri" pitchFamily="34" charset="-120"/>
               </a:rPr>
-              <a:t>Flooding is documented at Msida and elsewhere. Mooring failure or interrupted operations would be held by Transport Malta and the terminals.</a:t>
+              <a:t>Flooding is documented at Msida and elsewhere. Records of mooring failure or interrupted operations would be held by Transport Malta and the terminals.</a:t>
             </a:r>
             <a:endParaRPr lang="en-US" sz="1100" dirty="0"/>
           </a:p>
@@ -2869,7 +2869,7 @@
                 <a:ea typeface="Calibri" pitchFamily="34" charset="-122"/>
                 <a:cs typeface="Calibri" pitchFamily="34" charset="-120"/>
               </a:rPr>
-              <a:t>The files declare ellipsoidal heights and the data are orthometric. What remains is the offset against the gauges used for validation.</a:t>
+              <a:t>The files declare ellipsoidal heights while the data are orthometric. What remains to be established is the offset against the gauges used for validation.</a:t>
             </a:r>
             <a:endParaRPr lang="en-US" sz="1100" dirty="0"/>
           </a:p>
@@ -3830,7 +3830,7 @@
                 <a:ea typeface="Calibri" pitchFamily="34" charset="-122"/>
                 <a:cs typeface="Calibri" pitchFamily="34" charset="-120"/>
               </a:rPr>
-              <a:t>The solver and the assembly are unchanged. The physics is not.</a:t>
+              <a:t>The solver and the assembly are unchanged, while the governing physics differs.</a:t>
             </a:r>
             <a:endParaRPr lang="en-US" sz="1400" dirty="0"/>
           </a:p>
@@ -3875,7 +3875,7 @@
                 <a:ea typeface="Calibri" pitchFamily="34" charset="-122"/>
                 <a:cs typeface="Calibri" pitchFamily="34" charset="-120"/>
               </a:rPr>
-              <a:t>The framework comes from the Stagnone di Marsala digital twin, where a coupled Delft3D FM and SWAN model was built for a shallow vegetated lagoon.</a:t>
+              <a:t>The framework originates in the Stagnone di Marsala digital twin, a coupled Delft3D FM and SWAN model of a shallow vegetated lagoon.</a:t>
             </a:r>
             <a:endParaRPr lang="en-US" sz="1450" dirty="0"/>
           </a:p>
@@ -3898,7 +3898,7 @@
                 <a:ea typeface="Calibri" pitchFamily="34" charset="-122"/>
                 <a:cs typeface="Calibri" pitchFamily="34" charset="-120"/>
               </a:rPr>
-              <a:t>Carrying it to a second lagoon would test little. A reviewer could anticipate the outcome. Carrying it to a deep engineered harbour tests whether the pipeline is reusable or was fitted to one site.</a:t>
+              <a:t>A transfer to a second lagoon would remain within a single archetype and would establish little. A transfer to a deep engineered harbour establishes whether the pipeline is reusable or was fitted to one site.</a:t>
             </a:r>
             <a:endParaRPr lang="en-US" sz="1450" dirty="0"/>
           </a:p>
@@ -3918,7 +3918,7 @@
                 <a:ea typeface="Calibri" pitchFamily="34" charset="-122"/>
                 <a:cs typeface="Calibri" pitchFamily="34" charset="-120"/>
               </a:rPr>
-              <a:t>What transfers is the assembly. What does not transfer is itself a result, and it is recorded rather than hidden.</a:t>
+              <a:t>The stages that transfer constitute the reuse. Those that do not constitute a finding about where the generality of the framework ends, and they are recorded as such.</a:t>
             </a:r>
             <a:endParaRPr lang="en-US" sz="1450" dirty="0"/>
           </a:p>
@@ -5007,7 +5007,7 @@
                 <a:ea typeface="Calibri" pitchFamily="34" charset="-122"/>
                 <a:cs typeface="Calibri" pitchFamily="34" charset="-120"/>
               </a:rPr>
-              <a:t>The transfer effort is logged stage by stage as transferred, re-parameterised, or not applicable. That log is the methodological result.</a:t>
+              <a:t>The transfer effort is logged stage by stage as transferred, re-parameterised or not applicable. That log constitutes the methodological result.</a:t>
             </a:r>
             <a:endParaRPr lang="en-US" sz="1050" dirty="0"/>
           </a:p>
@@ -5500,7 +5500,7 @@
                 <a:ea typeface="Calibri" pitchFamily="34" charset="-122"/>
                 <a:cs typeface="Calibri" pitchFamily="34" charset="-120"/>
               </a:rPr>
-              <a:t>Two coordinate hazards
+              <a:t>Two coordinate reference conditions
 </a:t>
             </a:r>
             <a:endParaRPr lang="en-US" sz="1150" dirty="0"/>
@@ -5521,7 +5521,7 @@
                 <a:ea typeface="Calibri" pitchFamily="34" charset="-122"/>
                 <a:cs typeface="Calibri" pitchFamily="34" charset="-120"/>
               </a:rPr>
-              <a:t>The grids carry no datum. Interpreted as WGS84 they are displaced by 197 m, without error.
+              <a:t>The grids do not encode their datum. Interpreted as WGS84 they are displaced by 197 m, and no error is raised.
 </a:t>
             </a:r>
             <a:endParaRPr lang="en-US" sz="1150" dirty="0"/>
@@ -5542,7 +5542,7 @@
                 <a:ea typeface="Calibri" pitchFamily="34" charset="-122"/>
                 <a:cs typeface="Calibri" pitchFamily="34" charset="-120"/>
               </a:rPr>
-              <a:t>Bathymetry is ED50, the coastline is WGS84. Neither overlays the other untransformed.</a:t>
+              <a:t>The bathymetry is ED50 and the coastline is WGS84, so neither overlays the other without a datum transformation.</a:t>
             </a:r>
             <a:endParaRPr lang="en-US" sz="1150" dirty="0"/>
           </a:p>
@@ -5723,7 +5723,7 @@
                 <a:ea typeface="Calibri" pitchFamily="34" charset="-122"/>
                 <a:cs typeface="Calibri" pitchFamily="34" charset="-120"/>
               </a:rPr>
-              <a:t>Rissaga in the Balearics, marrobbio on the Sicilian shelf. Not basin sloshing in general.</a:t>
+              <a:t>An atmospherically generated long wave, known as rissaga in the Balearics and as marrobbio on the Sicilian shelf.</a:t>
             </a:r>
             <a:endParaRPr lang="en-US" sz="1400" dirty="0"/>
           </a:p>
@@ -5885,7 +5885,7 @@
                 <a:ea typeface="Calibri" pitchFamily="34" charset="-122"/>
                 <a:cs typeface="Calibri" pitchFamily="34" charset="-120"/>
               </a:rPr>
-              <a:t>An atmospheric disturbance travelling at √(gh) pumps the sea beneath it.</a:t>
+              <a:t>Energy transfers most efficiently when the atmospheric disturbance travels at the celerity of the long wave beneath it.</a:t>
             </a:r>
             <a:endParaRPr lang="en-US" sz="1200" dirty="0"/>
           </a:p>
@@ -6089,7 +6089,7 @@
                 <a:ea typeface="Calibri" pitchFamily="34" charset="-122"/>
                 <a:cs typeface="Calibri" pitchFamily="34" charset="-120"/>
               </a:rPr>
-              <a:t>Green's law amplifies the wave as it climbs the approach.</a:t>
+              <a:t>Green's law governs the amplification of the wave over the shoaling approach.</a:t>
             </a:r>
             <a:endParaRPr lang="en-US" sz="1200" dirty="0"/>
           </a:p>
@@ -6293,7 +6293,7 @@
                 <a:ea typeface="Calibri" pitchFamily="34" charset="-122"/>
                 <a:cs typeface="Calibri" pitchFamily="34" charset="-120"/>
               </a:rPr>
-              <a:t>The harbour geometry amplifies what arrives at its mouth.</a:t>
+              <a:t>The geometry of the basin amplifies the wave arriving at its mouth.</a:t>
             </a:r>
             <a:endParaRPr lang="en-US" sz="1200" dirty="0"/>
           </a:p>
@@ -9554,7 +9554,7 @@
                 <a:ea typeface="Calibri" pitchFamily="34" charset="-122"/>
                 <a:cs typeface="Calibri" pitchFamily="34" charset="-120"/>
               </a:rPr>
-              <a:t>The domain must contain the plateau.</a:t>
+              <a:t>The domain is therefore required to contain the plateau.</a:t>
             </a:r>
             <a:endParaRPr lang="en-US" sz="1150" dirty="0"/>
           </a:p>
@@ -9593,7 +9593,7 @@
                 <a:ea typeface="Calibri" pitchFamily="34" charset="-122"/>
                 <a:cs typeface="Calibri" pitchFamily="34" charset="-120"/>
               </a:rPr>
-              <a:t>Tested against its two plausible failures. A Helmholtz idealisation returns 12 to 18 minutes also, and the harbours amplify by less than a tenth across most of the band.</a:t>
+              <a:t>A Helmholtz idealisation returns 12 to 18 minutes likewise, and the harbours amplify by less than a tenth across the band.</a:t>
             </a:r>
             <a:endParaRPr lang="en-US" sz="1050" dirty="0"/>
           </a:p>
@@ -11304,7 +11304,7 @@
                 <a:ea typeface="Calibri" pitchFamily="34" charset="-122"/>
                 <a:cs typeface="Calibri" pitchFamily="34" charset="-120"/>
               </a:rPr>
-              <a:t>Whether the model reproduces the observed signal is binary and asymmetric. Affirmed, it confirms what is expected of a mature solver. Denied, it is blamed on the configuration.</a:t>
+              <a:t>Whether the model reproduces the observed signal admits a binary and asymmetric answer. An affirmative result confirms what is expected of a mature solver, and a negative result is attributed to the configuration rather than to the physics.</a:t>
             </a:r>
             <a:endParaRPr lang="en-US" sz="1200" dirty="0"/>
           </a:p>
@@ -11328,7 +11328,7 @@
                 <a:ea typeface="Calibri" pitchFamily="34" charset="-122"/>
                 <a:cs typeface="Calibri" pitchFamily="34" charset="-120"/>
               </a:rPr>
-              <a:t>It interrogates the instrument rather than the system, and has no constituency beyond modellers.</a:t>
+              <a:t>The formulation interrogates the instrument rather than the system, and its answer concerns no constituency beyond the modelling community.</a:t>
             </a:r>
             <a:endParaRPr lang="en-US" sz="1200" dirty="0"/>
           </a:p>
@@ -11349,7 +11349,7 @@
                 <a:ea typeface="Calibri" pitchFamily="34" charset="-122"/>
                 <a:cs typeface="Calibri" pitchFamily="34" charset="-120"/>
               </a:rPr>
-              <a:t>It is relocated to the methods.</a:t>
+              <a:t>It is accordingly relocated to the methods.</a:t>
             </a:r>
             <a:endParaRPr lang="en-US" sz="1200" dirty="0"/>
           </a:p>
@@ -11388,7 +11388,7 @@
                 <a:ea typeface="Cambria" pitchFamily="34" charset="-122"/>
                 <a:cs typeface="Cambria" pitchFamily="34" charset="-120"/>
               </a:rPr>
-              <a:t>Prior work to be cleared</a:t>
+              <a:t>Prior work the study must clear</a:t>
             </a:r>
             <a:endParaRPr lang="en-US" sz="1400" dirty="0"/>
           </a:p>
@@ -11458,7 +11458,7 @@
                 <a:ea typeface="Calibri" pitchFamily="34" charset="-122"/>
                 <a:cs typeface="Calibri" pitchFamily="34" charset="-120"/>
               </a:rPr>
-              <a:t>Repeating that at Valletta in three dimensions would be incremental.</a:t>
+              <a:t>A repetition at Valletta in three dimensions would be incremental.</a:t>
             </a:r>
             <a:endParaRPr lang="en-US" sz="1200" dirty="0"/>
           </a:p>
@@ -11479,7 +11479,7 @@
                 <a:ea typeface="Calibri" pitchFamily="34" charset="-122"/>
                 <a:cs typeface="Calibri" pitchFamily="34" charset="-120"/>
               </a:rPr>
-              <a:t>The generation side is untouched, because the prior work imposes the wave rather than producing it, and it therefore remains unaddressed.</a:t>
+              <a:t>The generation side is untreated, since the prior work imposes the offshore wave rather than producing it.</a:t>
             </a:r>
             <a:endParaRPr lang="en-US" sz="1200" dirty="0"/>
           </a:p>
@@ -11621,7 +11621,7 @@
                 <a:ea typeface="Calibri" pitchFamily="34" charset="-122"/>
                 <a:cs typeface="Calibri" pitchFamily="34" charset="-120"/>
               </a:rPr>
-              <a:t>ERA5 does not resolve the atmospheric gravity waves that trigger the phenomenon. That has been the largest standing risk.</a:t>
+              <a:t>ERA5 does not resolve the atmospheric gravity waves that trigger the phenomenon, which has constituted the largest standing risk in the project.</a:t>
             </a:r>
             <a:endParaRPr lang="en-US" sz="1400" dirty="0"/>
           </a:p>
@@ -11695,7 +11695,7 @@
         <p:spPr>
           <a:xfrm>
             <a:off x="1188720" y="2313432"/>
-            <a:ext cx="2377440" cy="292608"/>
+            <a:ext cx="3383280" cy="292608"/>
           </a:xfrm>
           <a:prstGeom prst="rect">
             <a:avLst/>
@@ -11835,7 +11835,7 @@
         <p:spPr>
           <a:xfrm>
             <a:off x="1188720" y="3483864"/>
-            <a:ext cx="2377440" cy="292608"/>
+            <a:ext cx="3383280" cy="292608"/>
           </a:xfrm>
           <a:prstGeom prst="rect">
             <a:avLst/>
@@ -11975,7 +11975,7 @@
         <p:spPr>
           <a:xfrm>
             <a:off x="1188720" y="4654296"/>
-            <a:ext cx="2377440" cy="292608"/>
+            <a:ext cx="3383280" cy="292608"/>
           </a:xfrm>
           <a:prstGeom prst="rect">
             <a:avLst/>
@@ -11999,7 +11999,7 @@
                 <a:ea typeface="Cambria" pitchFamily="34" charset="-122"/>
                 <a:cs typeface="Cambria" pitchFamily="34" charset="-120"/>
               </a:rPr>
-              <a:t>Observations invert</a:t>
+              <a:t>Inversion of the observations</a:t>
             </a:r>
             <a:endParaRPr lang="en-US" sz="1450" dirty="0"/>
           </a:p>
@@ -12041,7 +12041,7 @@
                 <a:ea typeface="Calibri" pitchFamily="34" charset="-122"/>
                 <a:cs typeface="Calibri" pitchFamily="34" charset="-120"/>
               </a:rPr>
-              <a:t>They cease to be the forcing and become the test: do recorded events occur under the conditions identified as resonant?</a:t>
+              <a:t>The observations cease to be the forcing and become the test, addressing whether recorded events occur under the conditions identified as resonant.</a:t>
             </a:r>
             <a:endParaRPr lang="en-US" sz="1250" dirty="0"/>
           </a:p>
@@ -12144,7 +12144,7 @@
                 <a:ea typeface="Calibri" pitchFamily="34" charset="-122"/>
                 <a:cs typeface="Calibri" pitchFamily="34" charset="-120"/>
               </a:rPr>
-              <a:t>A response surface is a property of the geometry. Climate change acts on the distribution of the forcing.
+              <a:t>A response surface is a property of the geometry, whereas climate change acts on the distribution of the forcing.
 </a:t>
             </a:r>
             <a:endParaRPr lang="en-US" sz="1150" dirty="0"/>

--- a/docs/valletta_model_concept_2026-09-25.pptx
+++ b/docs/valletta_model_concept_2026-09-25.pptx
@@ -600,7 +600,7 @@
           <a:p>
             <a:r>
               <a:rPr lang="en-US" dirty="0"/>
-              <a:t>These items determine what the study can be. The remainder is resolvable by execution.</a:t>
+              <a:t>These items determine what the study can be, and the remainder is resolvable by execution. The question of whether the group has its own intentions on the generation side belongs with the preceding slide rather than here.</a:t>
             </a:r>
             <a:endParaRPr lang="en-US" dirty="0"/>
           </a:p>
@@ -1304,7 +1304,7 @@
           <a:p>
             <a:r>
               <a:rPr lang="en-US" dirty="0"/>
-              <a:t>The applied companion is a map of exposure by inlet and quay. The fallback, with independent value, is harbour renewal under the Water Framework Directive.</a:t>
+              <a:t>The question is a proposal rather than a decision. Whether the group has work of its own planned on the generation side, and how the effort should be divided if so, is worth putting directly. The applied companion is a map of exposure by inlet and quay, and the fallback, with independent value, is harbour renewal under the Water Framework Directive.</a:t>
             </a:r>
             <a:endParaRPr lang="en-US" dirty="0"/>
           </a:p>
@@ -2398,7 +2398,7 @@
                 <a:ea typeface="Calibri" pitchFamily="34" charset="-122"/>
                 <a:cs typeface="Calibri" pitchFamily="34" charset="-120"/>
               </a:rPr>
-              <a:t>What is the full extent of prior work on the milgħuba, published or not?</a:t>
+              <a:t>Has the generation of the wave been modelled, or only its effect on a basin?</a:t>
             </a:r>
             <a:endParaRPr lang="en-US" sz="1280" dirty="0"/>
           </a:p>
@@ -2440,7 +2440,7 @@
                 <a:ea typeface="Calibri" pitchFamily="34" charset="-122"/>
                 <a:cs typeface="Calibri" pitchFamily="34" charset="-120"/>
               </a:rPr>
-              <a:t>The contribution rests on the generation side being unaddressed. That claim derives from a literature search rather than from consultation with its authors.</a:t>
+              <a:t>The 2007 study imposes the long wave at the offshore boundary and computes the response. Modelling how the atmosphere produces that wave over the shelf is what this study proposes. Whether it is genuinely untouched is known only from a literature search.</a:t>
             </a:r>
             <a:endParaRPr lang="en-US" sz="1100" dirty="0"/>
           </a:p>
@@ -2970,7 +2970,7 @@
                 <a:ea typeface="Calibri" pitchFamily="34" charset="-122"/>
                 <a:cs typeface="Calibri" pitchFamily="34" charset="-120"/>
               </a:rPr>
-              <a:t>Would the group regard the attribution question as a contribution, or as their own intention?</a:t>
+              <a:t>Is there any wave record beyond the BLUE buoy?</a:t>
             </a:r>
             <a:endParaRPr lang="en-US" sz="1280" dirty="0"/>
           </a:p>
@@ -3012,7 +3012,7 @@
                 <a:ea typeface="Calibri" pitchFamily="34" charset="-122"/>
                 <a:cs typeface="Calibri" pitchFamily="34" charset="-120"/>
               </a:rPr>
-              <a:t>Establishing this early avoids a duplication of intent.</a:t>
+              <a:t>Wave validation presently rests on a single point 3.7 km offshore. The radar reports a derived product whose own accuracy was assessed against models, so it serves as a cross-check rather than a reference.</a:t>
             </a:r>
             <a:endParaRPr lang="en-US" sz="1100" dirty="0"/>
           </a:p>
@@ -11155,7 +11155,7 @@
                 <a:ea typeface="Cambria" pitchFamily="34" charset="-122"/>
                 <a:cs typeface="Cambria" pitchFamily="34" charset="-120"/>
               </a:rPr>
-              <a:t>Attribution of amplification</a:t>
+              <a:t>A proposed question, for the group to judge</a:t>
             </a:r>
             <a:endParaRPr lang="en-US" sz="3200" dirty="0"/>
           </a:p>
@@ -11163,13 +11163,52 @@
       </p:sp>
       <p:sp>
         <p:nvSpPr>
-          <p:cNvPr id="4" name="Shape 2"/>
+          <p:cNvPr id="4" name="Text 2"/>
+          <p:cNvSpPr txBox="1"/>
+          <p:nvPr/>
+        </p:nvSpPr>
+        <p:spPr>
+          <a:xfrm>
+            <a:off x="566928" y="1408176"/>
+            <a:ext cx="10881360" cy="585216"/>
+          </a:xfrm>
+          <a:prstGeom prst="rect">
+            <a:avLst/>
+          </a:prstGeom>
+          <a:noFill/>
+          <a:ln/>
+        </p:spPr>
+        <p:txBody>
+          <a:bodyPr wrap="square" lIns="0" tIns="0" rIns="0" bIns="0" rtlCol="0" anchor="ctr"/>
+          <a:lstStyle/>
+          <a:p>
+            <a:pPr indent="0" marL="0">
+              <a:buNone/>
+            </a:pPr>
+            <a:r>
+              <a:rPr lang="en-US" sz="1400" dirty="0">
+                <a:solidFill>
+                  <a:srgbClr val="5F6368"/>
+                </a:solidFill>
+                <a:latin typeface="Calibri" pitchFamily="34" charset="0"/>
+                <a:ea typeface="Calibri" pitchFamily="34" charset="-122"/>
+                <a:cs typeface="Calibri" pitchFamily="34" charset="-120"/>
+              </a:rPr>
+              <a:t>Drafted this week and put to the group before it is committed to.</a:t>
+            </a:r>
+            <a:endParaRPr lang="en-US" sz="1400" dirty="0"/>
+          </a:p>
+        </p:txBody>
+      </p:sp>
+      <p:sp>
+        <p:nvSpPr>
+          <p:cNvPr id="5" name="Shape 3"/>
           <p:cNvSpPr/>
           <p:nvPr/>
         </p:nvSpPr>
         <p:spPr>
           <a:xfrm>
-            <a:off x="566928" y="1874520"/>
+            <a:off x="566928" y="2139696"/>
             <a:ext cx="11055096" cy="1298448"/>
           </a:xfrm>
           <a:prstGeom prst="roundRect">
@@ -11185,13 +11224,13 @@
       </p:sp>
       <p:sp>
         <p:nvSpPr>
-          <p:cNvPr id="5" name="Text 3"/>
+          <p:cNvPr id="6" name="Text 4"/>
           <p:cNvSpPr txBox="1"/>
           <p:nvPr/>
         </p:nvSpPr>
         <p:spPr>
           <a:xfrm>
-            <a:off x="886968" y="2084832"/>
+            <a:off x="886968" y="2350008"/>
             <a:ext cx="10424160" cy="914400"/>
           </a:xfrm>
           <a:prstGeom prst="rect">
@@ -11227,13 +11266,13 @@
       </p:sp>
       <p:sp>
         <p:nvSpPr>
-          <p:cNvPr id="6" name="Text 4"/>
+          <p:cNvPr id="7" name="Text 5"/>
           <p:cNvSpPr txBox="1"/>
           <p:nvPr/>
         </p:nvSpPr>
         <p:spPr>
           <a:xfrm>
-            <a:off x="566928" y="3456432"/>
+            <a:off x="566928" y="3721608"/>
             <a:ext cx="5212080" cy="292608"/>
           </a:xfrm>
           <a:prstGeom prst="rect">
@@ -11258,7 +11297,7 @@
                 <a:ea typeface="Cambria" pitchFamily="34" charset="-122"/>
                 <a:cs typeface="Cambria" pitchFamily="34" charset="-120"/>
               </a:rPr>
-              <a:t>The formulation it replaces</a:t>
+              <a:t>Basis for the formulation</a:t>
             </a:r>
             <a:endParaRPr lang="en-US" sz="1400" dirty="0"/>
           </a:p>
@@ -11266,13 +11305,13 @@
       </p:sp>
       <p:sp>
         <p:nvSpPr>
-          <p:cNvPr id="7" name="Text 5"/>
+          <p:cNvPr id="8" name="Text 6"/>
           <p:cNvSpPr txBox="1"/>
           <p:nvPr/>
         </p:nvSpPr>
         <p:spPr>
           <a:xfrm>
-            <a:off x="566928" y="3803904"/>
+            <a:off x="566928" y="4069080"/>
             <a:ext cx="5212080" cy="1737360"/>
           </a:xfrm>
           <a:prstGeom prst="rect">
@@ -11304,7 +11343,7 @@
                 <a:ea typeface="Calibri" pitchFamily="34" charset="-122"/>
                 <a:cs typeface="Calibri" pitchFamily="34" charset="-120"/>
               </a:rPr>
-              <a:t>Whether the model reproduces the observed signal admits a binary and asymmetric answer. An affirmative result confirms what is expected of a mature solver, and a negative result is attributed to the configuration rather than to the physics.</a:t>
+              <a:t>It is framed so that answering it requires a model. No arrangement of gauges separates the three stages of amplification from one another.</a:t>
             </a:r>
             <a:endParaRPr lang="en-US" sz="1200" dirty="0"/>
           </a:p>
@@ -11328,7 +11367,7 @@
                 <a:ea typeface="Calibri" pitchFamily="34" charset="-122"/>
                 <a:cs typeface="Calibri" pitchFamily="34" charset="-120"/>
               </a:rPr>
-              <a:t>The formulation interrogates the instrument rather than the system, and its answer concerns no constituency beyond the modelling community.</a:t>
+              <a:t>It is framed so that it does not repeat the prior work, which treats the response of a basin to a wave already present at its boundary.</a:t>
             </a:r>
             <a:endParaRPr lang="en-US" sz="1200" dirty="0"/>
           </a:p>
@@ -11349,7 +11388,7 @@
                 <a:ea typeface="Calibri" pitchFamily="34" charset="-122"/>
                 <a:cs typeface="Calibri" pitchFamily="34" charset="-120"/>
               </a:rPr>
-              <a:t>It is accordingly relocated to the methods.</a:t>
+              <a:t>Should the group judge the standing of that prior work differently, the formulation changes with it.</a:t>
             </a:r>
             <a:endParaRPr lang="en-US" sz="1200" dirty="0"/>
           </a:p>
@@ -11357,13 +11396,13 @@
       </p:sp>
       <p:sp>
         <p:nvSpPr>
-          <p:cNvPr id="8" name="Text 6"/>
+          <p:cNvPr id="9" name="Text 7"/>
           <p:cNvSpPr txBox="1"/>
           <p:nvPr/>
         </p:nvSpPr>
         <p:spPr>
           <a:xfrm>
-            <a:off x="6355080" y="3456432"/>
+            <a:off x="6355080" y="3721608"/>
             <a:ext cx="5212080" cy="292608"/>
           </a:xfrm>
           <a:prstGeom prst="rect">
@@ -11396,13 +11435,13 @@
       </p:sp>
       <p:sp>
         <p:nvSpPr>
-          <p:cNvPr id="9" name="Text 7"/>
+          <p:cNvPr id="10" name="Text 8"/>
           <p:cNvSpPr txBox="1"/>
           <p:nvPr/>
         </p:nvSpPr>
         <p:spPr>
           <a:xfrm>
-            <a:off x="6355080" y="3803904"/>
+            <a:off x="6355080" y="4069080"/>
             <a:ext cx="5266944" cy="1737360"/>
           </a:xfrm>
           <a:prstGeom prst="rect">

--- a/docs/valletta_model_concept_2026-09-25.pptx
+++ b/docs/valletta_model_concept_2026-09-25.pptx
@@ -4,6 +4,9 @@
   <p:sldMasterIdLst>
     <p:sldMasterId id="2147483648" r:id="rId1"/>
   </p:sldMasterIdLst>
+  <p:notesMasterIdLst>
+    <p:notesMasterId r:id="rId13"/>
+  </p:notesMasterIdLst>
   <p:sldIdLst>
     <p:sldId id="256" r:id="rId2"/>
     <p:sldId id="257" r:id="rId3"/>
@@ -17,9 +20,6 @@
     <p:sldId id="265" r:id="rId11"/>
     <p:sldId id="266" r:id="rId12"/>
   </p:sldIdLst>
-  <p:notesMasterIdLst>
-    <p:notesMasterId r:id="rId13"/>
-  </p:notesMasterIdLst>
   <p:sldSz cx="12192000" cy="6858000"/>
   <p:notesSz cx="6858000" cy="12192000"/>
   <p:defaultTextStyle>
@@ -114,6 +114,11 @@
       </a:defRPr>
     </a:lvl9pPr>
   </p:defaultTextStyle>
+  <p:extLst>
+    <p:ext uri="{EFAFB233-063F-42B5-8137-9DF3F51BA10A}">
+      <p15:sldGuideLst xmlns:p15="http://schemas.microsoft.com/office/powerpoint/2012/main"/>
+    </p:ext>
+  </p:extLst>
 </p:presentation>
 </file>
 
@@ -139,234 +144,10 @@
           <a:chExt cx="0" cy="0"/>
         </a:xfrm>
       </p:grpSpPr>
-      <p:sp>
-        <p:nvSpPr>
-          <p:cNvPr id="2" name="Header Placeholder 1"/>
-          <p:cNvSpPr>
-            <a:spLocks noGrp="1"/>
-          </p:cNvSpPr>
-          <p:nvPr>
-            <p:ph type="hdr" sz="quarter"/>
-          </p:nvPr>
-        </p:nvSpPr>
-        <p:spPr>
-          <a:xfrm>
-            <a:off x="0" y="0"/>
-            <a:ext cx="2971800" cy="458788"/>
-          </a:xfrm>
-          <a:prstGeom prst="rect">
-            <a:avLst/>
-          </a:prstGeom>
-        </p:spPr>
-        <p:txBody>
-          <a:bodyPr vert="horz" lIns="91440" tIns="45720" rIns="91440" bIns="45720" rtlCol="0"/>
-          <a:lstStyle>
-            <a:lvl1pPr algn="l">
-              <a:defRPr sz="1200"/>
-            </a:lvl1pPr>
-          </a:lstStyle>
-          <a:p>
-            <a:endParaRPr lang="en-US"/>
-          </a:p>
-        </p:txBody>
-      </p:sp>
-      <p:sp>
-        <p:nvSpPr>
-          <p:cNvPr id="3" name="Date Placeholder 2"/>
-          <p:cNvSpPr>
-            <a:spLocks noGrp="1"/>
-          </p:cNvSpPr>
-          <p:nvPr>
-            <p:ph type="dt" idx="1"/>
-          </p:nvPr>
-        </p:nvSpPr>
-        <p:spPr>
-          <a:xfrm>
-            <a:off x="3884613" y="0"/>
-            <a:ext cx="2971800" cy="458788"/>
-          </a:xfrm>
-          <a:prstGeom prst="rect">
-            <a:avLst/>
-          </a:prstGeom>
-        </p:spPr>
-        <p:txBody>
-          <a:bodyPr vert="horz" lIns="91440" tIns="45720" rIns="91440" bIns="45720" rtlCol="0"/>
-          <a:lstStyle>
-            <a:lvl1pPr algn="r">
-              <a:defRPr sz="1200"/>
-            </a:lvl1pPr>
-          </a:lstStyle>
-          <a:p>
-            <a:fld id="{5282F153-3F37-0F45-9E97-73ACFA13230C}" type="datetimeFigureOut">
-              <a:rPr lang="en-US"/>
-              <a:t>7/23/19</a:t>
-            </a:fld>
-            <a:endParaRPr lang="en-US"/>
-          </a:p>
-        </p:txBody>
-      </p:sp>
-      <p:sp>
-        <p:nvSpPr>
-          <p:cNvPr id="4" name="Slide Image Placeholder 3"/>
-          <p:cNvSpPr>
-            <a:spLocks noGrp="1" noRot="1" noChangeAspect="1"/>
-          </p:cNvSpPr>
-          <p:nvPr>
-            <p:ph type="sldImg" idx="2"/>
-          </p:nvPr>
-        </p:nvSpPr>
-        <p:spPr>
-          <a:xfrm>
-            <a:off x="685800" y="1143000"/>
-            <a:ext cx="5486400" cy="3086100"/>
-          </a:xfrm>
-          <a:prstGeom prst="rect">
-            <a:avLst/>
-          </a:prstGeom>
-          <a:noFill/>
-          <a:ln w="12700">
-            <a:solidFill>
-              <a:prstClr val="black"/>
-            </a:solidFill>
-          </a:ln>
-        </p:spPr>
-        <p:txBody>
-          <a:bodyPr vert="horz" lIns="91440" tIns="45720" rIns="91440" bIns="45720" rtlCol="0" anchor="ctr"/>
-          <a:lstStyle/>
-          <a:p>
-            <a:endParaRPr lang="en-US"/>
-          </a:p>
-        </p:txBody>
-      </p:sp>
-      <p:sp>
-        <p:nvSpPr>
-          <p:cNvPr id="5" name="Notes Placeholder 4"/>
-          <p:cNvSpPr>
-            <a:spLocks noGrp="1"/>
-          </p:cNvSpPr>
-          <p:nvPr>
-            <p:ph type="body" sz="quarter" idx="3"/>
-          </p:nvPr>
-        </p:nvSpPr>
-        <p:spPr>
-          <a:xfrm>
-            <a:off x="685800" y="4400550"/>
-            <a:ext cx="5486400" cy="3600450"/>
-          </a:xfrm>
-          <a:prstGeom prst="rect">
-            <a:avLst/>
-          </a:prstGeom>
-        </p:spPr>
-        <p:txBody>
-          <a:bodyPr vert="horz" lIns="91440" tIns="45720" rIns="91440" bIns="45720" rtlCol="0"/>
-          <a:lstStyle/>
-          <a:p>
-            <a:pPr lvl="0"/>
-            <a:r>
-              <a:rPr lang="en-US"/>
-              <a:t>Click to edit Master text styles</a:t>
-            </a:r>
-          </a:p>
-          <a:p>
-            <a:pPr lvl="1"/>
-            <a:r>
-              <a:rPr lang="en-US"/>
-              <a:t>Second level</a:t>
-            </a:r>
-          </a:p>
-          <a:p>
-            <a:pPr lvl="2"/>
-            <a:r>
-              <a:rPr lang="en-US"/>
-              <a:t>Third level</a:t>
-            </a:r>
-          </a:p>
-          <a:p>
-            <a:pPr lvl="3"/>
-            <a:r>
-              <a:rPr lang="en-US"/>
-              <a:t>Fourth level</a:t>
-            </a:r>
-          </a:p>
-          <a:p>
-            <a:pPr lvl="4"/>
-            <a:r>
-              <a:rPr lang="en-US"/>
-              <a:t>Fifth level</a:t>
-            </a:r>
-          </a:p>
-        </p:txBody>
-      </p:sp>
-      <p:sp>
-        <p:nvSpPr>
-          <p:cNvPr id="6" name="Footer Placeholder 5"/>
-          <p:cNvSpPr>
-            <a:spLocks noGrp="1"/>
-          </p:cNvSpPr>
-          <p:nvPr>
-            <p:ph type="ftr" sz="quarter" idx="4"/>
-          </p:nvPr>
-        </p:nvSpPr>
-        <p:spPr>
-          <a:xfrm>
-            <a:off x="0" y="8685213"/>
-            <a:ext cx="2971800" cy="458787"/>
-          </a:xfrm>
-          <a:prstGeom prst="rect">
-            <a:avLst/>
-          </a:prstGeom>
-        </p:spPr>
-        <p:txBody>
-          <a:bodyPr vert="horz" lIns="91440" tIns="45720" rIns="91440" bIns="45720" rtlCol="0" anchor="b"/>
-          <a:lstStyle>
-            <a:lvl1pPr algn="l">
-              <a:defRPr sz="1200"/>
-            </a:lvl1pPr>
-          </a:lstStyle>
-          <a:p>
-            <a:endParaRPr lang="en-US"/>
-          </a:p>
-        </p:txBody>
-      </p:sp>
-      <p:sp>
-        <p:nvSpPr>
-          <p:cNvPr id="7" name="Slide Number Placeholder 6"/>
-          <p:cNvSpPr>
-            <a:spLocks noGrp="1"/>
-          </p:cNvSpPr>
-          <p:nvPr>
-            <p:ph type="sldNum" sz="quarter" idx="5"/>
-          </p:nvPr>
-        </p:nvSpPr>
-        <p:spPr>
-          <a:xfrm>
-            <a:off x="3884613" y="8685213"/>
-            <a:ext cx="2971800" cy="458787"/>
-          </a:xfrm>
-          <a:prstGeom prst="rect">
-            <a:avLst/>
-          </a:prstGeom>
-        </p:spPr>
-        <p:txBody>
-          <a:bodyPr vert="horz" lIns="91440" tIns="45720" rIns="91440" bIns="45720" rtlCol="0" anchor="b"/>
-          <a:lstStyle>
-            <a:lvl1pPr algn="r">
-              <a:defRPr sz="1200"/>
-            </a:lvl1pPr>
-          </a:lstStyle>
-          <a:p>
-            <a:fld id="{CE5E9CC1-C706-0F49-92D6-E571CC5EEA8F}" type="slidenum">
-              <a:rPr lang="en-US"/>
-              <a:t>‹#›</a:t>
-            </a:fld>
-            <a:endParaRPr lang="en-US"/>
-          </a:p>
-        </p:txBody>
-      </p:sp>
     </p:spTree>
     <p:extLst>
       <p:ext uri="{BB962C8B-B14F-4D97-AF65-F5344CB8AC3E}">
-        <p14:creationId xmlns:p14="http://schemas.microsoft.com/office/powerpoint/2010/main" val="1024086991"/>
+        <p14:creationId xmlns:p14="http://schemas.microsoft.com/office/powerpoint/2010/main" val="2831109433"/>
       </p:ext>
     </p:extLst>
   </p:cSld>
@@ -514,7 +295,6 @@
               <a:rPr lang="en-US" dirty="0"/>
               <a:t>The deck covers the intended model and the matters to be settled before its construction.</a:t>
             </a:r>
-            <a:endParaRPr lang="en-US" dirty="0"/>
           </a:p>
         </p:txBody>
       </p:sp>
@@ -602,7 +382,6 @@
               <a:rPr lang="en-US" dirty="0"/>
               <a:t>These items determine what the study can be, and the remainder is resolvable by execution. The question of whether the group has its own intentions on the generation side belongs with the preceding slide rather than here.</a:t>
             </a:r>
-            <a:endParaRPr lang="en-US" dirty="0"/>
           </a:p>
         </p:txBody>
       </p:sp>
@@ -690,7 +469,6 @@
               <a:rPr lang="en-US" dirty="0"/>
               <a:t>Block B3 loses four working days to Delft and holds fifteen rather than nineteen.</a:t>
             </a:r>
-            <a:endParaRPr lang="en-US" dirty="0"/>
           </a:p>
         </p:txBody>
       </p:sp>
@@ -778,7 +556,6 @@
               <a:rPr lang="en-US" dirty="0"/>
               <a:t>Context. The thesis contribution is framework reusability, and Valletta constitutes the harder test.</a:t>
             </a:r>
-            <a:endParaRPr lang="en-US" dirty="0"/>
           </a:p>
         </p:txBody>
       </p:sp>
@@ -866,7 +643,6 @@
               <a:rPr lang="en-US" dirty="0"/>
               <a:t>The 10 m data came from the group's own contribution to EMODnet. The public product gives the inlets one to three cells.</a:t>
             </a:r>
-            <a:endParaRPr lang="en-US" dirty="0"/>
           </a:p>
         </p:txBody>
       </p:sp>
@@ -954,7 +730,6 @@
               <a:rPr lang="en-US" dirty="0"/>
               <a:t>The three-stage chain organises the study and determines the domain.</a:t>
             </a:r>
-            <a:endParaRPr lang="en-US" dirty="0"/>
           </a:p>
         </p:txBody>
       </p:sp>
@@ -1042,7 +817,6 @@
               <a:rPr lang="en-US" dirty="0"/>
               <a:t>The estimate was tested against its two plausible failures, the Helmholtz idealisation and excitation below resonance. The domain follows from this table. Whether the group's harbour records carry energy near 17 minutes is the first outstanding question.</a:t>
             </a:r>
-            <a:endParaRPr lang="en-US" dirty="0"/>
           </a:p>
         </p:txBody>
       </p:sp>
@@ -1130,7 +904,6 @@
               <a:rPr lang="en-US" dirty="0"/>
               <a:t>Domain B, roughly 86 by 66 km, east to 15 degrees, short of the escarpment. Stopping there is also what keeps sigma layers defensible.</a:t>
             </a:r>
-            <a:endParaRPr lang="en-US" dirty="0"/>
           </a:p>
         </p:txBody>
       </p:sp>
@@ -1218,7 +991,6 @@
               <a:rPr lang="en-US" dirty="0"/>
               <a:t>A question for Deltares concerns whether sigma holds from 15 m to 150 m, or whether a z-sigma hybrid is indicated.</a:t>
             </a:r>
-            <a:endParaRPr lang="en-US" dirty="0"/>
           </a:p>
         </p:txBody>
       </p:sp>
@@ -1306,7 +1078,6 @@
               <a:rPr lang="en-US" dirty="0"/>
               <a:t>The question is a proposal rather than a decision. Whether the group has work of its own planned on the generation side, and how the effort should be divided if so, is worth putting directly. The applied companion is a map of exposure by inlet and quay, and the fallback, with independent value, is harbour renewal under the Water Framework Directive.</a:t>
             </a:r>
-            <a:endParaRPr lang="en-US" dirty="0"/>
           </a:p>
         </p:txBody>
       </p:sp>
@@ -1394,7 +1165,6 @@
               <a:rPr lang="en-US" dirty="0"/>
               <a:t>A sweep of six speeds by eight directions amounts to forty-eight runs, barotropic and uncoupled, and therefore inexpensive.</a:t>
             </a:r>
-            <a:endParaRPr lang="en-US" dirty="0"/>
           </a:p>
         </p:txBody>
       </p:sp>
@@ -1467,6 +1237,11 @@
 <file path=ppt/slideMasters/slideMaster1.xml><?xml version="1.0" encoding="utf-8"?>
 <p:sldMaster xmlns:a="http://schemas.openxmlformats.org/drawingml/2006/main" xmlns:r="http://schemas.openxmlformats.org/officeDocument/2006/relationships" xmlns:p="http://schemas.openxmlformats.org/presentationml/2006/main">
   <p:cSld>
+    <p:bg>
+      <p:bgRef idx="1001">
+        <a:schemeClr val="bg1"/>
+      </p:bgRef>
+    </p:bg>
     <p:spTree>
       <p:nvGrpSpPr>
         <p:cNvPr id="1" name=""/>
@@ -1749,6 +1524,7 @@
         <a:solidFill>
           <a:srgbClr val="21295C"/>
         </a:solidFill>
+        <a:effectLst/>
       </p:bgPr>
     </p:bg>
     <p:spTree>
@@ -1786,6 +1562,13 @@
           </a:solidFill>
           <a:ln/>
         </p:spPr>
+        <p:txBody>
+          <a:bodyPr/>
+          <a:lstStyle/>
+          <a:p>
+            <a:endParaRPr lang="it-IT"/>
+          </a:p>
+        </p:txBody>
       </p:sp>
       <p:sp>
         <p:nvSpPr>
@@ -1808,6 +1591,13 @@
           </a:solidFill>
           <a:ln/>
         </p:spPr>
+        <p:txBody>
+          <a:bodyPr/>
+          <a:lstStyle/>
+          <a:p>
+            <a:endParaRPr lang="it-IT"/>
+          </a:p>
+        </p:txBody>
       </p:sp>
       <p:sp>
         <p:nvSpPr>
@@ -1830,11 +1620,11 @@
           <a:bodyPr wrap="square" lIns="0" tIns="0" rIns="0" bIns="0" rtlCol="0" anchor="ctr"/>
           <a:lstStyle/>
           <a:p>
-            <a:pPr indent="0" marL="0">
+            <a:pPr marL="0" indent="0">
               <a:buNone/>
             </a:pPr>
             <a:r>
-              <a:rPr lang="en-US" sz="1200" b="1" spc="200" kern="0" dirty="0">
+              <a:rPr lang="en-US" sz="1200" b="1" kern="0" spc="200" dirty="0">
                 <a:solidFill>
                   <a:srgbClr val="EB6834"/>
                 </a:solidFill>
@@ -1869,7 +1659,7 @@
           <a:bodyPr wrap="square" lIns="0" tIns="0" rIns="0" bIns="0" rtlCol="0" anchor="ctr"/>
           <a:lstStyle/>
           <a:p>
-            <a:pPr indent="0" marL="0">
+            <a:pPr marL="0" indent="0">
               <a:buNone/>
             </a:pPr>
             <a:r>
@@ -1908,7 +1698,7 @@
           <a:bodyPr wrap="square" lIns="0" tIns="0" rIns="0" bIns="0" rtlCol="0" anchor="ctr"/>
           <a:lstStyle/>
           <a:p>
-            <a:pPr indent="0" marL="0">
+            <a:pPr marL="0" indent="0">
               <a:buNone/>
             </a:pPr>
             <a:r>
@@ -1947,7 +1737,7 @@
           <a:bodyPr wrap="square" lIns="0" tIns="0" rIns="0" bIns="0" rtlCol="0" anchor="ctr"/>
           <a:lstStyle/>
           <a:p>
-            <a:pPr indent="0" marL="0">
+            <a:pPr marL="0" indent="0">
               <a:buNone/>
             </a:pPr>
             <a:r>
@@ -1961,9 +1751,6 @@
               </a:rPr>
               <a:t>Cicero Martins Jr</a:t>
             </a:r>
-            <a:pPr indent="0" marL="0">
-              <a:buNone/>
-            </a:pPr>
             <a:r>
               <a:rPr lang="en-US" sz="1300" dirty="0">
                 <a:solidFill>
@@ -2000,7 +1787,7 @@
           <a:bodyPr wrap="square" lIns="0" tIns="0" rIns="0" bIns="0" rtlCol="0" anchor="ctr"/>
           <a:lstStyle/>
           <a:p>
-            <a:pPr indent="0" marL="0">
+            <a:pPr marL="0" indent="0">
               <a:buNone/>
             </a:pPr>
             <a:r>
@@ -2039,7 +1826,7 @@
           <a:bodyPr wrap="square" lIns="0" tIns="0" rIns="0" bIns="0" rtlCol="0" anchor="ctr"/>
           <a:lstStyle/>
           <a:p>
-            <a:pPr indent="0" marL="0">
+            <a:pPr marL="0" indent="0">
               <a:buNone/>
             </a:pPr>
             <a:r>
@@ -2103,11 +1890,11 @@
           <a:bodyPr wrap="square" lIns="0" tIns="0" rIns="0" bIns="0" rtlCol="0" anchor="ctr"/>
           <a:lstStyle/>
           <a:p>
-            <a:pPr indent="0" marL="0">
+            <a:pPr marL="0" indent="0">
               <a:buNone/>
             </a:pPr>
             <a:r>
-              <a:rPr lang="en-US" sz="1200" b="1" spc="200" kern="0" dirty="0">
+              <a:rPr lang="en-US" sz="1200" b="1" kern="0" spc="200" dirty="0">
                 <a:solidFill>
                   <a:srgbClr val="EB6834"/>
                 </a:solidFill>
@@ -2142,7 +1929,7 @@
           <a:bodyPr wrap="square" lIns="0" tIns="0" rIns="0" bIns="0" rtlCol="0" anchor="ctr"/>
           <a:lstStyle/>
           <a:p>
-            <a:pPr indent="0" marL="0">
+            <a:pPr marL="0" indent="0">
               <a:buNone/>
             </a:pPr>
             <a:r>
@@ -2179,6 +1966,13 @@
           </a:solidFill>
           <a:ln/>
         </p:spPr>
+        <p:txBody>
+          <a:bodyPr/>
+          <a:lstStyle/>
+          <a:p>
+            <a:endParaRPr lang="it-IT"/>
+          </a:p>
+        </p:txBody>
       </p:sp>
       <p:sp>
         <p:nvSpPr>
@@ -2201,7 +1995,7 @@
           <a:bodyPr wrap="square" lIns="0" tIns="0" rIns="0" bIns="0" rtlCol="0" anchor="ctr"/>
           <a:lstStyle/>
           <a:p>
-            <a:pPr algn="ctr" indent="0" marL="0">
+            <a:pPr marL="0" indent="0" algn="ctr">
               <a:buNone/>
             </a:pPr>
             <a:r>
@@ -2240,7 +2034,7 @@
           <a:bodyPr wrap="square" lIns="0" tIns="0" rIns="0" bIns="0" rtlCol="0" anchor="ctr"/>
           <a:lstStyle/>
           <a:p>
-            <a:pPr indent="0" marL="0">
+            <a:pPr marL="0" indent="0">
               <a:lnSpc>
                 <a:spcPts val="1600"/>
               </a:lnSpc>
@@ -2282,7 +2076,7 @@
           <a:bodyPr wrap="square" lIns="0" tIns="0" rIns="0" bIns="0" rtlCol="0" anchor="ctr"/>
           <a:lstStyle/>
           <a:p>
-            <a:pPr indent="0" marL="0">
+            <a:pPr marL="0" indent="0">
               <a:lnSpc>
                 <a:spcPts val="1450"/>
               </a:lnSpc>
@@ -2322,6 +2116,13 @@
           </a:solidFill>
           <a:ln/>
         </p:spPr>
+        <p:txBody>
+          <a:bodyPr/>
+          <a:lstStyle/>
+          <a:p>
+            <a:endParaRPr lang="it-IT"/>
+          </a:p>
+        </p:txBody>
       </p:sp>
       <p:sp>
         <p:nvSpPr>
@@ -2344,7 +2145,7 @@
           <a:bodyPr wrap="square" lIns="0" tIns="0" rIns="0" bIns="0" rtlCol="0" anchor="ctr"/>
           <a:lstStyle/>
           <a:p>
-            <a:pPr algn="ctr" indent="0" marL="0">
+            <a:pPr marL="0" indent="0" algn="ctr">
               <a:buNone/>
             </a:pPr>
             <a:r>
@@ -2383,7 +2184,7 @@
           <a:bodyPr wrap="square" lIns="0" tIns="0" rIns="0" bIns="0" rtlCol="0" anchor="ctr"/>
           <a:lstStyle/>
           <a:p>
-            <a:pPr indent="0" marL="0">
+            <a:pPr marL="0" indent="0">
               <a:lnSpc>
                 <a:spcPts val="1600"/>
               </a:lnSpc>
@@ -2425,7 +2226,7 @@
           <a:bodyPr wrap="square" lIns="0" tIns="0" rIns="0" bIns="0" rtlCol="0" anchor="ctr"/>
           <a:lstStyle/>
           <a:p>
-            <a:pPr indent="0" marL="0">
+            <a:pPr marL="0" indent="0">
               <a:lnSpc>
                 <a:spcPts val="1450"/>
               </a:lnSpc>
@@ -2465,6 +2266,13 @@
           </a:solidFill>
           <a:ln/>
         </p:spPr>
+        <p:txBody>
+          <a:bodyPr/>
+          <a:lstStyle/>
+          <a:p>
+            <a:endParaRPr lang="it-IT"/>
+          </a:p>
+        </p:txBody>
       </p:sp>
       <p:sp>
         <p:nvSpPr>
@@ -2487,7 +2295,7 @@
           <a:bodyPr wrap="square" lIns="0" tIns="0" rIns="0" bIns="0" rtlCol="0" anchor="ctr"/>
           <a:lstStyle/>
           <a:p>
-            <a:pPr algn="ctr" indent="0" marL="0">
+            <a:pPr marL="0" indent="0" algn="ctr">
               <a:buNone/>
             </a:pPr>
             <a:r>
@@ -2526,7 +2334,7 @@
           <a:bodyPr wrap="square" lIns="0" tIns="0" rIns="0" bIns="0" rtlCol="0" anchor="ctr"/>
           <a:lstStyle/>
           <a:p>
-            <a:pPr indent="0" marL="0">
+            <a:pPr marL="0" indent="0">
               <a:lnSpc>
                 <a:spcPts val="1600"/>
               </a:lnSpc>
@@ -2568,7 +2376,7 @@
           <a:bodyPr wrap="square" lIns="0" tIns="0" rIns="0" bIns="0" rtlCol="0" anchor="ctr"/>
           <a:lstStyle/>
           <a:p>
-            <a:pPr indent="0" marL="0">
+            <a:pPr marL="0" indent="0">
               <a:lnSpc>
                 <a:spcPts val="1450"/>
               </a:lnSpc>
@@ -2608,6 +2416,13 @@
           </a:solidFill>
           <a:ln/>
         </p:spPr>
+        <p:txBody>
+          <a:bodyPr/>
+          <a:lstStyle/>
+          <a:p>
+            <a:endParaRPr lang="it-IT"/>
+          </a:p>
+        </p:txBody>
       </p:sp>
       <p:sp>
         <p:nvSpPr>
@@ -2630,7 +2445,7 @@
           <a:bodyPr wrap="square" lIns="0" tIns="0" rIns="0" bIns="0" rtlCol="0" anchor="ctr"/>
           <a:lstStyle/>
           <a:p>
-            <a:pPr algn="ctr" indent="0" marL="0">
+            <a:pPr marL="0" indent="0" algn="ctr">
               <a:buNone/>
             </a:pPr>
             <a:r>
@@ -2669,7 +2484,7 @@
           <a:bodyPr wrap="square" lIns="0" tIns="0" rIns="0" bIns="0" rtlCol="0" anchor="ctr"/>
           <a:lstStyle/>
           <a:p>
-            <a:pPr indent="0" marL="0">
+            <a:pPr marL="0" indent="0">
               <a:lnSpc>
                 <a:spcPts val="1600"/>
               </a:lnSpc>
@@ -2711,7 +2526,7 @@
           <a:bodyPr wrap="square" lIns="0" tIns="0" rIns="0" bIns="0" rtlCol="0" anchor="ctr"/>
           <a:lstStyle/>
           <a:p>
-            <a:pPr indent="0" marL="0">
+            <a:pPr marL="0" indent="0">
               <a:lnSpc>
                 <a:spcPts val="1450"/>
               </a:lnSpc>
@@ -2751,6 +2566,13 @@
           </a:solidFill>
           <a:ln/>
         </p:spPr>
+        <p:txBody>
+          <a:bodyPr/>
+          <a:lstStyle/>
+          <a:p>
+            <a:endParaRPr lang="it-IT"/>
+          </a:p>
+        </p:txBody>
       </p:sp>
       <p:sp>
         <p:nvSpPr>
@@ -2773,7 +2595,7 @@
           <a:bodyPr wrap="square" lIns="0" tIns="0" rIns="0" bIns="0" rtlCol="0" anchor="ctr"/>
           <a:lstStyle/>
           <a:p>
-            <a:pPr algn="ctr" indent="0" marL="0">
+            <a:pPr marL="0" indent="0" algn="ctr">
               <a:buNone/>
             </a:pPr>
             <a:r>
@@ -2812,7 +2634,7 @@
           <a:bodyPr wrap="square" lIns="0" tIns="0" rIns="0" bIns="0" rtlCol="0" anchor="ctr"/>
           <a:lstStyle/>
           <a:p>
-            <a:pPr indent="0" marL="0">
+            <a:pPr marL="0" indent="0">
               <a:lnSpc>
                 <a:spcPts val="1600"/>
               </a:lnSpc>
@@ -2854,7 +2676,7 @@
           <a:bodyPr wrap="square" lIns="0" tIns="0" rIns="0" bIns="0" rtlCol="0" anchor="ctr"/>
           <a:lstStyle/>
           <a:p>
-            <a:pPr indent="0" marL="0">
+            <a:pPr marL="0" indent="0">
               <a:lnSpc>
                 <a:spcPts val="1450"/>
               </a:lnSpc>
@@ -2894,6 +2716,13 @@
           </a:solidFill>
           <a:ln/>
         </p:spPr>
+        <p:txBody>
+          <a:bodyPr/>
+          <a:lstStyle/>
+          <a:p>
+            <a:endParaRPr lang="it-IT"/>
+          </a:p>
+        </p:txBody>
       </p:sp>
       <p:sp>
         <p:nvSpPr>
@@ -2916,7 +2745,7 @@
           <a:bodyPr wrap="square" lIns="0" tIns="0" rIns="0" bIns="0" rtlCol="0" anchor="ctr"/>
           <a:lstStyle/>
           <a:p>
-            <a:pPr algn="ctr" indent="0" marL="0">
+            <a:pPr marL="0" indent="0" algn="ctr">
               <a:buNone/>
             </a:pPr>
             <a:r>
@@ -2955,7 +2784,7 @@
           <a:bodyPr wrap="square" lIns="0" tIns="0" rIns="0" bIns="0" rtlCol="0" anchor="ctr"/>
           <a:lstStyle/>
           <a:p>
-            <a:pPr indent="0" marL="0">
+            <a:pPr marL="0" indent="0">
               <a:lnSpc>
                 <a:spcPts val="1600"/>
               </a:lnSpc>
@@ -2997,7 +2826,7 @@
           <a:bodyPr wrap="square" lIns="0" tIns="0" rIns="0" bIns="0" rtlCol="0" anchor="ctr"/>
           <a:lstStyle/>
           <a:p>
-            <a:pPr indent="0" marL="0">
+            <a:pPr marL="0" indent="0">
               <a:lnSpc>
                 <a:spcPts val="1450"/>
               </a:lnSpc>
@@ -3034,6 +2863,7 @@
         <a:solidFill>
           <a:srgbClr val="21295C"/>
         </a:solidFill>
+        <a:effectLst/>
       </p:bgPr>
     </p:bg>
     <p:spTree>
@@ -3071,6 +2901,13 @@
           </a:solidFill>
           <a:ln/>
         </p:spPr>
+        <p:txBody>
+          <a:bodyPr/>
+          <a:lstStyle/>
+          <a:p>
+            <a:endParaRPr lang="it-IT"/>
+          </a:p>
+        </p:txBody>
       </p:sp>
       <p:sp>
         <p:nvSpPr>
@@ -3093,11 +2930,11 @@
           <a:bodyPr wrap="square" lIns="0" tIns="0" rIns="0" bIns="0" rtlCol="0" anchor="ctr"/>
           <a:lstStyle/>
           <a:p>
-            <a:pPr indent="0" marL="0">
+            <a:pPr marL="0" indent="0">
               <a:buNone/>
             </a:pPr>
             <a:r>
-              <a:rPr lang="en-US" sz="1200" b="1" spc="200" kern="0" dirty="0">
+              <a:rPr lang="en-US" sz="1200" b="1" kern="0" spc="200" dirty="0">
                 <a:solidFill>
                   <a:srgbClr val="EB6834"/>
                 </a:solidFill>
@@ -3132,7 +2969,7 @@
           <a:bodyPr wrap="square" lIns="0" tIns="0" rIns="0" bIns="0" rtlCol="0" anchor="ctr"/>
           <a:lstStyle/>
           <a:p>
-            <a:pPr indent="0" marL="0">
+            <a:pPr marL="0" indent="0">
               <a:buNone/>
             </a:pPr>
             <a:r>
@@ -3169,6 +3006,13 @@
           </a:solidFill>
           <a:ln/>
         </p:spPr>
+        <p:txBody>
+          <a:bodyPr/>
+          <a:lstStyle/>
+          <a:p>
+            <a:endParaRPr lang="it-IT"/>
+          </a:p>
+        </p:txBody>
       </p:sp>
       <p:sp>
         <p:nvSpPr>
@@ -3191,7 +3035,7 @@
           <a:bodyPr wrap="square" lIns="0" tIns="0" rIns="0" bIns="0" rtlCol="0" anchor="ctr"/>
           <a:lstStyle/>
           <a:p>
-            <a:pPr indent="0" marL="0">
+            <a:pPr marL="0" indent="0">
               <a:buNone/>
             </a:pPr>
             <a:r>
@@ -3230,7 +3074,7 @@
           <a:bodyPr wrap="square" lIns="0" tIns="0" rIns="0" bIns="0" rtlCol="0" anchor="ctr"/>
           <a:lstStyle/>
           <a:p>
-            <a:pPr indent="0" marL="0">
+            <a:pPr marL="0" indent="0">
               <a:lnSpc>
                 <a:spcPts val="1600"/>
               </a:lnSpc>
@@ -3270,6 +3114,13 @@
           </a:solidFill>
           <a:ln/>
         </p:spPr>
+        <p:txBody>
+          <a:bodyPr/>
+          <a:lstStyle/>
+          <a:p>
+            <a:endParaRPr lang="it-IT"/>
+          </a:p>
+        </p:txBody>
       </p:sp>
       <p:sp>
         <p:nvSpPr>
@@ -3292,7 +3143,7 @@
           <a:bodyPr wrap="square" lIns="0" tIns="0" rIns="0" bIns="0" rtlCol="0" anchor="ctr"/>
           <a:lstStyle/>
           <a:p>
-            <a:pPr indent="0" marL="0">
+            <a:pPr marL="0" indent="0">
               <a:buNone/>
             </a:pPr>
             <a:r>
@@ -3331,7 +3182,7 @@
           <a:bodyPr wrap="square" lIns="0" tIns="0" rIns="0" bIns="0" rtlCol="0" anchor="ctr"/>
           <a:lstStyle/>
           <a:p>
-            <a:pPr indent="0" marL="0">
+            <a:pPr marL="0" indent="0">
               <a:lnSpc>
                 <a:spcPts val="1600"/>
               </a:lnSpc>
@@ -3371,6 +3222,13 @@
           </a:solidFill>
           <a:ln/>
         </p:spPr>
+        <p:txBody>
+          <a:bodyPr/>
+          <a:lstStyle/>
+          <a:p>
+            <a:endParaRPr lang="it-IT"/>
+          </a:p>
+        </p:txBody>
       </p:sp>
       <p:sp>
         <p:nvSpPr>
@@ -3393,7 +3251,7 @@
           <a:bodyPr wrap="square" lIns="0" tIns="0" rIns="0" bIns="0" rtlCol="0" anchor="ctr"/>
           <a:lstStyle/>
           <a:p>
-            <a:pPr indent="0" marL="0">
+            <a:pPr marL="0" indent="0">
               <a:buNone/>
             </a:pPr>
             <a:r>
@@ -3432,7 +3290,7 @@
           <a:bodyPr wrap="square" lIns="0" tIns="0" rIns="0" bIns="0" rtlCol="0" anchor="ctr"/>
           <a:lstStyle/>
           <a:p>
-            <a:pPr indent="0" marL="0">
+            <a:pPr marL="0" indent="0">
               <a:lnSpc>
                 <a:spcPts val="1600"/>
               </a:lnSpc>
@@ -3472,6 +3330,13 @@
           </a:solidFill>
           <a:ln/>
         </p:spPr>
+        <p:txBody>
+          <a:bodyPr/>
+          <a:lstStyle/>
+          <a:p>
+            <a:endParaRPr lang="it-IT"/>
+          </a:p>
+        </p:txBody>
       </p:sp>
       <p:sp>
         <p:nvSpPr>
@@ -3494,7 +3359,7 @@
           <a:bodyPr wrap="square" lIns="0" tIns="0" rIns="0" bIns="0" rtlCol="0" anchor="ctr"/>
           <a:lstStyle/>
           <a:p>
-            <a:pPr indent="0" marL="0">
+            <a:pPr marL="0" indent="0">
               <a:buNone/>
             </a:pPr>
             <a:r>
@@ -3533,7 +3398,7 @@
           <a:bodyPr wrap="square" lIns="0" tIns="0" rIns="0" bIns="0" rtlCol="0" anchor="ctr"/>
           <a:lstStyle/>
           <a:p>
-            <a:pPr indent="0" marL="0">
+            <a:pPr marL="0" indent="0">
               <a:lnSpc>
                 <a:spcPts val="1600"/>
               </a:lnSpc>
@@ -3573,6 +3438,13 @@
           </a:solidFill>
           <a:ln/>
         </p:spPr>
+        <p:txBody>
+          <a:bodyPr/>
+          <a:lstStyle/>
+          <a:p>
+            <a:endParaRPr lang="it-IT"/>
+          </a:p>
+        </p:txBody>
       </p:sp>
       <p:sp>
         <p:nvSpPr>
@@ -3595,7 +3467,7 @@
           <a:bodyPr wrap="square" lIns="0" tIns="0" rIns="0" bIns="0" rtlCol="0" anchor="ctr"/>
           <a:lstStyle/>
           <a:p>
-            <a:pPr indent="0" marL="0">
+            <a:pPr marL="0" indent="0">
               <a:buNone/>
             </a:pPr>
             <a:r>
@@ -3634,7 +3506,7 @@
           <a:bodyPr wrap="square" lIns="0" tIns="0" rIns="0" bIns="0" rtlCol="0" anchor="ctr"/>
           <a:lstStyle/>
           <a:p>
-            <a:pPr indent="0" marL="0">
+            <a:pPr marL="0" indent="0">
               <a:lnSpc>
                 <a:spcPts val="1600"/>
               </a:lnSpc>
@@ -3676,7 +3548,7 @@
           <a:bodyPr wrap="square" lIns="0" tIns="0" rIns="0" bIns="0" rtlCol="0" anchor="ctr"/>
           <a:lstStyle/>
           <a:p>
-            <a:pPr indent="0" marL="0">
+            <a:pPr marL="0" indent="0">
               <a:buNone/>
             </a:pPr>
             <a:r>
@@ -3740,11 +3612,11 @@
           <a:bodyPr wrap="square" lIns="0" tIns="0" rIns="0" bIns="0" rtlCol="0" anchor="ctr"/>
           <a:lstStyle/>
           <a:p>
-            <a:pPr indent="0" marL="0">
+            <a:pPr marL="0" indent="0">
               <a:buNone/>
             </a:pPr>
             <a:r>
-              <a:rPr lang="en-US" sz="1200" b="1" spc="200" kern="0" dirty="0">
+              <a:rPr lang="en-US" sz="1200" b="1" kern="0" spc="200" dirty="0">
                 <a:solidFill>
                   <a:srgbClr val="EB6834"/>
                 </a:solidFill>
@@ -3779,7 +3651,7 @@
           <a:bodyPr wrap="square" lIns="0" tIns="0" rIns="0" bIns="0" rtlCol="0" anchor="ctr"/>
           <a:lstStyle/>
           <a:p>
-            <a:pPr indent="0" marL="0">
+            <a:pPr marL="0" indent="0">
               <a:buNone/>
             </a:pPr>
             <a:r>
@@ -3818,7 +3690,7 @@
           <a:bodyPr wrap="square" lIns="0" tIns="0" rIns="0" bIns="0" rtlCol="0" anchor="ctr"/>
           <a:lstStyle/>
           <a:p>
-            <a:pPr indent="0" marL="0">
+            <a:pPr marL="0" indent="0">
               <a:buNone/>
             </a:pPr>
             <a:r>
@@ -3857,7 +3729,7 @@
           <a:bodyPr wrap="square" lIns="0" tIns="0" rIns="0" bIns="0" rtlCol="0" anchor="ctr"/>
           <a:lstStyle/>
           <a:p>
-            <a:pPr indent="0" marL="0">
+            <a:pPr marL="0" indent="0">
               <a:lnSpc>
                 <a:spcPts val="2200"/>
               </a:lnSpc>
@@ -3880,7 +3752,7 @@
             <a:endParaRPr lang="en-US" sz="1450" dirty="0"/>
           </a:p>
           <a:p>
-            <a:pPr indent="0" marL="0">
+            <a:pPr marL="0" indent="0">
               <a:lnSpc>
                 <a:spcPts val="2200"/>
               </a:lnSpc>
@@ -3903,7 +3775,7 @@
             <a:endParaRPr lang="en-US" sz="1450" dirty="0"/>
           </a:p>
           <a:p>
-            <a:pPr indent="0" marL="0">
+            <a:pPr marL="0" indent="0">
               <a:lnSpc>
                 <a:spcPts val="2200"/>
               </a:lnSpc>
@@ -3926,7 +3798,7 @@
       </p:sp>
       <p:graphicFrame>
         <p:nvGraphicFramePr>
-          <p:cNvPr id="3" name="Table 0"/>
+          <p:cNvPr id="6" name="Table 0"/>
           <p:cNvGraphicFramePr>
             <a:graphicFrameLocks noGrp="1"/>
           </p:cNvGraphicFramePr>
@@ -3940,16 +3812,34 @@
         </p:nvGraphicFramePr>
         <p:xfrm>
           <a:off x="6263640" y="2057400"/>
-          <a:ext cx="5358384" cy="914400"/>
+          <a:ext cx="5358384" cy="2103120"/>
         </p:xfrm>
         <a:graphic>
           <a:graphicData uri="http://schemas.openxmlformats.org/drawingml/2006/table">
             <a:tbl>
               <a:tblPr/>
               <a:tblGrid>
-                <a:gridCol w="1700784"/>
-                <a:gridCol w="1828800"/>
-                <a:gridCol w="1828800"/>
+                <a:gridCol w="1700784">
+                  <a:extLst>
+                    <a:ext uri="{9D8B030D-6E8A-4147-A177-3AD203B41FA5}">
+                      <a16:colId xmlns:a16="http://schemas.microsoft.com/office/drawing/2014/main" val="20000"/>
+                    </a:ext>
+                  </a:extLst>
+                </a:gridCol>
+                <a:gridCol w="1828800">
+                  <a:extLst>
+                    <a:ext uri="{9D8B030D-6E8A-4147-A177-3AD203B41FA5}">
+                      <a16:colId xmlns:a16="http://schemas.microsoft.com/office/drawing/2014/main" val="20001"/>
+                    </a:ext>
+                  </a:extLst>
+                </a:gridCol>
+                <a:gridCol w="1828800">
+                  <a:extLst>
+                    <a:ext uri="{9D8B030D-6E8A-4147-A177-3AD203B41FA5}">
+                      <a16:colId xmlns:a16="http://schemas.microsoft.com/office/drawing/2014/main" val="20002"/>
+                    </a:ext>
+                  </a:extLst>
+                </a:gridCol>
               </a:tblGrid>
               <a:tr h="420624">
                 <a:tc>
@@ -3957,7 +3847,7 @@
                     <a:bodyPr/>
                     <a:lstStyle/>
                     <a:p>
-                      <a:pPr indent="0" marL="0">
+                      <a:pPr marL="0" indent="0">
                         <a:buNone/>
                       </a:pPr>
                       <a:endParaRPr lang="en-US" sz="1250" dirty="0">
@@ -3967,7 +3857,7 @@
                       </a:endParaRPr>
                     </a:p>
                   </a:txBody>
-                  <a:tcPr marL="91440" marR="91440" marT="45720" marB="45720" anchor="ctr">
+                  <a:tcPr anchor="ctr">
                     <a:lnL w="6350" cap="flat" cmpd="sng" algn="ctr">
                       <a:solidFill>
                         <a:srgbClr val="D6DEE3"/>
@@ -4014,7 +3904,7 @@
                     <a:bodyPr/>
                     <a:lstStyle/>
                     <a:p>
-                      <a:pPr indent="0" marL="0">
+                      <a:pPr marL="0" indent="0">
                         <a:buNone/>
                       </a:pPr>
                       <a:r>
@@ -4035,7 +3925,7 @@
                       </a:endParaRPr>
                     </a:p>
                   </a:txBody>
-                  <a:tcPr marL="91440" marR="91440" marT="45720" marB="45720" anchor="ctr">
+                  <a:tcPr anchor="ctr">
                     <a:lnL w="6350" cap="flat" cmpd="sng" algn="ctr">
                       <a:solidFill>
                         <a:srgbClr val="D6DEE3"/>
@@ -4082,7 +3972,7 @@
                     <a:bodyPr/>
                     <a:lstStyle/>
                     <a:p>
-                      <a:pPr indent="0" marL="0">
+                      <a:pPr marL="0" indent="0">
                         <a:buNone/>
                       </a:pPr>
                       <a:r>
@@ -4103,7 +3993,7 @@
                       </a:endParaRPr>
                     </a:p>
                   </a:txBody>
-                  <a:tcPr marL="91440" marR="91440" marT="45720" marB="45720" anchor="ctr">
+                  <a:tcPr anchor="ctr">
                     <a:lnL w="6350" cap="flat" cmpd="sng" algn="ctr">
                       <a:solidFill>
                         <a:srgbClr val="D6DEE3"/>
@@ -4145,6 +4035,11 @@
                     </a:solidFill>
                   </a:tcPr>
                 </a:tc>
+                <a:extLst>
+                  <a:ext uri="{0D108BD9-81ED-4DB2-BD59-A6C34878D82A}">
+                    <a16:rowId xmlns:a16="http://schemas.microsoft.com/office/drawing/2014/main" val="10000"/>
+                  </a:ext>
+                </a:extLst>
               </a:tr>
               <a:tr h="420624">
                 <a:tc>
@@ -4152,7 +4047,7 @@
                     <a:bodyPr/>
                     <a:lstStyle/>
                     <a:p>
-                      <a:pPr indent="0" marL="0">
+                      <a:pPr marL="0" indent="0">
                         <a:buNone/>
                       </a:pPr>
                       <a:r>
@@ -4173,7 +4068,7 @@
                       </a:endParaRPr>
                     </a:p>
                   </a:txBody>
-                  <a:tcPr marL="91440" marR="91440" marT="45720" marB="45720" anchor="ctr">
+                  <a:tcPr anchor="ctr">
                     <a:lnL w="6350" cap="flat" cmpd="sng" algn="ctr">
                       <a:solidFill>
                         <a:srgbClr val="D6DEE3"/>
@@ -4220,7 +4115,7 @@
                     <a:bodyPr/>
                     <a:lstStyle/>
                     <a:p>
-                      <a:pPr indent="0" marL="0">
+                      <a:pPr marL="0" indent="0">
                         <a:buNone/>
                       </a:pPr>
                       <a:r>
@@ -4241,7 +4136,7 @@
                       </a:endParaRPr>
                     </a:p>
                   </a:txBody>
-                  <a:tcPr marL="91440" marR="91440" marT="45720" marB="45720" anchor="ctr">
+                  <a:tcPr anchor="ctr">
                     <a:lnL w="6350" cap="flat" cmpd="sng" algn="ctr">
                       <a:solidFill>
                         <a:srgbClr val="D6DEE3"/>
@@ -4288,7 +4183,7 @@
                     <a:bodyPr/>
                     <a:lstStyle/>
                     <a:p>
-                      <a:pPr indent="0" marL="0">
+                      <a:pPr marL="0" indent="0">
                         <a:buNone/>
                       </a:pPr>
                       <a:r>
@@ -4309,7 +4204,7 @@
                       </a:endParaRPr>
                     </a:p>
                   </a:txBody>
-                  <a:tcPr marL="91440" marR="91440" marT="45720" marB="45720" anchor="ctr">
+                  <a:tcPr anchor="ctr">
                     <a:lnL w="6350" cap="flat" cmpd="sng" algn="ctr">
                       <a:solidFill>
                         <a:srgbClr val="D6DEE3"/>
@@ -4351,6 +4246,11 @@
                     </a:solidFill>
                   </a:tcPr>
                 </a:tc>
+                <a:extLst>
+                  <a:ext uri="{0D108BD9-81ED-4DB2-BD59-A6C34878D82A}">
+                    <a16:rowId xmlns:a16="http://schemas.microsoft.com/office/drawing/2014/main" val="10001"/>
+                  </a:ext>
+                </a:extLst>
               </a:tr>
               <a:tr h="420624">
                 <a:tc>
@@ -4358,7 +4258,7 @@
                     <a:bodyPr/>
                     <a:lstStyle/>
                     <a:p>
-                      <a:pPr indent="0" marL="0">
+                      <a:pPr marL="0" indent="0">
                         <a:buNone/>
                       </a:pPr>
                       <a:r>
@@ -4379,7 +4279,7 @@
                       </a:endParaRPr>
                     </a:p>
                   </a:txBody>
-                  <a:tcPr marL="91440" marR="91440" marT="45720" marB="45720" anchor="ctr">
+                  <a:tcPr anchor="ctr">
                     <a:lnL w="6350" cap="flat" cmpd="sng" algn="ctr">
                       <a:solidFill>
                         <a:srgbClr val="D6DEE3"/>
@@ -4426,7 +4326,7 @@
                     <a:bodyPr/>
                     <a:lstStyle/>
                     <a:p>
-                      <a:pPr indent="0" marL="0">
+                      <a:pPr marL="0" indent="0">
                         <a:buNone/>
                       </a:pPr>
                       <a:r>
@@ -4447,7 +4347,7 @@
                       </a:endParaRPr>
                     </a:p>
                   </a:txBody>
-                  <a:tcPr marL="91440" marR="91440" marT="45720" marB="45720" anchor="ctr">
+                  <a:tcPr anchor="ctr">
                     <a:lnL w="6350" cap="flat" cmpd="sng" algn="ctr">
                       <a:solidFill>
                         <a:srgbClr val="D6DEE3"/>
@@ -4494,7 +4394,7 @@
                     <a:bodyPr/>
                     <a:lstStyle/>
                     <a:p>
-                      <a:pPr indent="0" marL="0">
+                      <a:pPr marL="0" indent="0">
                         <a:buNone/>
                       </a:pPr>
                       <a:r>
@@ -4515,7 +4415,7 @@
                       </a:endParaRPr>
                     </a:p>
                   </a:txBody>
-                  <a:tcPr marL="91440" marR="91440" marT="45720" marB="45720" anchor="ctr">
+                  <a:tcPr anchor="ctr">
                     <a:lnL w="6350" cap="flat" cmpd="sng" algn="ctr">
                       <a:solidFill>
                         <a:srgbClr val="D6DEE3"/>
@@ -4557,6 +4457,11 @@
                     </a:solidFill>
                   </a:tcPr>
                 </a:tc>
+                <a:extLst>
+                  <a:ext uri="{0D108BD9-81ED-4DB2-BD59-A6C34878D82A}">
+                    <a16:rowId xmlns:a16="http://schemas.microsoft.com/office/drawing/2014/main" val="10002"/>
+                  </a:ext>
+                </a:extLst>
               </a:tr>
               <a:tr h="420624">
                 <a:tc>
@@ -4564,7 +4469,7 @@
                     <a:bodyPr/>
                     <a:lstStyle/>
                     <a:p>
-                      <a:pPr indent="0" marL="0">
+                      <a:pPr marL="0" indent="0">
                         <a:buNone/>
                       </a:pPr>
                       <a:r>
@@ -4585,7 +4490,7 @@
                       </a:endParaRPr>
                     </a:p>
                   </a:txBody>
-                  <a:tcPr marL="91440" marR="91440" marT="45720" marB="45720" anchor="ctr">
+                  <a:tcPr anchor="ctr">
                     <a:lnL w="6350" cap="flat" cmpd="sng" algn="ctr">
                       <a:solidFill>
                         <a:srgbClr val="D6DEE3"/>
@@ -4632,7 +4537,7 @@
                     <a:bodyPr/>
                     <a:lstStyle/>
                     <a:p>
-                      <a:pPr indent="0" marL="0">
+                      <a:pPr marL="0" indent="0">
                         <a:buNone/>
                       </a:pPr>
                       <a:r>
@@ -4653,7 +4558,7 @@
                       </a:endParaRPr>
                     </a:p>
                   </a:txBody>
-                  <a:tcPr marL="91440" marR="91440" marT="45720" marB="45720" anchor="ctr">
+                  <a:tcPr anchor="ctr">
                     <a:lnL w="6350" cap="flat" cmpd="sng" algn="ctr">
                       <a:solidFill>
                         <a:srgbClr val="D6DEE3"/>
@@ -4700,7 +4605,7 @@
                     <a:bodyPr/>
                     <a:lstStyle/>
                     <a:p>
-                      <a:pPr indent="0" marL="0">
+                      <a:pPr marL="0" indent="0">
                         <a:buNone/>
                       </a:pPr>
                       <a:r>
@@ -4721,7 +4626,7 @@
                       </a:endParaRPr>
                     </a:p>
                   </a:txBody>
-                  <a:tcPr marL="91440" marR="91440" marT="45720" marB="45720" anchor="ctr">
+                  <a:tcPr anchor="ctr">
                     <a:lnL w="6350" cap="flat" cmpd="sng" algn="ctr">
                       <a:solidFill>
                         <a:srgbClr val="D6DEE3"/>
@@ -4763,6 +4668,11 @@
                     </a:solidFill>
                   </a:tcPr>
                 </a:tc>
+                <a:extLst>
+                  <a:ext uri="{0D108BD9-81ED-4DB2-BD59-A6C34878D82A}">
+                    <a16:rowId xmlns:a16="http://schemas.microsoft.com/office/drawing/2014/main" val="10003"/>
+                  </a:ext>
+                </a:extLst>
               </a:tr>
               <a:tr h="420624">
                 <a:tc>
@@ -4770,7 +4680,7 @@
                     <a:bodyPr/>
                     <a:lstStyle/>
                     <a:p>
-                      <a:pPr indent="0" marL="0">
+                      <a:pPr marL="0" indent="0">
                         <a:buNone/>
                       </a:pPr>
                       <a:r>
@@ -4791,7 +4701,7 @@
                       </a:endParaRPr>
                     </a:p>
                   </a:txBody>
-                  <a:tcPr marL="91440" marR="91440" marT="45720" marB="45720" anchor="ctr">
+                  <a:tcPr anchor="ctr">
                     <a:lnL w="6350" cap="flat" cmpd="sng" algn="ctr">
                       <a:solidFill>
                         <a:srgbClr val="D6DEE3"/>
@@ -4838,7 +4748,7 @@
                     <a:bodyPr/>
                     <a:lstStyle/>
                     <a:p>
-                      <a:pPr indent="0" marL="0">
+                      <a:pPr marL="0" indent="0">
                         <a:buNone/>
                       </a:pPr>
                       <a:r>
@@ -4859,7 +4769,7 @@
                       </a:endParaRPr>
                     </a:p>
                   </a:txBody>
-                  <a:tcPr marL="91440" marR="91440" marT="45720" marB="45720" anchor="ctr">
+                  <a:tcPr anchor="ctr">
                     <a:lnL w="6350" cap="flat" cmpd="sng" algn="ctr">
                       <a:solidFill>
                         <a:srgbClr val="D6DEE3"/>
@@ -4906,7 +4816,7 @@
                     <a:bodyPr/>
                     <a:lstStyle/>
                     <a:p>
-                      <a:pPr indent="0" marL="0">
+                      <a:pPr marL="0" indent="0">
                         <a:buNone/>
                       </a:pPr>
                       <a:r>
@@ -4927,7 +4837,7 @@
                       </a:endParaRPr>
                     </a:p>
                   </a:txBody>
-                  <a:tcPr marL="91440" marR="91440" marT="45720" marB="45720" anchor="ctr">
+                  <a:tcPr anchor="ctr">
                     <a:lnL w="6350" cap="flat" cmpd="sng" algn="ctr">
                       <a:solidFill>
                         <a:srgbClr val="D6DEE3"/>
@@ -4969,6 +4879,11 @@
                     </a:solidFill>
                   </a:tcPr>
                 </a:tc>
+                <a:extLst>
+                  <a:ext uri="{0D108BD9-81ED-4DB2-BD59-A6C34878D82A}">
+                    <a16:rowId xmlns:a16="http://schemas.microsoft.com/office/drawing/2014/main" val="10004"/>
+                  </a:ext>
+                </a:extLst>
               </a:tr>
             </a:tbl>
           </a:graphicData>
@@ -4995,7 +4910,7 @@
           <a:bodyPr wrap="square" lIns="0" tIns="0" rIns="0" bIns="0" rtlCol="0" anchor="ctr"/>
           <a:lstStyle/>
           <a:p>
-            <a:pPr indent="0" marL="0">
+            <a:pPr marL="0" indent="0">
               <a:buNone/>
             </a:pPr>
             <a:r>
@@ -5059,11 +4974,11 @@
           <a:bodyPr wrap="square" lIns="0" tIns="0" rIns="0" bIns="0" rtlCol="0" anchor="ctr"/>
           <a:lstStyle/>
           <a:p>
-            <a:pPr indent="0" marL="0">
+            <a:pPr marL="0" indent="0">
               <a:buNone/>
             </a:pPr>
             <a:r>
-              <a:rPr lang="en-US" sz="1200" b="1" spc="200" kern="0" dirty="0">
+              <a:rPr lang="en-US" sz="1200" b="1" kern="0" spc="200" dirty="0">
                 <a:solidFill>
                   <a:srgbClr val="EB6834"/>
                 </a:solidFill>
@@ -5098,7 +5013,7 @@
           <a:bodyPr wrap="square" lIns="0" tIns="0" rIns="0" bIns="0" rtlCol="0" anchor="ctr"/>
           <a:lstStyle/>
           <a:p>
-            <a:pPr indent="0" marL="0">
+            <a:pPr marL="0" indent="0">
               <a:buNone/>
             </a:pPr>
             <a:r>
@@ -5137,7 +5052,7 @@
           <a:bodyPr wrap="square" lIns="0" tIns="0" rIns="0" bIns="0" rtlCol="0" anchor="ctr"/>
           <a:lstStyle/>
           <a:p>
-            <a:pPr indent="0" marL="0">
+            <a:pPr marL="0" indent="0">
               <a:buNone/>
             </a:pPr>
             <a:r>
@@ -5176,7 +5091,7 @@
           <a:bodyPr wrap="square" lIns="0" tIns="0" rIns="0" bIns="0" rtlCol="0" anchor="ctr"/>
           <a:lstStyle/>
           <a:p>
-            <a:pPr indent="0" marL="0">
+            <a:pPr marL="0" indent="0">
               <a:buNone/>
             </a:pPr>
             <a:r>
@@ -5215,7 +5130,7 @@
           <a:bodyPr wrap="square" lIns="0" tIns="0" rIns="0" bIns="0" rtlCol="0" anchor="ctr"/>
           <a:lstStyle/>
           <a:p>
-            <a:pPr indent="0" marL="0">
+            <a:pPr marL="0" indent="0">
               <a:buNone/>
             </a:pPr>
             <a:r>
@@ -5232,7 +5147,7 @@
             <a:endParaRPr lang="en-US" sz="1200" dirty="0"/>
           </a:p>
           <a:p>
-            <a:pPr indent="0" marL="0">
+            <a:pPr marL="0" indent="0">
               <a:buNone/>
             </a:pPr>
             <a:r>
@@ -5271,7 +5186,7 @@
           <a:bodyPr wrap="square" lIns="0" tIns="0" rIns="0" bIns="0" rtlCol="0" anchor="ctr"/>
           <a:lstStyle/>
           <a:p>
-            <a:pPr indent="0" marL="0">
+            <a:pPr marL="0" indent="0">
               <a:buNone/>
             </a:pPr>
             <a:r>
@@ -5310,7 +5225,7 @@
           <a:bodyPr wrap="square" lIns="0" tIns="0" rIns="0" bIns="0" rtlCol="0" anchor="ctr"/>
           <a:lstStyle/>
           <a:p>
-            <a:pPr indent="0" marL="0">
+            <a:pPr marL="0" indent="0">
               <a:buNone/>
             </a:pPr>
             <a:r>
@@ -5327,7 +5242,7 @@
             <a:endParaRPr lang="en-US" sz="1200" dirty="0"/>
           </a:p>
           <a:p>
-            <a:pPr indent="0" marL="0">
+            <a:pPr marL="0" indent="0">
               <a:buNone/>
             </a:pPr>
             <a:r>
@@ -5366,7 +5281,7 @@
           <a:bodyPr wrap="square" lIns="0" tIns="0" rIns="0" bIns="0" rtlCol="0" anchor="ctr"/>
           <a:lstStyle/>
           <a:p>
-            <a:pPr indent="0" marL="0">
+            <a:pPr marL="0" indent="0">
               <a:buNone/>
             </a:pPr>
             <a:r>
@@ -5405,7 +5320,7 @@
           <a:bodyPr wrap="square" lIns="0" tIns="0" rIns="0" bIns="0" rtlCol="0" anchor="ctr"/>
           <a:lstStyle/>
           <a:p>
-            <a:pPr indent="0" marL="0">
+            <a:pPr marL="0" indent="0">
               <a:buNone/>
             </a:pPr>
             <a:r>
@@ -5422,7 +5337,7 @@
             <a:endParaRPr lang="en-US" sz="1200" dirty="0"/>
           </a:p>
           <a:p>
-            <a:pPr indent="0" marL="0">
+            <a:pPr marL="0" indent="0">
               <a:buNone/>
             </a:pPr>
             <a:r>
@@ -5442,14 +5357,14 @@
       </p:sp>
       <p:pic>
         <p:nvPicPr>
-          <p:cNvPr id="11" name="Image 0" descr="C:\Users\Unipa\Documents\MaltaDT\figures\bathymetry_overview.png">    </p:cNvPr>
+          <p:cNvPr id="11" name="Image 0" descr="C:\Users\Unipa\Documents\MaltaDT\figures\bathymetry_overview.png"/>
           <p:cNvPicPr>
             <a:picLocks noChangeAspect="1"/>
           </p:cNvPicPr>
           <p:nvPr/>
         </p:nvPicPr>
         <p:blipFill>
-          <a:blip r:embed="rId1"/>
+          <a:blip r:embed="rId3"/>
           <a:stretch>
             <a:fillRect/>
           </a:stretch>
@@ -5485,7 +5400,7 @@
           <a:bodyPr wrap="square" lIns="0" tIns="0" rIns="0" bIns="0" rtlCol="0" anchor="ctr"/>
           <a:lstStyle/>
           <a:p>
-            <a:pPr indent="0" marL="0">
+            <a:pPr marL="0" indent="0">
               <a:lnSpc>
                 <a:spcPts val="1600"/>
               </a:lnSpc>
@@ -5506,7 +5421,7 @@
             <a:endParaRPr lang="en-US" sz="1150" dirty="0"/>
           </a:p>
           <a:p>
-            <a:pPr indent="0" marL="0">
+            <a:pPr marL="0" indent="0">
               <a:lnSpc>
                 <a:spcPts val="1600"/>
               </a:lnSpc>
@@ -5527,7 +5442,7 @@
             <a:endParaRPr lang="en-US" sz="1150" dirty="0"/>
           </a:p>
           <a:p>
-            <a:pPr indent="0" marL="0">
+            <a:pPr marL="0" indent="0">
               <a:lnSpc>
                 <a:spcPts val="1600"/>
               </a:lnSpc>
@@ -5569,7 +5484,7 @@
           <a:bodyPr wrap="square" lIns="0" tIns="0" rIns="0" bIns="0" rtlCol="0" anchor="ctr"/>
           <a:lstStyle/>
           <a:p>
-            <a:pPr indent="0" marL="0">
+            <a:pPr marL="0" indent="0">
               <a:buNone/>
             </a:pPr>
             <a:r>
@@ -5633,11 +5548,11 @@
           <a:bodyPr wrap="square" lIns="0" tIns="0" rIns="0" bIns="0" rtlCol="0" anchor="ctr"/>
           <a:lstStyle/>
           <a:p>
-            <a:pPr indent="0" marL="0">
+            <a:pPr marL="0" indent="0">
               <a:buNone/>
             </a:pPr>
             <a:r>
-              <a:rPr lang="en-US" sz="1200" b="1" spc="200" kern="0" dirty="0">
+              <a:rPr lang="en-US" sz="1200" b="1" kern="0" spc="200" dirty="0">
                 <a:solidFill>
                   <a:srgbClr val="EB6834"/>
                 </a:solidFill>
@@ -5672,7 +5587,7 @@
           <a:bodyPr wrap="square" lIns="0" tIns="0" rIns="0" bIns="0" rtlCol="0" anchor="ctr"/>
           <a:lstStyle/>
           <a:p>
-            <a:pPr indent="0" marL="0">
+            <a:pPr marL="0" indent="0">
               <a:buNone/>
             </a:pPr>
             <a:r>
@@ -5711,7 +5626,7 @@
           <a:bodyPr wrap="square" lIns="0" tIns="0" rIns="0" bIns="0" rtlCol="0" anchor="ctr"/>
           <a:lstStyle/>
           <a:p>
-            <a:pPr indent="0" marL="0">
+            <a:pPr marL="0" indent="0">
               <a:buNone/>
             </a:pPr>
             <a:r>
@@ -5750,6 +5665,13 @@
           </a:solidFill>
           <a:ln/>
         </p:spPr>
+        <p:txBody>
+          <a:bodyPr/>
+          <a:lstStyle/>
+          <a:p>
+            <a:endParaRPr lang="it-IT"/>
+          </a:p>
+        </p:txBody>
       </p:sp>
       <p:sp>
         <p:nvSpPr>
@@ -5770,6 +5692,13 @@
           </a:solidFill>
           <a:ln/>
         </p:spPr>
+        <p:txBody>
+          <a:bodyPr/>
+          <a:lstStyle/>
+          <a:p>
+            <a:endParaRPr lang="it-IT"/>
+          </a:p>
+        </p:txBody>
       </p:sp>
       <p:sp>
         <p:nvSpPr>
@@ -5792,7 +5721,7 @@
           <a:bodyPr wrap="square" lIns="0" tIns="0" rIns="0" bIns="0" rtlCol="0" anchor="ctr"/>
           <a:lstStyle/>
           <a:p>
-            <a:pPr algn="ctr" indent="0" marL="0">
+            <a:pPr marL="0" indent="0" algn="ctr">
               <a:buNone/>
             </a:pPr>
             <a:r>
@@ -5831,7 +5760,7 @@
           <a:bodyPr wrap="square" lIns="0" tIns="0" rIns="0" bIns="0" rtlCol="0" anchor="ctr"/>
           <a:lstStyle/>
           <a:p>
-            <a:pPr indent="0" marL="0">
+            <a:pPr marL="0" indent="0">
               <a:buNone/>
             </a:pPr>
             <a:r>
@@ -5870,7 +5799,7 @@
           <a:bodyPr wrap="square" lIns="0" tIns="0" rIns="0" bIns="0" rtlCol="0" anchor="ctr"/>
           <a:lstStyle/>
           <a:p>
-            <a:pPr indent="0" marL="0">
+            <a:pPr marL="0" indent="0">
               <a:lnSpc>
                 <a:spcPts val="1600"/>
               </a:lnSpc>
@@ -5912,7 +5841,7 @@
           <a:bodyPr wrap="square" lIns="0" tIns="0" rIns="0" bIns="0" rtlCol="0" anchor="ctr"/>
           <a:lstStyle/>
           <a:p>
-            <a:pPr indent="0" marL="0">
+            <a:pPr marL="0" indent="0">
               <a:lnSpc>
                 <a:spcPts val="1500"/>
               </a:lnSpc>
@@ -5954,6 +5883,13 @@
           </a:solidFill>
           <a:ln/>
         </p:spPr>
+        <p:txBody>
+          <a:bodyPr/>
+          <a:lstStyle/>
+          <a:p>
+            <a:endParaRPr lang="it-IT"/>
+          </a:p>
+        </p:txBody>
       </p:sp>
       <p:sp>
         <p:nvSpPr>
@@ -5974,6 +5910,13 @@
           </a:solidFill>
           <a:ln/>
         </p:spPr>
+        <p:txBody>
+          <a:bodyPr/>
+          <a:lstStyle/>
+          <a:p>
+            <a:endParaRPr lang="it-IT"/>
+          </a:p>
+        </p:txBody>
       </p:sp>
       <p:sp>
         <p:nvSpPr>
@@ -5996,7 +5939,7 @@
           <a:bodyPr wrap="square" lIns="0" tIns="0" rIns="0" bIns="0" rtlCol="0" anchor="ctr"/>
           <a:lstStyle/>
           <a:p>
-            <a:pPr algn="ctr" indent="0" marL="0">
+            <a:pPr marL="0" indent="0" algn="ctr">
               <a:buNone/>
             </a:pPr>
             <a:r>
@@ -6035,7 +5978,7 @@
           <a:bodyPr wrap="square" lIns="0" tIns="0" rIns="0" bIns="0" rtlCol="0" anchor="ctr"/>
           <a:lstStyle/>
           <a:p>
-            <a:pPr indent="0" marL="0">
+            <a:pPr marL="0" indent="0">
               <a:buNone/>
             </a:pPr>
             <a:r>
@@ -6074,7 +6017,7 @@
           <a:bodyPr wrap="square" lIns="0" tIns="0" rIns="0" bIns="0" rtlCol="0" anchor="ctr"/>
           <a:lstStyle/>
           <a:p>
-            <a:pPr indent="0" marL="0">
+            <a:pPr marL="0" indent="0">
               <a:lnSpc>
                 <a:spcPts val="1600"/>
               </a:lnSpc>
@@ -6116,7 +6059,7 @@
           <a:bodyPr wrap="square" lIns="0" tIns="0" rIns="0" bIns="0" rtlCol="0" anchor="ctr"/>
           <a:lstStyle/>
           <a:p>
-            <a:pPr indent="0" marL="0">
+            <a:pPr marL="0" indent="0">
               <a:lnSpc>
                 <a:spcPts val="1500"/>
               </a:lnSpc>
@@ -6158,6 +6101,13 @@
           </a:solidFill>
           <a:ln/>
         </p:spPr>
+        <p:txBody>
+          <a:bodyPr/>
+          <a:lstStyle/>
+          <a:p>
+            <a:endParaRPr lang="it-IT"/>
+          </a:p>
+        </p:txBody>
       </p:sp>
       <p:sp>
         <p:nvSpPr>
@@ -6178,6 +6128,13 @@
           </a:solidFill>
           <a:ln/>
         </p:spPr>
+        <p:txBody>
+          <a:bodyPr/>
+          <a:lstStyle/>
+          <a:p>
+            <a:endParaRPr lang="it-IT"/>
+          </a:p>
+        </p:txBody>
       </p:sp>
       <p:sp>
         <p:nvSpPr>
@@ -6200,7 +6157,7 @@
           <a:bodyPr wrap="square" lIns="0" tIns="0" rIns="0" bIns="0" rtlCol="0" anchor="ctr"/>
           <a:lstStyle/>
           <a:p>
-            <a:pPr algn="ctr" indent="0" marL="0">
+            <a:pPr marL="0" indent="0" algn="ctr">
               <a:buNone/>
             </a:pPr>
             <a:r>
@@ -6239,7 +6196,7 @@
           <a:bodyPr wrap="square" lIns="0" tIns="0" rIns="0" bIns="0" rtlCol="0" anchor="ctr"/>
           <a:lstStyle/>
           <a:p>
-            <a:pPr indent="0" marL="0">
+            <a:pPr marL="0" indent="0">
               <a:buNone/>
             </a:pPr>
             <a:r>
@@ -6278,7 +6235,7 @@
           <a:bodyPr wrap="square" lIns="0" tIns="0" rIns="0" bIns="0" rtlCol="0" anchor="ctr"/>
           <a:lstStyle/>
           <a:p>
-            <a:pPr indent="0" marL="0">
+            <a:pPr marL="0" indent="0">
               <a:lnSpc>
                 <a:spcPts val="1600"/>
               </a:lnSpc>
@@ -6320,7 +6277,7 @@
           <a:bodyPr wrap="square" lIns="0" tIns="0" rIns="0" bIns="0" rtlCol="0" anchor="ctr"/>
           <a:lstStyle/>
           <a:p>
-            <a:pPr indent="0" marL="0">
+            <a:pPr marL="0" indent="0">
               <a:lnSpc>
                 <a:spcPts val="1500"/>
               </a:lnSpc>
@@ -6362,7 +6319,7 @@
           <a:bodyPr wrap="square" lIns="0" tIns="0" rIns="0" bIns="0" rtlCol="0" anchor="ctr"/>
           <a:lstStyle/>
           <a:p>
-            <a:pPr indent="0" marL="0">
+            <a:pPr marL="0" indent="0">
               <a:buNone/>
             </a:pPr>
             <a:r>
@@ -6426,11 +6383,11 @@
           <a:bodyPr wrap="square" lIns="0" tIns="0" rIns="0" bIns="0" rtlCol="0" anchor="ctr"/>
           <a:lstStyle/>
           <a:p>
-            <a:pPr indent="0" marL="0">
+            <a:pPr marL="0" indent="0">
               <a:buNone/>
             </a:pPr>
             <a:r>
-              <a:rPr lang="en-US" sz="1200" b="1" spc="200" kern="0" dirty="0">
+              <a:rPr lang="en-US" sz="1200" b="1" kern="0" spc="200" dirty="0">
                 <a:solidFill>
                   <a:srgbClr val="EB6834"/>
                 </a:solidFill>
@@ -6465,7 +6422,7 @@
           <a:bodyPr wrap="square" lIns="0" tIns="0" rIns="0" bIns="0" rtlCol="0" anchor="ctr"/>
           <a:lstStyle/>
           <a:p>
-            <a:pPr indent="0" marL="0">
+            <a:pPr marL="0" indent="0">
               <a:buNone/>
             </a:pPr>
             <a:r>
@@ -6504,7 +6461,7 @@
           <a:bodyPr wrap="square" lIns="0" tIns="0" rIns="0" bIns="0" rtlCol="0" anchor="ctr"/>
           <a:lstStyle/>
           <a:p>
-            <a:pPr indent="0" marL="0">
+            <a:pPr marL="0" indent="0">
               <a:buNone/>
             </a:pPr>
             <a:r>
@@ -6538,19 +6495,55 @@
         </p:nvGraphicFramePr>
         <p:xfrm>
           <a:off x="566928" y="2286000"/>
-          <a:ext cx="7772400" cy="914400"/>
+          <a:ext cx="7772400" cy="2400300"/>
         </p:xfrm>
         <a:graphic>
           <a:graphicData uri="http://schemas.openxmlformats.org/drawingml/2006/table">
             <a:tbl>
               <a:tblPr/>
               <a:tblGrid>
-                <a:gridCol w="2743200"/>
-                <a:gridCol w="868680"/>
-                <a:gridCol w="777240"/>
-                <a:gridCol w="960120"/>
-                <a:gridCol w="1051560"/>
-                <a:gridCol w="1371600"/>
+                <a:gridCol w="2743200">
+                  <a:extLst>
+                    <a:ext uri="{9D8B030D-6E8A-4147-A177-3AD203B41FA5}">
+                      <a16:colId xmlns:a16="http://schemas.microsoft.com/office/drawing/2014/main" val="20000"/>
+                    </a:ext>
+                  </a:extLst>
+                </a:gridCol>
+                <a:gridCol w="868680">
+                  <a:extLst>
+                    <a:ext uri="{9D8B030D-6E8A-4147-A177-3AD203B41FA5}">
+                      <a16:colId xmlns:a16="http://schemas.microsoft.com/office/drawing/2014/main" val="20001"/>
+                    </a:ext>
+                  </a:extLst>
+                </a:gridCol>
+                <a:gridCol w="777240">
+                  <a:extLst>
+                    <a:ext uri="{9D8B030D-6E8A-4147-A177-3AD203B41FA5}">
+                      <a16:colId xmlns:a16="http://schemas.microsoft.com/office/drawing/2014/main" val="20002"/>
+                    </a:ext>
+                  </a:extLst>
+                </a:gridCol>
+                <a:gridCol w="960120">
+                  <a:extLst>
+                    <a:ext uri="{9D8B030D-6E8A-4147-A177-3AD203B41FA5}">
+                      <a16:colId xmlns:a16="http://schemas.microsoft.com/office/drawing/2014/main" val="20003"/>
+                    </a:ext>
+                  </a:extLst>
+                </a:gridCol>
+                <a:gridCol w="1051560">
+                  <a:extLst>
+                    <a:ext uri="{9D8B030D-6E8A-4147-A177-3AD203B41FA5}">
+                      <a16:colId xmlns:a16="http://schemas.microsoft.com/office/drawing/2014/main" val="20004"/>
+                    </a:ext>
+                  </a:extLst>
+                </a:gridCol>
+                <a:gridCol w="1371600">
+                  <a:extLst>
+                    <a:ext uri="{9D8B030D-6E8A-4147-A177-3AD203B41FA5}">
+                      <a16:colId xmlns:a16="http://schemas.microsoft.com/office/drawing/2014/main" val="20005"/>
+                    </a:ext>
+                  </a:extLst>
+                </a:gridCol>
               </a:tblGrid>
               <a:tr h="342900">
                 <a:tc>
@@ -6558,7 +6551,7 @@
                     <a:bodyPr/>
                     <a:lstStyle/>
                     <a:p>
-                      <a:pPr algn="l" indent="0" marL="0">
+                      <a:pPr marL="0" indent="0" algn="l">
                         <a:buNone/>
                       </a:pPr>
                       <a:r>
@@ -6579,7 +6572,7 @@
                       </a:endParaRPr>
                     </a:p>
                   </a:txBody>
-                  <a:tcPr marL="91440" marR="91440" marT="45720" marB="45720" anchor="ctr">
+                  <a:tcPr anchor="ctr">
                     <a:lnL w="6350" cap="flat" cmpd="sng" algn="ctr">
                       <a:solidFill>
                         <a:srgbClr val="E2E8EC"/>
@@ -6626,7 +6619,7 @@
                     <a:bodyPr/>
                     <a:lstStyle/>
                     <a:p>
-                      <a:pPr algn="r" indent="0" marL="0">
+                      <a:pPr marL="0" indent="0" algn="r">
                         <a:buNone/>
                       </a:pPr>
                       <a:r>
@@ -6647,7 +6640,7 @@
                       </a:endParaRPr>
                     </a:p>
                   </a:txBody>
-                  <a:tcPr marL="91440" marR="91440" marT="45720" marB="45720" anchor="ctr">
+                  <a:tcPr anchor="ctr">
                     <a:lnL w="6350" cap="flat" cmpd="sng" algn="ctr">
                       <a:solidFill>
                         <a:srgbClr val="E2E8EC"/>
@@ -6694,7 +6687,7 @@
                     <a:bodyPr/>
                     <a:lstStyle/>
                     <a:p>
-                      <a:pPr algn="r" indent="0" marL="0">
+                      <a:pPr marL="0" indent="0" algn="r">
                         <a:buNone/>
                       </a:pPr>
                       <a:r>
@@ -6715,7 +6708,7 @@
                       </a:endParaRPr>
                     </a:p>
                   </a:txBody>
-                  <a:tcPr marL="91440" marR="91440" marT="45720" marB="45720" anchor="ctr">
+                  <a:tcPr anchor="ctr">
                     <a:lnL w="6350" cap="flat" cmpd="sng" algn="ctr">
                       <a:solidFill>
                         <a:srgbClr val="E2E8EC"/>
@@ -6762,7 +6755,7 @@
                     <a:bodyPr/>
                     <a:lstStyle/>
                     <a:p>
-                      <a:pPr algn="r" indent="0" marL="0">
+                      <a:pPr marL="0" indent="0" algn="r">
                         <a:buNone/>
                       </a:pPr>
                       <a:r>
@@ -6783,7 +6776,7 @@
                       </a:endParaRPr>
                     </a:p>
                   </a:txBody>
-                  <a:tcPr marL="91440" marR="91440" marT="45720" marB="45720" anchor="ctr">
+                  <a:tcPr anchor="ctr">
                     <a:lnL w="6350" cap="flat" cmpd="sng" algn="ctr">
                       <a:solidFill>
                         <a:srgbClr val="E2E8EC"/>
@@ -6830,7 +6823,7 @@
                     <a:bodyPr/>
                     <a:lstStyle/>
                     <a:p>
-                      <a:pPr algn="r" indent="0" marL="0">
+                      <a:pPr marL="0" indent="0" algn="r">
                         <a:buNone/>
                       </a:pPr>
                       <a:r>
@@ -6851,7 +6844,7 @@
                       </a:endParaRPr>
                     </a:p>
                   </a:txBody>
-                  <a:tcPr marL="91440" marR="91440" marT="45720" marB="45720" anchor="ctr">
+                  <a:tcPr anchor="ctr">
                     <a:lnL w="6350" cap="flat" cmpd="sng" algn="ctr">
                       <a:solidFill>
                         <a:srgbClr val="E2E8EC"/>
@@ -6898,7 +6891,7 @@
                     <a:bodyPr/>
                     <a:lstStyle/>
                     <a:p>
-                      <a:pPr algn="l" indent="0" marL="0">
+                      <a:pPr marL="0" indent="0" algn="l">
                         <a:buNone/>
                       </a:pPr>
                       <a:endParaRPr lang="en-US" sz="1200" dirty="0">
@@ -6908,7 +6901,7 @@
                       </a:endParaRPr>
                     </a:p>
                   </a:txBody>
-                  <a:tcPr marL="91440" marR="91440" marT="45720" marB="45720" anchor="ctr">
+                  <a:tcPr anchor="ctr">
                     <a:lnL w="6350" cap="flat" cmpd="sng" algn="ctr">
                       <a:solidFill>
                         <a:srgbClr val="E2E8EC"/>
@@ -6950,6 +6943,11 @@
                     </a:solidFill>
                   </a:tcPr>
                 </a:tc>
+                <a:extLst>
+                  <a:ext uri="{0D108BD9-81ED-4DB2-BD59-A6C34878D82A}">
+                    <a16:rowId xmlns:a16="http://schemas.microsoft.com/office/drawing/2014/main" val="10000"/>
+                  </a:ext>
+                </a:extLst>
               </a:tr>
               <a:tr h="342900">
                 <a:tc>
@@ -6957,7 +6955,7 @@
                     <a:bodyPr/>
                     <a:lstStyle/>
                     <a:p>
-                      <a:pPr algn="l" indent="0" marL="0">
+                      <a:pPr marL="0" indent="0" algn="l">
                         <a:buNone/>
                       </a:pPr>
                       <a:r>
@@ -6978,7 +6976,7 @@
                       </a:endParaRPr>
                     </a:p>
                   </a:txBody>
-                  <a:tcPr marL="91440" marR="91440" marT="45720" marB="45720" anchor="ctr">
+                  <a:tcPr anchor="ctr">
                     <a:lnL w="6350" cap="flat" cmpd="sng" algn="ctr">
                       <a:solidFill>
                         <a:srgbClr val="E2E8EC"/>
@@ -7025,7 +7023,7 @@
                     <a:bodyPr/>
                     <a:lstStyle/>
                     <a:p>
-                      <a:pPr algn="r" indent="0" marL="0">
+                      <a:pPr marL="0" indent="0" algn="r">
                         <a:buNone/>
                       </a:pPr>
                       <a:r>
@@ -7046,7 +7044,7 @@
                       </a:endParaRPr>
                     </a:p>
                   </a:txBody>
-                  <a:tcPr marL="91440" marR="91440" marT="45720" marB="45720" anchor="ctr">
+                  <a:tcPr anchor="ctr">
                     <a:lnL w="6350" cap="flat" cmpd="sng" algn="ctr">
                       <a:solidFill>
                         <a:srgbClr val="E2E8EC"/>
@@ -7093,7 +7091,7 @@
                     <a:bodyPr/>
                     <a:lstStyle/>
                     <a:p>
-                      <a:pPr algn="r" indent="0" marL="0">
+                      <a:pPr marL="0" indent="0" algn="r">
                         <a:buNone/>
                       </a:pPr>
                       <a:r>
@@ -7114,7 +7112,7 @@
                       </a:endParaRPr>
                     </a:p>
                   </a:txBody>
-                  <a:tcPr marL="91440" marR="91440" marT="45720" marB="45720" anchor="ctr">
+                  <a:tcPr anchor="ctr">
                     <a:lnL w="6350" cap="flat" cmpd="sng" algn="ctr">
                       <a:solidFill>
                         <a:srgbClr val="E2E8EC"/>
@@ -7161,7 +7159,7 @@
                     <a:bodyPr/>
                     <a:lstStyle/>
                     <a:p>
-                      <a:pPr algn="r" indent="0" marL="0">
+                      <a:pPr marL="0" indent="0" algn="r">
                         <a:buNone/>
                       </a:pPr>
                       <a:r>
@@ -7182,7 +7180,7 @@
                       </a:endParaRPr>
                     </a:p>
                   </a:txBody>
-                  <a:tcPr marL="91440" marR="91440" marT="45720" marB="45720" anchor="ctr">
+                  <a:tcPr anchor="ctr">
                     <a:lnL w="6350" cap="flat" cmpd="sng" algn="ctr">
                       <a:solidFill>
                         <a:srgbClr val="E2E8EC"/>
@@ -7229,7 +7227,7 @@
                     <a:bodyPr/>
                     <a:lstStyle/>
                     <a:p>
-                      <a:pPr algn="r" indent="0" marL="0">
+                      <a:pPr marL="0" indent="0" algn="r">
                         <a:buNone/>
                       </a:pPr>
                       <a:r>
@@ -7250,7 +7248,7 @@
                       </a:endParaRPr>
                     </a:p>
                   </a:txBody>
-                  <a:tcPr marL="91440" marR="91440" marT="45720" marB="45720" anchor="ctr">
+                  <a:tcPr anchor="ctr">
                     <a:lnL w="6350" cap="flat" cmpd="sng" algn="ctr">
                       <a:solidFill>
                         <a:srgbClr val="E2E8EC"/>
@@ -7297,7 +7295,7 @@
                     <a:bodyPr/>
                     <a:lstStyle/>
                     <a:p>
-                      <a:pPr algn="l" indent="0" marL="0">
+                      <a:pPr marL="0" indent="0" algn="l">
                         <a:buNone/>
                       </a:pPr>
                       <a:r>
@@ -7318,7 +7316,7 @@
                       </a:endParaRPr>
                     </a:p>
                   </a:txBody>
-                  <a:tcPr marL="91440" marR="91440" marT="45720" marB="45720" anchor="ctr">
+                  <a:tcPr anchor="ctr">
                     <a:lnL w="6350" cap="flat" cmpd="sng" algn="ctr">
                       <a:solidFill>
                         <a:srgbClr val="E2E8EC"/>
@@ -7360,6 +7358,11 @@
                     </a:solidFill>
                   </a:tcPr>
                 </a:tc>
+                <a:extLst>
+                  <a:ext uri="{0D108BD9-81ED-4DB2-BD59-A6C34878D82A}">
+                    <a16:rowId xmlns:a16="http://schemas.microsoft.com/office/drawing/2014/main" val="10001"/>
+                  </a:ext>
+                </a:extLst>
               </a:tr>
               <a:tr h="342900">
                 <a:tc>
@@ -7367,7 +7370,7 @@
                     <a:bodyPr/>
                     <a:lstStyle/>
                     <a:p>
-                      <a:pPr algn="l" indent="0" marL="0">
+                      <a:pPr marL="0" indent="0" algn="l">
                         <a:buNone/>
                       </a:pPr>
                       <a:r>
@@ -7388,7 +7391,7 @@
                       </a:endParaRPr>
                     </a:p>
                   </a:txBody>
-                  <a:tcPr marL="91440" marR="91440" marT="45720" marB="45720" anchor="ctr">
+                  <a:tcPr anchor="ctr">
                     <a:lnL w="6350" cap="flat" cmpd="sng" algn="ctr">
                       <a:solidFill>
                         <a:srgbClr val="E2E8EC"/>
@@ -7435,7 +7438,7 @@
                     <a:bodyPr/>
                     <a:lstStyle/>
                     <a:p>
-                      <a:pPr algn="r" indent="0" marL="0">
+                      <a:pPr marL="0" indent="0" algn="r">
                         <a:buNone/>
                       </a:pPr>
                       <a:r>
@@ -7456,7 +7459,7 @@
                       </a:endParaRPr>
                     </a:p>
                   </a:txBody>
-                  <a:tcPr marL="91440" marR="91440" marT="45720" marB="45720" anchor="ctr">
+                  <a:tcPr anchor="ctr">
                     <a:lnL w="6350" cap="flat" cmpd="sng" algn="ctr">
                       <a:solidFill>
                         <a:srgbClr val="E2E8EC"/>
@@ -7503,7 +7506,7 @@
                     <a:bodyPr/>
                     <a:lstStyle/>
                     <a:p>
-                      <a:pPr algn="r" indent="0" marL="0">
+                      <a:pPr marL="0" indent="0" algn="r">
                         <a:buNone/>
                       </a:pPr>
                       <a:r>
@@ -7524,7 +7527,7 @@
                       </a:endParaRPr>
                     </a:p>
                   </a:txBody>
-                  <a:tcPr marL="91440" marR="91440" marT="45720" marB="45720" anchor="ctr">
+                  <a:tcPr anchor="ctr">
                     <a:lnL w="6350" cap="flat" cmpd="sng" algn="ctr">
                       <a:solidFill>
                         <a:srgbClr val="E2E8EC"/>
@@ -7571,7 +7574,7 @@
                     <a:bodyPr/>
                     <a:lstStyle/>
                     <a:p>
-                      <a:pPr algn="r" indent="0" marL="0">
+                      <a:pPr marL="0" indent="0" algn="r">
                         <a:buNone/>
                       </a:pPr>
                       <a:r>
@@ -7592,7 +7595,7 @@
                       </a:endParaRPr>
                     </a:p>
                   </a:txBody>
-                  <a:tcPr marL="91440" marR="91440" marT="45720" marB="45720" anchor="ctr">
+                  <a:tcPr anchor="ctr">
                     <a:lnL w="6350" cap="flat" cmpd="sng" algn="ctr">
                       <a:solidFill>
                         <a:srgbClr val="E2E8EC"/>
@@ -7639,7 +7642,7 @@
                     <a:bodyPr/>
                     <a:lstStyle/>
                     <a:p>
-                      <a:pPr algn="r" indent="0" marL="0">
+                      <a:pPr marL="0" indent="0" algn="r">
                         <a:buNone/>
                       </a:pPr>
                       <a:r>
@@ -7660,7 +7663,7 @@
                       </a:endParaRPr>
                     </a:p>
                   </a:txBody>
-                  <a:tcPr marL="91440" marR="91440" marT="45720" marB="45720" anchor="ctr">
+                  <a:tcPr anchor="ctr">
                     <a:lnL w="6350" cap="flat" cmpd="sng" algn="ctr">
                       <a:solidFill>
                         <a:srgbClr val="E2E8EC"/>
@@ -7707,7 +7710,7 @@
                     <a:bodyPr/>
                     <a:lstStyle/>
                     <a:p>
-                      <a:pPr algn="l" indent="0" marL="0">
+                      <a:pPr marL="0" indent="0" algn="l">
                         <a:buNone/>
                       </a:pPr>
                       <a:r>
@@ -7728,7 +7731,7 @@
                       </a:endParaRPr>
                     </a:p>
                   </a:txBody>
-                  <a:tcPr marL="91440" marR="91440" marT="45720" marB="45720" anchor="ctr">
+                  <a:tcPr anchor="ctr">
                     <a:lnL w="6350" cap="flat" cmpd="sng" algn="ctr">
                       <a:solidFill>
                         <a:srgbClr val="E2E8EC"/>
@@ -7770,6 +7773,11 @@
                     </a:solidFill>
                   </a:tcPr>
                 </a:tc>
+                <a:extLst>
+                  <a:ext uri="{0D108BD9-81ED-4DB2-BD59-A6C34878D82A}">
+                    <a16:rowId xmlns:a16="http://schemas.microsoft.com/office/drawing/2014/main" val="10002"/>
+                  </a:ext>
+                </a:extLst>
               </a:tr>
               <a:tr h="342900">
                 <a:tc>
@@ -7777,7 +7785,7 @@
                     <a:bodyPr/>
                     <a:lstStyle/>
                     <a:p>
-                      <a:pPr algn="l" indent="0" marL="0">
+                      <a:pPr marL="0" indent="0" algn="l">
                         <a:buNone/>
                       </a:pPr>
                       <a:r>
@@ -7798,7 +7806,7 @@
                       </a:endParaRPr>
                     </a:p>
                   </a:txBody>
-                  <a:tcPr marL="91440" marR="91440" marT="45720" marB="45720" anchor="ctr">
+                  <a:tcPr anchor="ctr">
                     <a:lnL w="6350" cap="flat" cmpd="sng" algn="ctr">
                       <a:solidFill>
                         <a:srgbClr val="E2E8EC"/>
@@ -7845,7 +7853,7 @@
                     <a:bodyPr/>
                     <a:lstStyle/>
                     <a:p>
-                      <a:pPr algn="r" indent="0" marL="0">
+                      <a:pPr marL="0" indent="0" algn="r">
                         <a:buNone/>
                       </a:pPr>
                       <a:r>
@@ -7866,7 +7874,7 @@
                       </a:endParaRPr>
                     </a:p>
                   </a:txBody>
-                  <a:tcPr marL="91440" marR="91440" marT="45720" marB="45720" anchor="ctr">
+                  <a:tcPr anchor="ctr">
                     <a:lnL w="6350" cap="flat" cmpd="sng" algn="ctr">
                       <a:solidFill>
                         <a:srgbClr val="E2E8EC"/>
@@ -7913,7 +7921,7 @@
                     <a:bodyPr/>
                     <a:lstStyle/>
                     <a:p>
-                      <a:pPr algn="r" indent="0" marL="0">
+                      <a:pPr marL="0" indent="0" algn="r">
                         <a:buNone/>
                       </a:pPr>
                       <a:r>
@@ -7934,7 +7942,7 @@
                       </a:endParaRPr>
                     </a:p>
                   </a:txBody>
-                  <a:tcPr marL="91440" marR="91440" marT="45720" marB="45720" anchor="ctr">
+                  <a:tcPr anchor="ctr">
                     <a:lnL w="6350" cap="flat" cmpd="sng" algn="ctr">
                       <a:solidFill>
                         <a:srgbClr val="E2E8EC"/>
@@ -7981,7 +7989,7 @@
                     <a:bodyPr/>
                     <a:lstStyle/>
                     <a:p>
-                      <a:pPr algn="r" indent="0" marL="0">
+                      <a:pPr marL="0" indent="0" algn="r">
                         <a:buNone/>
                       </a:pPr>
                       <a:r>
@@ -8002,7 +8010,7 @@
                       </a:endParaRPr>
                     </a:p>
                   </a:txBody>
-                  <a:tcPr marL="91440" marR="91440" marT="45720" marB="45720" anchor="ctr">
+                  <a:tcPr anchor="ctr">
                     <a:lnL w="6350" cap="flat" cmpd="sng" algn="ctr">
                       <a:solidFill>
                         <a:srgbClr val="E2E8EC"/>
@@ -8049,7 +8057,7 @@
                     <a:bodyPr/>
                     <a:lstStyle/>
                     <a:p>
-                      <a:pPr algn="r" indent="0" marL="0">
+                      <a:pPr marL="0" indent="0" algn="r">
                         <a:buNone/>
                       </a:pPr>
                       <a:r>
@@ -8070,7 +8078,7 @@
                       </a:endParaRPr>
                     </a:p>
                   </a:txBody>
-                  <a:tcPr marL="91440" marR="91440" marT="45720" marB="45720" anchor="ctr">
+                  <a:tcPr anchor="ctr">
                     <a:lnL w="6350" cap="flat" cmpd="sng" algn="ctr">
                       <a:solidFill>
                         <a:srgbClr val="E2E8EC"/>
@@ -8117,7 +8125,7 @@
                     <a:bodyPr/>
                     <a:lstStyle/>
                     <a:p>
-                      <a:pPr algn="l" indent="0" marL="0">
+                      <a:pPr marL="0" indent="0" algn="l">
                         <a:buNone/>
                       </a:pPr>
                       <a:r>
@@ -8138,7 +8146,7 @@
                       </a:endParaRPr>
                     </a:p>
                   </a:txBody>
-                  <a:tcPr marL="91440" marR="91440" marT="45720" marB="45720" anchor="ctr">
+                  <a:tcPr anchor="ctr">
                     <a:lnL w="6350" cap="flat" cmpd="sng" algn="ctr">
                       <a:solidFill>
                         <a:srgbClr val="E2E8EC"/>
@@ -8180,6 +8188,11 @@
                     </a:solidFill>
                   </a:tcPr>
                 </a:tc>
+                <a:extLst>
+                  <a:ext uri="{0D108BD9-81ED-4DB2-BD59-A6C34878D82A}">
+                    <a16:rowId xmlns:a16="http://schemas.microsoft.com/office/drawing/2014/main" val="10003"/>
+                  </a:ext>
+                </a:extLst>
               </a:tr>
               <a:tr h="342900">
                 <a:tc>
@@ -8187,7 +8200,7 @@
                     <a:bodyPr/>
                     <a:lstStyle/>
                     <a:p>
-                      <a:pPr algn="l" indent="0" marL="0">
+                      <a:pPr marL="0" indent="0" algn="l">
                         <a:buNone/>
                       </a:pPr>
                       <a:r>
@@ -8208,7 +8221,7 @@
                       </a:endParaRPr>
                     </a:p>
                   </a:txBody>
-                  <a:tcPr marL="91440" marR="91440" marT="45720" marB="45720" anchor="ctr">
+                  <a:tcPr anchor="ctr">
                     <a:lnL w="6350" cap="flat" cmpd="sng" algn="ctr">
                       <a:solidFill>
                         <a:srgbClr val="E2E8EC"/>
@@ -8255,7 +8268,7 @@
                     <a:bodyPr/>
                     <a:lstStyle/>
                     <a:p>
-                      <a:pPr algn="r" indent="0" marL="0">
+                      <a:pPr marL="0" indent="0" algn="r">
                         <a:buNone/>
                       </a:pPr>
                       <a:r>
@@ -8276,7 +8289,7 @@
                       </a:endParaRPr>
                     </a:p>
                   </a:txBody>
-                  <a:tcPr marL="91440" marR="91440" marT="45720" marB="45720" anchor="ctr">
+                  <a:tcPr anchor="ctr">
                     <a:lnL w="6350" cap="flat" cmpd="sng" algn="ctr">
                       <a:solidFill>
                         <a:srgbClr val="E2E8EC"/>
@@ -8323,7 +8336,7 @@
                     <a:bodyPr/>
                     <a:lstStyle/>
                     <a:p>
-                      <a:pPr algn="r" indent="0" marL="0">
+                      <a:pPr marL="0" indent="0" algn="r">
                         <a:buNone/>
                       </a:pPr>
                       <a:r>
@@ -8344,7 +8357,7 @@
                       </a:endParaRPr>
                     </a:p>
                   </a:txBody>
-                  <a:tcPr marL="91440" marR="91440" marT="45720" marB="45720" anchor="ctr">
+                  <a:tcPr anchor="ctr">
                     <a:lnL w="6350" cap="flat" cmpd="sng" algn="ctr">
                       <a:solidFill>
                         <a:srgbClr val="E2E8EC"/>
@@ -8391,7 +8404,7 @@
                     <a:bodyPr/>
                     <a:lstStyle/>
                     <a:p>
-                      <a:pPr algn="r" indent="0" marL="0">
+                      <a:pPr marL="0" indent="0" algn="r">
                         <a:buNone/>
                       </a:pPr>
                       <a:r>
@@ -8412,7 +8425,7 @@
                       </a:endParaRPr>
                     </a:p>
                   </a:txBody>
-                  <a:tcPr marL="91440" marR="91440" marT="45720" marB="45720" anchor="ctr">
+                  <a:tcPr anchor="ctr">
                     <a:lnL w="6350" cap="flat" cmpd="sng" algn="ctr">
                       <a:solidFill>
                         <a:srgbClr val="E2E8EC"/>
@@ -8459,7 +8472,7 @@
                     <a:bodyPr/>
                     <a:lstStyle/>
                     <a:p>
-                      <a:pPr algn="r" indent="0" marL="0">
+                      <a:pPr marL="0" indent="0" algn="r">
                         <a:buNone/>
                       </a:pPr>
                       <a:r>
@@ -8480,7 +8493,7 @@
                       </a:endParaRPr>
                     </a:p>
                   </a:txBody>
-                  <a:tcPr marL="91440" marR="91440" marT="45720" marB="45720" anchor="ctr">
+                  <a:tcPr anchor="ctr">
                     <a:lnL w="6350" cap="flat" cmpd="sng" algn="ctr">
                       <a:solidFill>
                         <a:srgbClr val="E2E8EC"/>
@@ -8527,7 +8540,7 @@
                     <a:bodyPr/>
                     <a:lstStyle/>
                     <a:p>
-                      <a:pPr algn="l" indent="0" marL="0">
+                      <a:pPr marL="0" indent="0" algn="l">
                         <a:buNone/>
                       </a:pPr>
                       <a:r>
@@ -8548,7 +8561,7 @@
                       </a:endParaRPr>
                     </a:p>
                   </a:txBody>
-                  <a:tcPr marL="91440" marR="91440" marT="45720" marB="45720" anchor="ctr">
+                  <a:tcPr anchor="ctr">
                     <a:lnL w="6350" cap="flat" cmpd="sng" algn="ctr">
                       <a:solidFill>
                         <a:srgbClr val="E2E8EC"/>
@@ -8590,6 +8603,11 @@
                     </a:solidFill>
                   </a:tcPr>
                 </a:tc>
+                <a:extLst>
+                  <a:ext uri="{0D108BD9-81ED-4DB2-BD59-A6C34878D82A}">
+                    <a16:rowId xmlns:a16="http://schemas.microsoft.com/office/drawing/2014/main" val="10004"/>
+                  </a:ext>
+                </a:extLst>
               </a:tr>
               <a:tr h="342900">
                 <a:tc>
@@ -8597,7 +8615,7 @@
                     <a:bodyPr/>
                     <a:lstStyle/>
                     <a:p>
-                      <a:pPr algn="l" indent="0" marL="0">
+                      <a:pPr marL="0" indent="0" algn="l">
                         <a:buNone/>
                       </a:pPr>
                       <a:r>
@@ -8618,7 +8636,7 @@
                       </a:endParaRPr>
                     </a:p>
                   </a:txBody>
-                  <a:tcPr marL="91440" marR="91440" marT="45720" marB="45720" anchor="ctr">
+                  <a:tcPr anchor="ctr">
                     <a:lnL w="6350" cap="flat" cmpd="sng" algn="ctr">
                       <a:solidFill>
                         <a:srgbClr val="E2E8EC"/>
@@ -8665,7 +8683,7 @@
                     <a:bodyPr/>
                     <a:lstStyle/>
                     <a:p>
-                      <a:pPr algn="r" indent="0" marL="0">
+                      <a:pPr marL="0" indent="0" algn="r">
                         <a:buNone/>
                       </a:pPr>
                       <a:r>
@@ -8686,7 +8704,7 @@
                       </a:endParaRPr>
                     </a:p>
                   </a:txBody>
-                  <a:tcPr marL="91440" marR="91440" marT="45720" marB="45720" anchor="ctr">
+                  <a:tcPr anchor="ctr">
                     <a:lnL w="6350" cap="flat" cmpd="sng" algn="ctr">
                       <a:solidFill>
                         <a:srgbClr val="E2E8EC"/>
@@ -8733,7 +8751,7 @@
                     <a:bodyPr/>
                     <a:lstStyle/>
                     <a:p>
-                      <a:pPr algn="r" indent="0" marL="0">
+                      <a:pPr marL="0" indent="0" algn="r">
                         <a:buNone/>
                       </a:pPr>
                       <a:r>
@@ -8754,7 +8772,7 @@
                       </a:endParaRPr>
                     </a:p>
                   </a:txBody>
-                  <a:tcPr marL="91440" marR="91440" marT="45720" marB="45720" anchor="ctr">
+                  <a:tcPr anchor="ctr">
                     <a:lnL w="6350" cap="flat" cmpd="sng" algn="ctr">
                       <a:solidFill>
                         <a:srgbClr val="E2E8EC"/>
@@ -8801,7 +8819,7 @@
                     <a:bodyPr/>
                     <a:lstStyle/>
                     <a:p>
-                      <a:pPr algn="r" indent="0" marL="0">
+                      <a:pPr marL="0" indent="0" algn="r">
                         <a:buNone/>
                       </a:pPr>
                       <a:r>
@@ -8822,7 +8840,7 @@
                       </a:endParaRPr>
                     </a:p>
                   </a:txBody>
-                  <a:tcPr marL="91440" marR="91440" marT="45720" marB="45720" anchor="ctr">
+                  <a:tcPr anchor="ctr">
                     <a:lnL w="6350" cap="flat" cmpd="sng" algn="ctr">
                       <a:solidFill>
                         <a:srgbClr val="E2E8EC"/>
@@ -8869,7 +8887,7 @@
                     <a:bodyPr/>
                     <a:lstStyle/>
                     <a:p>
-                      <a:pPr algn="r" indent="0" marL="0">
+                      <a:pPr marL="0" indent="0" algn="r">
                         <a:buNone/>
                       </a:pPr>
                       <a:r>
@@ -8890,7 +8908,7 @@
                       </a:endParaRPr>
                     </a:p>
                   </a:txBody>
-                  <a:tcPr marL="91440" marR="91440" marT="45720" marB="45720" anchor="ctr">
+                  <a:tcPr anchor="ctr">
                     <a:lnL w="6350" cap="flat" cmpd="sng" algn="ctr">
                       <a:solidFill>
                         <a:srgbClr val="E2E8EC"/>
@@ -8937,7 +8955,7 @@
                     <a:bodyPr/>
                     <a:lstStyle/>
                     <a:p>
-                      <a:pPr algn="l" indent="0" marL="0">
+                      <a:pPr marL="0" indent="0" algn="l">
                         <a:buNone/>
                       </a:pPr>
                       <a:r>
@@ -8958,7 +8976,7 @@
                       </a:endParaRPr>
                     </a:p>
                   </a:txBody>
-                  <a:tcPr marL="91440" marR="91440" marT="45720" marB="45720" anchor="ctr">
+                  <a:tcPr anchor="ctr">
                     <a:lnL w="6350" cap="flat" cmpd="sng" algn="ctr">
                       <a:solidFill>
                         <a:srgbClr val="E2E8EC"/>
@@ -9000,6 +9018,11 @@
                     </a:solidFill>
                   </a:tcPr>
                 </a:tc>
+                <a:extLst>
+                  <a:ext uri="{0D108BD9-81ED-4DB2-BD59-A6C34878D82A}">
+                    <a16:rowId xmlns:a16="http://schemas.microsoft.com/office/drawing/2014/main" val="10005"/>
+                  </a:ext>
+                </a:extLst>
               </a:tr>
               <a:tr h="342900">
                 <a:tc>
@@ -9007,7 +9030,7 @@
                     <a:bodyPr/>
                     <a:lstStyle/>
                     <a:p>
-                      <a:pPr algn="l" indent="0" marL="0">
+                      <a:pPr marL="0" indent="0" algn="l">
                         <a:buNone/>
                       </a:pPr>
                       <a:r>
@@ -9028,7 +9051,7 @@
                       </a:endParaRPr>
                     </a:p>
                   </a:txBody>
-                  <a:tcPr marL="91440" marR="91440" marT="45720" marB="45720" anchor="ctr">
+                  <a:tcPr anchor="ctr">
                     <a:lnL w="6350" cap="flat" cmpd="sng" algn="ctr">
                       <a:solidFill>
                         <a:srgbClr val="E2E8EC"/>
@@ -9075,7 +9098,7 @@
                     <a:bodyPr/>
                     <a:lstStyle/>
                     <a:p>
-                      <a:pPr algn="r" indent="0" marL="0">
+                      <a:pPr marL="0" indent="0" algn="r">
                         <a:buNone/>
                       </a:pPr>
                       <a:r>
@@ -9096,7 +9119,7 @@
                       </a:endParaRPr>
                     </a:p>
                   </a:txBody>
-                  <a:tcPr marL="91440" marR="91440" marT="45720" marB="45720" anchor="ctr">
+                  <a:tcPr anchor="ctr">
                     <a:lnL w="6350" cap="flat" cmpd="sng" algn="ctr">
                       <a:solidFill>
                         <a:srgbClr val="E2E8EC"/>
@@ -9143,7 +9166,7 @@
                     <a:bodyPr/>
                     <a:lstStyle/>
                     <a:p>
-                      <a:pPr algn="r" indent="0" marL="0">
+                      <a:pPr marL="0" indent="0" algn="r">
                         <a:buNone/>
                       </a:pPr>
                       <a:r>
@@ -9164,7 +9187,7 @@
                       </a:endParaRPr>
                     </a:p>
                   </a:txBody>
-                  <a:tcPr marL="91440" marR="91440" marT="45720" marB="45720" anchor="ctr">
+                  <a:tcPr anchor="ctr">
                     <a:lnL w="6350" cap="flat" cmpd="sng" algn="ctr">
                       <a:solidFill>
                         <a:srgbClr val="E2E8EC"/>
@@ -9211,7 +9234,7 @@
                     <a:bodyPr/>
                     <a:lstStyle/>
                     <a:p>
-                      <a:pPr algn="r" indent="0" marL="0">
+                      <a:pPr marL="0" indent="0" algn="r">
                         <a:buNone/>
                       </a:pPr>
                       <a:r>
@@ -9232,7 +9255,7 @@
                       </a:endParaRPr>
                     </a:p>
                   </a:txBody>
-                  <a:tcPr marL="91440" marR="91440" marT="45720" marB="45720" anchor="ctr">
+                  <a:tcPr anchor="ctr">
                     <a:lnL w="6350" cap="flat" cmpd="sng" algn="ctr">
                       <a:solidFill>
                         <a:srgbClr val="E2E8EC"/>
@@ -9279,7 +9302,7 @@
                     <a:bodyPr/>
                     <a:lstStyle/>
                     <a:p>
-                      <a:pPr algn="r" indent="0" marL="0">
+                      <a:pPr marL="0" indent="0" algn="r">
                         <a:buNone/>
                       </a:pPr>
                       <a:r>
@@ -9300,7 +9323,7 @@
                       </a:endParaRPr>
                     </a:p>
                   </a:txBody>
-                  <a:tcPr marL="91440" marR="91440" marT="45720" marB="45720" anchor="ctr">
+                  <a:tcPr anchor="ctr">
                     <a:lnL w="6350" cap="flat" cmpd="sng" algn="ctr">
                       <a:solidFill>
                         <a:srgbClr val="E2E8EC"/>
@@ -9347,7 +9370,7 @@
                     <a:bodyPr/>
                     <a:lstStyle/>
                     <a:p>
-                      <a:pPr algn="l" indent="0" marL="0">
+                      <a:pPr marL="0" indent="0" algn="l">
                         <a:buNone/>
                       </a:pPr>
                       <a:r>
@@ -9368,7 +9391,7 @@
                       </a:endParaRPr>
                     </a:p>
                   </a:txBody>
-                  <a:tcPr marL="91440" marR="91440" marT="45720" marB="45720" anchor="ctr">
+                  <a:tcPr anchor="ctr">
                     <a:lnL w="6350" cap="flat" cmpd="sng" algn="ctr">
                       <a:solidFill>
                         <a:srgbClr val="E2E8EC"/>
@@ -9410,6 +9433,11 @@
                     </a:solidFill>
                   </a:tcPr>
                 </a:tc>
+                <a:extLst>
+                  <a:ext uri="{0D108BD9-81ED-4DB2-BD59-A6C34878D82A}">
+                    <a16:rowId xmlns:a16="http://schemas.microsoft.com/office/drawing/2014/main" val="10006"/>
+                  </a:ext>
+                </a:extLst>
               </a:tr>
             </a:tbl>
           </a:graphicData>
@@ -9417,7 +9445,7 @@
       </p:graphicFrame>
       <p:sp>
         <p:nvSpPr>
-          <p:cNvPr id="6" name="Shape 3"/>
+          <p:cNvPr id="5" name="Shape 3"/>
           <p:cNvSpPr/>
           <p:nvPr/>
         </p:nvSpPr>
@@ -9436,6 +9464,13 @@
           </a:solidFill>
           <a:ln/>
         </p:spPr>
+        <p:txBody>
+          <a:bodyPr/>
+          <a:lstStyle/>
+          <a:p>
+            <a:endParaRPr lang="it-IT"/>
+          </a:p>
+        </p:txBody>
       </p:sp>
       <p:sp>
         <p:nvSpPr>
@@ -9458,7 +9493,7 @@
           <a:bodyPr wrap="square" lIns="0" tIns="0" rIns="0" bIns="0" rtlCol="0" anchor="ctr"/>
           <a:lstStyle/>
           <a:p>
-            <a:pPr indent="0" marL="0">
+            <a:pPr marL="0" indent="0">
               <a:buNone/>
             </a:pPr>
             <a:r>
@@ -9497,7 +9532,7 @@
           <a:bodyPr wrap="square" lIns="0" tIns="0" rIns="0" bIns="0" rtlCol="0" anchor="ctr"/>
           <a:lstStyle/>
           <a:p>
-            <a:pPr indent="0" marL="0">
+            <a:pPr marL="0" indent="0">
               <a:lnSpc>
                 <a:spcPts val="1500"/>
               </a:lnSpc>
@@ -9518,7 +9553,7 @@
             <a:endParaRPr lang="en-US" sz="1150" dirty="0"/>
           </a:p>
           <a:p>
-            <a:pPr indent="0" marL="0">
+            <a:pPr marL="0" indent="0">
               <a:lnSpc>
                 <a:spcPts val="1500"/>
               </a:lnSpc>
@@ -9539,7 +9574,7 @@
             <a:endParaRPr lang="en-US" sz="1150" dirty="0"/>
           </a:p>
           <a:p>
-            <a:pPr indent="0" marL="0">
+            <a:pPr marL="0" indent="0">
               <a:lnSpc>
                 <a:spcPts val="1500"/>
               </a:lnSpc>
@@ -9581,7 +9616,7 @@
           <a:bodyPr wrap="square" lIns="0" tIns="0" rIns="0" bIns="0" rtlCol="0" anchor="ctr"/>
           <a:lstStyle/>
           <a:p>
-            <a:pPr indent="0" marL="0">
+            <a:pPr marL="0" indent="0">
               <a:buNone/>
             </a:pPr>
             <a:r>
@@ -9645,11 +9680,11 @@
           <a:bodyPr wrap="square" lIns="0" tIns="0" rIns="0" bIns="0" rtlCol="0" anchor="ctr"/>
           <a:lstStyle/>
           <a:p>
-            <a:pPr indent="0" marL="0">
+            <a:pPr marL="0" indent="0">
               <a:buNone/>
             </a:pPr>
             <a:r>
-              <a:rPr lang="en-US" sz="1200" b="1" spc="200" kern="0" dirty="0">
+              <a:rPr lang="en-US" sz="1200" b="1" kern="0" spc="200" dirty="0">
                 <a:solidFill>
                   <a:srgbClr val="EB6834"/>
                 </a:solidFill>
@@ -9684,7 +9719,7 @@
           <a:bodyPr wrap="square" lIns="0" tIns="0" rIns="0" bIns="0" rtlCol="0" anchor="ctr"/>
           <a:lstStyle/>
           <a:p>
-            <a:pPr indent="0" marL="0">
+            <a:pPr marL="0" indent="0">
               <a:buNone/>
             </a:pPr>
             <a:r>
@@ -9704,14 +9739,14 @@
       </p:sp>
       <p:pic>
         <p:nvPicPr>
-          <p:cNvPr id="4" name="Image 0" descr="C:\Users\Unipa\Documents\MaltaDT\figures\domain_design.png">    </p:cNvPr>
+          <p:cNvPr id="4" name="Image 0" descr="C:\Users\Unipa\Documents\MaltaDT\figures\domain_design.png"/>
           <p:cNvPicPr>
             <a:picLocks noChangeAspect="1"/>
           </p:cNvPicPr>
           <p:nvPr/>
         </p:nvPicPr>
         <p:blipFill>
-          <a:blip r:embed="rId1"/>
+          <a:blip r:embed="rId3"/>
           <a:stretch>
             <a:fillRect/>
           </a:stretch>
@@ -9772,11 +9807,11 @@
           <a:bodyPr wrap="square" lIns="0" tIns="0" rIns="0" bIns="0" rtlCol="0" anchor="ctr"/>
           <a:lstStyle/>
           <a:p>
-            <a:pPr indent="0" marL="0">
+            <a:pPr marL="0" indent="0">
               <a:buNone/>
             </a:pPr>
             <a:r>
-              <a:rPr lang="en-US" sz="1200" b="1" spc="200" kern="0" dirty="0">
+              <a:rPr lang="en-US" sz="1200" b="1" kern="0" spc="200" dirty="0">
                 <a:solidFill>
                   <a:srgbClr val="EB6834"/>
                 </a:solidFill>
@@ -9811,7 +9846,7 @@
           <a:bodyPr wrap="square" lIns="0" tIns="0" rIns="0" bIns="0" rtlCol="0" anchor="ctr"/>
           <a:lstStyle/>
           <a:p>
-            <a:pPr indent="0" marL="0">
+            <a:pPr marL="0" indent="0">
               <a:buNone/>
             </a:pPr>
             <a:r>
@@ -9850,7 +9885,7 @@
           <a:bodyPr wrap="square" lIns="0" tIns="0" rIns="0" bIns="0" rtlCol="0" anchor="ctr"/>
           <a:lstStyle/>
           <a:p>
-            <a:pPr indent="0" marL="0">
+            <a:pPr marL="0" indent="0">
               <a:buNone/>
             </a:pPr>
             <a:r>
@@ -9889,7 +9924,7 @@
           <a:bodyPr wrap="square" lIns="0" tIns="0" rIns="0" bIns="0" rtlCol="0" anchor="ctr"/>
           <a:lstStyle/>
           <a:p>
-            <a:pPr indent="0" marL="0">
+            <a:pPr marL="0" indent="0">
               <a:buNone/>
             </a:pPr>
             <a:r>
@@ -9928,7 +9963,7 @@
           <a:bodyPr wrap="square" lIns="0" tIns="0" rIns="0" bIns="0" rtlCol="0" anchor="ctr"/>
           <a:lstStyle/>
           <a:p>
-            <a:pPr indent="0" marL="0">
+            <a:pPr marL="0" indent="0">
               <a:lnSpc>
                 <a:spcPts val="1700"/>
               </a:lnSpc>
@@ -9952,7 +9987,7 @@
             <a:endParaRPr lang="en-US" sz="1250" dirty="0"/>
           </a:p>
           <a:p>
-            <a:pPr indent="0" marL="0">
+            <a:pPr marL="0" indent="0">
               <a:lnSpc>
                 <a:spcPts val="1700"/>
               </a:lnSpc>
@@ -9989,15 +10024,27 @@
         </p:nvGraphicFramePr>
         <p:xfrm>
           <a:off x="566928" y="3456432"/>
-          <a:ext cx="4937760" cy="914400"/>
+          <a:ext cx="4937760" cy="2057400"/>
         </p:xfrm>
         <a:graphic>
           <a:graphicData uri="http://schemas.openxmlformats.org/drawingml/2006/table">
             <a:tbl>
               <a:tblPr/>
               <a:tblGrid>
-                <a:gridCol w="3291840"/>
-                <a:gridCol w="1645920"/>
+                <a:gridCol w="3291840">
+                  <a:extLst>
+                    <a:ext uri="{9D8B030D-6E8A-4147-A177-3AD203B41FA5}">
+                      <a16:colId xmlns:a16="http://schemas.microsoft.com/office/drawing/2014/main" val="20000"/>
+                    </a:ext>
+                  </a:extLst>
+                </a:gridCol>
+                <a:gridCol w="1645920">
+                  <a:extLst>
+                    <a:ext uri="{9D8B030D-6E8A-4147-A177-3AD203B41FA5}">
+                      <a16:colId xmlns:a16="http://schemas.microsoft.com/office/drawing/2014/main" val="20001"/>
+                    </a:ext>
+                  </a:extLst>
+                </a:gridCol>
               </a:tblGrid>
               <a:tr h="342900">
                 <a:tc>
@@ -10005,7 +10052,7 @@
                     <a:bodyPr/>
                     <a:lstStyle/>
                     <a:p>
-                      <a:pPr algn="l" indent="0" marL="0">
+                      <a:pPr marL="0" indent="0" algn="l">
                         <a:buNone/>
                       </a:pPr>
                       <a:r>
@@ -10026,7 +10073,7 @@
                       </a:endParaRPr>
                     </a:p>
                   </a:txBody>
-                  <a:tcPr marL="91440" marR="91440" marT="45720" marB="45720" anchor="ctr">
+                  <a:tcPr anchor="ctr">
                     <a:lnL w="6350" cap="flat" cmpd="sng" algn="ctr">
                       <a:solidFill>
                         <a:srgbClr val="E2E8EC"/>
@@ -10073,7 +10120,7 @@
                     <a:bodyPr/>
                     <a:lstStyle/>
                     <a:p>
-                      <a:pPr algn="r" indent="0" marL="0">
+                      <a:pPr marL="0" indent="0" algn="r">
                         <a:buNone/>
                       </a:pPr>
                       <a:r>
@@ -10094,7 +10141,7 @@
                       </a:endParaRPr>
                     </a:p>
                   </a:txBody>
-                  <a:tcPr marL="91440" marR="91440" marT="45720" marB="45720" anchor="ctr">
+                  <a:tcPr anchor="ctr">
                     <a:lnL w="6350" cap="flat" cmpd="sng" algn="ctr">
                       <a:solidFill>
                         <a:srgbClr val="E2E8EC"/>
@@ -10136,6 +10183,11 @@
                     </a:solidFill>
                   </a:tcPr>
                 </a:tc>
+                <a:extLst>
+                  <a:ext uri="{0D108BD9-81ED-4DB2-BD59-A6C34878D82A}">
+                    <a16:rowId xmlns:a16="http://schemas.microsoft.com/office/drawing/2014/main" val="10000"/>
+                  </a:ext>
+                </a:extLst>
               </a:tr>
               <a:tr h="342900">
                 <a:tc>
@@ -10143,7 +10195,7 @@
                     <a:bodyPr/>
                     <a:lstStyle/>
                     <a:p>
-                      <a:pPr algn="l" indent="0" marL="0">
+                      <a:pPr marL="0" indent="0" algn="l">
                         <a:buNone/>
                       </a:pPr>
                       <a:r>
@@ -10164,7 +10216,7 @@
                       </a:endParaRPr>
                     </a:p>
                   </a:txBody>
-                  <a:tcPr marL="91440" marR="91440" marT="45720" marB="45720" anchor="ctr">
+                  <a:tcPr anchor="ctr">
                     <a:lnL w="6350" cap="flat" cmpd="sng" algn="ctr">
                       <a:solidFill>
                         <a:srgbClr val="E2E8EC"/>
@@ -10211,7 +10263,7 @@
                     <a:bodyPr/>
                     <a:lstStyle/>
                     <a:p>
-                      <a:pPr algn="r" indent="0" marL="0">
+                      <a:pPr marL="0" indent="0" algn="r">
                         <a:buNone/>
                       </a:pPr>
                       <a:r>
@@ -10232,7 +10284,7 @@
                       </a:endParaRPr>
                     </a:p>
                   </a:txBody>
-                  <a:tcPr marL="91440" marR="91440" marT="45720" marB="45720" anchor="ctr">
+                  <a:tcPr anchor="ctr">
                     <a:lnL w="6350" cap="flat" cmpd="sng" algn="ctr">
                       <a:solidFill>
                         <a:srgbClr val="E2E8EC"/>
@@ -10274,6 +10326,11 @@
                     </a:solidFill>
                   </a:tcPr>
                 </a:tc>
+                <a:extLst>
+                  <a:ext uri="{0D108BD9-81ED-4DB2-BD59-A6C34878D82A}">
+                    <a16:rowId xmlns:a16="http://schemas.microsoft.com/office/drawing/2014/main" val="10001"/>
+                  </a:ext>
+                </a:extLst>
               </a:tr>
               <a:tr h="342900">
                 <a:tc>
@@ -10281,7 +10338,7 @@
                     <a:bodyPr/>
                     <a:lstStyle/>
                     <a:p>
-                      <a:pPr algn="l" indent="0" marL="0">
+                      <a:pPr marL="0" indent="0" algn="l">
                         <a:buNone/>
                       </a:pPr>
                       <a:r>
@@ -10302,7 +10359,7 @@
                       </a:endParaRPr>
                     </a:p>
                   </a:txBody>
-                  <a:tcPr marL="91440" marR="91440" marT="45720" marB="45720" anchor="ctr">
+                  <a:tcPr anchor="ctr">
                     <a:lnL w="6350" cap="flat" cmpd="sng" algn="ctr">
                       <a:solidFill>
                         <a:srgbClr val="E2E8EC"/>
@@ -10349,7 +10406,7 @@
                     <a:bodyPr/>
                     <a:lstStyle/>
                     <a:p>
-                      <a:pPr algn="r" indent="0" marL="0">
+                      <a:pPr marL="0" indent="0" algn="r">
                         <a:buNone/>
                       </a:pPr>
                       <a:r>
@@ -10370,7 +10427,7 @@
                       </a:endParaRPr>
                     </a:p>
                   </a:txBody>
-                  <a:tcPr marL="91440" marR="91440" marT="45720" marB="45720" anchor="ctr">
+                  <a:tcPr anchor="ctr">
                     <a:lnL w="6350" cap="flat" cmpd="sng" algn="ctr">
                       <a:solidFill>
                         <a:srgbClr val="E2E8EC"/>
@@ -10412,6 +10469,11 @@
                     </a:solidFill>
                   </a:tcPr>
                 </a:tc>
+                <a:extLst>
+                  <a:ext uri="{0D108BD9-81ED-4DB2-BD59-A6C34878D82A}">
+                    <a16:rowId xmlns:a16="http://schemas.microsoft.com/office/drawing/2014/main" val="10002"/>
+                  </a:ext>
+                </a:extLst>
               </a:tr>
               <a:tr h="342900">
                 <a:tc>
@@ -10419,7 +10481,7 @@
                     <a:bodyPr/>
                     <a:lstStyle/>
                     <a:p>
-                      <a:pPr algn="l" indent="0" marL="0">
+                      <a:pPr marL="0" indent="0" algn="l">
                         <a:buNone/>
                       </a:pPr>
                       <a:r>
@@ -10440,7 +10502,7 @@
                       </a:endParaRPr>
                     </a:p>
                   </a:txBody>
-                  <a:tcPr marL="91440" marR="91440" marT="45720" marB="45720" anchor="ctr">
+                  <a:tcPr anchor="ctr">
                     <a:lnL w="6350" cap="flat" cmpd="sng" algn="ctr">
                       <a:solidFill>
                         <a:srgbClr val="E2E8EC"/>
@@ -10487,7 +10549,7 @@
                     <a:bodyPr/>
                     <a:lstStyle/>
                     <a:p>
-                      <a:pPr algn="r" indent="0" marL="0">
+                      <a:pPr marL="0" indent="0" algn="r">
                         <a:buNone/>
                       </a:pPr>
                       <a:r>
@@ -10508,7 +10570,7 @@
                       </a:endParaRPr>
                     </a:p>
                   </a:txBody>
-                  <a:tcPr marL="91440" marR="91440" marT="45720" marB="45720" anchor="ctr">
+                  <a:tcPr anchor="ctr">
                     <a:lnL w="6350" cap="flat" cmpd="sng" algn="ctr">
                       <a:solidFill>
                         <a:srgbClr val="E2E8EC"/>
@@ -10550,6 +10612,11 @@
                     </a:solidFill>
                   </a:tcPr>
                 </a:tc>
+                <a:extLst>
+                  <a:ext uri="{0D108BD9-81ED-4DB2-BD59-A6C34878D82A}">
+                    <a16:rowId xmlns:a16="http://schemas.microsoft.com/office/drawing/2014/main" val="10003"/>
+                  </a:ext>
+                </a:extLst>
               </a:tr>
               <a:tr h="342900">
                 <a:tc>
@@ -10557,7 +10624,7 @@
                     <a:bodyPr/>
                     <a:lstStyle/>
                     <a:p>
-                      <a:pPr algn="l" indent="0" marL="0">
+                      <a:pPr marL="0" indent="0" algn="l">
                         <a:buNone/>
                       </a:pPr>
                       <a:r>
@@ -10578,7 +10645,7 @@
                       </a:endParaRPr>
                     </a:p>
                   </a:txBody>
-                  <a:tcPr marL="91440" marR="91440" marT="45720" marB="45720" anchor="ctr">
+                  <a:tcPr anchor="ctr">
                     <a:lnL w="6350" cap="flat" cmpd="sng" algn="ctr">
                       <a:solidFill>
                         <a:srgbClr val="E2E8EC"/>
@@ -10625,7 +10692,7 @@
                     <a:bodyPr/>
                     <a:lstStyle/>
                     <a:p>
-                      <a:pPr algn="r" indent="0" marL="0">
+                      <a:pPr marL="0" indent="0" algn="r">
                         <a:buNone/>
                       </a:pPr>
                       <a:r>
@@ -10646,7 +10713,7 @@
                       </a:endParaRPr>
                     </a:p>
                   </a:txBody>
-                  <a:tcPr marL="91440" marR="91440" marT="45720" marB="45720" anchor="ctr">
+                  <a:tcPr anchor="ctr">
                     <a:lnL w="6350" cap="flat" cmpd="sng" algn="ctr">
                       <a:solidFill>
                         <a:srgbClr val="E2E8EC"/>
@@ -10688,6 +10755,11 @@
                     </a:solidFill>
                   </a:tcPr>
                 </a:tc>
+                <a:extLst>
+                  <a:ext uri="{0D108BD9-81ED-4DB2-BD59-A6C34878D82A}">
+                    <a16:rowId xmlns:a16="http://schemas.microsoft.com/office/drawing/2014/main" val="10004"/>
+                  </a:ext>
+                </a:extLst>
               </a:tr>
               <a:tr h="342900">
                 <a:tc>
@@ -10695,7 +10767,7 @@
                     <a:bodyPr/>
                     <a:lstStyle/>
                     <a:p>
-                      <a:pPr algn="l" indent="0" marL="0">
+                      <a:pPr marL="0" indent="0" algn="l">
                         <a:buNone/>
                       </a:pPr>
                       <a:r>
@@ -10716,7 +10788,7 @@
                       </a:endParaRPr>
                     </a:p>
                   </a:txBody>
-                  <a:tcPr marL="91440" marR="91440" marT="45720" marB="45720" anchor="ctr">
+                  <a:tcPr anchor="ctr">
                     <a:lnL w="6350" cap="flat" cmpd="sng" algn="ctr">
                       <a:solidFill>
                         <a:srgbClr val="E2E8EC"/>
@@ -10763,7 +10835,7 @@
                     <a:bodyPr/>
                     <a:lstStyle/>
                     <a:p>
-                      <a:pPr algn="r" indent="0" marL="0">
+                      <a:pPr marL="0" indent="0" algn="r">
                         <a:buNone/>
                       </a:pPr>
                       <a:r>
@@ -10784,7 +10856,7 @@
                       </a:endParaRPr>
                     </a:p>
                   </a:txBody>
-                  <a:tcPr marL="91440" marR="91440" marT="45720" marB="45720" anchor="ctr">
+                  <a:tcPr anchor="ctr">
                     <a:lnL w="6350" cap="flat" cmpd="sng" algn="ctr">
                       <a:solidFill>
                         <a:srgbClr val="E2E8EC"/>
@@ -10826,6 +10898,11 @@
                     </a:solidFill>
                   </a:tcPr>
                 </a:tc>
+                <a:extLst>
+                  <a:ext uri="{0D108BD9-81ED-4DB2-BD59-A6C34878D82A}">
+                    <a16:rowId xmlns:a16="http://schemas.microsoft.com/office/drawing/2014/main" val="10005"/>
+                  </a:ext>
+                </a:extLst>
               </a:tr>
             </a:tbl>
           </a:graphicData>
@@ -10833,7 +10910,7 @@
       </p:graphicFrame>
       <p:sp>
         <p:nvSpPr>
-          <p:cNvPr id="8" name="Shape 5"/>
+          <p:cNvPr id="7" name="Shape 5"/>
           <p:cNvSpPr/>
           <p:nvPr/>
         </p:nvSpPr>
@@ -10852,6 +10929,13 @@
           </a:solidFill>
           <a:ln/>
         </p:spPr>
+        <p:txBody>
+          <a:bodyPr/>
+          <a:lstStyle/>
+          <a:p>
+            <a:endParaRPr lang="it-IT"/>
+          </a:p>
+        </p:txBody>
       </p:sp>
       <p:sp>
         <p:nvSpPr>
@@ -10874,7 +10958,7 @@
           <a:bodyPr wrap="square" lIns="0" tIns="0" rIns="0" bIns="0" rtlCol="0" anchor="ctr"/>
           <a:lstStyle/>
           <a:p>
-            <a:pPr indent="0" marL="0">
+            <a:pPr marL="0" indent="0">
               <a:buNone/>
             </a:pPr>
             <a:r>
@@ -10913,7 +10997,7 @@
           <a:bodyPr wrap="square" lIns="0" tIns="0" rIns="0" bIns="0" rtlCol="0" anchor="ctr"/>
           <a:lstStyle/>
           <a:p>
-            <a:pPr indent="0" marL="0">
+            <a:pPr marL="0" indent="0">
               <a:lnSpc>
                 <a:spcPts val="1600"/>
               </a:lnSpc>
@@ -10955,6 +11039,13 @@
           </a:solidFill>
           <a:ln/>
         </p:spPr>
+        <p:txBody>
+          <a:bodyPr/>
+          <a:lstStyle/>
+          <a:p>
+            <a:endParaRPr lang="it-IT"/>
+          </a:p>
+        </p:txBody>
       </p:sp>
       <p:sp>
         <p:nvSpPr>
@@ -10977,7 +11068,7 @@
           <a:bodyPr wrap="square" lIns="0" tIns="0" rIns="0" bIns="0" rtlCol="0" anchor="ctr"/>
           <a:lstStyle/>
           <a:p>
-            <a:pPr indent="0" marL="0">
+            <a:pPr marL="0" indent="0">
               <a:buNone/>
             </a:pPr>
             <a:r>
@@ -11016,7 +11107,7 @@
           <a:bodyPr wrap="square" lIns="0" tIns="0" rIns="0" bIns="0" rtlCol="0" anchor="ctr"/>
           <a:lstStyle/>
           <a:p>
-            <a:pPr indent="0" marL="0">
+            <a:pPr marL="0" indent="0">
               <a:lnSpc>
                 <a:spcPts val="1600"/>
               </a:lnSpc>
@@ -11037,7 +11128,7 @@
             <a:endParaRPr lang="en-US" sz="1200" dirty="0"/>
           </a:p>
           <a:p>
-            <a:pPr indent="0" marL="0">
+            <a:pPr marL="0" indent="0">
               <a:lnSpc>
                 <a:spcPts val="1600"/>
               </a:lnSpc>
@@ -11104,11 +11195,11 @@
           <a:bodyPr wrap="square" lIns="0" tIns="0" rIns="0" bIns="0" rtlCol="0" anchor="ctr"/>
           <a:lstStyle/>
           <a:p>
-            <a:pPr indent="0" marL="0">
+            <a:pPr marL="0" indent="0">
               <a:buNone/>
             </a:pPr>
             <a:r>
-              <a:rPr lang="en-US" sz="1200" b="1" spc="200" kern="0" dirty="0">
+              <a:rPr lang="en-US" sz="1200" b="1" kern="0" spc="200" dirty="0">
                 <a:solidFill>
                   <a:srgbClr val="EB6834"/>
                 </a:solidFill>
@@ -11143,7 +11234,7 @@
           <a:bodyPr wrap="square" lIns="0" tIns="0" rIns="0" bIns="0" rtlCol="0" anchor="ctr"/>
           <a:lstStyle/>
           <a:p>
-            <a:pPr indent="0" marL="0">
+            <a:pPr marL="0" indent="0">
               <a:buNone/>
             </a:pPr>
             <a:r>
@@ -11155,48 +11246,8 @@
                 <a:ea typeface="Cambria" pitchFamily="34" charset="-122"/>
                 <a:cs typeface="Cambria" pitchFamily="34" charset="-120"/>
               </a:rPr>
-              <a:t>A proposed question, for the group to judge</a:t>
-            </a:r>
-            <a:endParaRPr lang="en-US" sz="3200" dirty="0"/>
-          </a:p>
-        </p:txBody>
-      </p:sp>
-      <p:sp>
-        <p:nvSpPr>
-          <p:cNvPr id="4" name="Text 2"/>
-          <p:cNvSpPr txBox="1"/>
-          <p:nvPr/>
-        </p:nvSpPr>
-        <p:spPr>
-          <a:xfrm>
-            <a:off x="566928" y="1408176"/>
-            <a:ext cx="10881360" cy="585216"/>
-          </a:xfrm>
-          <a:prstGeom prst="rect">
-            <a:avLst/>
-          </a:prstGeom>
-          <a:noFill/>
-          <a:ln/>
-        </p:spPr>
-        <p:txBody>
-          <a:bodyPr wrap="square" lIns="0" tIns="0" rIns="0" bIns="0" rtlCol="0" anchor="ctr"/>
-          <a:lstStyle/>
-          <a:p>
-            <a:pPr indent="0" marL="0">
-              <a:buNone/>
-            </a:pPr>
-            <a:r>
-              <a:rPr lang="en-US" sz="1400" dirty="0">
-                <a:solidFill>
-                  <a:srgbClr val="5F6368"/>
-                </a:solidFill>
-                <a:latin typeface="Calibri" pitchFamily="34" charset="0"/>
-                <a:ea typeface="Calibri" pitchFamily="34" charset="-122"/>
-                <a:cs typeface="Calibri" pitchFamily="34" charset="-120"/>
-              </a:rPr>
-              <a:t>Drafted this week and put to the group before it is committed to.</a:t>
-            </a:r>
-            <a:endParaRPr lang="en-US" sz="1400" dirty="0"/>
+              <a:t>A proposed question</a:t>
+            </a:r>
           </a:p>
         </p:txBody>
       </p:sp>
@@ -11221,6 +11272,13 @@
           </a:solidFill>
           <a:ln/>
         </p:spPr>
+        <p:txBody>
+          <a:bodyPr/>
+          <a:lstStyle/>
+          <a:p>
+            <a:endParaRPr lang="it-IT"/>
+          </a:p>
+        </p:txBody>
       </p:sp>
       <p:sp>
         <p:nvSpPr>
@@ -11243,7 +11301,7 @@
           <a:bodyPr wrap="square" lIns="0" tIns="0" rIns="0" bIns="0" rtlCol="0" anchor="ctr"/>
           <a:lstStyle/>
           <a:p>
-            <a:pPr indent="0" marL="0">
+            <a:pPr marL="0" indent="0">
               <a:lnSpc>
                 <a:spcPts val="2100"/>
               </a:lnSpc>
@@ -11285,7 +11343,7 @@
           <a:bodyPr wrap="square" lIns="0" tIns="0" rIns="0" bIns="0" rtlCol="0" anchor="ctr"/>
           <a:lstStyle/>
           <a:p>
-            <a:pPr indent="0" marL="0">
+            <a:pPr marL="0" indent="0">
               <a:buNone/>
             </a:pPr>
             <a:r>
@@ -11415,7 +11473,7 @@
           <a:bodyPr wrap="square" lIns="0" tIns="0" rIns="0" bIns="0" rtlCol="0" anchor="ctr"/>
           <a:lstStyle/>
           <a:p>
-            <a:pPr indent="0" marL="0">
+            <a:pPr marL="0" indent="0">
               <a:buNone/>
             </a:pPr>
             <a:r>
@@ -11570,11 +11628,11 @@
           <a:bodyPr wrap="square" lIns="0" tIns="0" rIns="0" bIns="0" rtlCol="0" anchor="ctr"/>
           <a:lstStyle/>
           <a:p>
-            <a:pPr indent="0" marL="0">
+            <a:pPr marL="0" indent="0">
               <a:buNone/>
             </a:pPr>
             <a:r>
-              <a:rPr lang="en-US" sz="1200" b="1" spc="200" kern="0" dirty="0">
+              <a:rPr lang="en-US" sz="1200" b="1" kern="0" spc="200" dirty="0">
                 <a:solidFill>
                   <a:srgbClr val="EB6834"/>
                 </a:solidFill>
@@ -11609,7 +11667,7 @@
           <a:bodyPr wrap="square" lIns="0" tIns="0" rIns="0" bIns="0" rtlCol="0" anchor="ctr"/>
           <a:lstStyle/>
           <a:p>
-            <a:pPr indent="0" marL="0">
+            <a:pPr marL="0" indent="0">
               <a:buNone/>
             </a:pPr>
             <a:r>
@@ -11648,7 +11706,7 @@
           <a:bodyPr wrap="square" lIns="0" tIns="0" rIns="0" bIns="0" rtlCol="0" anchor="ctr"/>
           <a:lstStyle/>
           <a:p>
-            <a:pPr indent="0" marL="0">
+            <a:pPr marL="0" indent="0">
               <a:buNone/>
             </a:pPr>
             <a:r>
@@ -11685,6 +11743,13 @@
           </a:solidFill>
           <a:ln/>
         </p:spPr>
+        <p:txBody>
+          <a:bodyPr/>
+          <a:lstStyle/>
+          <a:p>
+            <a:endParaRPr lang="it-IT"/>
+          </a:p>
+        </p:txBody>
       </p:sp>
       <p:sp>
         <p:nvSpPr>
@@ -11707,7 +11772,7 @@
           <a:bodyPr wrap="square" lIns="0" tIns="0" rIns="0" bIns="0" rtlCol="0" anchor="ctr"/>
           <a:lstStyle/>
           <a:p>
-            <a:pPr algn="ctr" indent="0" marL="0">
+            <a:pPr marL="0" indent="0" algn="ctr">
               <a:buNone/>
             </a:pPr>
             <a:r>
@@ -11746,7 +11811,7 @@
           <a:bodyPr wrap="square" lIns="0" tIns="0" rIns="0" bIns="0" rtlCol="0" anchor="ctr"/>
           <a:lstStyle/>
           <a:p>
-            <a:pPr indent="0" marL="0">
+            <a:pPr marL="0" indent="0">
               <a:buNone/>
             </a:pPr>
             <a:r>
@@ -11785,7 +11850,7 @@
           <a:bodyPr wrap="square" lIns="0" tIns="0" rIns="0" bIns="0" rtlCol="0" anchor="ctr"/>
           <a:lstStyle/>
           <a:p>
-            <a:pPr indent="0" marL="0">
+            <a:pPr marL="0" indent="0">
               <a:lnSpc>
                 <a:spcPts val="1700"/>
               </a:lnSpc>
@@ -11825,6 +11890,13 @@
           </a:solidFill>
           <a:ln/>
         </p:spPr>
+        <p:txBody>
+          <a:bodyPr/>
+          <a:lstStyle/>
+          <a:p>
+            <a:endParaRPr lang="it-IT"/>
+          </a:p>
+        </p:txBody>
       </p:sp>
       <p:sp>
         <p:nvSpPr>
@@ -11847,7 +11919,7 @@
           <a:bodyPr wrap="square" lIns="0" tIns="0" rIns="0" bIns="0" rtlCol="0" anchor="ctr"/>
           <a:lstStyle/>
           <a:p>
-            <a:pPr algn="ctr" indent="0" marL="0">
+            <a:pPr marL="0" indent="0" algn="ctr">
               <a:buNone/>
             </a:pPr>
             <a:r>
@@ -11886,7 +11958,7 @@
           <a:bodyPr wrap="square" lIns="0" tIns="0" rIns="0" bIns="0" rtlCol="0" anchor="ctr"/>
           <a:lstStyle/>
           <a:p>
-            <a:pPr indent="0" marL="0">
+            <a:pPr marL="0" indent="0">
               <a:buNone/>
             </a:pPr>
             <a:r>
@@ -11925,7 +11997,7 @@
           <a:bodyPr wrap="square" lIns="0" tIns="0" rIns="0" bIns="0" rtlCol="0" anchor="ctr"/>
           <a:lstStyle/>
           <a:p>
-            <a:pPr indent="0" marL="0">
+            <a:pPr marL="0" indent="0">
               <a:lnSpc>
                 <a:spcPts val="1700"/>
               </a:lnSpc>
@@ -11965,6 +12037,13 @@
           </a:solidFill>
           <a:ln/>
         </p:spPr>
+        <p:txBody>
+          <a:bodyPr/>
+          <a:lstStyle/>
+          <a:p>
+            <a:endParaRPr lang="it-IT"/>
+          </a:p>
+        </p:txBody>
       </p:sp>
       <p:sp>
         <p:nvSpPr>
@@ -11987,7 +12066,7 @@
           <a:bodyPr wrap="square" lIns="0" tIns="0" rIns="0" bIns="0" rtlCol="0" anchor="ctr"/>
           <a:lstStyle/>
           <a:p>
-            <a:pPr algn="ctr" indent="0" marL="0">
+            <a:pPr marL="0" indent="0" algn="ctr">
               <a:buNone/>
             </a:pPr>
             <a:r>
@@ -12026,7 +12105,7 @@
           <a:bodyPr wrap="square" lIns="0" tIns="0" rIns="0" bIns="0" rtlCol="0" anchor="ctr"/>
           <a:lstStyle/>
           <a:p>
-            <a:pPr indent="0" marL="0">
+            <a:pPr marL="0" indent="0">
               <a:buNone/>
             </a:pPr>
             <a:r>
@@ -12065,7 +12144,7 @@
           <a:bodyPr wrap="square" lIns="0" tIns="0" rIns="0" bIns="0" rtlCol="0" anchor="ctr"/>
           <a:lstStyle/>
           <a:p>
-            <a:pPr indent="0" marL="0">
+            <a:pPr marL="0" indent="0">
               <a:lnSpc>
                 <a:spcPts val="1700"/>
               </a:lnSpc>
@@ -12107,6 +12186,13 @@
           </a:solidFill>
           <a:ln/>
         </p:spPr>
+        <p:txBody>
+          <a:bodyPr/>
+          <a:lstStyle/>
+          <a:p>
+            <a:endParaRPr lang="it-IT"/>
+          </a:p>
+        </p:txBody>
       </p:sp>
       <p:sp>
         <p:nvSpPr>
@@ -12129,7 +12215,7 @@
           <a:bodyPr wrap="square" lIns="0" tIns="0" rIns="0" bIns="0" rtlCol="0" anchor="ctr"/>
           <a:lstStyle/>
           <a:p>
-            <a:pPr indent="0" marL="0">
+            <a:pPr marL="0" indent="0">
               <a:buNone/>
             </a:pPr>
             <a:r>
@@ -12168,7 +12254,7 @@
           <a:bodyPr wrap="square" lIns="0" tIns="0" rIns="0" bIns="0" rtlCol="0" anchor="ctr"/>
           <a:lstStyle/>
           <a:p>
-            <a:pPr indent="0" marL="0">
+            <a:pPr marL="0" indent="0">
               <a:lnSpc>
                 <a:spcPts val="1550"/>
               </a:lnSpc>
@@ -12189,7 +12275,7 @@
             <a:endParaRPr lang="en-US" sz="1150" dirty="0"/>
           </a:p>
           <a:p>
-            <a:pPr indent="0" marL="0">
+            <a:pPr marL="0" indent="0">
               <a:lnSpc>
                 <a:spcPts val="1550"/>
               </a:lnSpc>
@@ -12210,7 +12296,7 @@
             <a:endParaRPr lang="en-US" sz="1150" dirty="0"/>
           </a:p>
           <a:p>
-            <a:pPr indent="0" marL="0">
+            <a:pPr marL="0" indent="0">
               <a:lnSpc>
                 <a:spcPts val="1550"/>
               </a:lnSpc>
@@ -12252,7 +12338,7 @@
           <a:bodyPr wrap="square" lIns="0" tIns="0" rIns="0" bIns="0" rtlCol="0" anchor="ctr"/>
           <a:lstStyle/>
           <a:p>
-            <a:pPr indent="0" marL="0">
+            <a:pPr marL="0" indent="0">
               <a:buNone/>
             </a:pPr>
             <a:r>
@@ -12571,4 +12657,319 @@
     </a:ext>
   </a:extLst>
 </a:theme>
+</file>
+
+<file path=ppt/theme/theme2.xml><?xml version="1.0" encoding="utf-8"?>
+<a:theme xmlns:a="http://schemas.openxmlformats.org/drawingml/2006/main" name="Office Theme">
+  <a:themeElements>
+    <a:clrScheme name="Office">
+      <a:dk1>
+        <a:sysClr val="windowText" lastClr="000000"/>
+      </a:dk1>
+      <a:lt1>
+        <a:sysClr val="window" lastClr="FFFFFF"/>
+      </a:lt1>
+      <a:dk2>
+        <a:srgbClr val="0E2841"/>
+      </a:dk2>
+      <a:lt2>
+        <a:srgbClr val="E8E8E8"/>
+      </a:lt2>
+      <a:accent1>
+        <a:srgbClr val="156082"/>
+      </a:accent1>
+      <a:accent2>
+        <a:srgbClr val="E97132"/>
+      </a:accent2>
+      <a:accent3>
+        <a:srgbClr val="196B24"/>
+      </a:accent3>
+      <a:accent4>
+        <a:srgbClr val="0F9ED5"/>
+      </a:accent4>
+      <a:accent5>
+        <a:srgbClr val="A02B93"/>
+      </a:accent5>
+      <a:accent6>
+        <a:srgbClr val="4EA72E"/>
+      </a:accent6>
+      <a:hlink>
+        <a:srgbClr val="467886"/>
+      </a:hlink>
+      <a:folHlink>
+        <a:srgbClr val="96607D"/>
+      </a:folHlink>
+    </a:clrScheme>
+    <a:fontScheme name="Office">
+      <a:majorFont>
+        <a:latin typeface="Aptos Display" panose="02110004020202020204"/>
+        <a:ea typeface=""/>
+        <a:cs typeface=""/>
+        <a:font script="Jpan" typeface="游ゴシック Light"/>
+        <a:font script="Hang" typeface="맑은 고딕"/>
+        <a:font script="Hans" typeface="等线 Light"/>
+        <a:font script="Hant" typeface="新細明體"/>
+        <a:font script="Arab" typeface="Times New Roman"/>
+        <a:font script="Hebr" typeface="Times New Roman"/>
+        <a:font script="Thai" typeface="Angsana New"/>
+        <a:font script="Ethi" typeface="Nyala"/>
+        <a:font script="Beng" typeface="Vrinda"/>
+        <a:font script="Gujr" typeface="Shruti"/>
+        <a:font script="Khmr" typeface="MoolBoran"/>
+        <a:font script="Knda" typeface="Tunga"/>
+        <a:font script="Guru" typeface="Raavi"/>
+        <a:font script="Cans" typeface="Euphemia"/>
+        <a:font script="Cher" typeface="Plantagenet Cherokee"/>
+        <a:font script="Yiii" typeface="Microsoft Yi Baiti"/>
+        <a:font script="Tibt" typeface="Microsoft Himalaya"/>
+        <a:font script="Thaa" typeface="MV Boli"/>
+        <a:font script="Deva" typeface="Mangal"/>
+        <a:font script="Telu" typeface="Gautami"/>
+        <a:font script="Taml" typeface="Latha"/>
+        <a:font script="Syrc" typeface="Estrangelo Edessa"/>
+        <a:font script="Orya" typeface="Kalinga"/>
+        <a:font script="Mlym" typeface="Kartika"/>
+        <a:font script="Laoo" typeface="DokChampa"/>
+        <a:font script="Sinh" typeface="Iskoola Pota"/>
+        <a:font script="Mong" typeface="Mongolian Baiti"/>
+        <a:font script="Viet" typeface="Times New Roman"/>
+        <a:font script="Uigh" typeface="Microsoft Uighur"/>
+        <a:font script="Geor" typeface="Sylfaen"/>
+        <a:font script="Armn" typeface="Arial"/>
+        <a:font script="Bugi" typeface="Leelawadee UI"/>
+        <a:font script="Bopo" typeface="Microsoft JhengHei"/>
+        <a:font script="Java" typeface="Javanese Text"/>
+        <a:font script="Lisu" typeface="Segoe UI"/>
+        <a:font script="Mymr" typeface="Myanmar Text"/>
+        <a:font script="Nkoo" typeface="Ebrima"/>
+        <a:font script="Olck" typeface="Nirmala UI"/>
+        <a:font script="Osma" typeface="Ebrima"/>
+        <a:font script="Phag" typeface="Phagspa"/>
+        <a:font script="Syrn" typeface="Estrangelo Edessa"/>
+        <a:font script="Syrj" typeface="Estrangelo Edessa"/>
+        <a:font script="Syre" typeface="Estrangelo Edessa"/>
+        <a:font script="Sora" typeface="Nirmala UI"/>
+        <a:font script="Tale" typeface="Microsoft Tai Le"/>
+        <a:font script="Talu" typeface="Microsoft New Tai Lue"/>
+        <a:font script="Tfng" typeface="Ebrima"/>
+      </a:majorFont>
+      <a:minorFont>
+        <a:latin typeface="Aptos" panose="02110004020202020204"/>
+        <a:ea typeface=""/>
+        <a:cs typeface=""/>
+        <a:font script="Jpan" typeface="游ゴシック"/>
+        <a:font script="Hang" typeface="맑은 고딕"/>
+        <a:font script="Hans" typeface="等线"/>
+        <a:font script="Hant" typeface="新細明體"/>
+        <a:font script="Arab" typeface="Arial"/>
+        <a:font script="Hebr" typeface="Arial"/>
+        <a:font script="Thai" typeface="Cordia New"/>
+        <a:font script="Ethi" typeface="Nyala"/>
+        <a:font script="Beng" typeface="Vrinda"/>
+        <a:font script="Gujr" typeface="Shruti"/>
+        <a:font script="Khmr" typeface="DaunPenh"/>
+        <a:font script="Knda" typeface="Tunga"/>
+        <a:font script="Guru" typeface="Raavi"/>
+        <a:font script="Cans" typeface="Euphemia"/>
+        <a:font script="Cher" typeface="Plantagenet Cherokee"/>
+        <a:font script="Yiii" typeface="Microsoft Yi Baiti"/>
+        <a:font script="Tibt" typeface="Microsoft Himalaya"/>
+        <a:font script="Thaa" typeface="MV Boli"/>
+        <a:font script="Deva" typeface="Mangal"/>
+        <a:font script="Telu" typeface="Gautami"/>
+        <a:font script="Taml" typeface="Latha"/>
+        <a:font script="Syrc" typeface="Estrangelo Edessa"/>
+        <a:font script="Orya" typeface="Kalinga"/>
+        <a:font script="Mlym" typeface="Kartika"/>
+        <a:font script="Laoo" typeface="DokChampa"/>
+        <a:font script="Sinh" typeface="Iskoola Pota"/>
+        <a:font script="Mong" typeface="Mongolian Baiti"/>
+        <a:font script="Viet" typeface="Arial"/>
+        <a:font script="Uigh" typeface="Microsoft Uighur"/>
+        <a:font script="Geor" typeface="Sylfaen"/>
+        <a:font script="Armn" typeface="Arial"/>
+        <a:font script="Bugi" typeface="Leelawadee UI"/>
+        <a:font script="Bopo" typeface="Microsoft JhengHei"/>
+        <a:font script="Java" typeface="Javanese Text"/>
+        <a:font script="Lisu" typeface="Segoe UI"/>
+        <a:font script="Mymr" typeface="Myanmar Text"/>
+        <a:font script="Nkoo" typeface="Ebrima"/>
+        <a:font script="Olck" typeface="Nirmala UI"/>
+        <a:font script="Osma" typeface="Ebrima"/>
+        <a:font script="Phag" typeface="Phagspa"/>
+        <a:font script="Syrn" typeface="Estrangelo Edessa"/>
+        <a:font script="Syrj" typeface="Estrangelo Edessa"/>
+        <a:font script="Syre" typeface="Estrangelo Edessa"/>
+        <a:font script="Sora" typeface="Nirmala UI"/>
+        <a:font script="Tale" typeface="Microsoft Tai Le"/>
+        <a:font script="Talu" typeface="Microsoft New Tai Lue"/>
+        <a:font script="Tfng" typeface="Ebrima"/>
+      </a:minorFont>
+    </a:fontScheme>
+    <a:fmtScheme name="Office">
+      <a:fillStyleLst>
+        <a:solidFill>
+          <a:schemeClr val="phClr"/>
+        </a:solidFill>
+        <a:gradFill rotWithShape="1">
+          <a:gsLst>
+            <a:gs pos="0">
+              <a:schemeClr val="phClr">
+                <a:lumMod val="110000"/>
+                <a:satMod val="105000"/>
+                <a:tint val="67000"/>
+              </a:schemeClr>
+            </a:gs>
+            <a:gs pos="50000">
+              <a:schemeClr val="phClr">
+                <a:lumMod val="105000"/>
+                <a:satMod val="103000"/>
+                <a:tint val="73000"/>
+              </a:schemeClr>
+            </a:gs>
+            <a:gs pos="100000">
+              <a:schemeClr val="phClr">
+                <a:lumMod val="105000"/>
+                <a:satMod val="109000"/>
+                <a:tint val="81000"/>
+              </a:schemeClr>
+            </a:gs>
+          </a:gsLst>
+          <a:lin ang="5400000" scaled="0"/>
+        </a:gradFill>
+        <a:gradFill rotWithShape="1">
+          <a:gsLst>
+            <a:gs pos="0">
+              <a:schemeClr val="phClr">
+                <a:satMod val="103000"/>
+                <a:lumMod val="102000"/>
+                <a:tint val="94000"/>
+              </a:schemeClr>
+            </a:gs>
+            <a:gs pos="50000">
+              <a:schemeClr val="phClr">
+                <a:satMod val="110000"/>
+                <a:lumMod val="100000"/>
+                <a:shade val="100000"/>
+              </a:schemeClr>
+            </a:gs>
+            <a:gs pos="100000">
+              <a:schemeClr val="phClr">
+                <a:lumMod val="99000"/>
+                <a:satMod val="120000"/>
+                <a:shade val="78000"/>
+              </a:schemeClr>
+            </a:gs>
+          </a:gsLst>
+          <a:lin ang="5400000" scaled="0"/>
+        </a:gradFill>
+      </a:fillStyleLst>
+      <a:lnStyleLst>
+        <a:ln w="12700" cap="flat" cmpd="sng" algn="ctr">
+          <a:solidFill>
+            <a:schemeClr val="phClr"/>
+          </a:solidFill>
+          <a:prstDash val="solid"/>
+          <a:miter lim="800000"/>
+        </a:ln>
+        <a:ln w="19050" cap="flat" cmpd="sng" algn="ctr">
+          <a:solidFill>
+            <a:schemeClr val="phClr"/>
+          </a:solidFill>
+          <a:prstDash val="solid"/>
+          <a:miter lim="800000"/>
+        </a:ln>
+        <a:ln w="25400" cap="flat" cmpd="sng" algn="ctr">
+          <a:solidFill>
+            <a:schemeClr val="phClr"/>
+          </a:solidFill>
+          <a:prstDash val="solid"/>
+          <a:miter lim="800000"/>
+        </a:ln>
+      </a:lnStyleLst>
+      <a:effectStyleLst>
+        <a:effectStyle>
+          <a:effectLst/>
+        </a:effectStyle>
+        <a:effectStyle>
+          <a:effectLst/>
+        </a:effectStyle>
+        <a:effectStyle>
+          <a:effectLst>
+            <a:outerShdw blurRad="57150" dist="19050" dir="5400000" algn="ctr" rotWithShape="0">
+              <a:srgbClr val="000000">
+                <a:alpha val="63000"/>
+              </a:srgbClr>
+            </a:outerShdw>
+          </a:effectLst>
+        </a:effectStyle>
+      </a:effectStyleLst>
+      <a:bgFillStyleLst>
+        <a:solidFill>
+          <a:schemeClr val="phClr"/>
+        </a:solidFill>
+        <a:solidFill>
+          <a:schemeClr val="phClr">
+            <a:tint val="95000"/>
+            <a:satMod val="170000"/>
+          </a:schemeClr>
+        </a:solidFill>
+        <a:gradFill rotWithShape="1">
+          <a:gsLst>
+            <a:gs pos="0">
+              <a:schemeClr val="phClr">
+                <a:tint val="93000"/>
+                <a:satMod val="150000"/>
+                <a:shade val="98000"/>
+                <a:lumMod val="102000"/>
+              </a:schemeClr>
+            </a:gs>
+            <a:gs pos="50000">
+              <a:schemeClr val="phClr">
+                <a:tint val="98000"/>
+                <a:satMod val="130000"/>
+                <a:shade val="90000"/>
+                <a:lumMod val="103000"/>
+              </a:schemeClr>
+            </a:gs>
+            <a:gs pos="100000">
+              <a:schemeClr val="phClr">
+                <a:shade val="63000"/>
+                <a:satMod val="120000"/>
+              </a:schemeClr>
+            </a:gs>
+          </a:gsLst>
+          <a:lin ang="5400000" scaled="0"/>
+        </a:gradFill>
+      </a:bgFillStyleLst>
+    </a:fmtScheme>
+  </a:themeElements>
+  <a:objectDefaults>
+    <a:lnDef>
+      <a:spPr/>
+      <a:bodyPr/>
+      <a:lstStyle/>
+      <a:style>
+        <a:lnRef idx="2">
+          <a:schemeClr val="accent1"/>
+        </a:lnRef>
+        <a:fillRef idx="0">
+          <a:schemeClr val="accent1"/>
+        </a:fillRef>
+        <a:effectRef idx="1">
+          <a:schemeClr val="accent1"/>
+        </a:effectRef>
+        <a:fontRef idx="minor">
+          <a:schemeClr val="tx1"/>
+        </a:fontRef>
+      </a:style>
+    </a:lnDef>
+  </a:objectDefaults>
+  <a:extraClrSchemeLst/>
+  <a:extLst>
+    <a:ext uri="{05A4C25C-085E-4340-85A3-A5531E510DB2}">
+      <thm15:themeFamily xmlns:thm15="http://schemas.microsoft.com/office/thememl/2012/main" name="Office Theme" id="{2E142A2C-CD16-42D6-873A-C26D2A0506FA}" vid="{1BDDFF52-6CD6-40A5-AB3C-68EB2F1E4D0A}"/>
+    </a:ext>
+  </a:extLst>
+</a:theme>
 </file>
--- a/docs/valletta_model_concept_2026-09-25.pptx
+++ b/docs/valletta_model_concept_2026-09-25.pptx
@@ -4,9 +4,6 @@
   <p:sldMasterIdLst>
     <p:sldMasterId id="2147483648" r:id="rId1"/>
   </p:sldMasterIdLst>
-  <p:notesMasterIdLst>
-    <p:notesMasterId r:id="rId13"/>
-  </p:notesMasterIdLst>
   <p:sldIdLst>
     <p:sldId id="256" r:id="rId2"/>
     <p:sldId id="257" r:id="rId3"/>
@@ -19,7 +16,12 @@
     <p:sldId id="264" r:id="rId10"/>
     <p:sldId id="265" r:id="rId11"/>
     <p:sldId id="266" r:id="rId12"/>
+    <p:sldId id="267" r:id="rId13"/>
+    <p:sldId id="268" r:id="rId14"/>
   </p:sldIdLst>
+  <p:notesMasterIdLst>
+    <p:notesMasterId r:id="rId15"/>
+  </p:notesMasterIdLst>
   <p:sldSz cx="12192000" cy="6858000"/>
   <p:notesSz cx="6858000" cy="12192000"/>
   <p:defaultTextStyle>
@@ -114,11 +116,6 @@
       </a:defRPr>
     </a:lvl9pPr>
   </p:defaultTextStyle>
-  <p:extLst>
-    <p:ext uri="{EFAFB233-063F-42B5-8137-9DF3F51BA10A}">
-      <p15:sldGuideLst xmlns:p15="http://schemas.microsoft.com/office/powerpoint/2012/main"/>
-    </p:ext>
-  </p:extLst>
 </p:presentation>
 </file>
 
@@ -144,10 +141,234 @@
           <a:chExt cx="0" cy="0"/>
         </a:xfrm>
       </p:grpSpPr>
+      <p:sp>
+        <p:nvSpPr>
+          <p:cNvPr id="2" name="Header Placeholder 1"/>
+          <p:cNvSpPr>
+            <a:spLocks noGrp="1"/>
+          </p:cNvSpPr>
+          <p:nvPr>
+            <p:ph type="hdr" sz="quarter"/>
+          </p:nvPr>
+        </p:nvSpPr>
+        <p:spPr>
+          <a:xfrm>
+            <a:off x="0" y="0"/>
+            <a:ext cx="2971800" cy="458788"/>
+          </a:xfrm>
+          <a:prstGeom prst="rect">
+            <a:avLst/>
+          </a:prstGeom>
+        </p:spPr>
+        <p:txBody>
+          <a:bodyPr vert="horz" lIns="91440" tIns="45720" rIns="91440" bIns="45720" rtlCol="0"/>
+          <a:lstStyle>
+            <a:lvl1pPr algn="l">
+              <a:defRPr sz="1200"/>
+            </a:lvl1pPr>
+          </a:lstStyle>
+          <a:p>
+            <a:endParaRPr lang="en-US"/>
+          </a:p>
+        </p:txBody>
+      </p:sp>
+      <p:sp>
+        <p:nvSpPr>
+          <p:cNvPr id="3" name="Date Placeholder 2"/>
+          <p:cNvSpPr>
+            <a:spLocks noGrp="1"/>
+          </p:cNvSpPr>
+          <p:nvPr>
+            <p:ph type="dt" idx="1"/>
+          </p:nvPr>
+        </p:nvSpPr>
+        <p:spPr>
+          <a:xfrm>
+            <a:off x="3884613" y="0"/>
+            <a:ext cx="2971800" cy="458788"/>
+          </a:xfrm>
+          <a:prstGeom prst="rect">
+            <a:avLst/>
+          </a:prstGeom>
+        </p:spPr>
+        <p:txBody>
+          <a:bodyPr vert="horz" lIns="91440" tIns="45720" rIns="91440" bIns="45720" rtlCol="0"/>
+          <a:lstStyle>
+            <a:lvl1pPr algn="r">
+              <a:defRPr sz="1200"/>
+            </a:lvl1pPr>
+          </a:lstStyle>
+          <a:p>
+            <a:fld id="{5282F153-3F37-0F45-9E97-73ACFA13230C}" type="datetimeFigureOut">
+              <a:rPr lang="en-US"/>
+              <a:t>7/23/19</a:t>
+            </a:fld>
+            <a:endParaRPr lang="en-US"/>
+          </a:p>
+        </p:txBody>
+      </p:sp>
+      <p:sp>
+        <p:nvSpPr>
+          <p:cNvPr id="4" name="Slide Image Placeholder 3"/>
+          <p:cNvSpPr>
+            <a:spLocks noGrp="1" noRot="1" noChangeAspect="1"/>
+          </p:cNvSpPr>
+          <p:nvPr>
+            <p:ph type="sldImg" idx="2"/>
+          </p:nvPr>
+        </p:nvSpPr>
+        <p:spPr>
+          <a:xfrm>
+            <a:off x="685800" y="1143000"/>
+            <a:ext cx="5486400" cy="3086100"/>
+          </a:xfrm>
+          <a:prstGeom prst="rect">
+            <a:avLst/>
+          </a:prstGeom>
+          <a:noFill/>
+          <a:ln w="12700">
+            <a:solidFill>
+              <a:prstClr val="black"/>
+            </a:solidFill>
+          </a:ln>
+        </p:spPr>
+        <p:txBody>
+          <a:bodyPr vert="horz" lIns="91440" tIns="45720" rIns="91440" bIns="45720" rtlCol="0" anchor="ctr"/>
+          <a:lstStyle/>
+          <a:p>
+            <a:endParaRPr lang="en-US"/>
+          </a:p>
+        </p:txBody>
+      </p:sp>
+      <p:sp>
+        <p:nvSpPr>
+          <p:cNvPr id="5" name="Notes Placeholder 4"/>
+          <p:cNvSpPr>
+            <a:spLocks noGrp="1"/>
+          </p:cNvSpPr>
+          <p:nvPr>
+            <p:ph type="body" sz="quarter" idx="3"/>
+          </p:nvPr>
+        </p:nvSpPr>
+        <p:spPr>
+          <a:xfrm>
+            <a:off x="685800" y="4400550"/>
+            <a:ext cx="5486400" cy="3600450"/>
+          </a:xfrm>
+          <a:prstGeom prst="rect">
+            <a:avLst/>
+          </a:prstGeom>
+        </p:spPr>
+        <p:txBody>
+          <a:bodyPr vert="horz" lIns="91440" tIns="45720" rIns="91440" bIns="45720" rtlCol="0"/>
+          <a:lstStyle/>
+          <a:p>
+            <a:pPr lvl="0"/>
+            <a:r>
+              <a:rPr lang="en-US"/>
+              <a:t>Click to edit Master text styles</a:t>
+            </a:r>
+          </a:p>
+          <a:p>
+            <a:pPr lvl="1"/>
+            <a:r>
+              <a:rPr lang="en-US"/>
+              <a:t>Second level</a:t>
+            </a:r>
+          </a:p>
+          <a:p>
+            <a:pPr lvl="2"/>
+            <a:r>
+              <a:rPr lang="en-US"/>
+              <a:t>Third level</a:t>
+            </a:r>
+          </a:p>
+          <a:p>
+            <a:pPr lvl="3"/>
+            <a:r>
+              <a:rPr lang="en-US"/>
+              <a:t>Fourth level</a:t>
+            </a:r>
+          </a:p>
+          <a:p>
+            <a:pPr lvl="4"/>
+            <a:r>
+              <a:rPr lang="en-US"/>
+              <a:t>Fifth level</a:t>
+            </a:r>
+          </a:p>
+        </p:txBody>
+      </p:sp>
+      <p:sp>
+        <p:nvSpPr>
+          <p:cNvPr id="6" name="Footer Placeholder 5"/>
+          <p:cNvSpPr>
+            <a:spLocks noGrp="1"/>
+          </p:cNvSpPr>
+          <p:nvPr>
+            <p:ph type="ftr" sz="quarter" idx="4"/>
+          </p:nvPr>
+        </p:nvSpPr>
+        <p:spPr>
+          <a:xfrm>
+            <a:off x="0" y="8685213"/>
+            <a:ext cx="2971800" cy="458787"/>
+          </a:xfrm>
+          <a:prstGeom prst="rect">
+            <a:avLst/>
+          </a:prstGeom>
+        </p:spPr>
+        <p:txBody>
+          <a:bodyPr vert="horz" lIns="91440" tIns="45720" rIns="91440" bIns="45720" rtlCol="0" anchor="b"/>
+          <a:lstStyle>
+            <a:lvl1pPr algn="l">
+              <a:defRPr sz="1200"/>
+            </a:lvl1pPr>
+          </a:lstStyle>
+          <a:p>
+            <a:endParaRPr lang="en-US"/>
+          </a:p>
+        </p:txBody>
+      </p:sp>
+      <p:sp>
+        <p:nvSpPr>
+          <p:cNvPr id="7" name="Slide Number Placeholder 6"/>
+          <p:cNvSpPr>
+            <a:spLocks noGrp="1"/>
+          </p:cNvSpPr>
+          <p:nvPr>
+            <p:ph type="sldNum" sz="quarter" idx="5"/>
+          </p:nvPr>
+        </p:nvSpPr>
+        <p:spPr>
+          <a:xfrm>
+            <a:off x="3884613" y="8685213"/>
+            <a:ext cx="2971800" cy="458787"/>
+          </a:xfrm>
+          <a:prstGeom prst="rect">
+            <a:avLst/>
+          </a:prstGeom>
+        </p:spPr>
+        <p:txBody>
+          <a:bodyPr vert="horz" lIns="91440" tIns="45720" rIns="91440" bIns="45720" rtlCol="0" anchor="b"/>
+          <a:lstStyle>
+            <a:lvl1pPr algn="r">
+              <a:defRPr sz="1200"/>
+            </a:lvl1pPr>
+          </a:lstStyle>
+          <a:p>
+            <a:fld id="{CE5E9CC1-C706-0F49-92D6-E571CC5EEA8F}" type="slidenum">
+              <a:rPr lang="en-US"/>
+              <a:t>‹#›</a:t>
+            </a:fld>
+            <a:endParaRPr lang="en-US"/>
+          </a:p>
+        </p:txBody>
+      </p:sp>
     </p:spTree>
     <p:extLst>
       <p:ext uri="{BB962C8B-B14F-4D97-AF65-F5344CB8AC3E}">
-        <p14:creationId xmlns:p14="http://schemas.microsoft.com/office/powerpoint/2010/main" val="2831109433"/>
+        <p14:creationId xmlns:p14="http://schemas.microsoft.com/office/powerpoint/2010/main" val="1024086991"/>
       </p:ext>
     </p:extLst>
   </p:cSld>
@@ -295,6 +516,7 @@
               <a:rPr lang="en-US" dirty="0"/>
               <a:t>The deck covers the intended model and the matters to be settled before its construction.</a:t>
             </a:r>
+            <a:endParaRPr lang="en-US" dirty="0"/>
           </a:p>
         </p:txBody>
       </p:sp>
@@ -380,8 +602,9 @@
           <a:p>
             <a:r>
               <a:rPr lang="en-US" dirty="0"/>
-              <a:t>These items determine what the study can be, and the remainder is resolvable by execution. The question of whether the group has its own intentions on the generation side belongs with the preceding slide rather than here.</a:t>
-            </a:r>
+              <a:t>The framing is a response curve over the class of basin. The exact geometry of any proposed structure is neither needed nor used, and the exercise carries no assessment of the project now in consultation. Whether to pursue it at all is the first of the outstanding questions.</a:t>
+            </a:r>
+            <a:endParaRPr lang="en-US" dirty="0"/>
           </a:p>
         </p:txBody>
       </p:sp>
@@ -467,8 +690,9 @@
           <a:p>
             <a:r>
               <a:rPr lang="en-US" dirty="0"/>
-              <a:t>Block B3 loses four working days to Delft and holds fifteen rather than nineteen.</a:t>
-            </a:r>
+              <a:t>A sweep of six speeds by eight directions amounts to forty-eight runs, barotropic and uncoupled, and therefore inexpensive. The sensitivity of the preceding slide is a second evaluation of the same sweep over a modified mouth, which is why it is affordable within the period.</a:t>
+            </a:r>
+            <a:endParaRPr lang="en-US" dirty="0"/>
           </a:p>
         </p:txBody>
       </p:sp>
@@ -490,6 +714,182 @@
             <a:fld id="{F7021451-1387-4CA6-816F-3879F97B5CBC}" type="slidenum">
               <a:rPr lang="en-US"/>
               <a:t>11</a:t>
+            </a:fld>
+            <a:endParaRPr lang="en-US"/>
+          </a:p>
+        </p:txBody>
+      </p:sp>
+    </p:spTree>
+    <p:extLst>
+      <p:ext uri="{BB962C8B-B14F-4D97-AF65-F5344CB8AC3E}">
+        <p14:creationId xmlns:p14="http://schemas.microsoft.com/office/powerpoint/2010/main" val="1024086991"/>
+      </p:ext>
+    </p:extLst>
+  </p:cSld>
+  <p:clrMapOvr>
+    <a:masterClrMapping/>
+  </p:clrMapOvr>
+</p:notes>
+</file>
+
+<file path=ppt/notesSlides/notesSlide12.xml><?xml version="1.0" encoding="utf-8"?>
+<p:notes xmlns:a="http://schemas.openxmlformats.org/drawingml/2006/main" xmlns:r="http://schemas.openxmlformats.org/officeDocument/2006/relationships" xmlns:p="http://schemas.openxmlformats.org/presentationml/2006/main">
+  <p:cSld>
+    <p:spTree>
+      <p:nvGrpSpPr>
+        <p:cNvPr id="1" name=""/>
+        <p:cNvGrpSpPr/>
+        <p:nvPr/>
+      </p:nvGrpSpPr>
+      <p:grpSpPr>
+        <a:xfrm>
+          <a:off x="0" y="0"/>
+          <a:ext cx="0" cy="0"/>
+          <a:chOff x="0" y="0"/>
+          <a:chExt cx="0" cy="0"/>
+        </a:xfrm>
+      </p:grpSpPr>
+      <p:sp>
+        <p:nvSpPr>
+          <p:cNvPr id="2" name="Slide Image Placeholder 1"/>
+          <p:cNvSpPr>
+            <a:spLocks noGrp="1" noRot="1" noChangeAspect="1"/>
+          </p:cNvSpPr>
+          <p:nvPr>
+            <p:ph type="sldImg"/>
+          </p:nvPr>
+        </p:nvSpPr>
+        <p:spPr/>
+      </p:sp>
+      <p:sp>
+        <p:nvSpPr>
+          <p:cNvPr id="3" name="Notes Placeholder 2"/>
+          <p:cNvSpPr>
+            <a:spLocks noGrp="1"/>
+          </p:cNvSpPr>
+          <p:nvPr>
+            <p:ph type="body" idx="1"/>
+          </p:nvPr>
+        </p:nvSpPr>
+        <p:spPr/>
+        <p:txBody>
+          <a:bodyPr/>
+          <a:lstStyle/>
+          <a:p>
+            <a:r>
+              <a:rPr lang="en-US" dirty="0"/>
+              <a:t>These items determine what the study can be, and the remainder is resolvable by execution. One question is dropped from the six because the record now answers it in part: damage inside the port is documented for the wind-wave storms of February 2019 and February 2023, and what remains open is disruption attributable to long waves specifically, held by Transport Malta and the terminals.</a:t>
+            </a:r>
+            <a:endParaRPr lang="en-US" dirty="0"/>
+          </a:p>
+        </p:txBody>
+      </p:sp>
+      <p:sp>
+        <p:nvSpPr>
+          <p:cNvPr id="4" name="Slide Number Placeholder 3"/>
+          <p:cNvSpPr>
+            <a:spLocks noGrp="1"/>
+          </p:cNvSpPr>
+          <p:nvPr>
+            <p:ph type="sldNum" sz="quarter" idx="10"/>
+          </p:nvPr>
+        </p:nvSpPr>
+        <p:spPr/>
+        <p:txBody>
+          <a:bodyPr/>
+          <a:lstStyle/>
+          <a:p>
+            <a:fld id="{F7021451-1387-4CA6-816F-3879F97B5CBC}" type="slidenum">
+              <a:rPr lang="en-US"/>
+              <a:t>12</a:t>
+            </a:fld>
+            <a:endParaRPr lang="en-US"/>
+          </a:p>
+        </p:txBody>
+      </p:sp>
+    </p:spTree>
+    <p:extLst>
+      <p:ext uri="{BB962C8B-B14F-4D97-AF65-F5344CB8AC3E}">
+        <p14:creationId xmlns:p14="http://schemas.microsoft.com/office/powerpoint/2010/main" val="1024086991"/>
+      </p:ext>
+    </p:extLst>
+  </p:cSld>
+  <p:clrMapOvr>
+    <a:masterClrMapping/>
+  </p:clrMapOvr>
+</p:notes>
+</file>
+
+<file path=ppt/notesSlides/notesSlide13.xml><?xml version="1.0" encoding="utf-8"?>
+<p:notes xmlns:a="http://schemas.openxmlformats.org/drawingml/2006/main" xmlns:r="http://schemas.openxmlformats.org/officeDocument/2006/relationships" xmlns:p="http://schemas.openxmlformats.org/presentationml/2006/main">
+  <p:cSld>
+    <p:spTree>
+      <p:nvGrpSpPr>
+        <p:cNvPr id="1" name=""/>
+        <p:cNvGrpSpPr/>
+        <p:nvPr/>
+      </p:nvGrpSpPr>
+      <p:grpSpPr>
+        <a:xfrm>
+          <a:off x="0" y="0"/>
+          <a:ext cx="0" cy="0"/>
+          <a:chOff x="0" y="0"/>
+          <a:chExt cx="0" cy="0"/>
+        </a:xfrm>
+      </p:grpSpPr>
+      <p:sp>
+        <p:nvSpPr>
+          <p:cNvPr id="2" name="Slide Image Placeholder 1"/>
+          <p:cNvSpPr>
+            <a:spLocks noGrp="1" noRot="1" noChangeAspect="1"/>
+          </p:cNvSpPr>
+          <p:nvPr>
+            <p:ph type="sldImg"/>
+          </p:nvPr>
+        </p:nvSpPr>
+        <p:spPr/>
+      </p:sp>
+      <p:sp>
+        <p:nvSpPr>
+          <p:cNvPr id="3" name="Notes Placeholder 2"/>
+          <p:cNvSpPr>
+            <a:spLocks noGrp="1"/>
+          </p:cNvSpPr>
+          <p:nvPr>
+            <p:ph type="body" idx="1"/>
+          </p:nvPr>
+        </p:nvSpPr>
+        <p:spPr/>
+        <p:txBody>
+          <a:bodyPr/>
+          <a:lstStyle/>
+          <a:p>
+            <a:r>
+              <a:rPr lang="en-US" dirty="0"/>
+              <a:t>Block B3 loses four working days to Delft and holds fifteen rather than nineteen. The EDITO deployment is conditional on the configuration proving stable in time, and it belongs to block B6 alongside the integration into the existing ocean.mt portal.</a:t>
+            </a:r>
+            <a:endParaRPr lang="en-US" dirty="0"/>
+          </a:p>
+        </p:txBody>
+      </p:sp>
+      <p:sp>
+        <p:nvSpPr>
+          <p:cNvPr id="4" name="Slide Number Placeholder 3"/>
+          <p:cNvSpPr>
+            <a:spLocks noGrp="1"/>
+          </p:cNvSpPr>
+          <p:nvPr>
+            <p:ph type="sldNum" sz="quarter" idx="10"/>
+          </p:nvPr>
+        </p:nvSpPr>
+        <p:spPr/>
+        <p:txBody>
+          <a:bodyPr/>
+          <a:lstStyle/>
+          <a:p>
+            <a:fld id="{F7021451-1387-4CA6-816F-3879F97B5CBC}" type="slidenum">
+              <a:rPr lang="en-US"/>
+              <a:t>13</a:t>
             </a:fld>
             <a:endParaRPr lang="en-US"/>
           </a:p>
@@ -556,6 +956,7 @@
               <a:rPr lang="en-US" dirty="0"/>
               <a:t>Context. The thesis contribution is framework reusability, and Valletta constitutes the harder test.</a:t>
             </a:r>
+            <a:endParaRPr lang="en-US" dirty="0"/>
           </a:p>
         </p:txBody>
       </p:sp>
@@ -643,6 +1044,7 @@
               <a:rPr lang="en-US" dirty="0"/>
               <a:t>The 10 m data came from the group's own contribution to EMODnet. The public product gives the inlets one to three cells.</a:t>
             </a:r>
+            <a:endParaRPr lang="en-US" dirty="0"/>
           </a:p>
         </p:txBody>
       </p:sp>
@@ -730,6 +1132,7 @@
               <a:rPr lang="en-US" dirty="0"/>
               <a:t>The three-stage chain organises the study and determines the domain.</a:t>
             </a:r>
+            <a:endParaRPr lang="en-US" dirty="0"/>
           </a:p>
         </p:txBody>
       </p:sp>
@@ -815,8 +1218,9 @@
           <a:p>
             <a:r>
               <a:rPr lang="en-US" dirty="0"/>
-              <a:t>The estimate was tested against its two plausible failures, the Helmholtz idealisation and excitation below resonance. The domain follows from this table. Whether the group's harbour records carry energy near 17 minutes is the first outstanding question.</a:t>
-            </a:r>
+              <a:t>The estimate was tested against its two plausible failures, the Helmholtz idealisation and excitation below resonance. The domain follows from this table. One correction is outstanding and it is not conservative: the coastline carries the St Elmo breakwater as a detached polygon of 378 m, so the mouth is not the single 400 m opening assumed, and a smaller section lengthens the period toward the observed band. Whether the group's harbour records carry energy near 17 minutes is the first outstanding question.</a:t>
+            </a:r>
+            <a:endParaRPr lang="en-US" dirty="0"/>
           </a:p>
         </p:txBody>
       </p:sp>
@@ -904,6 +1308,7 @@
               <a:rPr lang="en-US" dirty="0"/>
               <a:t>Domain B, roughly 86 by 66 km, east to 15 degrees, short of the escarpment. Stopping there is also what keeps sigma layers defensible.</a:t>
             </a:r>
+            <a:endParaRPr lang="en-US" dirty="0"/>
           </a:p>
         </p:txBody>
       </p:sp>
@@ -989,8 +1394,9 @@
           <a:p>
             <a:r>
               <a:rPr lang="en-US" dirty="0"/>
-              <a:t>A question for Deltares concerns whether sigma holds from 15 m to 150 m, or whether a z-sigma hybrid is indicated.</a:t>
-            </a:r>
+              <a:t>A question for Deltares concerns whether sigma holds from 15 m to 150 m, or whether a z-sigma hybrid is indicated. The wave nest was sized from the width of the harbour entrances and landed within a quarter of the resolution the group already uses on this coast, which is an independent check on the choice.</a:t>
+            </a:r>
+            <a:endParaRPr lang="en-US" dirty="0"/>
           </a:p>
         </p:txBody>
       </p:sp>
@@ -1076,8 +1482,9 @@
           <a:p>
             <a:r>
               <a:rPr lang="en-US" dirty="0"/>
-              <a:t>The question is a proposal rather than a decision. Whether the group has work of its own planned on the generation side, and how the effort should be divided if so, is worth putting directly. The applied companion is a map of exposure by inlet and quay, and the fallback, with independent value, is harbour renewal under the Water Framework Directive.</a:t>
-            </a:r>
+              <a:t>Nothing here is claimed as a capability the group lacks. The relocatability requirement in the design report corresponds to the framework-transfer argument of the thesis, and the porting log is the evidence for it.</a:t>
+            </a:r>
+            <a:endParaRPr lang="en-US" dirty="0"/>
           </a:p>
         </p:txBody>
       </p:sp>
@@ -1163,8 +1570,9 @@
           <a:p>
             <a:r>
               <a:rPr lang="en-US" dirty="0"/>
-              <a:t>A sweep of six speeds by eight directions amounts to forty-eight runs, barotropic and uncoupled, and therefore inexpensive.</a:t>
-            </a:r>
+              <a:t>The question is a proposal rather than a decision. Whether the group has work of its own planned on the generation side, and how the effort would then be divided, should be put to them directly. The applied companion is a map of exposure by inlet and quay, and the renewal question, treated on the following slides, has independent standing under the Water Framework Directive.</a:t>
+            </a:r>
+            <a:endParaRPr lang="en-US" dirty="0"/>
           </a:p>
         </p:txBody>
       </p:sp>
@@ -1237,11 +1645,6 @@
 <file path=ppt/slideMasters/slideMaster1.xml><?xml version="1.0" encoding="utf-8"?>
 <p:sldMaster xmlns:a="http://schemas.openxmlformats.org/drawingml/2006/main" xmlns:r="http://schemas.openxmlformats.org/officeDocument/2006/relationships" xmlns:p="http://schemas.openxmlformats.org/presentationml/2006/main">
   <p:cSld>
-    <p:bg>
-      <p:bgRef idx="1001">
-        <a:schemeClr val="bg1"/>
-      </p:bgRef>
-    </p:bg>
     <p:spTree>
       <p:nvGrpSpPr>
         <p:cNvPr id="1" name=""/>
@@ -1524,7 +1927,6 @@
         <a:solidFill>
           <a:srgbClr val="21295C"/>
         </a:solidFill>
-        <a:effectLst/>
       </p:bgPr>
     </p:bg>
     <p:spTree>
@@ -1562,13 +1964,6 @@
           </a:solidFill>
           <a:ln/>
         </p:spPr>
-        <p:txBody>
-          <a:bodyPr/>
-          <a:lstStyle/>
-          <a:p>
-            <a:endParaRPr lang="it-IT"/>
-          </a:p>
-        </p:txBody>
       </p:sp>
       <p:sp>
         <p:nvSpPr>
@@ -1591,13 +1986,6 @@
           </a:solidFill>
           <a:ln/>
         </p:spPr>
-        <p:txBody>
-          <a:bodyPr/>
-          <a:lstStyle/>
-          <a:p>
-            <a:endParaRPr lang="it-IT"/>
-          </a:p>
-        </p:txBody>
       </p:sp>
       <p:sp>
         <p:nvSpPr>
@@ -1620,11 +2008,11 @@
           <a:bodyPr wrap="square" lIns="0" tIns="0" rIns="0" bIns="0" rtlCol="0" anchor="ctr"/>
           <a:lstStyle/>
           <a:p>
-            <a:pPr marL="0" indent="0">
+            <a:pPr indent="0" marL="0">
               <a:buNone/>
             </a:pPr>
             <a:r>
-              <a:rPr lang="en-US" sz="1200" b="1" kern="0" spc="200" dirty="0">
+              <a:rPr lang="en-US" sz="1200" b="1" spc="200" kern="0" dirty="0">
                 <a:solidFill>
                   <a:srgbClr val="EB6834"/>
                 </a:solidFill>
@@ -1659,7 +2047,7 @@
           <a:bodyPr wrap="square" lIns="0" tIns="0" rIns="0" bIns="0" rtlCol="0" anchor="ctr"/>
           <a:lstStyle/>
           <a:p>
-            <a:pPr marL="0" indent="0">
+            <a:pPr indent="0" marL="0">
               <a:buNone/>
             </a:pPr>
             <a:r>
@@ -1698,7 +2086,7 @@
           <a:bodyPr wrap="square" lIns="0" tIns="0" rIns="0" bIns="0" rtlCol="0" anchor="ctr"/>
           <a:lstStyle/>
           <a:p>
-            <a:pPr marL="0" indent="0">
+            <a:pPr indent="0" marL="0">
               <a:buNone/>
             </a:pPr>
             <a:r>
@@ -1737,7 +2125,7 @@
           <a:bodyPr wrap="square" lIns="0" tIns="0" rIns="0" bIns="0" rtlCol="0" anchor="ctr"/>
           <a:lstStyle/>
           <a:p>
-            <a:pPr marL="0" indent="0">
+            <a:pPr indent="0" marL="0">
               <a:buNone/>
             </a:pPr>
             <a:r>
@@ -1751,6 +2139,9 @@
               </a:rPr>
               <a:t>Cicero Martins Jr</a:t>
             </a:r>
+            <a:pPr indent="0" marL="0">
+              <a:buNone/>
+            </a:pPr>
             <a:r>
               <a:rPr lang="en-US" sz="1300" dirty="0">
                 <a:solidFill>
@@ -1787,7 +2178,7 @@
           <a:bodyPr wrap="square" lIns="0" tIns="0" rIns="0" bIns="0" rtlCol="0" anchor="ctr"/>
           <a:lstStyle/>
           <a:p>
-            <a:pPr marL="0" indent="0">
+            <a:pPr indent="0" marL="0">
               <a:buNone/>
             </a:pPr>
             <a:r>
@@ -1826,7 +2217,7 @@
           <a:bodyPr wrap="square" lIns="0" tIns="0" rIns="0" bIns="0" rtlCol="0" anchor="ctr"/>
           <a:lstStyle/>
           <a:p>
-            <a:pPr marL="0" indent="0">
+            <a:pPr indent="0" marL="0">
               <a:buNone/>
             </a:pPr>
             <a:r>
@@ -1890,11 +2281,11 @@
           <a:bodyPr wrap="square" lIns="0" tIns="0" rIns="0" bIns="0" rtlCol="0" anchor="ctr"/>
           <a:lstStyle/>
           <a:p>
-            <a:pPr marL="0" indent="0">
+            <a:pPr indent="0" marL="0">
               <a:buNone/>
             </a:pPr>
             <a:r>
-              <a:rPr lang="en-US" sz="1200" b="1" kern="0" spc="200" dirty="0">
+              <a:rPr lang="en-US" sz="1200" b="1" spc="200" kern="0" dirty="0">
                 <a:solidFill>
                   <a:srgbClr val="EB6834"/>
                 </a:solidFill>
@@ -1902,7 +2293,7 @@
                 <a:ea typeface="Calibri" pitchFamily="34" charset="-122"/>
                 <a:cs typeface="Calibri" pitchFamily="34" charset="-120"/>
               </a:rPr>
-              <a:t>OUTSTANDING QUESTIONS</a:t>
+              <a:t>A SECOND QUESTION</a:t>
             </a:r>
             <a:endParaRPr lang="en-US" sz="1200" dirty="0"/>
           </a:p>
@@ -1929,7 +2320,7 @@
           <a:bodyPr wrap="square" lIns="0" tIns="0" rIns="0" bIns="0" rtlCol="0" anchor="ctr"/>
           <a:lstStyle/>
           <a:p>
-            <a:pPr marL="0" indent="0">
+            <a:pPr indent="0" marL="0">
               <a:buNone/>
             </a:pPr>
             <a:r>
@@ -1941,7 +2332,7 @@
                 <a:ea typeface="Cambria" pitchFamily="34" charset="-122"/>
                 <a:cs typeface="Cambria" pitchFamily="34" charset="-120"/>
               </a:rPr>
-              <a:t>Six questions and their bearing on the study</a:t>
+              <a:t>The basin is sensitive to the geometry of its mouth</a:t>
             </a:r>
             <a:endParaRPr lang="en-US" sz="3200" dirty="0"/>
           </a:p>
@@ -1949,41 +2340,14 @@
       </p:sp>
       <p:sp>
         <p:nvSpPr>
-          <p:cNvPr id="4" name="Shape 2"/>
-          <p:cNvSpPr/>
-          <p:nvPr/>
-        </p:nvSpPr>
-        <p:spPr>
-          <a:xfrm>
-            <a:off x="566928" y="1874520"/>
-            <a:ext cx="402336" cy="402336"/>
-          </a:xfrm>
-          <a:prstGeom prst="ellipse">
-            <a:avLst/>
-          </a:prstGeom>
-          <a:solidFill>
-            <a:srgbClr val="065A82"/>
-          </a:solidFill>
-          <a:ln/>
-        </p:spPr>
-        <p:txBody>
-          <a:bodyPr/>
-          <a:lstStyle/>
-          <a:p>
-            <a:endParaRPr lang="it-IT"/>
-          </a:p>
-        </p:txBody>
-      </p:sp>
-      <p:sp>
-        <p:nvSpPr>
-          <p:cNvPr id="5" name="Text 3"/>
+          <p:cNvPr id="4" name="Text 2"/>
           <p:cNvSpPr txBox="1"/>
           <p:nvPr/>
         </p:nvSpPr>
         <p:spPr>
           <a:xfrm>
-            <a:off x="566928" y="1874520"/>
-            <a:ext cx="402336" cy="402336"/>
+            <a:off x="566928" y="1408176"/>
+            <a:ext cx="10881360" cy="585216"/>
           </a:xfrm>
           <a:prstGeom prst="rect">
             <a:avLst/>
@@ -1995,34 +2359,1095 @@
           <a:bodyPr wrap="square" lIns="0" tIns="0" rIns="0" bIns="0" rtlCol="0" anchor="ctr"/>
           <a:lstStyle/>
           <a:p>
-            <a:pPr marL="0" indent="0" algn="ctr">
+            <a:pPr indent="0" marL="0">
               <a:buNone/>
             </a:pPr>
             <a:r>
-              <a:rPr lang="en-US" sz="1500" b="1" dirty="0">
-                <a:solidFill>
-                  <a:srgbClr val="FFFFFF"/>
+              <a:rPr lang="en-US" sz="1400" dirty="0">
+                <a:solidFill>
+                  <a:srgbClr val="5F6368"/>
                 </a:solidFill>
                 <a:latin typeface="Calibri" pitchFamily="34" charset="0"/>
                 <a:ea typeface="Calibri" pitchFamily="34" charset="-122"/>
                 <a:cs typeface="Calibri" pitchFamily="34" charset="-120"/>
               </a:rPr>
-              <a:t>1</a:t>
-            </a:r>
-            <a:endParaRPr lang="en-US" sz="1500" dirty="0"/>
-          </a:p>
-        </p:txBody>
-      </p:sp>
-      <p:sp>
-        <p:nvSpPr>
-          <p:cNvPr id="6" name="Text 4"/>
+              <a:t>An academic sensitivity on the class of basin, put to the group for judgement. No particular design is represented.</a:t>
+            </a:r>
+            <a:endParaRPr lang="en-US" sz="1400" dirty="0"/>
+          </a:p>
+        </p:txBody>
+      </p:sp>
+      <p:graphicFrame>
+        <p:nvGraphicFramePr>
+          <p:cNvPr id="11" name="Table 0"/>
+          <p:cNvGraphicFramePr>
+            <a:graphicFrameLocks noGrp="1"/>
+          </p:cNvGraphicFramePr>
+          <p:nvPr>
+            <p:extLst>
+              <p:ext uri="{D42A27DB-BD31-4B8C-83A1-F6EECF244321}">
+                <p14:modId xmlns:p14="http://schemas.microsoft.com/office/powerpoint/2010/main" val="1579011935"/>
+              </p:ext>
+            </p:extLst>
+          </p:nvPr>
+        </p:nvGraphicFramePr>
+        <p:xfrm>
+          <a:off x="566928" y="2286000"/>
+          <a:ext cx="6492240" cy="914400"/>
+        </p:xfrm>
+        <a:graphic>
+          <a:graphicData uri="http://schemas.openxmlformats.org/drawingml/2006/table">
+            <a:tbl>
+              <a:tblPr/>
+              <a:tblGrid>
+                <a:gridCol w="2834640"/>
+                <a:gridCol w="2011680"/>
+                <a:gridCol w="1645920"/>
+              </a:tblGrid>
+              <a:tr h="365760">
+                <a:tc>
+                  <a:txBody>
+                    <a:bodyPr/>
+                    <a:lstStyle/>
+                    <a:p>
+                      <a:pPr algn="l" indent="0" marL="0">
+                        <a:buNone/>
+                      </a:pPr>
+                      <a:r>
+                        <a:rPr lang="en-US" sz="1200" b="1" dirty="0">
+                          <a:solidFill>
+                            <a:srgbClr val="FFFFFF"/>
+                          </a:solidFill>
+                          <a:latin typeface="Calibri" pitchFamily="34" charset="0"/>
+                          <a:ea typeface="Calibri" pitchFamily="34" charset="-122"/>
+                          <a:cs typeface="Calibri" pitchFamily="34" charset="-120"/>
+                        </a:rPr>
+                        <a:t>Restriction of the mouth section</a:t>
+                      </a:r>
+                      <a:endParaRPr lang="en-US" sz="1200" dirty="0">
+                        <a:latin typeface="Calibri" charset="0"/>
+                        <a:ea typeface="Calibri" charset="0"/>
+                        <a:cs typeface="Calibri" charset="0"/>
+                      </a:endParaRPr>
+                    </a:p>
+                  </a:txBody>
+                  <a:tcPr marL="91440" marR="91440" marT="45720" marB="45720" anchor="ctr">
+                    <a:lnL w="6350" cap="flat" cmpd="sng" algn="ctr">
+                      <a:solidFill>
+                        <a:srgbClr val="E2E8EC"/>
+                      </a:solidFill>
+                      <a:prstDash val="solid"/>
+                      <a:round/>
+                      <a:headEnd type="none" w="med" len="med"/>
+                      <a:tailEnd type="none" w="med" len="med"/>
+                    </a:lnL>
+                    <a:lnR w="6350" cap="flat" cmpd="sng" algn="ctr">
+                      <a:solidFill>
+                        <a:srgbClr val="E2E8EC"/>
+                      </a:solidFill>
+                      <a:prstDash val="solid"/>
+                      <a:round/>
+                      <a:headEnd type="none" w="med" len="med"/>
+                      <a:tailEnd type="none" w="med" len="med"/>
+                    </a:lnR>
+                    <a:lnT w="6350" cap="flat" cmpd="sng" algn="ctr">
+                      <a:solidFill>
+                        <a:srgbClr val="E2E8EC"/>
+                      </a:solidFill>
+                      <a:prstDash val="solid"/>
+                      <a:round/>
+                      <a:headEnd type="none" w="med" len="med"/>
+                      <a:tailEnd type="none" w="med" len="med"/>
+                    </a:lnT>
+                    <a:lnB w="6350" cap="flat" cmpd="sng" algn="ctr">
+                      <a:solidFill>
+                        <a:srgbClr val="E2E8EC"/>
+                      </a:solidFill>
+                      <a:prstDash val="solid"/>
+                      <a:round/>
+                      <a:headEnd type="none" w="med" len="med"/>
+                      <a:tailEnd type="none" w="med" len="med"/>
+                    </a:lnB>
+                    <a:solidFill>
+                      <a:srgbClr val="065A82"/>
+                    </a:solidFill>
+                  </a:tcPr>
+                </a:tc>
+                <a:tc>
+                  <a:txBody>
+                    <a:bodyPr/>
+                    <a:lstStyle/>
+                    <a:p>
+                      <a:pPr algn="r" indent="0" marL="0">
+                        <a:buNone/>
+                      </a:pPr>
+                      <a:r>
+                        <a:rPr lang="en-US" sz="1200" b="1" dirty="0">
+                          <a:solidFill>
+                            <a:srgbClr val="FFFFFF"/>
+                          </a:solidFill>
+                          <a:latin typeface="Calibri" pitchFamily="34" charset="0"/>
+                          <a:ea typeface="Calibri" pitchFamily="34" charset="-122"/>
+                          <a:cs typeface="Calibri" pitchFamily="34" charset="-120"/>
+                        </a:rPr>
+                        <a:t>Pumping period</a:t>
+                      </a:r>
+                      <a:endParaRPr lang="en-US" sz="1200" dirty="0">
+                        <a:latin typeface="Calibri" charset="0"/>
+                        <a:ea typeface="Calibri" charset="0"/>
+                        <a:cs typeface="Calibri" charset="0"/>
+                      </a:endParaRPr>
+                    </a:p>
+                  </a:txBody>
+                  <a:tcPr marL="91440" marR="91440" marT="45720" marB="45720" anchor="ctr">
+                    <a:lnL w="6350" cap="flat" cmpd="sng" algn="ctr">
+                      <a:solidFill>
+                        <a:srgbClr val="E2E8EC"/>
+                      </a:solidFill>
+                      <a:prstDash val="solid"/>
+                      <a:round/>
+                      <a:headEnd type="none" w="med" len="med"/>
+                      <a:tailEnd type="none" w="med" len="med"/>
+                    </a:lnL>
+                    <a:lnR w="6350" cap="flat" cmpd="sng" algn="ctr">
+                      <a:solidFill>
+                        <a:srgbClr val="E2E8EC"/>
+                      </a:solidFill>
+                      <a:prstDash val="solid"/>
+                      <a:round/>
+                      <a:headEnd type="none" w="med" len="med"/>
+                      <a:tailEnd type="none" w="med" len="med"/>
+                    </a:lnR>
+                    <a:lnT w="6350" cap="flat" cmpd="sng" algn="ctr">
+                      <a:solidFill>
+                        <a:srgbClr val="E2E8EC"/>
+                      </a:solidFill>
+                      <a:prstDash val="solid"/>
+                      <a:round/>
+                      <a:headEnd type="none" w="med" len="med"/>
+                      <a:tailEnd type="none" w="med" len="med"/>
+                    </a:lnT>
+                    <a:lnB w="6350" cap="flat" cmpd="sng" algn="ctr">
+                      <a:solidFill>
+                        <a:srgbClr val="E2E8EC"/>
+                      </a:solidFill>
+                      <a:prstDash val="solid"/>
+                      <a:round/>
+                      <a:headEnd type="none" w="med" len="med"/>
+                      <a:tailEnd type="none" w="med" len="med"/>
+                    </a:lnB>
+                    <a:solidFill>
+                      <a:srgbClr val="065A82"/>
+                    </a:solidFill>
+                  </a:tcPr>
+                </a:tc>
+                <a:tc>
+                  <a:txBody>
+                    <a:bodyPr/>
+                    <a:lstStyle/>
+                    <a:p>
+                      <a:pPr algn="r" indent="0" marL="0">
+                        <a:buNone/>
+                      </a:pPr>
+                      <a:r>
+                        <a:rPr lang="en-US" sz="1200" b="1" dirty="0">
+                          <a:solidFill>
+                            <a:srgbClr val="FFFFFF"/>
+                          </a:solidFill>
+                          <a:latin typeface="Calibri" pitchFamily="34" charset="0"/>
+                          <a:ea typeface="Calibri" pitchFamily="34" charset="-122"/>
+                          <a:cs typeface="Calibri" pitchFamily="34" charset="-120"/>
+                        </a:rPr>
+                        <a:t>Grand Harbour</a:t>
+                      </a:r>
+                      <a:endParaRPr lang="en-US" sz="1200" dirty="0">
+                        <a:latin typeface="Calibri" charset="0"/>
+                        <a:ea typeface="Calibri" charset="0"/>
+                        <a:cs typeface="Calibri" charset="0"/>
+                      </a:endParaRPr>
+                    </a:p>
+                  </a:txBody>
+                  <a:tcPr marL="91440" marR="91440" marT="45720" marB="45720" anchor="ctr">
+                    <a:lnL w="6350" cap="flat" cmpd="sng" algn="ctr">
+                      <a:solidFill>
+                        <a:srgbClr val="E2E8EC"/>
+                      </a:solidFill>
+                      <a:prstDash val="solid"/>
+                      <a:round/>
+                      <a:headEnd type="none" w="med" len="med"/>
+                      <a:tailEnd type="none" w="med" len="med"/>
+                    </a:lnL>
+                    <a:lnR w="6350" cap="flat" cmpd="sng" algn="ctr">
+                      <a:solidFill>
+                        <a:srgbClr val="E2E8EC"/>
+                      </a:solidFill>
+                      <a:prstDash val="solid"/>
+                      <a:round/>
+                      <a:headEnd type="none" w="med" len="med"/>
+                      <a:tailEnd type="none" w="med" len="med"/>
+                    </a:lnR>
+                    <a:lnT w="6350" cap="flat" cmpd="sng" algn="ctr">
+                      <a:solidFill>
+                        <a:srgbClr val="E2E8EC"/>
+                      </a:solidFill>
+                      <a:prstDash val="solid"/>
+                      <a:round/>
+                      <a:headEnd type="none" w="med" len="med"/>
+                      <a:tailEnd type="none" w="med" len="med"/>
+                    </a:lnT>
+                    <a:lnB w="6350" cap="flat" cmpd="sng" algn="ctr">
+                      <a:solidFill>
+                        <a:srgbClr val="E2E8EC"/>
+                      </a:solidFill>
+                      <a:prstDash val="solid"/>
+                      <a:round/>
+                      <a:headEnd type="none" w="med" len="med"/>
+                      <a:tailEnd type="none" w="med" len="med"/>
+                    </a:lnB>
+                    <a:solidFill>
+                      <a:srgbClr val="065A82"/>
+                    </a:solidFill>
+                  </a:tcPr>
+                </a:tc>
+              </a:tr>
+              <a:tr h="365760">
+                <a:tc>
+                  <a:txBody>
+                    <a:bodyPr/>
+                    <a:lstStyle/>
+                    <a:p>
+                      <a:pPr algn="l" indent="0" marL="0">
+                        <a:buNone/>
+                      </a:pPr>
+                      <a:r>
+                        <a:rPr lang="en-US" sz="1200" b="1" dirty="0">
+                          <a:solidFill>
+                            <a:srgbClr val="1A1A1A"/>
+                          </a:solidFill>
+                          <a:latin typeface="Calibri" pitchFamily="34" charset="0"/>
+                          <a:ea typeface="Calibri" pitchFamily="34" charset="-122"/>
+                          <a:cs typeface="Calibri" pitchFamily="34" charset="-120"/>
+                        </a:rPr>
+                        <a:t>none</a:t>
+                      </a:r>
+                      <a:endParaRPr lang="en-US" sz="1200" dirty="0">
+                        <a:latin typeface="Calibri" charset="0"/>
+                        <a:ea typeface="Calibri" charset="0"/>
+                        <a:cs typeface="Calibri" charset="0"/>
+                      </a:endParaRPr>
+                    </a:p>
+                  </a:txBody>
+                  <a:tcPr marL="91440" marR="91440" marT="45720" marB="45720" anchor="ctr">
+                    <a:lnL w="6350" cap="flat" cmpd="sng" algn="ctr">
+                      <a:solidFill>
+                        <a:srgbClr val="E2E8EC"/>
+                      </a:solidFill>
+                      <a:prstDash val="solid"/>
+                      <a:round/>
+                      <a:headEnd type="none" w="med" len="med"/>
+                      <a:tailEnd type="none" w="med" len="med"/>
+                    </a:lnL>
+                    <a:lnR w="6350" cap="flat" cmpd="sng" algn="ctr">
+                      <a:solidFill>
+                        <a:srgbClr val="E2E8EC"/>
+                      </a:solidFill>
+                      <a:prstDash val="solid"/>
+                      <a:round/>
+                      <a:headEnd type="none" w="med" len="med"/>
+                      <a:tailEnd type="none" w="med" len="med"/>
+                    </a:lnR>
+                    <a:lnT w="6350" cap="flat" cmpd="sng" algn="ctr">
+                      <a:solidFill>
+                        <a:srgbClr val="E2E8EC"/>
+                      </a:solidFill>
+                      <a:prstDash val="solid"/>
+                      <a:round/>
+                      <a:headEnd type="none" w="med" len="med"/>
+                      <a:tailEnd type="none" w="med" len="med"/>
+                    </a:lnT>
+                    <a:lnB w="6350" cap="flat" cmpd="sng" algn="ctr">
+                      <a:solidFill>
+                        <a:srgbClr val="E2E8EC"/>
+                      </a:solidFill>
+                      <a:prstDash val="solid"/>
+                      <a:round/>
+                      <a:headEnd type="none" w="med" len="med"/>
+                      <a:tailEnd type="none" w="med" len="med"/>
+                    </a:lnB>
+                    <a:solidFill>
+                      <a:srgbClr val="FFFFFF"/>
+                    </a:solidFill>
+                  </a:tcPr>
+                </a:tc>
+                <a:tc>
+                  <a:txBody>
+                    <a:bodyPr/>
+                    <a:lstStyle/>
+                    <a:p>
+                      <a:pPr algn="r" indent="0" marL="0">
+                        <a:buNone/>
+                      </a:pPr>
+                      <a:r>
+                        <a:rPr lang="en-US" sz="1200" dirty="0">
+                          <a:solidFill>
+                            <a:srgbClr val="1A1A1A"/>
+                          </a:solidFill>
+                          <a:latin typeface="Calibri" pitchFamily="34" charset="0"/>
+                          <a:ea typeface="Calibri" pitchFamily="34" charset="-122"/>
+                          <a:cs typeface="Calibri" pitchFamily="34" charset="-120"/>
+                        </a:rPr>
+                        <a:t>reference</a:t>
+                      </a:r>
+                      <a:endParaRPr lang="en-US" sz="1200" dirty="0">
+                        <a:latin typeface="Calibri" charset="0"/>
+                        <a:ea typeface="Calibri" charset="0"/>
+                        <a:cs typeface="Calibri" charset="0"/>
+                      </a:endParaRPr>
+                    </a:p>
+                  </a:txBody>
+                  <a:tcPr marL="91440" marR="91440" marT="45720" marB="45720" anchor="ctr">
+                    <a:lnL w="6350" cap="flat" cmpd="sng" algn="ctr">
+                      <a:solidFill>
+                        <a:srgbClr val="E2E8EC"/>
+                      </a:solidFill>
+                      <a:prstDash val="solid"/>
+                      <a:round/>
+                      <a:headEnd type="none" w="med" len="med"/>
+                      <a:tailEnd type="none" w="med" len="med"/>
+                    </a:lnL>
+                    <a:lnR w="6350" cap="flat" cmpd="sng" algn="ctr">
+                      <a:solidFill>
+                        <a:srgbClr val="E2E8EC"/>
+                      </a:solidFill>
+                      <a:prstDash val="solid"/>
+                      <a:round/>
+                      <a:headEnd type="none" w="med" len="med"/>
+                      <a:tailEnd type="none" w="med" len="med"/>
+                    </a:lnR>
+                    <a:lnT w="6350" cap="flat" cmpd="sng" algn="ctr">
+                      <a:solidFill>
+                        <a:srgbClr val="E2E8EC"/>
+                      </a:solidFill>
+                      <a:prstDash val="solid"/>
+                      <a:round/>
+                      <a:headEnd type="none" w="med" len="med"/>
+                      <a:tailEnd type="none" w="med" len="med"/>
+                    </a:lnT>
+                    <a:lnB w="6350" cap="flat" cmpd="sng" algn="ctr">
+                      <a:solidFill>
+                        <a:srgbClr val="E2E8EC"/>
+                      </a:solidFill>
+                      <a:prstDash val="solid"/>
+                      <a:round/>
+                      <a:headEnd type="none" w="med" len="med"/>
+                      <a:tailEnd type="none" w="med" len="med"/>
+                    </a:lnB>
+                    <a:solidFill>
+                      <a:srgbClr val="FFFFFF"/>
+                    </a:solidFill>
+                  </a:tcPr>
+                </a:tc>
+                <a:tc>
+                  <a:txBody>
+                    <a:bodyPr/>
+                    <a:lstStyle/>
+                    <a:p>
+                      <a:pPr algn="r" indent="0" marL="0">
+                        <a:buNone/>
+                      </a:pPr>
+                      <a:r>
+                        <a:rPr lang="en-US" sz="1200" dirty="0">
+                          <a:solidFill>
+                            <a:srgbClr val="1A1A1A"/>
+                          </a:solidFill>
+                          <a:latin typeface="Calibri" pitchFamily="34" charset="0"/>
+                          <a:ea typeface="Calibri" pitchFamily="34" charset="-122"/>
+                          <a:cs typeface="Calibri" pitchFamily="34" charset="-120"/>
+                        </a:rPr>
+                        <a:t>12.4 to 17.5 min</a:t>
+                      </a:r>
+                      <a:endParaRPr lang="en-US" sz="1200" dirty="0">
+                        <a:latin typeface="Calibri" charset="0"/>
+                        <a:ea typeface="Calibri" charset="0"/>
+                        <a:cs typeface="Calibri" charset="0"/>
+                      </a:endParaRPr>
+                    </a:p>
+                  </a:txBody>
+                  <a:tcPr marL="91440" marR="91440" marT="45720" marB="45720" anchor="ctr">
+                    <a:lnL w="6350" cap="flat" cmpd="sng" algn="ctr">
+                      <a:solidFill>
+                        <a:srgbClr val="E2E8EC"/>
+                      </a:solidFill>
+                      <a:prstDash val="solid"/>
+                      <a:round/>
+                      <a:headEnd type="none" w="med" len="med"/>
+                      <a:tailEnd type="none" w="med" len="med"/>
+                    </a:lnL>
+                    <a:lnR w="6350" cap="flat" cmpd="sng" algn="ctr">
+                      <a:solidFill>
+                        <a:srgbClr val="E2E8EC"/>
+                      </a:solidFill>
+                      <a:prstDash val="solid"/>
+                      <a:round/>
+                      <a:headEnd type="none" w="med" len="med"/>
+                      <a:tailEnd type="none" w="med" len="med"/>
+                    </a:lnR>
+                    <a:lnT w="6350" cap="flat" cmpd="sng" algn="ctr">
+                      <a:solidFill>
+                        <a:srgbClr val="E2E8EC"/>
+                      </a:solidFill>
+                      <a:prstDash val="solid"/>
+                      <a:round/>
+                      <a:headEnd type="none" w="med" len="med"/>
+                      <a:tailEnd type="none" w="med" len="med"/>
+                    </a:lnT>
+                    <a:lnB w="6350" cap="flat" cmpd="sng" algn="ctr">
+                      <a:solidFill>
+                        <a:srgbClr val="E2E8EC"/>
+                      </a:solidFill>
+                      <a:prstDash val="solid"/>
+                      <a:round/>
+                      <a:headEnd type="none" w="med" len="med"/>
+                      <a:tailEnd type="none" w="med" len="med"/>
+                    </a:lnB>
+                    <a:solidFill>
+                      <a:srgbClr val="FFFFFF"/>
+                    </a:solidFill>
+                  </a:tcPr>
+                </a:tc>
+              </a:tr>
+              <a:tr h="365760">
+                <a:tc>
+                  <a:txBody>
+                    <a:bodyPr/>
+                    <a:lstStyle/>
+                    <a:p>
+                      <a:pPr algn="l" indent="0" marL="0">
+                        <a:buNone/>
+                      </a:pPr>
+                      <a:r>
+                        <a:rPr lang="en-US" sz="1200" b="1" dirty="0">
+                          <a:solidFill>
+                            <a:srgbClr val="1A1A1A"/>
+                          </a:solidFill>
+                          <a:latin typeface="Calibri" pitchFamily="34" charset="0"/>
+                          <a:ea typeface="Calibri" pitchFamily="34" charset="-122"/>
+                          <a:cs typeface="Calibri" pitchFamily="34" charset="-120"/>
+                        </a:rPr>
+                        <a:t>25 per cent</a:t>
+                      </a:r>
+                      <a:endParaRPr lang="en-US" sz="1200" dirty="0">
+                        <a:latin typeface="Calibri" charset="0"/>
+                        <a:ea typeface="Calibri" charset="0"/>
+                        <a:cs typeface="Calibri" charset="0"/>
+                      </a:endParaRPr>
+                    </a:p>
+                  </a:txBody>
+                  <a:tcPr marL="91440" marR="91440" marT="45720" marB="45720" anchor="ctr">
+                    <a:lnL w="6350" cap="flat" cmpd="sng" algn="ctr">
+                      <a:solidFill>
+                        <a:srgbClr val="E2E8EC"/>
+                      </a:solidFill>
+                      <a:prstDash val="solid"/>
+                      <a:round/>
+                      <a:headEnd type="none" w="med" len="med"/>
+                      <a:tailEnd type="none" w="med" len="med"/>
+                    </a:lnL>
+                    <a:lnR w="6350" cap="flat" cmpd="sng" algn="ctr">
+                      <a:solidFill>
+                        <a:srgbClr val="E2E8EC"/>
+                      </a:solidFill>
+                      <a:prstDash val="solid"/>
+                      <a:round/>
+                      <a:headEnd type="none" w="med" len="med"/>
+                      <a:tailEnd type="none" w="med" len="med"/>
+                    </a:lnR>
+                    <a:lnT w="6350" cap="flat" cmpd="sng" algn="ctr">
+                      <a:solidFill>
+                        <a:srgbClr val="E2E8EC"/>
+                      </a:solidFill>
+                      <a:prstDash val="solid"/>
+                      <a:round/>
+                      <a:headEnd type="none" w="med" len="med"/>
+                      <a:tailEnd type="none" w="med" len="med"/>
+                    </a:lnT>
+                    <a:lnB w="6350" cap="flat" cmpd="sng" algn="ctr">
+                      <a:solidFill>
+                        <a:srgbClr val="E2E8EC"/>
+                      </a:solidFill>
+                      <a:prstDash val="solid"/>
+                      <a:round/>
+                      <a:headEnd type="none" w="med" len="med"/>
+                      <a:tailEnd type="none" w="med" len="med"/>
+                    </a:lnB>
+                    <a:solidFill>
+                      <a:srgbClr val="EEF3F6"/>
+                    </a:solidFill>
+                  </a:tcPr>
+                </a:tc>
+                <a:tc>
+                  <a:txBody>
+                    <a:bodyPr/>
+                    <a:lstStyle/>
+                    <a:p>
+                      <a:pPr algn="r" indent="0" marL="0">
+                        <a:buNone/>
+                      </a:pPr>
+                      <a:r>
+                        <a:rPr lang="en-US" sz="1200" dirty="0">
+                          <a:solidFill>
+                            <a:srgbClr val="1A1A1A"/>
+                          </a:solidFill>
+                          <a:latin typeface="Calibri" pitchFamily="34" charset="0"/>
+                          <a:ea typeface="Calibri" pitchFamily="34" charset="-122"/>
+                          <a:cs typeface="Calibri" pitchFamily="34" charset="-120"/>
+                        </a:rPr>
+                        <a:t>+15.5 %</a:t>
+                      </a:r>
+                      <a:endParaRPr lang="en-US" sz="1200" dirty="0">
+                        <a:latin typeface="Calibri" charset="0"/>
+                        <a:ea typeface="Calibri" charset="0"/>
+                        <a:cs typeface="Calibri" charset="0"/>
+                      </a:endParaRPr>
+                    </a:p>
+                  </a:txBody>
+                  <a:tcPr marL="91440" marR="91440" marT="45720" marB="45720" anchor="ctr">
+                    <a:lnL w="6350" cap="flat" cmpd="sng" algn="ctr">
+                      <a:solidFill>
+                        <a:srgbClr val="E2E8EC"/>
+                      </a:solidFill>
+                      <a:prstDash val="solid"/>
+                      <a:round/>
+                      <a:headEnd type="none" w="med" len="med"/>
+                      <a:tailEnd type="none" w="med" len="med"/>
+                    </a:lnL>
+                    <a:lnR w="6350" cap="flat" cmpd="sng" algn="ctr">
+                      <a:solidFill>
+                        <a:srgbClr val="E2E8EC"/>
+                      </a:solidFill>
+                      <a:prstDash val="solid"/>
+                      <a:round/>
+                      <a:headEnd type="none" w="med" len="med"/>
+                      <a:tailEnd type="none" w="med" len="med"/>
+                    </a:lnR>
+                    <a:lnT w="6350" cap="flat" cmpd="sng" algn="ctr">
+                      <a:solidFill>
+                        <a:srgbClr val="E2E8EC"/>
+                      </a:solidFill>
+                      <a:prstDash val="solid"/>
+                      <a:round/>
+                      <a:headEnd type="none" w="med" len="med"/>
+                      <a:tailEnd type="none" w="med" len="med"/>
+                    </a:lnT>
+                    <a:lnB w="6350" cap="flat" cmpd="sng" algn="ctr">
+                      <a:solidFill>
+                        <a:srgbClr val="E2E8EC"/>
+                      </a:solidFill>
+                      <a:prstDash val="solid"/>
+                      <a:round/>
+                      <a:headEnd type="none" w="med" len="med"/>
+                      <a:tailEnd type="none" w="med" len="med"/>
+                    </a:lnB>
+                    <a:solidFill>
+                      <a:srgbClr val="EEF3F6"/>
+                    </a:solidFill>
+                  </a:tcPr>
+                </a:tc>
+                <a:tc>
+                  <a:txBody>
+                    <a:bodyPr/>
+                    <a:lstStyle/>
+                    <a:p>
+                      <a:pPr algn="r" indent="0" marL="0">
+                        <a:buNone/>
+                      </a:pPr>
+                      <a:r>
+                        <a:rPr lang="en-US" sz="1200" dirty="0">
+                          <a:solidFill>
+                            <a:srgbClr val="1A1A1A"/>
+                          </a:solidFill>
+                          <a:latin typeface="Calibri" pitchFamily="34" charset="0"/>
+                          <a:ea typeface="Calibri" pitchFamily="34" charset="-122"/>
+                          <a:cs typeface="Calibri" pitchFamily="34" charset="-120"/>
+                        </a:rPr>
+                        <a:t>14.3 to 20.2 min</a:t>
+                      </a:r>
+                      <a:endParaRPr lang="en-US" sz="1200" dirty="0">
+                        <a:latin typeface="Calibri" charset="0"/>
+                        <a:ea typeface="Calibri" charset="0"/>
+                        <a:cs typeface="Calibri" charset="0"/>
+                      </a:endParaRPr>
+                    </a:p>
+                  </a:txBody>
+                  <a:tcPr marL="91440" marR="91440" marT="45720" marB="45720" anchor="ctr">
+                    <a:lnL w="6350" cap="flat" cmpd="sng" algn="ctr">
+                      <a:solidFill>
+                        <a:srgbClr val="E2E8EC"/>
+                      </a:solidFill>
+                      <a:prstDash val="solid"/>
+                      <a:round/>
+                      <a:headEnd type="none" w="med" len="med"/>
+                      <a:tailEnd type="none" w="med" len="med"/>
+                    </a:lnL>
+                    <a:lnR w="6350" cap="flat" cmpd="sng" algn="ctr">
+                      <a:solidFill>
+                        <a:srgbClr val="E2E8EC"/>
+                      </a:solidFill>
+                      <a:prstDash val="solid"/>
+                      <a:round/>
+                      <a:headEnd type="none" w="med" len="med"/>
+                      <a:tailEnd type="none" w="med" len="med"/>
+                    </a:lnR>
+                    <a:lnT w="6350" cap="flat" cmpd="sng" algn="ctr">
+                      <a:solidFill>
+                        <a:srgbClr val="E2E8EC"/>
+                      </a:solidFill>
+                      <a:prstDash val="solid"/>
+                      <a:round/>
+                      <a:headEnd type="none" w="med" len="med"/>
+                      <a:tailEnd type="none" w="med" len="med"/>
+                    </a:lnT>
+                    <a:lnB w="6350" cap="flat" cmpd="sng" algn="ctr">
+                      <a:solidFill>
+                        <a:srgbClr val="E2E8EC"/>
+                      </a:solidFill>
+                      <a:prstDash val="solid"/>
+                      <a:round/>
+                      <a:headEnd type="none" w="med" len="med"/>
+                      <a:tailEnd type="none" w="med" len="med"/>
+                    </a:lnB>
+                    <a:solidFill>
+                      <a:srgbClr val="EEF3F6"/>
+                    </a:solidFill>
+                  </a:tcPr>
+                </a:tc>
+              </a:tr>
+              <a:tr h="365760">
+                <a:tc>
+                  <a:txBody>
+                    <a:bodyPr/>
+                    <a:lstStyle/>
+                    <a:p>
+                      <a:pPr algn="l" indent="0" marL="0">
+                        <a:buNone/>
+                      </a:pPr>
+                      <a:r>
+                        <a:rPr lang="en-US" sz="1200" b="1" dirty="0">
+                          <a:solidFill>
+                            <a:srgbClr val="1A1A1A"/>
+                          </a:solidFill>
+                          <a:latin typeface="Calibri" pitchFamily="34" charset="0"/>
+                          <a:ea typeface="Calibri" pitchFamily="34" charset="-122"/>
+                          <a:cs typeface="Calibri" pitchFamily="34" charset="-120"/>
+                        </a:rPr>
+                        <a:t>50 per cent</a:t>
+                      </a:r>
+                      <a:endParaRPr lang="en-US" sz="1200" dirty="0">
+                        <a:latin typeface="Calibri" charset="0"/>
+                        <a:ea typeface="Calibri" charset="0"/>
+                        <a:cs typeface="Calibri" charset="0"/>
+                      </a:endParaRPr>
+                    </a:p>
+                  </a:txBody>
+                  <a:tcPr marL="91440" marR="91440" marT="45720" marB="45720" anchor="ctr">
+                    <a:lnL w="6350" cap="flat" cmpd="sng" algn="ctr">
+                      <a:solidFill>
+                        <a:srgbClr val="E2E8EC"/>
+                      </a:solidFill>
+                      <a:prstDash val="solid"/>
+                      <a:round/>
+                      <a:headEnd type="none" w="med" len="med"/>
+                      <a:tailEnd type="none" w="med" len="med"/>
+                    </a:lnL>
+                    <a:lnR w="6350" cap="flat" cmpd="sng" algn="ctr">
+                      <a:solidFill>
+                        <a:srgbClr val="E2E8EC"/>
+                      </a:solidFill>
+                      <a:prstDash val="solid"/>
+                      <a:round/>
+                      <a:headEnd type="none" w="med" len="med"/>
+                      <a:tailEnd type="none" w="med" len="med"/>
+                    </a:lnR>
+                    <a:lnT w="6350" cap="flat" cmpd="sng" algn="ctr">
+                      <a:solidFill>
+                        <a:srgbClr val="E2E8EC"/>
+                      </a:solidFill>
+                      <a:prstDash val="solid"/>
+                      <a:round/>
+                      <a:headEnd type="none" w="med" len="med"/>
+                      <a:tailEnd type="none" w="med" len="med"/>
+                    </a:lnT>
+                    <a:lnB w="6350" cap="flat" cmpd="sng" algn="ctr">
+                      <a:solidFill>
+                        <a:srgbClr val="E2E8EC"/>
+                      </a:solidFill>
+                      <a:prstDash val="solid"/>
+                      <a:round/>
+                      <a:headEnd type="none" w="med" len="med"/>
+                      <a:tailEnd type="none" w="med" len="med"/>
+                    </a:lnB>
+                    <a:solidFill>
+                      <a:srgbClr val="FFFFFF"/>
+                    </a:solidFill>
+                  </a:tcPr>
+                </a:tc>
+                <a:tc>
+                  <a:txBody>
+                    <a:bodyPr/>
+                    <a:lstStyle/>
+                    <a:p>
+                      <a:pPr algn="r" indent="0" marL="0">
+                        <a:buNone/>
+                      </a:pPr>
+                      <a:r>
+                        <a:rPr lang="en-US" sz="1200" dirty="0">
+                          <a:solidFill>
+                            <a:srgbClr val="1A1A1A"/>
+                          </a:solidFill>
+                          <a:latin typeface="Calibri" pitchFamily="34" charset="0"/>
+                          <a:ea typeface="Calibri" pitchFamily="34" charset="-122"/>
+                          <a:cs typeface="Calibri" pitchFamily="34" charset="-120"/>
+                        </a:rPr>
+                        <a:t>+41.4 %</a:t>
+                      </a:r>
+                      <a:endParaRPr lang="en-US" sz="1200" dirty="0">
+                        <a:latin typeface="Calibri" charset="0"/>
+                        <a:ea typeface="Calibri" charset="0"/>
+                        <a:cs typeface="Calibri" charset="0"/>
+                      </a:endParaRPr>
+                    </a:p>
+                  </a:txBody>
+                  <a:tcPr marL="91440" marR="91440" marT="45720" marB="45720" anchor="ctr">
+                    <a:lnL w="6350" cap="flat" cmpd="sng" algn="ctr">
+                      <a:solidFill>
+                        <a:srgbClr val="E2E8EC"/>
+                      </a:solidFill>
+                      <a:prstDash val="solid"/>
+                      <a:round/>
+                      <a:headEnd type="none" w="med" len="med"/>
+                      <a:tailEnd type="none" w="med" len="med"/>
+                    </a:lnL>
+                    <a:lnR w="6350" cap="flat" cmpd="sng" algn="ctr">
+                      <a:solidFill>
+                        <a:srgbClr val="E2E8EC"/>
+                      </a:solidFill>
+                      <a:prstDash val="solid"/>
+                      <a:round/>
+                      <a:headEnd type="none" w="med" len="med"/>
+                      <a:tailEnd type="none" w="med" len="med"/>
+                    </a:lnR>
+                    <a:lnT w="6350" cap="flat" cmpd="sng" algn="ctr">
+                      <a:solidFill>
+                        <a:srgbClr val="E2E8EC"/>
+                      </a:solidFill>
+                      <a:prstDash val="solid"/>
+                      <a:round/>
+                      <a:headEnd type="none" w="med" len="med"/>
+                      <a:tailEnd type="none" w="med" len="med"/>
+                    </a:lnT>
+                    <a:lnB w="6350" cap="flat" cmpd="sng" algn="ctr">
+                      <a:solidFill>
+                        <a:srgbClr val="E2E8EC"/>
+                      </a:solidFill>
+                      <a:prstDash val="solid"/>
+                      <a:round/>
+                      <a:headEnd type="none" w="med" len="med"/>
+                      <a:tailEnd type="none" w="med" len="med"/>
+                    </a:lnB>
+                    <a:solidFill>
+                      <a:srgbClr val="FFFFFF"/>
+                    </a:solidFill>
+                  </a:tcPr>
+                </a:tc>
+                <a:tc>
+                  <a:txBody>
+                    <a:bodyPr/>
+                    <a:lstStyle/>
+                    <a:p>
+                      <a:pPr algn="r" indent="0" marL="0">
+                        <a:buNone/>
+                      </a:pPr>
+                      <a:r>
+                        <a:rPr lang="en-US" sz="1200" dirty="0">
+                          <a:solidFill>
+                            <a:srgbClr val="1A1A1A"/>
+                          </a:solidFill>
+                          <a:latin typeface="Calibri" pitchFamily="34" charset="0"/>
+                          <a:ea typeface="Calibri" pitchFamily="34" charset="-122"/>
+                          <a:cs typeface="Calibri" pitchFamily="34" charset="-120"/>
+                        </a:rPr>
+                        <a:t>17.5 to 24.7 min</a:t>
+                      </a:r>
+                      <a:endParaRPr lang="en-US" sz="1200" dirty="0">
+                        <a:latin typeface="Calibri" charset="0"/>
+                        <a:ea typeface="Calibri" charset="0"/>
+                        <a:cs typeface="Calibri" charset="0"/>
+                      </a:endParaRPr>
+                    </a:p>
+                  </a:txBody>
+                  <a:tcPr marL="91440" marR="91440" marT="45720" marB="45720" anchor="ctr">
+                    <a:lnL w="6350" cap="flat" cmpd="sng" algn="ctr">
+                      <a:solidFill>
+                        <a:srgbClr val="E2E8EC"/>
+                      </a:solidFill>
+                      <a:prstDash val="solid"/>
+                      <a:round/>
+                      <a:headEnd type="none" w="med" len="med"/>
+                      <a:tailEnd type="none" w="med" len="med"/>
+                    </a:lnL>
+                    <a:lnR w="6350" cap="flat" cmpd="sng" algn="ctr">
+                      <a:solidFill>
+                        <a:srgbClr val="E2E8EC"/>
+                      </a:solidFill>
+                      <a:prstDash val="solid"/>
+                      <a:round/>
+                      <a:headEnd type="none" w="med" len="med"/>
+                      <a:tailEnd type="none" w="med" len="med"/>
+                    </a:lnR>
+                    <a:lnT w="6350" cap="flat" cmpd="sng" algn="ctr">
+                      <a:solidFill>
+                        <a:srgbClr val="E2E8EC"/>
+                      </a:solidFill>
+                      <a:prstDash val="solid"/>
+                      <a:round/>
+                      <a:headEnd type="none" w="med" len="med"/>
+                      <a:tailEnd type="none" w="med" len="med"/>
+                    </a:lnT>
+                    <a:lnB w="6350" cap="flat" cmpd="sng" algn="ctr">
+                      <a:solidFill>
+                        <a:srgbClr val="E2E8EC"/>
+                      </a:solidFill>
+                      <a:prstDash val="solid"/>
+                      <a:round/>
+                      <a:headEnd type="none" w="med" len="med"/>
+                      <a:tailEnd type="none" w="med" len="med"/>
+                    </a:lnB>
+                    <a:solidFill>
+                      <a:srgbClr val="FFFFFF"/>
+                    </a:solidFill>
+                  </a:tcPr>
+                </a:tc>
+              </a:tr>
+              <a:tr h="365760">
+                <a:tc>
+                  <a:txBody>
+                    <a:bodyPr/>
+                    <a:lstStyle/>
+                    <a:p>
+                      <a:pPr algn="l" indent="0" marL="0">
+                        <a:buNone/>
+                      </a:pPr>
+                      <a:r>
+                        <a:rPr lang="en-US" sz="1200" b="1" dirty="0">
+                          <a:solidFill>
+                            <a:srgbClr val="1A1A1A"/>
+                          </a:solidFill>
+                          <a:latin typeface="Calibri" pitchFamily="34" charset="0"/>
+                          <a:ea typeface="Calibri" pitchFamily="34" charset="-122"/>
+                          <a:cs typeface="Calibri" pitchFamily="34" charset="-120"/>
+                        </a:rPr>
+                        <a:t>66 per cent</a:t>
+                      </a:r>
+                      <a:endParaRPr lang="en-US" sz="1200" dirty="0">
+                        <a:latin typeface="Calibri" charset="0"/>
+                        <a:ea typeface="Calibri" charset="0"/>
+                        <a:cs typeface="Calibri" charset="0"/>
+                      </a:endParaRPr>
+                    </a:p>
+                  </a:txBody>
+                  <a:tcPr marL="91440" marR="91440" marT="45720" marB="45720" anchor="ctr">
+                    <a:lnL w="6350" cap="flat" cmpd="sng" algn="ctr">
+                      <a:solidFill>
+                        <a:srgbClr val="E2E8EC"/>
+                      </a:solidFill>
+                      <a:prstDash val="solid"/>
+                      <a:round/>
+                      <a:headEnd type="none" w="med" len="med"/>
+                      <a:tailEnd type="none" w="med" len="med"/>
+                    </a:lnL>
+                    <a:lnR w="6350" cap="flat" cmpd="sng" algn="ctr">
+                      <a:solidFill>
+                        <a:srgbClr val="E2E8EC"/>
+                      </a:solidFill>
+                      <a:prstDash val="solid"/>
+                      <a:round/>
+                      <a:headEnd type="none" w="med" len="med"/>
+                      <a:tailEnd type="none" w="med" len="med"/>
+                    </a:lnR>
+                    <a:lnT w="6350" cap="flat" cmpd="sng" algn="ctr">
+                      <a:solidFill>
+                        <a:srgbClr val="E2E8EC"/>
+                      </a:solidFill>
+                      <a:prstDash val="solid"/>
+                      <a:round/>
+                      <a:headEnd type="none" w="med" len="med"/>
+                      <a:tailEnd type="none" w="med" len="med"/>
+                    </a:lnT>
+                    <a:lnB w="6350" cap="flat" cmpd="sng" algn="ctr">
+                      <a:solidFill>
+                        <a:srgbClr val="E2E8EC"/>
+                      </a:solidFill>
+                      <a:prstDash val="solid"/>
+                      <a:round/>
+                      <a:headEnd type="none" w="med" len="med"/>
+                      <a:tailEnd type="none" w="med" len="med"/>
+                    </a:lnB>
+                    <a:solidFill>
+                      <a:srgbClr val="EEF3F6"/>
+                    </a:solidFill>
+                  </a:tcPr>
+                </a:tc>
+                <a:tc>
+                  <a:txBody>
+                    <a:bodyPr/>
+                    <a:lstStyle/>
+                    <a:p>
+                      <a:pPr algn="r" indent="0" marL="0">
+                        <a:buNone/>
+                      </a:pPr>
+                      <a:r>
+                        <a:rPr lang="en-US" sz="1200" dirty="0">
+                          <a:solidFill>
+                            <a:srgbClr val="1A1A1A"/>
+                          </a:solidFill>
+                          <a:latin typeface="Calibri" pitchFamily="34" charset="0"/>
+                          <a:ea typeface="Calibri" pitchFamily="34" charset="-122"/>
+                          <a:cs typeface="Calibri" pitchFamily="34" charset="-120"/>
+                        </a:rPr>
+                        <a:t>+71.5 %</a:t>
+                      </a:r>
+                      <a:endParaRPr lang="en-US" sz="1200" dirty="0">
+                        <a:latin typeface="Calibri" charset="0"/>
+                        <a:ea typeface="Calibri" charset="0"/>
+                        <a:cs typeface="Calibri" charset="0"/>
+                      </a:endParaRPr>
+                    </a:p>
+                  </a:txBody>
+                  <a:tcPr marL="91440" marR="91440" marT="45720" marB="45720" anchor="ctr">
+                    <a:lnL w="6350" cap="flat" cmpd="sng" algn="ctr">
+                      <a:solidFill>
+                        <a:srgbClr val="E2E8EC"/>
+                      </a:solidFill>
+                      <a:prstDash val="solid"/>
+                      <a:round/>
+                      <a:headEnd type="none" w="med" len="med"/>
+                      <a:tailEnd type="none" w="med" len="med"/>
+                    </a:lnL>
+                    <a:lnR w="6350" cap="flat" cmpd="sng" algn="ctr">
+                      <a:solidFill>
+                        <a:srgbClr val="E2E8EC"/>
+                      </a:solidFill>
+                      <a:prstDash val="solid"/>
+                      <a:round/>
+                      <a:headEnd type="none" w="med" len="med"/>
+                      <a:tailEnd type="none" w="med" len="med"/>
+                    </a:lnR>
+                    <a:lnT w="6350" cap="flat" cmpd="sng" algn="ctr">
+                      <a:solidFill>
+                        <a:srgbClr val="E2E8EC"/>
+                      </a:solidFill>
+                      <a:prstDash val="solid"/>
+                      <a:round/>
+                      <a:headEnd type="none" w="med" len="med"/>
+                      <a:tailEnd type="none" w="med" len="med"/>
+                    </a:lnT>
+                    <a:lnB w="6350" cap="flat" cmpd="sng" algn="ctr">
+                      <a:solidFill>
+                        <a:srgbClr val="E2E8EC"/>
+                      </a:solidFill>
+                      <a:prstDash val="solid"/>
+                      <a:round/>
+                      <a:headEnd type="none" w="med" len="med"/>
+                      <a:tailEnd type="none" w="med" len="med"/>
+                    </a:lnB>
+                    <a:solidFill>
+                      <a:srgbClr val="EEF3F6"/>
+                    </a:solidFill>
+                  </a:tcPr>
+                </a:tc>
+                <a:tc>
+                  <a:txBody>
+                    <a:bodyPr/>
+                    <a:lstStyle/>
+                    <a:p>
+                      <a:pPr algn="r" indent="0" marL="0">
+                        <a:buNone/>
+                      </a:pPr>
+                      <a:r>
+                        <a:rPr lang="en-US" sz="1200" dirty="0">
+                          <a:solidFill>
+                            <a:srgbClr val="1A1A1A"/>
+                          </a:solidFill>
+                          <a:latin typeface="Calibri" pitchFamily="34" charset="0"/>
+                          <a:ea typeface="Calibri" pitchFamily="34" charset="-122"/>
+                          <a:cs typeface="Calibri" pitchFamily="34" charset="-120"/>
+                        </a:rPr>
+                        <a:t>21.2 to 30.0 min</a:t>
+                      </a:r>
+                      <a:endParaRPr lang="en-US" sz="1200" dirty="0">
+                        <a:latin typeface="Calibri" charset="0"/>
+                        <a:ea typeface="Calibri" charset="0"/>
+                        <a:cs typeface="Calibri" charset="0"/>
+                      </a:endParaRPr>
+                    </a:p>
+                  </a:txBody>
+                  <a:tcPr marL="91440" marR="91440" marT="45720" marB="45720" anchor="ctr">
+                    <a:lnL w="6350" cap="flat" cmpd="sng" algn="ctr">
+                      <a:solidFill>
+                        <a:srgbClr val="E2E8EC"/>
+                      </a:solidFill>
+                      <a:prstDash val="solid"/>
+                      <a:round/>
+                      <a:headEnd type="none" w="med" len="med"/>
+                      <a:tailEnd type="none" w="med" len="med"/>
+                    </a:lnL>
+                    <a:lnR w="6350" cap="flat" cmpd="sng" algn="ctr">
+                      <a:solidFill>
+                        <a:srgbClr val="E2E8EC"/>
+                      </a:solidFill>
+                      <a:prstDash val="solid"/>
+                      <a:round/>
+                      <a:headEnd type="none" w="med" len="med"/>
+                      <a:tailEnd type="none" w="med" len="med"/>
+                    </a:lnR>
+                    <a:lnT w="6350" cap="flat" cmpd="sng" algn="ctr">
+                      <a:solidFill>
+                        <a:srgbClr val="E2E8EC"/>
+                      </a:solidFill>
+                      <a:prstDash val="solid"/>
+                      <a:round/>
+                      <a:headEnd type="none" w="med" len="med"/>
+                      <a:tailEnd type="none" w="med" len="med"/>
+                    </a:lnT>
+                    <a:lnB w="6350" cap="flat" cmpd="sng" algn="ctr">
+                      <a:solidFill>
+                        <a:srgbClr val="E2E8EC"/>
+                      </a:solidFill>
+                      <a:prstDash val="solid"/>
+                      <a:round/>
+                      <a:headEnd type="none" w="med" len="med"/>
+                      <a:tailEnd type="none" w="med" len="med"/>
+                    </a:lnB>
+                    <a:solidFill>
+                      <a:srgbClr val="EEF3F6"/>
+                    </a:solidFill>
+                  </a:tcPr>
+                </a:tc>
+              </a:tr>
+            </a:tbl>
+          </a:graphicData>
+        </a:graphic>
+      </p:graphicFrame>
+      <p:sp>
+        <p:nvSpPr>
+          <p:cNvPr id="6" name="Text 3"/>
           <p:cNvSpPr txBox="1"/>
           <p:nvPr/>
         </p:nvSpPr>
         <p:spPr>
           <a:xfrm>
-            <a:off x="1133856" y="1847088"/>
-            <a:ext cx="4828032" cy="475488"/>
+            <a:off x="566928" y="4224528"/>
+            <a:ext cx="6492240" cy="731520"/>
           </a:xfrm>
           <a:prstGeom prst="rect">
             <a:avLst/>
@@ -2034,37 +3459,59 @@
           <a:bodyPr wrap="square" lIns="0" tIns="0" rIns="0" bIns="0" rtlCol="0" anchor="ctr"/>
           <a:lstStyle/>
           <a:p>
-            <a:pPr marL="0" indent="0">
+            <a:pPr indent="0" marL="0">
               <a:lnSpc>
-                <a:spcPts val="1600"/>
+                <a:spcPts val="1550"/>
               </a:lnSpc>
               <a:buNone/>
             </a:pPr>
             <a:r>
-              <a:rPr lang="en-US" sz="1280" b="1" dirty="0">
-                <a:solidFill>
-                  <a:srgbClr val="1A1A1A"/>
+              <a:rPr lang="en-US" sz="1150" dirty="0">
+                <a:solidFill>
+                  <a:srgbClr val="5F6368"/>
                 </a:solidFill>
                 <a:latin typeface="Calibri" pitchFamily="34" charset="0"/>
                 <a:ea typeface="Calibri" pitchFamily="34" charset="-122"/>
                 <a:cs typeface="Calibri" pitchFamily="34" charset="-120"/>
               </a:rPr>
-              <a:t>Is there a sea level record inside the Grand Harbour, and at what sampling interval?</a:t>
-            </a:r>
-            <a:endParaRPr lang="en-US" sz="1280" dirty="0"/>
-          </a:p>
-        </p:txBody>
-      </p:sp>
-      <p:sp>
-        <p:nvSpPr>
-          <p:cNvPr id="7" name="Text 5"/>
+              <a:t>The period scales as the inverse square root of the open cross-section, so the shift is independent of basin area and of the length of the channel. Exchange scales with the section directly, and responds more strongly still.</a:t>
+            </a:r>
+            <a:endParaRPr lang="en-US" sz="1150" dirty="0"/>
+          </a:p>
+        </p:txBody>
+      </p:sp>
+      <p:sp>
+        <p:nvSpPr>
+          <p:cNvPr id="7" name="Shape 4"/>
+          <p:cNvSpPr/>
+          <p:nvPr/>
+        </p:nvSpPr>
+        <p:spPr>
+          <a:xfrm>
+            <a:off x="7360920" y="2286000"/>
+            <a:ext cx="4261104" cy="1572768"/>
+          </a:xfrm>
+          <a:prstGeom prst="roundRect">
+            <a:avLst>
+              <a:gd name="adj" fmla="val 3488"/>
+            </a:avLst>
+          </a:prstGeom>
+          <a:solidFill>
+            <a:srgbClr val="EEF3F6"/>
+          </a:solidFill>
+          <a:ln/>
+        </p:spPr>
+      </p:sp>
+      <p:sp>
+        <p:nvSpPr>
+          <p:cNvPr id="8" name="Text 5"/>
           <p:cNvSpPr txBox="1"/>
           <p:nvPr/>
         </p:nvSpPr>
         <p:spPr>
           <a:xfrm>
-            <a:off x="1133856" y="2331720"/>
-            <a:ext cx="4828032" cy="896112"/>
+            <a:off x="7635240" y="2450592"/>
+            <a:ext cx="3749040" cy="274320"/>
           </a:xfrm>
           <a:prstGeom prst="rect">
             <a:avLst/>
@@ -2076,64 +3523,98 @@
           <a:bodyPr wrap="square" lIns="0" tIns="0" rIns="0" bIns="0" rtlCol="0" anchor="ctr"/>
           <a:lstStyle/>
           <a:p>
-            <a:pPr marL="0" indent="0">
+            <a:pPr indent="0" marL="0">
+              <a:buNone/>
+            </a:pPr>
+            <a:r>
+              <a:rPr lang="en-US" sz="1350" b="1" dirty="0">
+                <a:solidFill>
+                  <a:srgbClr val="065A82"/>
+                </a:solidFill>
+                <a:latin typeface="Cambria" pitchFamily="34" charset="0"/>
+                <a:ea typeface="Cambria" pitchFamily="34" charset="-122"/>
+                <a:cs typeface="Cambria" pitchFamily="34" charset="-120"/>
+              </a:rPr>
+              <a:t>The magnitude in context</a:t>
+            </a:r>
+            <a:endParaRPr lang="en-US" sz="1350" dirty="0"/>
+          </a:p>
+        </p:txBody>
+      </p:sp>
+      <p:sp>
+        <p:nvSpPr>
+          <p:cNvPr id="9" name="Text 6"/>
+          <p:cNvSpPr txBox="1"/>
+          <p:nvPr/>
+        </p:nvSpPr>
+        <p:spPr>
+          <a:xfrm>
+            <a:off x="7635240" y="2779776"/>
+            <a:ext cx="3749040" cy="960120"/>
+          </a:xfrm>
+          <a:prstGeom prst="rect">
+            <a:avLst/>
+          </a:prstGeom>
+          <a:noFill/>
+          <a:ln/>
+        </p:spPr>
+        <p:txBody>
+          <a:bodyPr wrap="square" lIns="0" tIns="0" rIns="0" bIns="0" rtlCol="0" anchor="ctr"/>
+          <a:lstStyle/>
+          <a:p>
+            <a:pPr indent="0" marL="0">
               <a:lnSpc>
-                <a:spcPts val="1450"/>
+                <a:spcPts val="1550"/>
               </a:lnSpc>
               <a:buNone/>
             </a:pPr>
             <a:r>
-              <a:rPr lang="en-US" sz="1100" dirty="0">
-                <a:solidFill>
-                  <a:srgbClr val="5F6368"/>
+              <a:rPr lang="en-US" sz="1150" dirty="0">
+                <a:solidFill>
+                  <a:srgbClr val="1A1A1A"/>
                 </a:solidFill>
                 <a:latin typeface="Calibri" pitchFamily="34" charset="0"/>
                 <a:ea typeface="Calibri" pitchFamily="34" charset="-122"/>
                 <a:cs typeface="Calibri" pitchFamily="34" charset="-120"/>
               </a:rPr>
-              <a:t>A spectrum would establish whether the basins carry energy near 17 minutes. The 0.2 to 2 cph band is observed at Mellieħa, on another coast, so the present analysis can only infer the Valletta response.</a:t>
-            </a:r>
-            <a:endParaRPr lang="en-US" sz="1100" dirty="0"/>
-          </a:p>
-        </p:txBody>
-      </p:sp>
-      <p:sp>
-        <p:nvSpPr>
-          <p:cNvPr id="8" name="Shape 6"/>
+              <a:t>A metre of sea level rise displaces these modes by one to four per cent. A restriction of a quarter displaces them four times as far. The geometry of the mouth is the dominant control.</a:t>
+            </a:r>
+            <a:endParaRPr lang="en-US" sz="1150" dirty="0"/>
+          </a:p>
+        </p:txBody>
+      </p:sp>
+      <p:sp>
+        <p:nvSpPr>
+          <p:cNvPr id="10" name="Shape 7"/>
           <p:cNvSpPr/>
           <p:nvPr/>
         </p:nvSpPr>
         <p:spPr>
           <a:xfrm>
-            <a:off x="6126480" y="1874520"/>
-            <a:ext cx="402336" cy="402336"/>
-          </a:xfrm>
-          <a:prstGeom prst="ellipse">
-            <a:avLst/>
+            <a:off x="7360920" y="4005072"/>
+            <a:ext cx="4261104" cy="1572768"/>
+          </a:xfrm>
+          <a:prstGeom prst="roundRect">
+            <a:avLst>
+              <a:gd name="adj" fmla="val 3488"/>
+            </a:avLst>
           </a:prstGeom>
           <a:solidFill>
-            <a:srgbClr val="1C7293"/>
+            <a:srgbClr val="21295C"/>
           </a:solidFill>
           <a:ln/>
         </p:spPr>
-        <p:txBody>
-          <a:bodyPr/>
-          <a:lstStyle/>
-          <a:p>
-            <a:endParaRPr lang="it-IT"/>
-          </a:p>
-        </p:txBody>
-      </p:sp>
-      <p:sp>
-        <p:nvSpPr>
-          <p:cNvPr id="9" name="Text 7"/>
+      </p:sp>
+      <p:sp>
+        <p:nvSpPr>
+          <p:cNvPr id="11" name="Text 8"/>
           <p:cNvSpPr txBox="1"/>
           <p:nvPr/>
         </p:nvSpPr>
         <p:spPr>
           <a:xfrm>
-            <a:off x="6126480" y="1874520"/>
-            <a:ext cx="402336" cy="402336"/>
+            <a:off x="7635240" y="4169664"/>
+            <a:ext cx="3749040" cy="274320"/>
           </a:xfrm>
           <a:prstGeom prst="rect">
             <a:avLst/>
@@ -2145,34 +3626,76 @@
           <a:bodyPr wrap="square" lIns="0" tIns="0" rIns="0" bIns="0" rtlCol="0" anchor="ctr"/>
           <a:lstStyle/>
           <a:p>
-            <a:pPr marL="0" indent="0" algn="ctr">
+            <a:pPr indent="0" marL="0">
               <a:buNone/>
             </a:pPr>
             <a:r>
-              <a:rPr lang="en-US" sz="1500" b="1" dirty="0">
-                <a:solidFill>
-                  <a:srgbClr val="FFFFFF"/>
+              <a:rPr lang="en-US" sz="1350" b="1" dirty="0">
+                <a:solidFill>
+                  <a:srgbClr val="EB6834"/>
+                </a:solidFill>
+                <a:latin typeface="Cambria" pitchFamily="34" charset="0"/>
+                <a:ea typeface="Cambria" pitchFamily="34" charset="-122"/>
+                <a:cs typeface="Cambria" pitchFamily="34" charset="-120"/>
+              </a:rPr>
+              <a:t>The limit of the result</a:t>
+            </a:r>
+            <a:endParaRPr lang="en-US" sz="1350" dirty="0"/>
+          </a:p>
+        </p:txBody>
+      </p:sp>
+      <p:sp>
+        <p:nvSpPr>
+          <p:cNvPr id="12" name="Text 9"/>
+          <p:cNvSpPr txBox="1"/>
+          <p:nvPr/>
+        </p:nvSpPr>
+        <p:spPr>
+          <a:xfrm>
+            <a:off x="7635240" y="4498848"/>
+            <a:ext cx="3749040" cy="960120"/>
+          </a:xfrm>
+          <a:prstGeom prst="rect">
+            <a:avLst/>
+          </a:prstGeom>
+          <a:noFill/>
+          <a:ln/>
+        </p:spPr>
+        <p:txBody>
+          <a:bodyPr wrap="square" lIns="0" tIns="0" rIns="0" bIns="0" rtlCol="0" anchor="ctr"/>
+          <a:lstStyle/>
+          <a:p>
+            <a:pPr indent="0" marL="0">
+              <a:lnSpc>
+                <a:spcPts val="1550"/>
+              </a:lnSpc>
+              <a:buNone/>
+            </a:pPr>
+            <a:r>
+              <a:rPr lang="en-US" sz="1150" dirty="0">
+                <a:solidFill>
+                  <a:srgbClr val="CADCFC"/>
                 </a:solidFill>
                 <a:latin typeface="Calibri" pitchFamily="34" charset="0"/>
                 <a:ea typeface="Calibri" pitchFamily="34" charset="-122"/>
                 <a:cs typeface="Calibri" pitchFamily="34" charset="-120"/>
               </a:rPr>
-              <a:t>2</a:t>
-            </a:r>
-            <a:endParaRPr lang="en-US" sz="1500" dirty="0"/>
-          </a:p>
-        </p:txBody>
-      </p:sp>
-      <p:sp>
-        <p:nvSpPr>
-          <p:cNvPr id="10" name="Text 8"/>
+              <a:t>Reaching the observed band would require the mouth to lose two thirds of its section. The conclusion that the harbours respond rather than resonate stands.</a:t>
+            </a:r>
+            <a:endParaRPr lang="en-US" sz="1150" dirty="0"/>
+          </a:p>
+        </p:txBody>
+      </p:sp>
+      <p:sp>
+        <p:nvSpPr>
+          <p:cNvPr id="13" name="Text 10"/>
           <p:cNvSpPr txBox="1"/>
           <p:nvPr/>
         </p:nvSpPr>
         <p:spPr>
           <a:xfrm>
-            <a:off x="6693408" y="1847088"/>
-            <a:ext cx="4828032" cy="475488"/>
+            <a:off x="566928" y="6053328"/>
+            <a:ext cx="11055096" cy="310896"/>
           </a:xfrm>
           <a:prstGeom prst="rect">
             <a:avLst/>
@@ -2184,666 +3707,21 @@
           <a:bodyPr wrap="square" lIns="0" tIns="0" rIns="0" bIns="0" rtlCol="0" anchor="ctr"/>
           <a:lstStyle/>
           <a:p>
-            <a:pPr marL="0" indent="0">
-              <a:lnSpc>
-                <a:spcPts val="1600"/>
-              </a:lnSpc>
+            <a:pPr indent="0" marL="0">
               <a:buNone/>
             </a:pPr>
             <a:r>
-              <a:rPr lang="en-US" sz="1280" b="1" dirty="0">
-                <a:solidFill>
-                  <a:srgbClr val="1A1A1A"/>
+              <a:rPr lang="en-US" sz="1050" i="1" dirty="0">
+                <a:solidFill>
+                  <a:srgbClr val="5F6368"/>
                 </a:solidFill>
                 <a:latin typeface="Calibri" pitchFamily="34" charset="0"/>
                 <a:ea typeface="Calibri" pitchFamily="34" charset="-122"/>
                 <a:cs typeface="Calibri" pitchFamily="34" charset="-120"/>
               </a:rPr>
-              <a:t>Has the generation of the wave been modelled, or only its effect on a basin?</a:t>
-            </a:r>
-            <a:endParaRPr lang="en-US" sz="1280" dirty="0"/>
-          </a:p>
-        </p:txBody>
-      </p:sp>
-      <p:sp>
-        <p:nvSpPr>
-          <p:cNvPr id="11" name="Text 9"/>
-          <p:cNvSpPr txBox="1"/>
-          <p:nvPr/>
-        </p:nvSpPr>
-        <p:spPr>
-          <a:xfrm>
-            <a:off x="6693408" y="2331720"/>
-            <a:ext cx="4828032" cy="896112"/>
-          </a:xfrm>
-          <a:prstGeom prst="rect">
-            <a:avLst/>
-          </a:prstGeom>
-          <a:noFill/>
-          <a:ln/>
-        </p:spPr>
-        <p:txBody>
-          <a:bodyPr wrap="square" lIns="0" tIns="0" rIns="0" bIns="0" rtlCol="0" anchor="ctr"/>
-          <a:lstStyle/>
-          <a:p>
-            <a:pPr marL="0" indent="0">
-              <a:lnSpc>
-                <a:spcPts val="1450"/>
-              </a:lnSpc>
-              <a:buNone/>
-            </a:pPr>
-            <a:r>
-              <a:rPr lang="en-US" sz="1100" dirty="0">
-                <a:solidFill>
-                  <a:srgbClr val="5F6368"/>
-                </a:solidFill>
-                <a:latin typeface="Calibri" pitchFamily="34" charset="0"/>
-                <a:ea typeface="Calibri" pitchFamily="34" charset="-122"/>
-                <a:cs typeface="Calibri" pitchFamily="34" charset="-120"/>
-              </a:rPr>
-              <a:t>The 2007 study imposes the long wave at the offshore boundary and computes the response. Modelling how the atmosphere produces that wave over the shelf is what this study proposes. Whether it is genuinely untouched is known only from a literature search.</a:t>
-            </a:r>
-            <a:endParaRPr lang="en-US" sz="1100" dirty="0"/>
-          </a:p>
-        </p:txBody>
-      </p:sp>
-      <p:sp>
-        <p:nvSpPr>
-          <p:cNvPr id="12" name="Shape 10"/>
-          <p:cNvSpPr/>
-          <p:nvPr/>
-        </p:nvSpPr>
-        <p:spPr>
-          <a:xfrm>
-            <a:off x="566928" y="3355848"/>
-            <a:ext cx="402336" cy="402336"/>
-          </a:xfrm>
-          <a:prstGeom prst="ellipse">
-            <a:avLst/>
-          </a:prstGeom>
-          <a:solidFill>
-            <a:srgbClr val="065A82"/>
-          </a:solidFill>
-          <a:ln/>
-        </p:spPr>
-        <p:txBody>
-          <a:bodyPr/>
-          <a:lstStyle/>
-          <a:p>
-            <a:endParaRPr lang="it-IT"/>
-          </a:p>
-        </p:txBody>
-      </p:sp>
-      <p:sp>
-        <p:nvSpPr>
-          <p:cNvPr id="13" name="Text 11"/>
-          <p:cNvSpPr txBox="1"/>
-          <p:nvPr/>
-        </p:nvSpPr>
-        <p:spPr>
-          <a:xfrm>
-            <a:off x="566928" y="3355848"/>
-            <a:ext cx="402336" cy="402336"/>
-          </a:xfrm>
-          <a:prstGeom prst="rect">
-            <a:avLst/>
-          </a:prstGeom>
-          <a:noFill/>
-          <a:ln/>
-        </p:spPr>
-        <p:txBody>
-          <a:bodyPr wrap="square" lIns="0" tIns="0" rIns="0" bIns="0" rtlCol="0" anchor="ctr"/>
-          <a:lstStyle/>
-          <a:p>
-            <a:pPr marL="0" indent="0" algn="ctr">
-              <a:buNone/>
-            </a:pPr>
-            <a:r>
-              <a:rPr lang="en-US" sz="1500" b="1" dirty="0">
-                <a:solidFill>
-                  <a:srgbClr val="FFFFFF"/>
-                </a:solidFill>
-                <a:latin typeface="Calibri" pitchFamily="34" charset="0"/>
-                <a:ea typeface="Calibri" pitchFamily="34" charset="-122"/>
-                <a:cs typeface="Calibri" pitchFamily="34" charset="-120"/>
-              </a:rPr>
-              <a:t>3</a:t>
-            </a:r>
-            <a:endParaRPr lang="en-US" sz="1500" dirty="0"/>
-          </a:p>
-        </p:txBody>
-      </p:sp>
-      <p:sp>
-        <p:nvSpPr>
-          <p:cNvPr id="14" name="Text 12"/>
-          <p:cNvSpPr txBox="1"/>
-          <p:nvPr/>
-        </p:nvSpPr>
-        <p:spPr>
-          <a:xfrm>
-            <a:off x="1133856" y="3328416"/>
-            <a:ext cx="4828032" cy="475488"/>
-          </a:xfrm>
-          <a:prstGeom prst="rect">
-            <a:avLst/>
-          </a:prstGeom>
-          <a:noFill/>
-          <a:ln/>
-        </p:spPr>
-        <p:txBody>
-          <a:bodyPr wrap="square" lIns="0" tIns="0" rIns="0" bIns="0" rtlCol="0" anchor="ctr"/>
-          <a:lstStyle/>
-          <a:p>
-            <a:pPr marL="0" indent="0">
-              <a:lnSpc>
-                <a:spcPts val="1600"/>
-              </a:lnSpc>
-              <a:buNone/>
-            </a:pPr>
-            <a:r>
-              <a:rPr lang="en-US" sz="1280" b="1" dirty="0">
-                <a:solidFill>
-                  <a:srgbClr val="1A1A1A"/>
-                </a:solidFill>
-                <a:latin typeface="Calibri" pitchFamily="34" charset="0"/>
-                <a:ea typeface="Calibri" pitchFamily="34" charset="-122"/>
-                <a:cs typeface="Calibri" pitchFamily="34" charset="-120"/>
-              </a:rPr>
-              <a:t>What is the sampling interval of the PORTO sea level stations?</a:t>
-            </a:r>
-            <a:endParaRPr lang="en-US" sz="1280" dirty="0"/>
-          </a:p>
-        </p:txBody>
-      </p:sp>
-      <p:sp>
-        <p:nvSpPr>
-          <p:cNvPr id="15" name="Text 13"/>
-          <p:cNvSpPr txBox="1"/>
-          <p:nvPr/>
-        </p:nvSpPr>
-        <p:spPr>
-          <a:xfrm>
-            <a:off x="1133856" y="3813048"/>
-            <a:ext cx="4828032" cy="896112"/>
-          </a:xfrm>
-          <a:prstGeom prst="rect">
-            <a:avLst/>
-          </a:prstGeom>
-          <a:noFill/>
-          <a:ln/>
-        </p:spPr>
-        <p:txBody>
-          <a:bodyPr wrap="square" lIns="0" tIns="0" rIns="0" bIns="0" rtlCol="0" anchor="ctr"/>
-          <a:lstStyle/>
-          <a:p>
-            <a:pPr marL="0" indent="0">
-              <a:lnSpc>
-                <a:spcPts val="1450"/>
-              </a:lnSpc>
-              <a:buNone/>
-            </a:pPr>
-            <a:r>
-              <a:rPr lang="en-US" sz="1100" dirty="0">
-                <a:solidFill>
-                  <a:srgbClr val="5F6368"/>
-                </a:solidFill>
-                <a:latin typeface="Calibri" pitchFamily="34" charset="0"/>
-                <a:ea typeface="Calibri" pitchFamily="34" charset="-122"/>
-                <a:cs typeface="Calibri" pitchFamily="34" charset="-120"/>
-              </a:rPr>
-              <a:t>The seiche band is 0.2 to 2 cph. At an interval coarser than one minute the model has no observational target within its own frequency range.</a:t>
-            </a:r>
-            <a:endParaRPr lang="en-US" sz="1100" dirty="0"/>
-          </a:p>
-        </p:txBody>
-      </p:sp>
-      <p:sp>
-        <p:nvSpPr>
-          <p:cNvPr id="16" name="Shape 14"/>
-          <p:cNvSpPr/>
-          <p:nvPr/>
-        </p:nvSpPr>
-        <p:spPr>
-          <a:xfrm>
-            <a:off x="6126480" y="3355848"/>
-            <a:ext cx="402336" cy="402336"/>
-          </a:xfrm>
-          <a:prstGeom prst="ellipse">
-            <a:avLst/>
-          </a:prstGeom>
-          <a:solidFill>
-            <a:srgbClr val="1C7293"/>
-          </a:solidFill>
-          <a:ln/>
-        </p:spPr>
-        <p:txBody>
-          <a:bodyPr/>
-          <a:lstStyle/>
-          <a:p>
-            <a:endParaRPr lang="it-IT"/>
-          </a:p>
-        </p:txBody>
-      </p:sp>
-      <p:sp>
-        <p:nvSpPr>
-          <p:cNvPr id="17" name="Text 15"/>
-          <p:cNvSpPr txBox="1"/>
-          <p:nvPr/>
-        </p:nvSpPr>
-        <p:spPr>
-          <a:xfrm>
-            <a:off x="6126480" y="3355848"/>
-            <a:ext cx="402336" cy="402336"/>
-          </a:xfrm>
-          <a:prstGeom prst="rect">
-            <a:avLst/>
-          </a:prstGeom>
-          <a:noFill/>
-          <a:ln/>
-        </p:spPr>
-        <p:txBody>
-          <a:bodyPr wrap="square" lIns="0" tIns="0" rIns="0" bIns="0" rtlCol="0" anchor="ctr"/>
-          <a:lstStyle/>
-          <a:p>
-            <a:pPr marL="0" indent="0" algn="ctr">
-              <a:buNone/>
-            </a:pPr>
-            <a:r>
-              <a:rPr lang="en-US" sz="1500" b="1" dirty="0">
-                <a:solidFill>
-                  <a:srgbClr val="FFFFFF"/>
-                </a:solidFill>
-                <a:latin typeface="Calibri" pitchFamily="34" charset="0"/>
-                <a:ea typeface="Calibri" pitchFamily="34" charset="-122"/>
-                <a:cs typeface="Calibri" pitchFamily="34" charset="-120"/>
-              </a:rPr>
-              <a:t>4</a:t>
-            </a:r>
-            <a:endParaRPr lang="en-US" sz="1500" dirty="0"/>
-          </a:p>
-        </p:txBody>
-      </p:sp>
-      <p:sp>
-        <p:nvSpPr>
-          <p:cNvPr id="18" name="Text 16"/>
-          <p:cNvSpPr txBox="1"/>
-          <p:nvPr/>
-        </p:nvSpPr>
-        <p:spPr>
-          <a:xfrm>
-            <a:off x="6693408" y="3328416"/>
-            <a:ext cx="4828032" cy="475488"/>
-          </a:xfrm>
-          <a:prstGeom prst="rect">
-            <a:avLst/>
-          </a:prstGeom>
-          <a:noFill/>
-          <a:ln/>
-        </p:spPr>
-        <p:txBody>
-          <a:bodyPr wrap="square" lIns="0" tIns="0" rIns="0" bIns="0" rtlCol="0" anchor="ctr"/>
-          <a:lstStyle/>
-          <a:p>
-            <a:pPr marL="0" indent="0">
-              <a:lnSpc>
-                <a:spcPts val="1600"/>
-              </a:lnSpc>
-              <a:buNone/>
-            </a:pPr>
-            <a:r>
-              <a:rPr lang="en-US" sz="1280" b="1" dirty="0">
-                <a:solidFill>
-                  <a:srgbClr val="1A1A1A"/>
-                </a:solidFill>
-                <a:latin typeface="Calibri" pitchFamily="34" charset="0"/>
-                <a:ea typeface="Calibri" pitchFamily="34" charset="-122"/>
-                <a:cs typeface="Calibri" pitchFamily="34" charset="-120"/>
-              </a:rPr>
-              <a:t>Is there documented damage or disruption inside the commercial port?</a:t>
-            </a:r>
-            <a:endParaRPr lang="en-US" sz="1280" dirty="0"/>
-          </a:p>
-        </p:txBody>
-      </p:sp>
-      <p:sp>
-        <p:nvSpPr>
-          <p:cNvPr id="19" name="Text 17"/>
-          <p:cNvSpPr txBox="1"/>
-          <p:nvPr/>
-        </p:nvSpPr>
-        <p:spPr>
-          <a:xfrm>
-            <a:off x="6693408" y="3813048"/>
-            <a:ext cx="4828032" cy="896112"/>
-          </a:xfrm>
-          <a:prstGeom prst="rect">
-            <a:avLst/>
-          </a:prstGeom>
-          <a:noFill/>
-          <a:ln/>
-        </p:spPr>
-        <p:txBody>
-          <a:bodyPr wrap="square" lIns="0" tIns="0" rIns="0" bIns="0" rtlCol="0" anchor="ctr"/>
-          <a:lstStyle/>
-          <a:p>
-            <a:pPr marL="0" indent="0">
-              <a:lnSpc>
-                <a:spcPts val="1450"/>
-              </a:lnSpc>
-              <a:buNone/>
-            </a:pPr>
-            <a:r>
-              <a:rPr lang="en-US" sz="1100" dirty="0">
-                <a:solidFill>
-                  <a:srgbClr val="5F6368"/>
-                </a:solidFill>
-                <a:latin typeface="Calibri" pitchFamily="34" charset="0"/>
-                <a:ea typeface="Calibri" pitchFamily="34" charset="-122"/>
-                <a:cs typeface="Calibri" pitchFamily="34" charset="-120"/>
-              </a:rPr>
-              <a:t>Flooding is documented at Msida and elsewhere. Records of mooring failure or interrupted operations would be held by Transport Malta and the terminals.</a:t>
-            </a:r>
-            <a:endParaRPr lang="en-US" sz="1100" dirty="0"/>
-          </a:p>
-        </p:txBody>
-      </p:sp>
-      <p:sp>
-        <p:nvSpPr>
-          <p:cNvPr id="20" name="Shape 18"/>
-          <p:cNvSpPr/>
-          <p:nvPr/>
-        </p:nvSpPr>
-        <p:spPr>
-          <a:xfrm>
-            <a:off x="566928" y="4837176"/>
-            <a:ext cx="402336" cy="402336"/>
-          </a:xfrm>
-          <a:prstGeom prst="ellipse">
-            <a:avLst/>
-          </a:prstGeom>
-          <a:solidFill>
-            <a:srgbClr val="065A82"/>
-          </a:solidFill>
-          <a:ln/>
-        </p:spPr>
-        <p:txBody>
-          <a:bodyPr/>
-          <a:lstStyle/>
-          <a:p>
-            <a:endParaRPr lang="it-IT"/>
-          </a:p>
-        </p:txBody>
-      </p:sp>
-      <p:sp>
-        <p:nvSpPr>
-          <p:cNvPr id="21" name="Text 19"/>
-          <p:cNvSpPr txBox="1"/>
-          <p:nvPr/>
-        </p:nvSpPr>
-        <p:spPr>
-          <a:xfrm>
-            <a:off x="566928" y="4837176"/>
-            <a:ext cx="402336" cy="402336"/>
-          </a:xfrm>
-          <a:prstGeom prst="rect">
-            <a:avLst/>
-          </a:prstGeom>
-          <a:noFill/>
-          <a:ln/>
-        </p:spPr>
-        <p:txBody>
-          <a:bodyPr wrap="square" lIns="0" tIns="0" rIns="0" bIns="0" rtlCol="0" anchor="ctr"/>
-          <a:lstStyle/>
-          <a:p>
-            <a:pPr marL="0" indent="0" algn="ctr">
-              <a:buNone/>
-            </a:pPr>
-            <a:r>
-              <a:rPr lang="en-US" sz="1500" b="1" dirty="0">
-                <a:solidFill>
-                  <a:srgbClr val="FFFFFF"/>
-                </a:solidFill>
-                <a:latin typeface="Calibri" pitchFamily="34" charset="0"/>
-                <a:ea typeface="Calibri" pitchFamily="34" charset="-122"/>
-                <a:cs typeface="Calibri" pitchFamily="34" charset="-120"/>
-              </a:rPr>
-              <a:t>5</a:t>
-            </a:r>
-            <a:endParaRPr lang="en-US" sz="1500" dirty="0"/>
-          </a:p>
-        </p:txBody>
-      </p:sp>
-      <p:sp>
-        <p:nvSpPr>
-          <p:cNvPr id="22" name="Text 20"/>
-          <p:cNvSpPr txBox="1"/>
-          <p:nvPr/>
-        </p:nvSpPr>
-        <p:spPr>
-          <a:xfrm>
-            <a:off x="1133856" y="4809744"/>
-            <a:ext cx="4828032" cy="475488"/>
-          </a:xfrm>
-          <a:prstGeom prst="rect">
-            <a:avLst/>
-          </a:prstGeom>
-          <a:noFill/>
-          <a:ln/>
-        </p:spPr>
-        <p:txBody>
-          <a:bodyPr wrap="square" lIns="0" tIns="0" rIns="0" bIns="0" rtlCol="0" anchor="ctr"/>
-          <a:lstStyle/>
-          <a:p>
-            <a:pPr marL="0" indent="0">
-              <a:lnSpc>
-                <a:spcPts val="1600"/>
-              </a:lnSpc>
-              <a:buNone/>
-            </a:pPr>
-            <a:r>
-              <a:rPr lang="en-US" sz="1280" b="1" dirty="0">
-                <a:solidFill>
-                  <a:srgbClr val="1A1A1A"/>
-                </a:solidFill>
-                <a:latin typeface="Calibri" pitchFamily="34" charset="0"/>
-                <a:ea typeface="Calibri" pitchFamily="34" charset="-122"/>
-                <a:cs typeface="Calibri" pitchFamily="34" charset="-120"/>
-              </a:rPr>
-              <a:t>What is the levelling datum behind the bathymetry, and how does its zero relate to the tide gauges?</a:t>
-            </a:r>
-            <a:endParaRPr lang="en-US" sz="1280" dirty="0"/>
-          </a:p>
-        </p:txBody>
-      </p:sp>
-      <p:sp>
-        <p:nvSpPr>
-          <p:cNvPr id="23" name="Text 21"/>
-          <p:cNvSpPr txBox="1"/>
-          <p:nvPr/>
-        </p:nvSpPr>
-        <p:spPr>
-          <a:xfrm>
-            <a:off x="1133856" y="5294376"/>
-            <a:ext cx="4828032" cy="896112"/>
-          </a:xfrm>
-          <a:prstGeom prst="rect">
-            <a:avLst/>
-          </a:prstGeom>
-          <a:noFill/>
-          <a:ln/>
-        </p:spPr>
-        <p:txBody>
-          <a:bodyPr wrap="square" lIns="0" tIns="0" rIns="0" bIns="0" rtlCol="0" anchor="ctr"/>
-          <a:lstStyle/>
-          <a:p>
-            <a:pPr marL="0" indent="0">
-              <a:lnSpc>
-                <a:spcPts val="1450"/>
-              </a:lnSpc>
-              <a:buNone/>
-            </a:pPr>
-            <a:r>
-              <a:rPr lang="en-US" sz="1100" dirty="0">
-                <a:solidFill>
-                  <a:srgbClr val="5F6368"/>
-                </a:solidFill>
-                <a:latin typeface="Calibri" pitchFamily="34" charset="0"/>
-                <a:ea typeface="Calibri" pitchFamily="34" charset="-122"/>
-                <a:cs typeface="Calibri" pitchFamily="34" charset="-120"/>
-              </a:rPr>
-              <a:t>The files declare ellipsoidal heights while the data are orthometric. What remains to be established is the offset against the gauges used for validation.</a:t>
-            </a:r>
-            <a:endParaRPr lang="en-US" sz="1100" dirty="0"/>
-          </a:p>
-        </p:txBody>
-      </p:sp>
-      <p:sp>
-        <p:nvSpPr>
-          <p:cNvPr id="24" name="Shape 22"/>
-          <p:cNvSpPr/>
-          <p:nvPr/>
-        </p:nvSpPr>
-        <p:spPr>
-          <a:xfrm>
-            <a:off x="6126480" y="4837176"/>
-            <a:ext cx="402336" cy="402336"/>
-          </a:xfrm>
-          <a:prstGeom prst="ellipse">
-            <a:avLst/>
-          </a:prstGeom>
-          <a:solidFill>
-            <a:srgbClr val="1C7293"/>
-          </a:solidFill>
-          <a:ln/>
-        </p:spPr>
-        <p:txBody>
-          <a:bodyPr/>
-          <a:lstStyle/>
-          <a:p>
-            <a:endParaRPr lang="it-IT"/>
-          </a:p>
-        </p:txBody>
-      </p:sp>
-      <p:sp>
-        <p:nvSpPr>
-          <p:cNvPr id="25" name="Text 23"/>
-          <p:cNvSpPr txBox="1"/>
-          <p:nvPr/>
-        </p:nvSpPr>
-        <p:spPr>
-          <a:xfrm>
-            <a:off x="6126480" y="4837176"/>
-            <a:ext cx="402336" cy="402336"/>
-          </a:xfrm>
-          <a:prstGeom prst="rect">
-            <a:avLst/>
-          </a:prstGeom>
-          <a:noFill/>
-          <a:ln/>
-        </p:spPr>
-        <p:txBody>
-          <a:bodyPr wrap="square" lIns="0" tIns="0" rIns="0" bIns="0" rtlCol="0" anchor="ctr"/>
-          <a:lstStyle/>
-          <a:p>
-            <a:pPr marL="0" indent="0" algn="ctr">
-              <a:buNone/>
-            </a:pPr>
-            <a:r>
-              <a:rPr lang="en-US" sz="1500" b="1" dirty="0">
-                <a:solidFill>
-                  <a:srgbClr val="FFFFFF"/>
-                </a:solidFill>
-                <a:latin typeface="Calibri" pitchFamily="34" charset="0"/>
-                <a:ea typeface="Calibri" pitchFamily="34" charset="-122"/>
-                <a:cs typeface="Calibri" pitchFamily="34" charset="-120"/>
-              </a:rPr>
-              <a:t>6</a:t>
-            </a:r>
-            <a:endParaRPr lang="en-US" sz="1500" dirty="0"/>
-          </a:p>
-        </p:txBody>
-      </p:sp>
-      <p:sp>
-        <p:nvSpPr>
-          <p:cNvPr id="26" name="Text 24"/>
-          <p:cNvSpPr txBox="1"/>
-          <p:nvPr/>
-        </p:nvSpPr>
-        <p:spPr>
-          <a:xfrm>
-            <a:off x="6693408" y="4809744"/>
-            <a:ext cx="4828032" cy="475488"/>
-          </a:xfrm>
-          <a:prstGeom prst="rect">
-            <a:avLst/>
-          </a:prstGeom>
-          <a:noFill/>
-          <a:ln/>
-        </p:spPr>
-        <p:txBody>
-          <a:bodyPr wrap="square" lIns="0" tIns="0" rIns="0" bIns="0" rtlCol="0" anchor="ctr"/>
-          <a:lstStyle/>
-          <a:p>
-            <a:pPr marL="0" indent="0">
-              <a:lnSpc>
-                <a:spcPts val="1600"/>
-              </a:lnSpc>
-              <a:buNone/>
-            </a:pPr>
-            <a:r>
-              <a:rPr lang="en-US" sz="1280" b="1" dirty="0">
-                <a:solidFill>
-                  <a:srgbClr val="1A1A1A"/>
-                </a:solidFill>
-                <a:latin typeface="Calibri" pitchFamily="34" charset="0"/>
-                <a:ea typeface="Calibri" pitchFamily="34" charset="-122"/>
-                <a:cs typeface="Calibri" pitchFamily="34" charset="-120"/>
-              </a:rPr>
-              <a:t>Is there any wave record beyond the BLUE buoy?</a:t>
-            </a:r>
-            <a:endParaRPr lang="en-US" sz="1280" dirty="0"/>
-          </a:p>
-        </p:txBody>
-      </p:sp>
-      <p:sp>
-        <p:nvSpPr>
-          <p:cNvPr id="27" name="Text 25"/>
-          <p:cNvSpPr txBox="1"/>
-          <p:nvPr/>
-        </p:nvSpPr>
-        <p:spPr>
-          <a:xfrm>
-            <a:off x="6693408" y="5294376"/>
-            <a:ext cx="4828032" cy="896112"/>
-          </a:xfrm>
-          <a:prstGeom prst="rect">
-            <a:avLst/>
-          </a:prstGeom>
-          <a:noFill/>
-          <a:ln/>
-        </p:spPr>
-        <p:txBody>
-          <a:bodyPr wrap="square" lIns="0" tIns="0" rIns="0" bIns="0" rtlCol="0" anchor="ctr"/>
-          <a:lstStyle/>
-          <a:p>
-            <a:pPr marL="0" indent="0">
-              <a:lnSpc>
-                <a:spcPts val="1450"/>
-              </a:lnSpc>
-              <a:buNone/>
-            </a:pPr>
-            <a:r>
-              <a:rPr lang="en-US" sz="1100" dirty="0">
-                <a:solidFill>
-                  <a:srgbClr val="5F6368"/>
-                </a:solidFill>
-                <a:latin typeface="Calibri" pitchFamily="34" charset="0"/>
-                <a:ea typeface="Calibri" pitchFamily="34" charset="-122"/>
-                <a:cs typeface="Calibri" pitchFamily="34" charset="-120"/>
-              </a:rPr>
-              <a:t>Wave validation presently rests on a single point 3.7 km offshore. The radar reports a derived product whose own accuracy was assessed against models, so it serves as a cross-check rather than a reference.</a:t>
-            </a:r>
-            <a:endParaRPr lang="en-US" sz="1100" dirty="0"/>
+              <a:t>The cost is a second evaluation of the same sweep, with no new forcing, no new validation and no new configuration.</a:t>
+            </a:r>
+            <a:endParaRPr lang="en-US" sz="1050" dirty="0"/>
           </a:p>
         </p:txBody>
       </p:sp>
@@ -2858,12 +3736,1718 @@
 <file path=ppt/slides/slide11.xml><?xml version="1.0" encoding="utf-8"?>
 <p:sld xmlns:a="http://schemas.openxmlformats.org/drawingml/2006/main" xmlns:r="http://schemas.openxmlformats.org/officeDocument/2006/relationships" xmlns:p="http://schemas.openxmlformats.org/presentationml/2006/main">
   <p:cSld name="Slide 11">
+    <p:spTree>
+      <p:nvGrpSpPr>
+        <p:cNvPr id="1" name=""/>
+        <p:cNvGrpSpPr/>
+        <p:nvPr/>
+      </p:nvGrpSpPr>
+      <p:grpSpPr>
+        <a:xfrm>
+          <a:off x="0" y="0"/>
+          <a:ext cx="0" cy="0"/>
+          <a:chOff x="0" y="0"/>
+          <a:chExt cx="0" cy="0"/>
+        </a:xfrm>
+      </p:grpSpPr>
+      <p:sp>
+        <p:nvSpPr>
+          <p:cNvPr id="2" name="Text 0"/>
+          <p:cNvSpPr txBox="1"/>
+          <p:nvPr/>
+        </p:nvSpPr>
+        <p:spPr>
+          <a:xfrm>
+            <a:off x="566928" y="438912"/>
+            <a:ext cx="8229600" cy="274320"/>
+          </a:xfrm>
+          <a:prstGeom prst="rect">
+            <a:avLst/>
+          </a:prstGeom>
+          <a:noFill/>
+          <a:ln/>
+        </p:spPr>
+        <p:txBody>
+          <a:bodyPr wrap="square" lIns="0" tIns="0" rIns="0" bIns="0" rtlCol="0" anchor="ctr"/>
+          <a:lstStyle/>
+          <a:p>
+            <a:pPr indent="0" marL="0">
+              <a:buNone/>
+            </a:pPr>
+            <a:r>
+              <a:rPr lang="en-US" sz="1200" b="1" spc="200" kern="0" dirty="0">
+                <a:solidFill>
+                  <a:srgbClr val="EB6834"/>
+                </a:solidFill>
+                <a:latin typeface="Calibri" pitchFamily="34" charset="0"/>
+                <a:ea typeface="Calibri" pitchFamily="34" charset="-122"/>
+                <a:cs typeface="Calibri" pitchFamily="34" charset="-120"/>
+              </a:rPr>
+              <a:t>EXPERIMENTAL DESIGN</a:t>
+            </a:r>
+            <a:endParaRPr lang="en-US" sz="1200" dirty="0"/>
+          </a:p>
+        </p:txBody>
+      </p:sp>
+      <p:sp>
+        <p:nvSpPr>
+          <p:cNvPr id="3" name="Text 1"/>
+          <p:cNvSpPr txBox="1"/>
+          <p:nvPr/>
+        </p:nvSpPr>
+        <p:spPr>
+          <a:xfrm>
+            <a:off x="566928" y="749808"/>
+            <a:ext cx="10424160" cy="658368"/>
+          </a:xfrm>
+          <a:prstGeom prst="rect">
+            <a:avLst/>
+          </a:prstGeom>
+          <a:noFill/>
+          <a:ln/>
+        </p:spPr>
+        <p:txBody>
+          <a:bodyPr wrap="square" lIns="0" tIns="0" rIns="0" bIns="0" rtlCol="0" anchor="ctr"/>
+          <a:lstStyle/>
+          <a:p>
+            <a:pPr indent="0" marL="0">
+              <a:buNone/>
+            </a:pPr>
+            <a:r>
+              <a:rPr lang="en-US" sz="3200" b="1" dirty="0">
+                <a:solidFill>
+                  <a:srgbClr val="1A1A1A"/>
+                </a:solidFill>
+                <a:latin typeface="Cambria" pitchFamily="34" charset="0"/>
+                <a:ea typeface="Cambria" pitchFamily="34" charset="-122"/>
+                <a:cs typeface="Cambria" pitchFamily="34" charset="-120"/>
+              </a:rPr>
+              <a:t>A parametric sweep in place of a hindcast</a:t>
+            </a:r>
+            <a:endParaRPr lang="en-US" sz="3200" dirty="0"/>
+          </a:p>
+        </p:txBody>
+      </p:sp>
+      <p:sp>
+        <p:nvSpPr>
+          <p:cNvPr id="4" name="Text 2"/>
+          <p:cNvSpPr txBox="1"/>
+          <p:nvPr/>
+        </p:nvSpPr>
+        <p:spPr>
+          <a:xfrm>
+            <a:off x="566928" y="1408176"/>
+            <a:ext cx="10881360" cy="585216"/>
+          </a:xfrm>
+          <a:prstGeom prst="rect">
+            <a:avLst/>
+          </a:prstGeom>
+          <a:noFill/>
+          <a:ln/>
+        </p:spPr>
+        <p:txBody>
+          <a:bodyPr wrap="square" lIns="0" tIns="0" rIns="0" bIns="0" rtlCol="0" anchor="ctr"/>
+          <a:lstStyle/>
+          <a:p>
+            <a:pPr indent="0" marL="0">
+              <a:buNone/>
+            </a:pPr>
+            <a:r>
+              <a:rPr lang="en-US" sz="1400" dirty="0">
+                <a:solidFill>
+                  <a:srgbClr val="5F6368"/>
+                </a:solidFill>
+                <a:latin typeface="Calibri" pitchFamily="34" charset="0"/>
+                <a:ea typeface="Calibri" pitchFamily="34" charset="-122"/>
+                <a:cs typeface="Calibri" pitchFamily="34" charset="-120"/>
+              </a:rPr>
+              <a:t>ERA5 does not resolve the atmospheric gravity waves that trigger the phenomenon, which has constituted the largest standing risk in the project.</a:t>
+            </a:r>
+            <a:endParaRPr lang="en-US" sz="1400" dirty="0"/>
+          </a:p>
+        </p:txBody>
+      </p:sp>
+      <p:sp>
+        <p:nvSpPr>
+          <p:cNvPr id="5" name="Shape 3"/>
+          <p:cNvSpPr/>
+          <p:nvPr/>
+        </p:nvSpPr>
+        <p:spPr>
+          <a:xfrm>
+            <a:off x="566928" y="2331720"/>
+            <a:ext cx="402336" cy="402336"/>
+          </a:xfrm>
+          <a:prstGeom prst="ellipse">
+            <a:avLst/>
+          </a:prstGeom>
+          <a:solidFill>
+            <a:srgbClr val="065A82"/>
+          </a:solidFill>
+          <a:ln/>
+        </p:spPr>
+      </p:sp>
+      <p:sp>
+        <p:nvSpPr>
+          <p:cNvPr id="6" name="Text 4"/>
+          <p:cNvSpPr txBox="1"/>
+          <p:nvPr/>
+        </p:nvSpPr>
+        <p:spPr>
+          <a:xfrm>
+            <a:off x="566928" y="2331720"/>
+            <a:ext cx="402336" cy="402336"/>
+          </a:xfrm>
+          <a:prstGeom prst="rect">
+            <a:avLst/>
+          </a:prstGeom>
+          <a:noFill/>
+          <a:ln/>
+        </p:spPr>
+        <p:txBody>
+          <a:bodyPr wrap="square" lIns="0" tIns="0" rIns="0" bIns="0" rtlCol="0" anchor="ctr"/>
+          <a:lstStyle/>
+          <a:p>
+            <a:pPr algn="ctr" indent="0" marL="0">
+              <a:buNone/>
+            </a:pPr>
+            <a:r>
+              <a:rPr lang="en-US" sz="1500" b="1" dirty="0">
+                <a:solidFill>
+                  <a:srgbClr val="FFFFFF"/>
+                </a:solidFill>
+                <a:latin typeface="Calibri" pitchFamily="34" charset="0"/>
+                <a:ea typeface="Calibri" pitchFamily="34" charset="-122"/>
+                <a:cs typeface="Calibri" pitchFamily="34" charset="-120"/>
+              </a:rPr>
+              <a:t>1</a:t>
+            </a:r>
+            <a:endParaRPr lang="en-US" sz="1500" dirty="0"/>
+          </a:p>
+        </p:txBody>
+      </p:sp>
+      <p:sp>
+        <p:nvSpPr>
+          <p:cNvPr id="7" name="Text 5"/>
+          <p:cNvSpPr txBox="1"/>
+          <p:nvPr/>
+        </p:nvSpPr>
+        <p:spPr>
+          <a:xfrm>
+            <a:off x="1188720" y="2313432"/>
+            <a:ext cx="3383280" cy="292608"/>
+          </a:xfrm>
+          <a:prstGeom prst="rect">
+            <a:avLst/>
+          </a:prstGeom>
+          <a:noFill/>
+          <a:ln/>
+        </p:spPr>
+        <p:txBody>
+          <a:bodyPr wrap="square" lIns="0" tIns="0" rIns="0" bIns="0" rtlCol="0" anchor="ctr"/>
+          <a:lstStyle/>
+          <a:p>
+            <a:pPr indent="0" marL="0">
+              <a:buNone/>
+            </a:pPr>
+            <a:r>
+              <a:rPr lang="en-US" sz="1450" b="1" dirty="0">
+                <a:solidFill>
+                  <a:srgbClr val="1A1A1A"/>
+                </a:solidFill>
+                <a:latin typeface="Cambria" pitchFamily="34" charset="0"/>
+                <a:ea typeface="Cambria" pitchFamily="34" charset="-122"/>
+                <a:cs typeface="Cambria" pitchFamily="34" charset="-120"/>
+              </a:rPr>
+              <a:t>Sweep</a:t>
+            </a:r>
+            <a:endParaRPr lang="en-US" sz="1450" dirty="0"/>
+          </a:p>
+        </p:txBody>
+      </p:sp>
+      <p:sp>
+        <p:nvSpPr>
+          <p:cNvPr id="8" name="Text 6"/>
+          <p:cNvSpPr txBox="1"/>
+          <p:nvPr/>
+        </p:nvSpPr>
+        <p:spPr>
+          <a:xfrm>
+            <a:off x="1188720" y="2624328"/>
+            <a:ext cx="6035040" cy="658368"/>
+          </a:xfrm>
+          <a:prstGeom prst="rect">
+            <a:avLst/>
+          </a:prstGeom>
+          <a:noFill/>
+          <a:ln/>
+        </p:spPr>
+        <p:txBody>
+          <a:bodyPr wrap="square" lIns="0" tIns="0" rIns="0" bIns="0" rtlCol="0" anchor="ctr"/>
+          <a:lstStyle/>
+          <a:p>
+            <a:pPr indent="0" marL="0">
+              <a:lnSpc>
+                <a:spcPts val="1700"/>
+              </a:lnSpc>
+              <a:buNone/>
+            </a:pPr>
+            <a:r>
+              <a:rPr lang="en-US" sz="1250" dirty="0">
+                <a:solidFill>
+                  <a:srgbClr val="5F6368"/>
+                </a:solidFill>
+                <a:latin typeface="Calibri" pitchFamily="34" charset="0"/>
+                <a:ea typeface="Calibri" pitchFamily="34" charset="-122"/>
+                <a:cs typeface="Calibri" pitchFamily="34" charset="-120"/>
+              </a:rPr>
+              <a:t>Impose a moving pressure disturbance and vary its speed, direction, width and duration.</a:t>
+            </a:r>
+            <a:endParaRPr lang="en-US" sz="1250" dirty="0"/>
+          </a:p>
+        </p:txBody>
+      </p:sp>
+      <p:sp>
+        <p:nvSpPr>
+          <p:cNvPr id="9" name="Shape 7"/>
+          <p:cNvSpPr/>
+          <p:nvPr/>
+        </p:nvSpPr>
+        <p:spPr>
+          <a:xfrm>
+            <a:off x="566928" y="3502152"/>
+            <a:ext cx="402336" cy="402336"/>
+          </a:xfrm>
+          <a:prstGeom prst="ellipse">
+            <a:avLst/>
+          </a:prstGeom>
+          <a:solidFill>
+            <a:srgbClr val="065A82"/>
+          </a:solidFill>
+          <a:ln/>
+        </p:spPr>
+      </p:sp>
+      <p:sp>
+        <p:nvSpPr>
+          <p:cNvPr id="10" name="Text 8"/>
+          <p:cNvSpPr txBox="1"/>
+          <p:nvPr/>
+        </p:nvSpPr>
+        <p:spPr>
+          <a:xfrm>
+            <a:off x="566928" y="3502152"/>
+            <a:ext cx="402336" cy="402336"/>
+          </a:xfrm>
+          <a:prstGeom prst="rect">
+            <a:avLst/>
+          </a:prstGeom>
+          <a:noFill/>
+          <a:ln/>
+        </p:spPr>
+        <p:txBody>
+          <a:bodyPr wrap="square" lIns="0" tIns="0" rIns="0" bIns="0" rtlCol="0" anchor="ctr"/>
+          <a:lstStyle/>
+          <a:p>
+            <a:pPr algn="ctr" indent="0" marL="0">
+              <a:buNone/>
+            </a:pPr>
+            <a:r>
+              <a:rPr lang="en-US" sz="1500" b="1" dirty="0">
+                <a:solidFill>
+                  <a:srgbClr val="FFFFFF"/>
+                </a:solidFill>
+                <a:latin typeface="Calibri" pitchFamily="34" charset="0"/>
+                <a:ea typeface="Calibri" pitchFamily="34" charset="-122"/>
+                <a:cs typeface="Calibri" pitchFamily="34" charset="-120"/>
+              </a:rPr>
+              <a:t>2</a:t>
+            </a:r>
+            <a:endParaRPr lang="en-US" sz="1500" dirty="0"/>
+          </a:p>
+        </p:txBody>
+      </p:sp>
+      <p:sp>
+        <p:nvSpPr>
+          <p:cNvPr id="11" name="Text 9"/>
+          <p:cNvSpPr txBox="1"/>
+          <p:nvPr/>
+        </p:nvSpPr>
+        <p:spPr>
+          <a:xfrm>
+            <a:off x="1188720" y="3483864"/>
+            <a:ext cx="3383280" cy="292608"/>
+          </a:xfrm>
+          <a:prstGeom prst="rect">
+            <a:avLst/>
+          </a:prstGeom>
+          <a:noFill/>
+          <a:ln/>
+        </p:spPr>
+        <p:txBody>
+          <a:bodyPr wrap="square" lIns="0" tIns="0" rIns="0" bIns="0" rtlCol="0" anchor="ctr"/>
+          <a:lstStyle/>
+          <a:p>
+            <a:pPr indent="0" marL="0">
+              <a:buNone/>
+            </a:pPr>
+            <a:r>
+              <a:rPr lang="en-US" sz="1450" b="1" dirty="0">
+                <a:solidFill>
+                  <a:srgbClr val="1A1A1A"/>
+                </a:solidFill>
+                <a:latin typeface="Cambria" pitchFamily="34" charset="0"/>
+                <a:ea typeface="Cambria" pitchFamily="34" charset="-122"/>
+                <a:cs typeface="Cambria" pitchFamily="34" charset="-120"/>
+              </a:rPr>
+              <a:t>Response surface</a:t>
+            </a:r>
+            <a:endParaRPr lang="en-US" sz="1450" dirty="0"/>
+          </a:p>
+        </p:txBody>
+      </p:sp>
+      <p:sp>
+        <p:nvSpPr>
+          <p:cNvPr id="12" name="Text 10"/>
+          <p:cNvSpPr txBox="1"/>
+          <p:nvPr/>
+        </p:nvSpPr>
+        <p:spPr>
+          <a:xfrm>
+            <a:off x="1188720" y="3794760"/>
+            <a:ext cx="6035040" cy="658368"/>
+          </a:xfrm>
+          <a:prstGeom prst="rect">
+            <a:avLst/>
+          </a:prstGeom>
+          <a:noFill/>
+          <a:ln/>
+        </p:spPr>
+        <p:txBody>
+          <a:bodyPr wrap="square" lIns="0" tIns="0" rIns="0" bIns="0" rtlCol="0" anchor="ctr"/>
+          <a:lstStyle/>
+          <a:p>
+            <a:pPr indent="0" marL="0">
+              <a:lnSpc>
+                <a:spcPts val="1700"/>
+              </a:lnSpc>
+              <a:buNone/>
+            </a:pPr>
+            <a:r>
+              <a:rPr lang="en-US" sz="1250" dirty="0">
+                <a:solidFill>
+                  <a:srgbClr val="5F6368"/>
+                </a:solidFill>
+                <a:latin typeface="Calibri" pitchFamily="34" charset="0"/>
+                <a:ea typeface="Calibri" pitchFamily="34" charset="-122"/>
+                <a:cs typeface="Calibri" pitchFamily="34" charset="-120"/>
+              </a:rPr>
+              <a:t>The output is a transfer function of the geometry, independent of any particular storm.</a:t>
+            </a:r>
+            <a:endParaRPr lang="en-US" sz="1250" dirty="0"/>
+          </a:p>
+        </p:txBody>
+      </p:sp>
+      <p:sp>
+        <p:nvSpPr>
+          <p:cNvPr id="13" name="Shape 11"/>
+          <p:cNvSpPr/>
+          <p:nvPr/>
+        </p:nvSpPr>
+        <p:spPr>
+          <a:xfrm>
+            <a:off x="566928" y="4672584"/>
+            <a:ext cx="402336" cy="402336"/>
+          </a:xfrm>
+          <a:prstGeom prst="ellipse">
+            <a:avLst/>
+          </a:prstGeom>
+          <a:solidFill>
+            <a:srgbClr val="EB6834"/>
+          </a:solidFill>
+          <a:ln/>
+        </p:spPr>
+      </p:sp>
+      <p:sp>
+        <p:nvSpPr>
+          <p:cNvPr id="14" name="Text 12"/>
+          <p:cNvSpPr txBox="1"/>
+          <p:nvPr/>
+        </p:nvSpPr>
+        <p:spPr>
+          <a:xfrm>
+            <a:off x="566928" y="4672584"/>
+            <a:ext cx="402336" cy="402336"/>
+          </a:xfrm>
+          <a:prstGeom prst="rect">
+            <a:avLst/>
+          </a:prstGeom>
+          <a:noFill/>
+          <a:ln/>
+        </p:spPr>
+        <p:txBody>
+          <a:bodyPr wrap="square" lIns="0" tIns="0" rIns="0" bIns="0" rtlCol="0" anchor="ctr"/>
+          <a:lstStyle/>
+          <a:p>
+            <a:pPr algn="ctr" indent="0" marL="0">
+              <a:buNone/>
+            </a:pPr>
+            <a:r>
+              <a:rPr lang="en-US" sz="1500" b="1" dirty="0">
+                <a:solidFill>
+                  <a:srgbClr val="FFFFFF"/>
+                </a:solidFill>
+                <a:latin typeface="Calibri" pitchFamily="34" charset="0"/>
+                <a:ea typeface="Calibri" pitchFamily="34" charset="-122"/>
+                <a:cs typeface="Calibri" pitchFamily="34" charset="-120"/>
+              </a:rPr>
+              <a:t>3</a:t>
+            </a:r>
+            <a:endParaRPr lang="en-US" sz="1500" dirty="0"/>
+          </a:p>
+        </p:txBody>
+      </p:sp>
+      <p:sp>
+        <p:nvSpPr>
+          <p:cNvPr id="15" name="Text 13"/>
+          <p:cNvSpPr txBox="1"/>
+          <p:nvPr/>
+        </p:nvSpPr>
+        <p:spPr>
+          <a:xfrm>
+            <a:off x="1188720" y="4654296"/>
+            <a:ext cx="3383280" cy="292608"/>
+          </a:xfrm>
+          <a:prstGeom prst="rect">
+            <a:avLst/>
+          </a:prstGeom>
+          <a:noFill/>
+          <a:ln/>
+        </p:spPr>
+        <p:txBody>
+          <a:bodyPr wrap="square" lIns="0" tIns="0" rIns="0" bIns="0" rtlCol="0" anchor="ctr"/>
+          <a:lstStyle/>
+          <a:p>
+            <a:pPr indent="0" marL="0">
+              <a:buNone/>
+            </a:pPr>
+            <a:r>
+              <a:rPr lang="en-US" sz="1450" b="1" dirty="0">
+                <a:solidFill>
+                  <a:srgbClr val="1A1A1A"/>
+                </a:solidFill>
+                <a:latin typeface="Cambria" pitchFamily="34" charset="0"/>
+                <a:ea typeface="Cambria" pitchFamily="34" charset="-122"/>
+                <a:cs typeface="Cambria" pitchFamily="34" charset="-120"/>
+              </a:rPr>
+              <a:t>Inversion of the observations</a:t>
+            </a:r>
+            <a:endParaRPr lang="en-US" sz="1450" dirty="0"/>
+          </a:p>
+        </p:txBody>
+      </p:sp>
+      <p:sp>
+        <p:nvSpPr>
+          <p:cNvPr id="16" name="Text 14"/>
+          <p:cNvSpPr txBox="1"/>
+          <p:nvPr/>
+        </p:nvSpPr>
+        <p:spPr>
+          <a:xfrm>
+            <a:off x="1188720" y="4965192"/>
+            <a:ext cx="6035040" cy="658368"/>
+          </a:xfrm>
+          <a:prstGeom prst="rect">
+            <a:avLst/>
+          </a:prstGeom>
+          <a:noFill/>
+          <a:ln/>
+        </p:spPr>
+        <p:txBody>
+          <a:bodyPr wrap="square" lIns="0" tIns="0" rIns="0" bIns="0" rtlCol="0" anchor="ctr"/>
+          <a:lstStyle/>
+          <a:p>
+            <a:pPr indent="0" marL="0">
+              <a:lnSpc>
+                <a:spcPts val="1700"/>
+              </a:lnSpc>
+              <a:buNone/>
+            </a:pPr>
+            <a:r>
+              <a:rPr lang="en-US" sz="1250" dirty="0">
+                <a:solidFill>
+                  <a:srgbClr val="5F6368"/>
+                </a:solidFill>
+                <a:latin typeface="Calibri" pitchFamily="34" charset="0"/>
+                <a:ea typeface="Calibri" pitchFamily="34" charset="-122"/>
+                <a:cs typeface="Calibri" pitchFamily="34" charset="-120"/>
+              </a:rPr>
+              <a:t>The observations cease to be the forcing and become the test, addressing whether recorded events occur under the conditions identified as resonant.</a:t>
+            </a:r>
+            <a:endParaRPr lang="en-US" sz="1250" dirty="0"/>
+          </a:p>
+        </p:txBody>
+      </p:sp>
+      <p:sp>
+        <p:nvSpPr>
+          <p:cNvPr id="17" name="Shape 15"/>
+          <p:cNvSpPr/>
+          <p:nvPr/>
+        </p:nvSpPr>
+        <p:spPr>
+          <a:xfrm>
+            <a:off x="7680960" y="2286000"/>
+            <a:ext cx="3941064" cy="3108960"/>
+          </a:xfrm>
+          <a:prstGeom prst="roundRect">
+            <a:avLst>
+              <a:gd name="adj" fmla="val 1765"/>
+            </a:avLst>
+          </a:prstGeom>
+          <a:solidFill>
+            <a:srgbClr val="21295C"/>
+          </a:solidFill>
+          <a:ln/>
+        </p:spPr>
+      </p:sp>
+      <p:sp>
+        <p:nvSpPr>
+          <p:cNvPr id="18" name="Text 16"/>
+          <p:cNvSpPr txBox="1"/>
+          <p:nvPr/>
+        </p:nvSpPr>
+        <p:spPr>
+          <a:xfrm>
+            <a:off x="7955280" y="2487168"/>
+            <a:ext cx="3429000" cy="548640"/>
+          </a:xfrm>
+          <a:prstGeom prst="rect">
+            <a:avLst/>
+          </a:prstGeom>
+          <a:noFill/>
+          <a:ln/>
+        </p:spPr>
+        <p:txBody>
+          <a:bodyPr wrap="square" lIns="0" tIns="0" rIns="0" bIns="0" rtlCol="0" anchor="ctr"/>
+          <a:lstStyle/>
+          <a:p>
+            <a:pPr indent="0" marL="0">
+              <a:buNone/>
+            </a:pPr>
+            <a:r>
+              <a:rPr lang="en-US" sz="1400" b="1" dirty="0">
+                <a:solidFill>
+                  <a:srgbClr val="EB6834"/>
+                </a:solidFill>
+                <a:latin typeface="Cambria" pitchFamily="34" charset="0"/>
+                <a:ea typeface="Cambria" pitchFamily="34" charset="-122"/>
+                <a:cs typeface="Cambria" pitchFamily="34" charset="-120"/>
+              </a:rPr>
+              <a:t>Bearing beyond the present study</a:t>
+            </a:r>
+            <a:endParaRPr lang="en-US" sz="1400" dirty="0"/>
+          </a:p>
+        </p:txBody>
+      </p:sp>
+      <p:sp>
+        <p:nvSpPr>
+          <p:cNvPr id="19" name="Text 17"/>
+          <p:cNvSpPr txBox="1"/>
+          <p:nvPr/>
+        </p:nvSpPr>
+        <p:spPr>
+          <a:xfrm>
+            <a:off x="7955280" y="3063240"/>
+            <a:ext cx="3429000" cy="2103120"/>
+          </a:xfrm>
+          <a:prstGeom prst="rect">
+            <a:avLst/>
+          </a:prstGeom>
+          <a:noFill/>
+          <a:ln/>
+        </p:spPr>
+        <p:txBody>
+          <a:bodyPr wrap="square" lIns="0" tIns="0" rIns="0" bIns="0" rtlCol="0" anchor="ctr"/>
+          <a:lstStyle/>
+          <a:p>
+            <a:pPr indent="0" marL="0">
+              <a:lnSpc>
+                <a:spcPts val="1550"/>
+              </a:lnSpc>
+              <a:buNone/>
+            </a:pPr>
+            <a:r>
+              <a:rPr lang="en-US" sz="1150" dirty="0">
+                <a:solidFill>
+                  <a:srgbClr val="CADCFC"/>
+                </a:solidFill>
+                <a:latin typeface="Calibri" pitchFamily="34" charset="0"/>
+                <a:ea typeface="Calibri" pitchFamily="34" charset="-122"/>
+                <a:cs typeface="Calibri" pitchFamily="34" charset="-120"/>
+              </a:rPr>
+              <a:t>A response surface is a property of the geometry, whereas climate change acts on the distribution of the forcing.
+</a:t>
+            </a:r>
+            <a:endParaRPr lang="en-US" sz="1150" dirty="0"/>
+          </a:p>
+          <a:p>
+            <a:pPr indent="0" marL="0">
+              <a:lnSpc>
+                <a:spcPts val="1550"/>
+              </a:lnSpc>
+              <a:buNone/>
+            </a:pPr>
+            <a:r>
+              <a:rPr lang="en-US" sz="1150" dirty="0">
+                <a:solidFill>
+                  <a:srgbClr val="CADCFC"/>
+                </a:solidFill>
+                <a:latin typeface="Calibri" pitchFamily="34" charset="0"/>
+                <a:ea typeface="Calibri" pitchFamily="34" charset="-122"/>
+                <a:cs typeface="Calibri" pitchFamily="34" charset="-120"/>
+              </a:rPr>
+              <a:t>The two separate, so the surface is computed once and any later study with synoptic projections may convolve them without repeating the hydrodynamics.
+</a:t>
+            </a:r>
+            <a:endParaRPr lang="en-US" sz="1150" dirty="0"/>
+          </a:p>
+          <a:p>
+            <a:pPr indent="0" marL="0">
+              <a:lnSpc>
+                <a:spcPts val="1550"/>
+              </a:lnSpc>
+              <a:buNone/>
+            </a:pPr>
+            <a:r>
+              <a:rPr lang="en-US" sz="1150" b="1" dirty="0">
+                <a:solidFill>
+                  <a:srgbClr val="FFFFFF"/>
+                </a:solidFill>
+                <a:latin typeface="Calibri" pitchFamily="34" charset="0"/>
+                <a:ea typeface="Calibri" pitchFamily="34" charset="-122"/>
+                <a:cs typeface="Calibri" pitchFamily="34" charset="-120"/>
+              </a:rPr>
+              <a:t>No climate scenario need be run through the model.</a:t>
+            </a:r>
+            <a:endParaRPr lang="en-US" sz="1150" dirty="0"/>
+          </a:p>
+        </p:txBody>
+      </p:sp>
+      <p:sp>
+        <p:nvSpPr>
+          <p:cNvPr id="20" name="Text 18"/>
+          <p:cNvSpPr txBox="1"/>
+          <p:nvPr/>
+        </p:nvSpPr>
+        <p:spPr>
+          <a:xfrm>
+            <a:off x="566928" y="6053328"/>
+            <a:ext cx="11055096" cy="310896"/>
+          </a:xfrm>
+          <a:prstGeom prst="rect">
+            <a:avLst/>
+          </a:prstGeom>
+          <a:noFill/>
+          <a:ln/>
+        </p:spPr>
+        <p:txBody>
+          <a:bodyPr wrap="square" lIns="0" tIns="0" rIns="0" bIns="0" rtlCol="0" anchor="ctr"/>
+          <a:lstStyle/>
+          <a:p>
+            <a:pPr indent="0" marL="0">
+              <a:buNone/>
+            </a:pPr>
+            <a:r>
+              <a:rPr lang="en-US" sz="1050" i="1" dirty="0">
+                <a:solidFill>
+                  <a:srgbClr val="5F6368"/>
+                </a:solidFill>
+                <a:latin typeface="Calibri" pitchFamily="34" charset="0"/>
+                <a:ea typeface="Calibri" pitchFamily="34" charset="-122"/>
+                <a:cs typeface="Calibri" pitchFamily="34" charset="-120"/>
+              </a:rPr>
+              <a:t>The milgħuba floods Msida, at the head of Msida Creek inside Marsamxett, together with Marsaskala, Xemxija, Marsaxlokk and Sliema.</a:t>
+            </a:r>
+            <a:endParaRPr lang="en-US" sz="1050" dirty="0"/>
+          </a:p>
+        </p:txBody>
+      </p:sp>
+    </p:spTree>
+  </p:cSld>
+  <p:clrMapOvr>
+    <a:masterClrMapping/>
+  </p:clrMapOvr>
+</p:sld>
+</file>
+
+<file path=ppt/slides/slide12.xml><?xml version="1.0" encoding="utf-8"?>
+<p:sld xmlns:a="http://schemas.openxmlformats.org/drawingml/2006/main" xmlns:r="http://schemas.openxmlformats.org/officeDocument/2006/relationships" xmlns:p="http://schemas.openxmlformats.org/presentationml/2006/main">
+  <p:cSld name="Slide 12">
+    <p:spTree>
+      <p:nvGrpSpPr>
+        <p:cNvPr id="1" name=""/>
+        <p:cNvGrpSpPr/>
+        <p:nvPr/>
+      </p:nvGrpSpPr>
+      <p:grpSpPr>
+        <a:xfrm>
+          <a:off x="0" y="0"/>
+          <a:ext cx="0" cy="0"/>
+          <a:chOff x="0" y="0"/>
+          <a:chExt cx="0" cy="0"/>
+        </a:xfrm>
+      </p:grpSpPr>
+      <p:sp>
+        <p:nvSpPr>
+          <p:cNvPr id="2" name="Text 0"/>
+          <p:cNvSpPr txBox="1"/>
+          <p:nvPr/>
+        </p:nvSpPr>
+        <p:spPr>
+          <a:xfrm>
+            <a:off x="566928" y="438912"/>
+            <a:ext cx="8229600" cy="274320"/>
+          </a:xfrm>
+          <a:prstGeom prst="rect">
+            <a:avLst/>
+          </a:prstGeom>
+          <a:noFill/>
+          <a:ln/>
+        </p:spPr>
+        <p:txBody>
+          <a:bodyPr wrap="square" lIns="0" tIns="0" rIns="0" bIns="0" rtlCol="0" anchor="ctr"/>
+          <a:lstStyle/>
+          <a:p>
+            <a:pPr indent="0" marL="0">
+              <a:buNone/>
+            </a:pPr>
+            <a:r>
+              <a:rPr lang="en-US" sz="1200" b="1" spc="200" kern="0" dirty="0">
+                <a:solidFill>
+                  <a:srgbClr val="EB6834"/>
+                </a:solidFill>
+                <a:latin typeface="Calibri" pitchFamily="34" charset="0"/>
+                <a:ea typeface="Calibri" pitchFamily="34" charset="-122"/>
+                <a:cs typeface="Calibri" pitchFamily="34" charset="-120"/>
+              </a:rPr>
+              <a:t>OUTSTANDING QUESTIONS</a:t>
+            </a:r>
+            <a:endParaRPr lang="en-US" sz="1200" dirty="0"/>
+          </a:p>
+        </p:txBody>
+      </p:sp>
+      <p:sp>
+        <p:nvSpPr>
+          <p:cNvPr id="3" name="Text 1"/>
+          <p:cNvSpPr txBox="1"/>
+          <p:nvPr/>
+        </p:nvSpPr>
+        <p:spPr>
+          <a:xfrm>
+            <a:off x="566928" y="749808"/>
+            <a:ext cx="10424160" cy="658368"/>
+          </a:xfrm>
+          <a:prstGeom prst="rect">
+            <a:avLst/>
+          </a:prstGeom>
+          <a:noFill/>
+          <a:ln/>
+        </p:spPr>
+        <p:txBody>
+          <a:bodyPr wrap="square" lIns="0" tIns="0" rIns="0" bIns="0" rtlCol="0" anchor="ctr"/>
+          <a:lstStyle/>
+          <a:p>
+            <a:pPr indent="0" marL="0">
+              <a:buNone/>
+            </a:pPr>
+            <a:r>
+              <a:rPr lang="en-US" sz="3200" b="1" dirty="0">
+                <a:solidFill>
+                  <a:srgbClr val="1A1A1A"/>
+                </a:solidFill>
+                <a:latin typeface="Cambria" pitchFamily="34" charset="0"/>
+                <a:ea typeface="Cambria" pitchFamily="34" charset="-122"/>
+                <a:cs typeface="Cambria" pitchFamily="34" charset="-120"/>
+              </a:rPr>
+              <a:t>Six questions and their bearing on the study</a:t>
+            </a:r>
+            <a:endParaRPr lang="en-US" sz="3200" dirty="0"/>
+          </a:p>
+        </p:txBody>
+      </p:sp>
+      <p:sp>
+        <p:nvSpPr>
+          <p:cNvPr id="4" name="Shape 2"/>
+          <p:cNvSpPr/>
+          <p:nvPr/>
+        </p:nvSpPr>
+        <p:spPr>
+          <a:xfrm>
+            <a:off x="566928" y="1874520"/>
+            <a:ext cx="402336" cy="402336"/>
+          </a:xfrm>
+          <a:prstGeom prst="ellipse">
+            <a:avLst/>
+          </a:prstGeom>
+          <a:solidFill>
+            <a:srgbClr val="065A82"/>
+          </a:solidFill>
+          <a:ln/>
+        </p:spPr>
+      </p:sp>
+      <p:sp>
+        <p:nvSpPr>
+          <p:cNvPr id="5" name="Text 3"/>
+          <p:cNvSpPr txBox="1"/>
+          <p:nvPr/>
+        </p:nvSpPr>
+        <p:spPr>
+          <a:xfrm>
+            <a:off x="566928" y="1874520"/>
+            <a:ext cx="402336" cy="402336"/>
+          </a:xfrm>
+          <a:prstGeom prst="rect">
+            <a:avLst/>
+          </a:prstGeom>
+          <a:noFill/>
+          <a:ln/>
+        </p:spPr>
+        <p:txBody>
+          <a:bodyPr wrap="square" lIns="0" tIns="0" rIns="0" bIns="0" rtlCol="0" anchor="ctr"/>
+          <a:lstStyle/>
+          <a:p>
+            <a:pPr algn="ctr" indent="0" marL="0">
+              <a:buNone/>
+            </a:pPr>
+            <a:r>
+              <a:rPr lang="en-US" sz="1500" b="1" dirty="0">
+                <a:solidFill>
+                  <a:srgbClr val="FFFFFF"/>
+                </a:solidFill>
+                <a:latin typeface="Calibri" pitchFamily="34" charset="0"/>
+                <a:ea typeface="Calibri" pitchFamily="34" charset="-122"/>
+                <a:cs typeface="Calibri" pitchFamily="34" charset="-120"/>
+              </a:rPr>
+              <a:t>1</a:t>
+            </a:r>
+            <a:endParaRPr lang="en-US" sz="1500" dirty="0"/>
+          </a:p>
+        </p:txBody>
+      </p:sp>
+      <p:sp>
+        <p:nvSpPr>
+          <p:cNvPr id="6" name="Text 4"/>
+          <p:cNvSpPr txBox="1"/>
+          <p:nvPr/>
+        </p:nvSpPr>
+        <p:spPr>
+          <a:xfrm>
+            <a:off x="1133856" y="1847088"/>
+            <a:ext cx="4828032" cy="475488"/>
+          </a:xfrm>
+          <a:prstGeom prst="rect">
+            <a:avLst/>
+          </a:prstGeom>
+          <a:noFill/>
+          <a:ln/>
+        </p:spPr>
+        <p:txBody>
+          <a:bodyPr wrap="square" lIns="0" tIns="0" rIns="0" bIns="0" rtlCol="0" anchor="ctr"/>
+          <a:lstStyle/>
+          <a:p>
+            <a:pPr indent="0" marL="0">
+              <a:lnSpc>
+                <a:spcPts val="1600"/>
+              </a:lnSpc>
+              <a:buNone/>
+            </a:pPr>
+            <a:r>
+              <a:rPr lang="en-US" sz="1280" b="1" dirty="0">
+                <a:solidFill>
+                  <a:srgbClr val="1A1A1A"/>
+                </a:solidFill>
+                <a:latin typeface="Calibri" pitchFamily="34" charset="0"/>
+                <a:ea typeface="Calibri" pitchFamily="34" charset="-122"/>
+                <a:cs typeface="Calibri" pitchFamily="34" charset="-120"/>
+              </a:rPr>
+              <a:t>Is the sensitivity exercise on the harbour mouth one the group would consider appropriate?</a:t>
+            </a:r>
+            <a:endParaRPr lang="en-US" sz="1280" dirty="0"/>
+          </a:p>
+        </p:txBody>
+      </p:sp>
+      <p:sp>
+        <p:nvSpPr>
+          <p:cNvPr id="7" name="Text 5"/>
+          <p:cNvSpPr txBox="1"/>
+          <p:nvPr/>
+        </p:nvSpPr>
+        <p:spPr>
+          <a:xfrm>
+            <a:off x="1133856" y="2331720"/>
+            <a:ext cx="4828032" cy="896112"/>
+          </a:xfrm>
+          <a:prstGeom prst="rect">
+            <a:avLst/>
+          </a:prstGeom>
+          <a:noFill/>
+          <a:ln/>
+        </p:spPr>
+        <p:txBody>
+          <a:bodyPr wrap="square" lIns="0" tIns="0" rIns="0" bIns="0" rtlCol="0" anchor="ctr"/>
+          <a:lstStyle/>
+          <a:p>
+            <a:pPr indent="0" marL="0">
+              <a:lnSpc>
+                <a:spcPts val="1450"/>
+              </a:lnSpc>
+              <a:buNone/>
+            </a:pPr>
+            <a:r>
+              <a:rPr lang="en-US" sz="1100" dirty="0">
+                <a:solidFill>
+                  <a:srgbClr val="5F6368"/>
+                </a:solidFill>
+                <a:latin typeface="Calibri" pitchFamily="34" charset="0"/>
+                <a:ea typeface="Calibri" pitchFamily="34" charset="-122"/>
+                <a:cs typeface="Calibri" pitchFamily="34" charset="-120"/>
+              </a:rPr>
+              <a:t>It is framed as a response curve over the class of basin, and it carries no assessment of the project now in consultation. The question is whether that framing is acceptable, not whether the physics holds.</a:t>
+            </a:r>
+            <a:endParaRPr lang="en-US" sz="1100" dirty="0"/>
+          </a:p>
+        </p:txBody>
+      </p:sp>
+      <p:sp>
+        <p:nvSpPr>
+          <p:cNvPr id="8" name="Shape 6"/>
+          <p:cNvSpPr/>
+          <p:nvPr/>
+        </p:nvSpPr>
+        <p:spPr>
+          <a:xfrm>
+            <a:off x="6126480" y="1874520"/>
+            <a:ext cx="402336" cy="402336"/>
+          </a:xfrm>
+          <a:prstGeom prst="ellipse">
+            <a:avLst/>
+          </a:prstGeom>
+          <a:solidFill>
+            <a:srgbClr val="1C7293"/>
+          </a:solidFill>
+          <a:ln/>
+        </p:spPr>
+      </p:sp>
+      <p:sp>
+        <p:nvSpPr>
+          <p:cNvPr id="9" name="Text 7"/>
+          <p:cNvSpPr txBox="1"/>
+          <p:nvPr/>
+        </p:nvSpPr>
+        <p:spPr>
+          <a:xfrm>
+            <a:off x="6126480" y="1874520"/>
+            <a:ext cx="402336" cy="402336"/>
+          </a:xfrm>
+          <a:prstGeom prst="rect">
+            <a:avLst/>
+          </a:prstGeom>
+          <a:noFill/>
+          <a:ln/>
+        </p:spPr>
+        <p:txBody>
+          <a:bodyPr wrap="square" lIns="0" tIns="0" rIns="0" bIns="0" rtlCol="0" anchor="ctr"/>
+          <a:lstStyle/>
+          <a:p>
+            <a:pPr algn="ctr" indent="0" marL="0">
+              <a:buNone/>
+            </a:pPr>
+            <a:r>
+              <a:rPr lang="en-US" sz="1500" b="1" dirty="0">
+                <a:solidFill>
+                  <a:srgbClr val="FFFFFF"/>
+                </a:solidFill>
+                <a:latin typeface="Calibri" pitchFamily="34" charset="0"/>
+                <a:ea typeface="Calibri" pitchFamily="34" charset="-122"/>
+                <a:cs typeface="Calibri" pitchFamily="34" charset="-120"/>
+              </a:rPr>
+              <a:t>2</a:t>
+            </a:r>
+            <a:endParaRPr lang="en-US" sz="1500" dirty="0"/>
+          </a:p>
+        </p:txBody>
+      </p:sp>
+      <p:sp>
+        <p:nvSpPr>
+          <p:cNvPr id="10" name="Text 8"/>
+          <p:cNvSpPr txBox="1"/>
+          <p:nvPr/>
+        </p:nvSpPr>
+        <p:spPr>
+          <a:xfrm>
+            <a:off x="6693408" y="1847088"/>
+            <a:ext cx="4828032" cy="475488"/>
+          </a:xfrm>
+          <a:prstGeom prst="rect">
+            <a:avLst/>
+          </a:prstGeom>
+          <a:noFill/>
+          <a:ln/>
+        </p:spPr>
+        <p:txBody>
+          <a:bodyPr wrap="square" lIns="0" tIns="0" rIns="0" bIns="0" rtlCol="0" anchor="ctr"/>
+          <a:lstStyle/>
+          <a:p>
+            <a:pPr indent="0" marL="0">
+              <a:lnSpc>
+                <a:spcPts val="1600"/>
+              </a:lnSpc>
+              <a:buNone/>
+            </a:pPr>
+            <a:r>
+              <a:rPr lang="en-US" sz="1280" b="1" dirty="0">
+                <a:solidFill>
+                  <a:srgbClr val="1A1A1A"/>
+                </a:solidFill>
+                <a:latin typeface="Calibri" pitchFamily="34" charset="0"/>
+                <a:ea typeface="Calibri" pitchFamily="34" charset="-122"/>
+                <a:cs typeface="Calibri" pitchFamily="34" charset="-120"/>
+              </a:rPr>
+              <a:t>Is there a sea level record inside the Grand Harbour, and at what sampling interval?</a:t>
+            </a:r>
+            <a:endParaRPr lang="en-US" sz="1280" dirty="0"/>
+          </a:p>
+        </p:txBody>
+      </p:sp>
+      <p:sp>
+        <p:nvSpPr>
+          <p:cNvPr id="11" name="Text 9"/>
+          <p:cNvSpPr txBox="1"/>
+          <p:nvPr/>
+        </p:nvSpPr>
+        <p:spPr>
+          <a:xfrm>
+            <a:off x="6693408" y="2331720"/>
+            <a:ext cx="4828032" cy="896112"/>
+          </a:xfrm>
+          <a:prstGeom prst="rect">
+            <a:avLst/>
+          </a:prstGeom>
+          <a:noFill/>
+          <a:ln/>
+        </p:spPr>
+        <p:txBody>
+          <a:bodyPr wrap="square" lIns="0" tIns="0" rIns="0" bIns="0" rtlCol="0" anchor="ctr"/>
+          <a:lstStyle/>
+          <a:p>
+            <a:pPr indent="0" marL="0">
+              <a:lnSpc>
+                <a:spcPts val="1450"/>
+              </a:lnSpc>
+              <a:buNone/>
+            </a:pPr>
+            <a:r>
+              <a:rPr lang="en-US" sz="1100" dirty="0">
+                <a:solidFill>
+                  <a:srgbClr val="5F6368"/>
+                </a:solidFill>
+                <a:latin typeface="Calibri" pitchFamily="34" charset="0"/>
+                <a:ea typeface="Calibri" pitchFamily="34" charset="-122"/>
+                <a:cs typeface="Calibri" pitchFamily="34" charset="-120"/>
+              </a:rPr>
+              <a:t>A spectrum would establish whether the basins carry energy near 17 minutes. The 0.2 to 2 cph band is observed at Mellieħa, on another coast, so the present analysis can only infer the Valletta response.</a:t>
+            </a:r>
+            <a:endParaRPr lang="en-US" sz="1100" dirty="0"/>
+          </a:p>
+        </p:txBody>
+      </p:sp>
+      <p:sp>
+        <p:nvSpPr>
+          <p:cNvPr id="12" name="Shape 10"/>
+          <p:cNvSpPr/>
+          <p:nvPr/>
+        </p:nvSpPr>
+        <p:spPr>
+          <a:xfrm>
+            <a:off x="566928" y="3355848"/>
+            <a:ext cx="402336" cy="402336"/>
+          </a:xfrm>
+          <a:prstGeom prst="ellipse">
+            <a:avLst/>
+          </a:prstGeom>
+          <a:solidFill>
+            <a:srgbClr val="065A82"/>
+          </a:solidFill>
+          <a:ln/>
+        </p:spPr>
+      </p:sp>
+      <p:sp>
+        <p:nvSpPr>
+          <p:cNvPr id="13" name="Text 11"/>
+          <p:cNvSpPr txBox="1"/>
+          <p:nvPr/>
+        </p:nvSpPr>
+        <p:spPr>
+          <a:xfrm>
+            <a:off x="566928" y="3355848"/>
+            <a:ext cx="402336" cy="402336"/>
+          </a:xfrm>
+          <a:prstGeom prst="rect">
+            <a:avLst/>
+          </a:prstGeom>
+          <a:noFill/>
+          <a:ln/>
+        </p:spPr>
+        <p:txBody>
+          <a:bodyPr wrap="square" lIns="0" tIns="0" rIns="0" bIns="0" rtlCol="0" anchor="ctr"/>
+          <a:lstStyle/>
+          <a:p>
+            <a:pPr algn="ctr" indent="0" marL="0">
+              <a:buNone/>
+            </a:pPr>
+            <a:r>
+              <a:rPr lang="en-US" sz="1500" b="1" dirty="0">
+                <a:solidFill>
+                  <a:srgbClr val="FFFFFF"/>
+                </a:solidFill>
+                <a:latin typeface="Calibri" pitchFamily="34" charset="0"/>
+                <a:ea typeface="Calibri" pitchFamily="34" charset="-122"/>
+                <a:cs typeface="Calibri" pitchFamily="34" charset="-120"/>
+              </a:rPr>
+              <a:t>3</a:t>
+            </a:r>
+            <a:endParaRPr lang="en-US" sz="1500" dirty="0"/>
+          </a:p>
+        </p:txBody>
+      </p:sp>
+      <p:sp>
+        <p:nvSpPr>
+          <p:cNvPr id="14" name="Text 12"/>
+          <p:cNvSpPr txBox="1"/>
+          <p:nvPr/>
+        </p:nvSpPr>
+        <p:spPr>
+          <a:xfrm>
+            <a:off x="1133856" y="3328416"/>
+            <a:ext cx="4828032" cy="475488"/>
+          </a:xfrm>
+          <a:prstGeom prst="rect">
+            <a:avLst/>
+          </a:prstGeom>
+          <a:noFill/>
+          <a:ln/>
+        </p:spPr>
+        <p:txBody>
+          <a:bodyPr wrap="square" lIns="0" tIns="0" rIns="0" bIns="0" rtlCol="0" anchor="ctr"/>
+          <a:lstStyle/>
+          <a:p>
+            <a:pPr indent="0" marL="0">
+              <a:lnSpc>
+                <a:spcPts val="1600"/>
+              </a:lnSpc>
+              <a:buNone/>
+            </a:pPr>
+            <a:r>
+              <a:rPr lang="en-US" sz="1280" b="1" dirty="0">
+                <a:solidFill>
+                  <a:srgbClr val="1A1A1A"/>
+                </a:solidFill>
+                <a:latin typeface="Calibri" pitchFamily="34" charset="0"/>
+                <a:ea typeface="Calibri" pitchFamily="34" charset="-122"/>
+                <a:cs typeface="Calibri" pitchFamily="34" charset="-120"/>
+              </a:rPr>
+              <a:t>Has the generation of the wave been modelled, or only its effect on a basin?</a:t>
+            </a:r>
+            <a:endParaRPr lang="en-US" sz="1280" dirty="0"/>
+          </a:p>
+        </p:txBody>
+      </p:sp>
+      <p:sp>
+        <p:nvSpPr>
+          <p:cNvPr id="15" name="Text 13"/>
+          <p:cNvSpPr txBox="1"/>
+          <p:nvPr/>
+        </p:nvSpPr>
+        <p:spPr>
+          <a:xfrm>
+            <a:off x="1133856" y="3813048"/>
+            <a:ext cx="4828032" cy="896112"/>
+          </a:xfrm>
+          <a:prstGeom prst="rect">
+            <a:avLst/>
+          </a:prstGeom>
+          <a:noFill/>
+          <a:ln/>
+        </p:spPr>
+        <p:txBody>
+          <a:bodyPr wrap="square" lIns="0" tIns="0" rIns="0" bIns="0" rtlCol="0" anchor="ctr"/>
+          <a:lstStyle/>
+          <a:p>
+            <a:pPr indent="0" marL="0">
+              <a:lnSpc>
+                <a:spcPts val="1450"/>
+              </a:lnSpc>
+              <a:buNone/>
+            </a:pPr>
+            <a:r>
+              <a:rPr lang="en-US" sz="1100" dirty="0">
+                <a:solidFill>
+                  <a:srgbClr val="5F6368"/>
+                </a:solidFill>
+                <a:latin typeface="Calibri" pitchFamily="34" charset="0"/>
+                <a:ea typeface="Calibri" pitchFamily="34" charset="-122"/>
+                <a:cs typeface="Calibri" pitchFamily="34" charset="-120"/>
+              </a:rPr>
+              <a:t>The 2007 study imposes the long wave at the offshore boundary and computes the response. Modelling how the atmosphere produces that wave over the shelf is what this study proposes. Whether it is genuinely untouched is known only from a literature search.</a:t>
+            </a:r>
+            <a:endParaRPr lang="en-US" sz="1100" dirty="0"/>
+          </a:p>
+        </p:txBody>
+      </p:sp>
+      <p:sp>
+        <p:nvSpPr>
+          <p:cNvPr id="16" name="Shape 14"/>
+          <p:cNvSpPr/>
+          <p:nvPr/>
+        </p:nvSpPr>
+        <p:spPr>
+          <a:xfrm>
+            <a:off x="6126480" y="3355848"/>
+            <a:ext cx="402336" cy="402336"/>
+          </a:xfrm>
+          <a:prstGeom prst="ellipse">
+            <a:avLst/>
+          </a:prstGeom>
+          <a:solidFill>
+            <a:srgbClr val="1C7293"/>
+          </a:solidFill>
+          <a:ln/>
+        </p:spPr>
+      </p:sp>
+      <p:sp>
+        <p:nvSpPr>
+          <p:cNvPr id="17" name="Text 15"/>
+          <p:cNvSpPr txBox="1"/>
+          <p:nvPr/>
+        </p:nvSpPr>
+        <p:spPr>
+          <a:xfrm>
+            <a:off x="6126480" y="3355848"/>
+            <a:ext cx="402336" cy="402336"/>
+          </a:xfrm>
+          <a:prstGeom prst="rect">
+            <a:avLst/>
+          </a:prstGeom>
+          <a:noFill/>
+          <a:ln/>
+        </p:spPr>
+        <p:txBody>
+          <a:bodyPr wrap="square" lIns="0" tIns="0" rIns="0" bIns="0" rtlCol="0" anchor="ctr"/>
+          <a:lstStyle/>
+          <a:p>
+            <a:pPr algn="ctr" indent="0" marL="0">
+              <a:buNone/>
+            </a:pPr>
+            <a:r>
+              <a:rPr lang="en-US" sz="1500" b="1" dirty="0">
+                <a:solidFill>
+                  <a:srgbClr val="FFFFFF"/>
+                </a:solidFill>
+                <a:latin typeface="Calibri" pitchFamily="34" charset="0"/>
+                <a:ea typeface="Calibri" pitchFamily="34" charset="-122"/>
+                <a:cs typeface="Calibri" pitchFamily="34" charset="-120"/>
+              </a:rPr>
+              <a:t>4</a:t>
+            </a:r>
+            <a:endParaRPr lang="en-US" sz="1500" dirty="0"/>
+          </a:p>
+        </p:txBody>
+      </p:sp>
+      <p:sp>
+        <p:nvSpPr>
+          <p:cNvPr id="18" name="Text 16"/>
+          <p:cNvSpPr txBox="1"/>
+          <p:nvPr/>
+        </p:nvSpPr>
+        <p:spPr>
+          <a:xfrm>
+            <a:off x="6693408" y="3328416"/>
+            <a:ext cx="4828032" cy="475488"/>
+          </a:xfrm>
+          <a:prstGeom prst="rect">
+            <a:avLst/>
+          </a:prstGeom>
+          <a:noFill/>
+          <a:ln/>
+        </p:spPr>
+        <p:txBody>
+          <a:bodyPr wrap="square" lIns="0" tIns="0" rIns="0" bIns="0" rtlCol="0" anchor="ctr"/>
+          <a:lstStyle/>
+          <a:p>
+            <a:pPr indent="0" marL="0">
+              <a:lnSpc>
+                <a:spcPts val="1600"/>
+              </a:lnSpc>
+              <a:buNone/>
+            </a:pPr>
+            <a:r>
+              <a:rPr lang="en-US" sz="1280" b="1" dirty="0">
+                <a:solidFill>
+                  <a:srgbClr val="1A1A1A"/>
+                </a:solidFill>
+                <a:latin typeface="Calibri" pitchFamily="34" charset="0"/>
+                <a:ea typeface="Calibri" pitchFamily="34" charset="-122"/>
+                <a:cs typeface="Calibri" pitchFamily="34" charset="-120"/>
+              </a:rPr>
+              <a:t>What is the sampling interval of the PORTO sea level stations?</a:t>
+            </a:r>
+            <a:endParaRPr lang="en-US" sz="1280" dirty="0"/>
+          </a:p>
+        </p:txBody>
+      </p:sp>
+      <p:sp>
+        <p:nvSpPr>
+          <p:cNvPr id="19" name="Text 17"/>
+          <p:cNvSpPr txBox="1"/>
+          <p:nvPr/>
+        </p:nvSpPr>
+        <p:spPr>
+          <a:xfrm>
+            <a:off x="6693408" y="3813048"/>
+            <a:ext cx="4828032" cy="896112"/>
+          </a:xfrm>
+          <a:prstGeom prst="rect">
+            <a:avLst/>
+          </a:prstGeom>
+          <a:noFill/>
+          <a:ln/>
+        </p:spPr>
+        <p:txBody>
+          <a:bodyPr wrap="square" lIns="0" tIns="0" rIns="0" bIns="0" rtlCol="0" anchor="ctr"/>
+          <a:lstStyle/>
+          <a:p>
+            <a:pPr indent="0" marL="0">
+              <a:lnSpc>
+                <a:spcPts val="1450"/>
+              </a:lnSpc>
+              <a:buNone/>
+            </a:pPr>
+            <a:r>
+              <a:rPr lang="en-US" sz="1100" dirty="0">
+                <a:solidFill>
+                  <a:srgbClr val="5F6368"/>
+                </a:solidFill>
+                <a:latin typeface="Calibri" pitchFamily="34" charset="0"/>
+                <a:ea typeface="Calibri" pitchFamily="34" charset="-122"/>
+                <a:cs typeface="Calibri" pitchFamily="34" charset="-120"/>
+              </a:rPr>
+              <a:t>The seiche band is 0.2 to 2 cph. At an interval coarser than one minute the model has no observational target within its own frequency range.</a:t>
+            </a:r>
+            <a:endParaRPr lang="en-US" sz="1100" dirty="0"/>
+          </a:p>
+        </p:txBody>
+      </p:sp>
+      <p:sp>
+        <p:nvSpPr>
+          <p:cNvPr id="20" name="Shape 18"/>
+          <p:cNvSpPr/>
+          <p:nvPr/>
+        </p:nvSpPr>
+        <p:spPr>
+          <a:xfrm>
+            <a:off x="566928" y="4837176"/>
+            <a:ext cx="402336" cy="402336"/>
+          </a:xfrm>
+          <a:prstGeom prst="ellipse">
+            <a:avLst/>
+          </a:prstGeom>
+          <a:solidFill>
+            <a:srgbClr val="065A82"/>
+          </a:solidFill>
+          <a:ln/>
+        </p:spPr>
+      </p:sp>
+      <p:sp>
+        <p:nvSpPr>
+          <p:cNvPr id="21" name="Text 19"/>
+          <p:cNvSpPr txBox="1"/>
+          <p:nvPr/>
+        </p:nvSpPr>
+        <p:spPr>
+          <a:xfrm>
+            <a:off x="566928" y="4837176"/>
+            <a:ext cx="402336" cy="402336"/>
+          </a:xfrm>
+          <a:prstGeom prst="rect">
+            <a:avLst/>
+          </a:prstGeom>
+          <a:noFill/>
+          <a:ln/>
+        </p:spPr>
+        <p:txBody>
+          <a:bodyPr wrap="square" lIns="0" tIns="0" rIns="0" bIns="0" rtlCol="0" anchor="ctr"/>
+          <a:lstStyle/>
+          <a:p>
+            <a:pPr algn="ctr" indent="0" marL="0">
+              <a:buNone/>
+            </a:pPr>
+            <a:r>
+              <a:rPr lang="en-US" sz="1500" b="1" dirty="0">
+                <a:solidFill>
+                  <a:srgbClr val="FFFFFF"/>
+                </a:solidFill>
+                <a:latin typeface="Calibri" pitchFamily="34" charset="0"/>
+                <a:ea typeface="Calibri" pitchFamily="34" charset="-122"/>
+                <a:cs typeface="Calibri" pitchFamily="34" charset="-120"/>
+              </a:rPr>
+              <a:t>5</a:t>
+            </a:r>
+            <a:endParaRPr lang="en-US" sz="1500" dirty="0"/>
+          </a:p>
+        </p:txBody>
+      </p:sp>
+      <p:sp>
+        <p:nvSpPr>
+          <p:cNvPr id="22" name="Text 20"/>
+          <p:cNvSpPr txBox="1"/>
+          <p:nvPr/>
+        </p:nvSpPr>
+        <p:spPr>
+          <a:xfrm>
+            <a:off x="1133856" y="4809744"/>
+            <a:ext cx="4828032" cy="475488"/>
+          </a:xfrm>
+          <a:prstGeom prst="rect">
+            <a:avLst/>
+          </a:prstGeom>
+          <a:noFill/>
+          <a:ln/>
+        </p:spPr>
+        <p:txBody>
+          <a:bodyPr wrap="square" lIns="0" tIns="0" rIns="0" bIns="0" rtlCol="0" anchor="ctr"/>
+          <a:lstStyle/>
+          <a:p>
+            <a:pPr indent="0" marL="0">
+              <a:lnSpc>
+                <a:spcPts val="1600"/>
+              </a:lnSpc>
+              <a:buNone/>
+            </a:pPr>
+            <a:r>
+              <a:rPr lang="en-US" sz="1280" b="1" dirty="0">
+                <a:solidFill>
+                  <a:srgbClr val="1A1A1A"/>
+                </a:solidFill>
+                <a:latin typeface="Calibri" pitchFamily="34" charset="0"/>
+                <a:ea typeface="Calibri" pitchFamily="34" charset="-122"/>
+                <a:cs typeface="Calibri" pitchFamily="34" charset="-120"/>
+              </a:rPr>
+              <a:t>Is there any wave record beyond the BLUE buoy?</a:t>
+            </a:r>
+            <a:endParaRPr lang="en-US" sz="1280" dirty="0"/>
+          </a:p>
+        </p:txBody>
+      </p:sp>
+      <p:sp>
+        <p:nvSpPr>
+          <p:cNvPr id="23" name="Text 21"/>
+          <p:cNvSpPr txBox="1"/>
+          <p:nvPr/>
+        </p:nvSpPr>
+        <p:spPr>
+          <a:xfrm>
+            <a:off x="1133856" y="5294376"/>
+            <a:ext cx="4828032" cy="896112"/>
+          </a:xfrm>
+          <a:prstGeom prst="rect">
+            <a:avLst/>
+          </a:prstGeom>
+          <a:noFill/>
+          <a:ln/>
+        </p:spPr>
+        <p:txBody>
+          <a:bodyPr wrap="square" lIns="0" tIns="0" rIns="0" bIns="0" rtlCol="0" anchor="ctr"/>
+          <a:lstStyle/>
+          <a:p>
+            <a:pPr indent="0" marL="0">
+              <a:lnSpc>
+                <a:spcPts val="1450"/>
+              </a:lnSpc>
+              <a:buNone/>
+            </a:pPr>
+            <a:r>
+              <a:rPr lang="en-US" sz="1100" dirty="0">
+                <a:solidFill>
+                  <a:srgbClr val="5F6368"/>
+                </a:solidFill>
+                <a:latin typeface="Calibri" pitchFamily="34" charset="0"/>
+                <a:ea typeface="Calibri" pitchFamily="34" charset="-122"/>
+                <a:cs typeface="Calibri" pitchFamily="34" charset="-120"/>
+              </a:rPr>
+              <a:t>Wave validation presently rests on a single point 3.7 km offshore. The radar reports a derived product whose own accuracy was assessed against models, so it serves as a cross-check rather than a reference.</a:t>
+            </a:r>
+            <a:endParaRPr lang="en-US" sz="1100" dirty="0"/>
+          </a:p>
+        </p:txBody>
+      </p:sp>
+      <p:sp>
+        <p:nvSpPr>
+          <p:cNvPr id="24" name="Shape 22"/>
+          <p:cNvSpPr/>
+          <p:nvPr/>
+        </p:nvSpPr>
+        <p:spPr>
+          <a:xfrm>
+            <a:off x="6126480" y="4837176"/>
+            <a:ext cx="402336" cy="402336"/>
+          </a:xfrm>
+          <a:prstGeom prst="ellipse">
+            <a:avLst/>
+          </a:prstGeom>
+          <a:solidFill>
+            <a:srgbClr val="1C7293"/>
+          </a:solidFill>
+          <a:ln/>
+        </p:spPr>
+      </p:sp>
+      <p:sp>
+        <p:nvSpPr>
+          <p:cNvPr id="25" name="Text 23"/>
+          <p:cNvSpPr txBox="1"/>
+          <p:nvPr/>
+        </p:nvSpPr>
+        <p:spPr>
+          <a:xfrm>
+            <a:off x="6126480" y="4837176"/>
+            <a:ext cx="402336" cy="402336"/>
+          </a:xfrm>
+          <a:prstGeom prst="rect">
+            <a:avLst/>
+          </a:prstGeom>
+          <a:noFill/>
+          <a:ln/>
+        </p:spPr>
+        <p:txBody>
+          <a:bodyPr wrap="square" lIns="0" tIns="0" rIns="0" bIns="0" rtlCol="0" anchor="ctr"/>
+          <a:lstStyle/>
+          <a:p>
+            <a:pPr algn="ctr" indent="0" marL="0">
+              <a:buNone/>
+            </a:pPr>
+            <a:r>
+              <a:rPr lang="en-US" sz="1500" b="1" dirty="0">
+                <a:solidFill>
+                  <a:srgbClr val="FFFFFF"/>
+                </a:solidFill>
+                <a:latin typeface="Calibri" pitchFamily="34" charset="0"/>
+                <a:ea typeface="Calibri" pitchFamily="34" charset="-122"/>
+                <a:cs typeface="Calibri" pitchFamily="34" charset="-120"/>
+              </a:rPr>
+              <a:t>6</a:t>
+            </a:r>
+            <a:endParaRPr lang="en-US" sz="1500" dirty="0"/>
+          </a:p>
+        </p:txBody>
+      </p:sp>
+      <p:sp>
+        <p:nvSpPr>
+          <p:cNvPr id="26" name="Text 24"/>
+          <p:cNvSpPr txBox="1"/>
+          <p:nvPr/>
+        </p:nvSpPr>
+        <p:spPr>
+          <a:xfrm>
+            <a:off x="6693408" y="4809744"/>
+            <a:ext cx="4828032" cy="475488"/>
+          </a:xfrm>
+          <a:prstGeom prst="rect">
+            <a:avLst/>
+          </a:prstGeom>
+          <a:noFill/>
+          <a:ln/>
+        </p:spPr>
+        <p:txBody>
+          <a:bodyPr wrap="square" lIns="0" tIns="0" rIns="0" bIns="0" rtlCol="0" anchor="ctr"/>
+          <a:lstStyle/>
+          <a:p>
+            <a:pPr indent="0" marL="0">
+              <a:lnSpc>
+                <a:spcPts val="1600"/>
+              </a:lnSpc>
+              <a:buNone/>
+            </a:pPr>
+            <a:r>
+              <a:rPr lang="en-US" sz="1280" b="1" dirty="0">
+                <a:solidFill>
+                  <a:srgbClr val="1A1A1A"/>
+                </a:solidFill>
+                <a:latin typeface="Calibri" pitchFamily="34" charset="0"/>
+                <a:ea typeface="Calibri" pitchFamily="34" charset="-122"/>
+                <a:cs typeface="Calibri" pitchFamily="34" charset="-120"/>
+              </a:rPr>
+              <a:t>What is the levelling datum behind the bathymetry, and how does its zero relate to the tide gauges?</a:t>
+            </a:r>
+            <a:endParaRPr lang="en-US" sz="1280" dirty="0"/>
+          </a:p>
+        </p:txBody>
+      </p:sp>
+      <p:sp>
+        <p:nvSpPr>
+          <p:cNvPr id="27" name="Text 25"/>
+          <p:cNvSpPr txBox="1"/>
+          <p:nvPr/>
+        </p:nvSpPr>
+        <p:spPr>
+          <a:xfrm>
+            <a:off x="6693408" y="5294376"/>
+            <a:ext cx="4828032" cy="896112"/>
+          </a:xfrm>
+          <a:prstGeom prst="rect">
+            <a:avLst/>
+          </a:prstGeom>
+          <a:noFill/>
+          <a:ln/>
+        </p:spPr>
+        <p:txBody>
+          <a:bodyPr wrap="square" lIns="0" tIns="0" rIns="0" bIns="0" rtlCol="0" anchor="ctr"/>
+          <a:lstStyle/>
+          <a:p>
+            <a:pPr indent="0" marL="0">
+              <a:lnSpc>
+                <a:spcPts val="1450"/>
+              </a:lnSpc>
+              <a:buNone/>
+            </a:pPr>
+            <a:r>
+              <a:rPr lang="en-US" sz="1100" dirty="0">
+                <a:solidFill>
+                  <a:srgbClr val="5F6368"/>
+                </a:solidFill>
+                <a:latin typeface="Calibri" pitchFamily="34" charset="0"/>
+                <a:ea typeface="Calibri" pitchFamily="34" charset="-122"/>
+                <a:cs typeface="Calibri" pitchFamily="34" charset="-120"/>
+              </a:rPr>
+              <a:t>The files declare ellipsoidal heights while the data are orthometric. What remains to be established is the offset against the gauges used for validation.</a:t>
+            </a:r>
+            <a:endParaRPr lang="en-US" sz="1100" dirty="0"/>
+          </a:p>
+        </p:txBody>
+      </p:sp>
+    </p:spTree>
+  </p:cSld>
+  <p:clrMapOvr>
+    <a:masterClrMapping/>
+  </p:clrMapOvr>
+</p:sld>
+</file>
+
+<file path=ppt/slides/slide13.xml><?xml version="1.0" encoding="utf-8"?>
+<p:sld xmlns:a="http://schemas.openxmlformats.org/drawingml/2006/main" xmlns:r="http://schemas.openxmlformats.org/officeDocument/2006/relationships" xmlns:p="http://schemas.openxmlformats.org/presentationml/2006/main">
+  <p:cSld name="Slide 13">
     <p:bg>
       <p:bgPr>
         <a:solidFill>
           <a:srgbClr val="21295C"/>
         </a:solidFill>
-        <a:effectLst/>
       </p:bgPr>
     </p:bg>
     <p:spTree>
@@ -2901,13 +5485,6 @@
           </a:solidFill>
           <a:ln/>
         </p:spPr>
-        <p:txBody>
-          <a:bodyPr/>
-          <a:lstStyle/>
-          <a:p>
-            <a:endParaRPr lang="it-IT"/>
-          </a:p>
-        </p:txBody>
       </p:sp>
       <p:sp>
         <p:nvSpPr>
@@ -2930,11 +5507,11 @@
           <a:bodyPr wrap="square" lIns="0" tIns="0" rIns="0" bIns="0" rtlCol="0" anchor="ctr"/>
           <a:lstStyle/>
           <a:p>
-            <a:pPr marL="0" indent="0">
+            <a:pPr indent="0" marL="0">
               <a:buNone/>
             </a:pPr>
             <a:r>
-              <a:rPr lang="en-US" sz="1200" b="1" kern="0" spc="200" dirty="0">
+              <a:rPr lang="en-US" sz="1200" b="1" spc="200" kern="0" dirty="0">
                 <a:solidFill>
                   <a:srgbClr val="EB6834"/>
                 </a:solidFill>
@@ -2969,7 +5546,7 @@
           <a:bodyPr wrap="square" lIns="0" tIns="0" rIns="0" bIns="0" rtlCol="0" anchor="ctr"/>
           <a:lstStyle/>
           <a:p>
-            <a:pPr marL="0" indent="0">
+            <a:pPr indent="0" marL="0">
               <a:buNone/>
             </a:pPr>
             <a:r>
@@ -3006,13 +5583,6 @@
           </a:solidFill>
           <a:ln/>
         </p:spPr>
-        <p:txBody>
-          <a:bodyPr/>
-          <a:lstStyle/>
-          <a:p>
-            <a:endParaRPr lang="it-IT"/>
-          </a:p>
-        </p:txBody>
       </p:sp>
       <p:sp>
         <p:nvSpPr>
@@ -3023,7 +5593,7 @@
         <p:spPr>
           <a:xfrm>
             <a:off x="978408" y="1965960"/>
-            <a:ext cx="2651760" cy="301752"/>
+            <a:ext cx="2331720" cy="301752"/>
           </a:xfrm>
           <a:prstGeom prst="rect">
             <a:avLst/>
@@ -3035,7 +5605,7 @@
           <a:bodyPr wrap="square" lIns="0" tIns="0" rIns="0" bIns="0" rtlCol="0" anchor="ctr"/>
           <a:lstStyle/>
           <a:p>
-            <a:pPr marL="0" indent="0">
+            <a:pPr indent="0" marL="0">
               <a:buNone/>
             </a:pPr>
             <a:r>
@@ -3061,8 +5631,8 @@
         </p:nvSpPr>
         <p:spPr>
           <a:xfrm>
-            <a:off x="3721608" y="1965960"/>
-            <a:ext cx="7863840" cy="512064"/>
+            <a:off x="3401568" y="1965960"/>
+            <a:ext cx="3291840" cy="658368"/>
           </a:xfrm>
           <a:prstGeom prst="rect">
             <a:avLst/>
@@ -3074,14 +5644,14 @@
           <a:bodyPr wrap="square" lIns="0" tIns="0" rIns="0" bIns="0" rtlCol="0" anchor="ctr"/>
           <a:lstStyle/>
           <a:p>
-            <a:pPr marL="0" indent="0">
+            <a:pPr indent="0" marL="0">
               <a:lnSpc>
-                <a:spcPts val="1600"/>
+                <a:spcPts val="1500"/>
               </a:lnSpc>
               <a:buNone/>
             </a:pPr>
             <a:r>
-              <a:rPr lang="en-US" sz="1250" dirty="0">
+              <a:rPr lang="en-US" sz="1200" dirty="0">
                 <a:solidFill>
                   <a:srgbClr val="9FB3D1"/>
                 </a:solidFill>
@@ -3091,7 +5661,7 @@
               </a:rPr>
               <a:t>Seiche climatology from the Portomaso and PORTO archives. No model is required.</a:t>
             </a:r>
-            <a:endParaRPr lang="en-US" sz="1250" dirty="0"/>
+            <a:endParaRPr lang="en-US" sz="1200" dirty="0"/>
           </a:p>
         </p:txBody>
       </p:sp>
@@ -3103,7 +5673,7 @@
         </p:nvSpPr>
         <p:spPr>
           <a:xfrm>
-            <a:off x="612648" y="2843784"/>
+            <a:off x="612648" y="2898648"/>
             <a:ext cx="155448" cy="155448"/>
           </a:xfrm>
           <a:prstGeom prst="ellipse">
@@ -3114,13 +5684,6 @@
           </a:solidFill>
           <a:ln/>
         </p:spPr>
-        <p:txBody>
-          <a:bodyPr/>
-          <a:lstStyle/>
-          <a:p>
-            <a:endParaRPr lang="it-IT"/>
-          </a:p>
-        </p:txBody>
       </p:sp>
       <p:sp>
         <p:nvSpPr>
@@ -3130,8 +5693,8 @@
         </p:nvSpPr>
         <p:spPr>
           <a:xfrm>
-            <a:off x="978408" y="2752344"/>
-            <a:ext cx="2651760" cy="301752"/>
+            <a:off x="978408" y="2807208"/>
+            <a:ext cx="2331720" cy="301752"/>
           </a:xfrm>
           <a:prstGeom prst="rect">
             <a:avLst/>
@@ -3143,7 +5706,7 @@
           <a:bodyPr wrap="square" lIns="0" tIns="0" rIns="0" bIns="0" rtlCol="0" anchor="ctr"/>
           <a:lstStyle/>
           <a:p>
-            <a:pPr marL="0" indent="0">
+            <a:pPr indent="0" marL="0">
               <a:buNone/>
             </a:pPr>
             <a:r>
@@ -3169,8 +5732,8 @@
         </p:nvSpPr>
         <p:spPr>
           <a:xfrm>
-            <a:off x="3721608" y="2752344"/>
-            <a:ext cx="7863840" cy="512064"/>
+            <a:off x="3401568" y="2807208"/>
+            <a:ext cx="3291840" cy="658368"/>
           </a:xfrm>
           <a:prstGeom prst="rect">
             <a:avLst/>
@@ -3182,14 +5745,14 @@
           <a:bodyPr wrap="square" lIns="0" tIns="0" rIns="0" bIns="0" rtlCol="0" anchor="ctr"/>
           <a:lstStyle/>
           <a:p>
-            <a:pPr marL="0" indent="0">
+            <a:pPr indent="0" marL="0">
               <a:lnSpc>
-                <a:spcPts val="1600"/>
+                <a:spcPts val="1500"/>
               </a:lnSpc>
               <a:buNone/>
             </a:pPr>
             <a:r>
-              <a:rPr lang="en-US" sz="1250" dirty="0">
+              <a:rPr lang="en-US" sz="1200" dirty="0">
                 <a:solidFill>
                   <a:srgbClr val="9FB3D1"/>
                 </a:solidFill>
@@ -3199,7 +5762,7 @@
               </a:rPr>
               <a:t>Delft3D User Days abstract.</a:t>
             </a:r>
-            <a:endParaRPr lang="en-US" sz="1250" dirty="0"/>
+            <a:endParaRPr lang="en-US" sz="1200" dirty="0"/>
           </a:p>
         </p:txBody>
       </p:sp>
@@ -3211,7 +5774,7 @@
         </p:nvSpPr>
         <p:spPr>
           <a:xfrm>
-            <a:off x="612648" y="3630168"/>
+            <a:off x="612648" y="3739896"/>
             <a:ext cx="155448" cy="155448"/>
           </a:xfrm>
           <a:prstGeom prst="ellipse">
@@ -3222,13 +5785,6 @@
           </a:solidFill>
           <a:ln/>
         </p:spPr>
-        <p:txBody>
-          <a:bodyPr/>
-          <a:lstStyle/>
-          <a:p>
-            <a:endParaRPr lang="it-IT"/>
-          </a:p>
-        </p:txBody>
       </p:sp>
       <p:sp>
         <p:nvSpPr>
@@ -3238,8 +5794,8 @@
         </p:nvSpPr>
         <p:spPr>
           <a:xfrm>
-            <a:off x="978408" y="3538728"/>
-            <a:ext cx="2651760" cy="301752"/>
+            <a:off x="978408" y="3648456"/>
+            <a:ext cx="2331720" cy="301752"/>
           </a:xfrm>
           <a:prstGeom prst="rect">
             <a:avLst/>
@@ -3251,7 +5807,7 @@
           <a:bodyPr wrap="square" lIns="0" tIns="0" rIns="0" bIns="0" rtlCol="0" anchor="ctr"/>
           <a:lstStyle/>
           <a:p>
-            <a:pPr marL="0" indent="0">
+            <a:pPr indent="0" marL="0">
               <a:buNone/>
             </a:pPr>
             <a:r>
@@ -3277,8 +5833,8 @@
         </p:nvSpPr>
         <p:spPr>
           <a:xfrm>
-            <a:off x="3721608" y="3538728"/>
-            <a:ext cx="7863840" cy="512064"/>
+            <a:off x="3401568" y="3648456"/>
+            <a:ext cx="3291840" cy="658368"/>
           </a:xfrm>
           <a:prstGeom prst="rect">
             <a:avLst/>
@@ -3290,14 +5846,14 @@
           <a:bodyPr wrap="square" lIns="0" tIns="0" rIns="0" bIns="0" rtlCol="0" anchor="ctr"/>
           <a:lstStyle/>
           <a:p>
-            <a:pPr marL="0" indent="0">
+            <a:pPr indent="0" marL="0">
               <a:lnSpc>
-                <a:spcPts val="1600"/>
+                <a:spcPts val="1500"/>
               </a:lnSpc>
               <a:buNone/>
             </a:pPr>
             <a:r>
-              <a:rPr lang="en-US" sz="1250" dirty="0">
+              <a:rPr lang="en-US" sz="1200" dirty="0">
                 <a:solidFill>
                   <a:srgbClr val="9FB3D1"/>
                 </a:solidFill>
@@ -3307,7 +5863,7 @@
               </a:rPr>
               <a:t>Merged bathymetry over the domain, gaps intersected with the coastline.</a:t>
             </a:r>
-            <a:endParaRPr lang="en-US" sz="1250" dirty="0"/>
+            <a:endParaRPr lang="en-US" sz="1200" dirty="0"/>
           </a:p>
         </p:txBody>
       </p:sp>
@@ -3319,7 +5875,7 @@
         </p:nvSpPr>
         <p:spPr>
           <a:xfrm>
-            <a:off x="612648" y="4416552"/>
+            <a:off x="612648" y="4581144"/>
             <a:ext cx="155448" cy="155448"/>
           </a:xfrm>
           <a:prstGeom prst="ellipse">
@@ -3330,13 +5886,6 @@
           </a:solidFill>
           <a:ln/>
         </p:spPr>
-        <p:txBody>
-          <a:bodyPr/>
-          <a:lstStyle/>
-          <a:p>
-            <a:endParaRPr lang="it-IT"/>
-          </a:p>
-        </p:txBody>
       </p:sp>
       <p:sp>
         <p:nvSpPr>
@@ -3346,8 +5895,8 @@
         </p:nvSpPr>
         <p:spPr>
           <a:xfrm>
-            <a:off x="978408" y="4325112"/>
-            <a:ext cx="2651760" cy="301752"/>
+            <a:off x="978408" y="4489704"/>
+            <a:ext cx="2331720" cy="301752"/>
           </a:xfrm>
           <a:prstGeom prst="rect">
             <a:avLst/>
@@ -3359,7 +5908,7 @@
           <a:bodyPr wrap="square" lIns="0" tIns="0" rIns="0" bIns="0" rtlCol="0" anchor="ctr"/>
           <a:lstStyle/>
           <a:p>
-            <a:pPr marL="0" indent="0">
+            <a:pPr indent="0" marL="0">
               <a:buNone/>
             </a:pPr>
             <a:r>
@@ -3385,8 +5934,8 @@
         </p:nvSpPr>
         <p:spPr>
           <a:xfrm>
-            <a:off x="3721608" y="4325112"/>
-            <a:ext cx="7863840" cy="512064"/>
+            <a:off x="3401568" y="4489704"/>
+            <a:ext cx="3291840" cy="658368"/>
           </a:xfrm>
           <a:prstGeom prst="rect">
             <a:avLst/>
@@ -3398,14 +5947,14 @@
           <a:bodyPr wrap="square" lIns="0" tIns="0" rIns="0" bIns="0" rtlCol="0" anchor="ctr"/>
           <a:lstStyle/>
           <a:p>
-            <a:pPr marL="0" indent="0">
+            <a:pPr indent="0" marL="0">
               <a:lnSpc>
-                <a:spcPts val="1600"/>
+                <a:spcPts val="1500"/>
               </a:lnSpc>
               <a:buNone/>
             </a:pPr>
             <a:r>
-              <a:rPr lang="en-US" sz="1250" dirty="0">
+              <a:rPr lang="en-US" sz="1200" dirty="0">
                 <a:solidFill>
                   <a:srgbClr val="9FB3D1"/>
                 </a:solidFill>
@@ -3415,7 +5964,7 @@
               </a:rPr>
               <a:t>Delft3D User Days at Deltares, with the four configuration questions.</a:t>
             </a:r>
-            <a:endParaRPr lang="en-US" sz="1250" dirty="0"/>
+            <a:endParaRPr lang="en-US" sz="1200" dirty="0"/>
           </a:p>
         </p:txBody>
       </p:sp>
@@ -3427,7 +5976,7 @@
         </p:nvSpPr>
         <p:spPr>
           <a:xfrm>
-            <a:off x="612648" y="5202936"/>
+            <a:off x="612648" y="5422392"/>
             <a:ext cx="155448" cy="155448"/>
           </a:xfrm>
           <a:prstGeom prst="ellipse">
@@ -3438,13 +5987,6 @@
           </a:solidFill>
           <a:ln/>
         </p:spPr>
-        <p:txBody>
-          <a:bodyPr/>
-          <a:lstStyle/>
-          <a:p>
-            <a:endParaRPr lang="it-IT"/>
-          </a:p>
-        </p:txBody>
       </p:sp>
       <p:sp>
         <p:nvSpPr>
@@ -3454,8 +5996,8 @@
         </p:nvSpPr>
         <p:spPr>
           <a:xfrm>
-            <a:off x="978408" y="5111496"/>
-            <a:ext cx="2651760" cy="301752"/>
+            <a:off x="978408" y="5330952"/>
+            <a:ext cx="2331720" cy="301752"/>
           </a:xfrm>
           <a:prstGeom prst="rect">
             <a:avLst/>
@@ -3467,7 +6009,7 @@
           <a:bodyPr wrap="square" lIns="0" tIns="0" rIns="0" bIns="0" rtlCol="0" anchor="ctr"/>
           <a:lstStyle/>
           <a:p>
-            <a:pPr marL="0" indent="0">
+            <a:pPr indent="0" marL="0">
               <a:buNone/>
             </a:pPr>
             <a:r>
@@ -3493,8 +6035,8 @@
         </p:nvSpPr>
         <p:spPr>
           <a:xfrm>
-            <a:off x="3721608" y="5111496"/>
-            <a:ext cx="7863840" cy="512064"/>
+            <a:off x="3401568" y="5330952"/>
+            <a:ext cx="3291840" cy="658368"/>
           </a:xfrm>
           <a:prstGeom prst="rect">
             <a:avLst/>
@@ -3506,14 +6048,14 @@
           <a:bodyPr wrap="square" lIns="0" tIns="0" rIns="0" bIns="0" rtlCol="0" anchor="ctr"/>
           <a:lstStyle/>
           <a:p>
-            <a:pPr marL="0" indent="0">
+            <a:pPr indent="0" marL="0">
               <a:lnSpc>
-                <a:spcPts val="1600"/>
+                <a:spcPts val="1500"/>
               </a:lnSpc>
               <a:buNone/>
             </a:pPr>
             <a:r>
-              <a:rPr lang="en-US" sz="1250" dirty="0">
+              <a:rPr lang="en-US" sz="1200" dirty="0">
                 <a:solidFill>
                   <a:srgbClr val="9FB3D1"/>
                 </a:solidFill>
@@ -3523,20 +6065,44 @@
               </a:rPr>
               <a:t>Mesh, Riemann boundary verified by synthetic pulse, first runs.</a:t>
             </a:r>
-            <a:endParaRPr lang="en-US" sz="1250" dirty="0"/>
-          </a:p>
-        </p:txBody>
-      </p:sp>
-      <p:sp>
-        <p:nvSpPr>
-          <p:cNvPr id="20" name="Text 18"/>
+            <a:endParaRPr lang="en-US" sz="1200" dirty="0"/>
+          </a:p>
+        </p:txBody>
+      </p:sp>
+      <p:sp>
+        <p:nvSpPr>
+          <p:cNvPr id="20" name="Shape 18"/>
+          <p:cNvSpPr/>
+          <p:nvPr/>
+        </p:nvSpPr>
+        <p:spPr>
+          <a:xfrm>
+            <a:off x="6858000" y="1965960"/>
+            <a:ext cx="4764024" cy="3108960"/>
+          </a:xfrm>
+          <a:prstGeom prst="roundRect">
+            <a:avLst>
+              <a:gd name="adj" fmla="val 1765"/>
+            </a:avLst>
+          </a:prstGeom>
+          <a:solidFill>
+            <a:srgbClr val="065A82">
+              <a:alpha val="70000"/>
+            </a:srgbClr>
+          </a:solidFill>
+          <a:ln/>
+        </p:spPr>
+      </p:sp>
+      <p:sp>
+        <p:nvSpPr>
+          <p:cNvPr id="21" name="Text 19"/>
           <p:cNvSpPr txBox="1"/>
           <p:nvPr/>
         </p:nvSpPr>
         <p:spPr>
           <a:xfrm>
-            <a:off x="566928" y="6144768"/>
-            <a:ext cx="10058400" cy="274320"/>
+            <a:off x="7132320" y="2176272"/>
+            <a:ext cx="4206240" cy="274320"/>
           </a:xfrm>
           <a:prstGeom prst="rect">
             <a:avLst/>
@@ -3548,7 +6114,136 @@
           <a:bodyPr wrap="square" lIns="0" tIns="0" rIns="0" bIns="0" rtlCol="0" anchor="ctr"/>
           <a:lstStyle/>
           <a:p>
-            <a:pPr marL="0" indent="0">
+            <a:pPr indent="0" marL="0">
+              <a:buNone/>
+            </a:pPr>
+            <a:r>
+              <a:rPr lang="en-US" sz="1400" b="1" dirty="0">
+                <a:solidFill>
+                  <a:srgbClr val="EB6834"/>
+                </a:solidFill>
+                <a:latin typeface="Cambria" pitchFamily="34" charset="0"/>
+                <a:ea typeface="Cambria" pitchFamily="34" charset="-122"/>
+                <a:cs typeface="Cambria" pitchFamily="34" charset="-120"/>
+              </a:rPr>
+              <a:t>Beyond the period</a:t>
+            </a:r>
+            <a:endParaRPr lang="en-US" sz="1400" dirty="0"/>
+          </a:p>
+        </p:txBody>
+      </p:sp>
+      <p:sp>
+        <p:nvSpPr>
+          <p:cNvPr id="22" name="Text 20"/>
+          <p:cNvSpPr txBox="1"/>
+          <p:nvPr/>
+        </p:nvSpPr>
+        <p:spPr>
+          <a:xfrm>
+            <a:off x="7132320" y="2542032"/>
+            <a:ext cx="4206240" cy="2286000"/>
+          </a:xfrm>
+          <a:prstGeom prst="rect">
+            <a:avLst/>
+          </a:prstGeom>
+          <a:noFill/>
+          <a:ln/>
+        </p:spPr>
+        <p:txBody>
+          <a:bodyPr wrap="square" lIns="0" tIns="0" rIns="0" bIns="0" rtlCol="0" anchor="ctr"/>
+          <a:lstStyle/>
+          <a:p>
+            <a:pPr indent="0" marL="0">
+              <a:lnSpc>
+                <a:spcPts val="1550"/>
+              </a:lnSpc>
+              <a:spcAft>
+                <a:spcPts val="900"/>
+              </a:spcAft>
+              <a:buNone/>
+            </a:pPr>
+            <a:r>
+              <a:rPr lang="en-US" sz="1150" dirty="0">
+                <a:solidFill>
+                  <a:srgbClr val="DCE7F5"/>
+                </a:solidFill>
+                <a:latin typeface="Calibri" pitchFamily="34" charset="0"/>
+                <a:ea typeface="Calibri" pitchFamily="34" charset="-122"/>
+                <a:cs typeface="Calibri" pitchFamily="34" charset="-120"/>
+              </a:rPr>
+              <a:t>The Stagnone twin runs containerised on the EDITO Datalab and publishes to its object storage.
+</a:t>
+            </a:r>
+            <a:endParaRPr lang="en-US" sz="1150" dirty="0"/>
+          </a:p>
+          <a:p>
+            <a:pPr indent="0" marL="0">
+              <a:lnSpc>
+                <a:spcPts val="1550"/>
+              </a:lnSpc>
+              <a:spcAft>
+                <a:spcPts val="900"/>
+              </a:spcAft>
+              <a:buNone/>
+            </a:pPr>
+            <a:r>
+              <a:rPr lang="en-US" sz="1150" dirty="0">
+                <a:solidFill>
+                  <a:srgbClr val="DCE7F5"/>
+                </a:solidFill>
+                <a:latin typeface="Calibri" pitchFamily="34" charset="0"/>
+                <a:ea typeface="Calibri" pitchFamily="34" charset="-122"/>
+                <a:cs typeface="Calibri" pitchFamily="34" charset="-120"/>
+              </a:rPr>
+              <a:t>A Valletta configuration would take the same route, so the deliverable is a running pilot rather than a set of figures.
+</a:t>
+            </a:r>
+            <a:endParaRPr lang="en-US" sz="1150" dirty="0"/>
+          </a:p>
+          <a:p>
+            <a:pPr indent="0" marL="0">
+              <a:lnSpc>
+                <a:spcPts val="1550"/>
+              </a:lnSpc>
+              <a:buNone/>
+            </a:pPr>
+            <a:r>
+              <a:rPr lang="en-US" sz="1150" b="1" dirty="0">
+                <a:solidFill>
+                  <a:srgbClr val="FFFFFF"/>
+                </a:solidFill>
+                <a:latin typeface="Calibri" pitchFamily="34" charset="0"/>
+                <a:ea typeface="Calibri" pitchFamily="34" charset="-122"/>
+                <a:cs typeface="Calibri" pitchFamily="34" charset="-120"/>
+              </a:rPr>
+              <a:t>That is the relocatable setup the design report asks for.</a:t>
+            </a:r>
+            <a:endParaRPr lang="en-US" sz="1150" dirty="0"/>
+          </a:p>
+        </p:txBody>
+      </p:sp>
+      <p:sp>
+        <p:nvSpPr>
+          <p:cNvPr id="23" name="Text 21"/>
+          <p:cNvSpPr txBox="1"/>
+          <p:nvPr/>
+        </p:nvSpPr>
+        <p:spPr>
+          <a:xfrm>
+            <a:off x="566928" y="6199632"/>
+            <a:ext cx="5852160" cy="274320"/>
+          </a:xfrm>
+          <a:prstGeom prst="rect">
+            <a:avLst/>
+          </a:prstGeom>
+          <a:noFill/>
+          <a:ln/>
+        </p:spPr>
+        <p:txBody>
+          <a:bodyPr wrap="square" lIns="0" tIns="0" rIns="0" bIns="0" rtlCol="0" anchor="ctr"/>
+          <a:lstStyle/>
+          <a:p>
+            <a:pPr indent="0" marL="0">
               <a:buNone/>
             </a:pPr>
             <a:r>
@@ -3612,11 +6307,11 @@
           <a:bodyPr wrap="square" lIns="0" tIns="0" rIns="0" bIns="0" rtlCol="0" anchor="ctr"/>
           <a:lstStyle/>
           <a:p>
-            <a:pPr marL="0" indent="0">
+            <a:pPr indent="0" marL="0">
               <a:buNone/>
             </a:pPr>
             <a:r>
-              <a:rPr lang="en-US" sz="1200" b="1" kern="0" spc="200" dirty="0">
+              <a:rPr lang="en-US" sz="1200" b="1" spc="200" kern="0" dirty="0">
                 <a:solidFill>
                   <a:srgbClr val="EB6834"/>
                 </a:solidFill>
@@ -3651,7 +6346,7 @@
           <a:bodyPr wrap="square" lIns="0" tIns="0" rIns="0" bIns="0" rtlCol="0" anchor="ctr"/>
           <a:lstStyle/>
           <a:p>
-            <a:pPr marL="0" indent="0">
+            <a:pPr indent="0" marL="0">
               <a:buNone/>
             </a:pPr>
             <a:r>
@@ -3690,7 +6385,7 @@
           <a:bodyPr wrap="square" lIns="0" tIns="0" rIns="0" bIns="0" rtlCol="0" anchor="ctr"/>
           <a:lstStyle/>
           <a:p>
-            <a:pPr marL="0" indent="0">
+            <a:pPr indent="0" marL="0">
               <a:buNone/>
             </a:pPr>
             <a:r>
@@ -3729,7 +6424,7 @@
           <a:bodyPr wrap="square" lIns="0" tIns="0" rIns="0" bIns="0" rtlCol="0" anchor="ctr"/>
           <a:lstStyle/>
           <a:p>
-            <a:pPr marL="0" indent="0">
+            <a:pPr indent="0" marL="0">
               <a:lnSpc>
                 <a:spcPts val="2200"/>
               </a:lnSpc>
@@ -3752,7 +6447,7 @@
             <a:endParaRPr lang="en-US" sz="1450" dirty="0"/>
           </a:p>
           <a:p>
-            <a:pPr marL="0" indent="0">
+            <a:pPr indent="0" marL="0">
               <a:lnSpc>
                 <a:spcPts val="2200"/>
               </a:lnSpc>
@@ -3775,7 +6470,7 @@
             <a:endParaRPr lang="en-US" sz="1450" dirty="0"/>
           </a:p>
           <a:p>
-            <a:pPr marL="0" indent="0">
+            <a:pPr indent="0" marL="0">
               <a:lnSpc>
                 <a:spcPts val="2200"/>
               </a:lnSpc>
@@ -3798,7 +6493,7 @@
       </p:sp>
       <p:graphicFrame>
         <p:nvGraphicFramePr>
-          <p:cNvPr id="6" name="Table 0"/>
+          <p:cNvPr id="3" name="Table 0"/>
           <p:cNvGraphicFramePr>
             <a:graphicFrameLocks noGrp="1"/>
           </p:cNvGraphicFramePr>
@@ -3812,34 +6507,16 @@
         </p:nvGraphicFramePr>
         <p:xfrm>
           <a:off x="6263640" y="2057400"/>
-          <a:ext cx="5358384" cy="2103120"/>
+          <a:ext cx="5358384" cy="914400"/>
         </p:xfrm>
         <a:graphic>
           <a:graphicData uri="http://schemas.openxmlformats.org/drawingml/2006/table">
             <a:tbl>
               <a:tblPr/>
               <a:tblGrid>
-                <a:gridCol w="1700784">
-                  <a:extLst>
-                    <a:ext uri="{9D8B030D-6E8A-4147-A177-3AD203B41FA5}">
-                      <a16:colId xmlns:a16="http://schemas.microsoft.com/office/drawing/2014/main" val="20000"/>
-                    </a:ext>
-                  </a:extLst>
-                </a:gridCol>
-                <a:gridCol w="1828800">
-                  <a:extLst>
-                    <a:ext uri="{9D8B030D-6E8A-4147-A177-3AD203B41FA5}">
-                      <a16:colId xmlns:a16="http://schemas.microsoft.com/office/drawing/2014/main" val="20001"/>
-                    </a:ext>
-                  </a:extLst>
-                </a:gridCol>
-                <a:gridCol w="1828800">
-                  <a:extLst>
-                    <a:ext uri="{9D8B030D-6E8A-4147-A177-3AD203B41FA5}">
-                      <a16:colId xmlns:a16="http://schemas.microsoft.com/office/drawing/2014/main" val="20002"/>
-                    </a:ext>
-                  </a:extLst>
-                </a:gridCol>
+                <a:gridCol w="1700784"/>
+                <a:gridCol w="1828800"/>
+                <a:gridCol w="1828800"/>
               </a:tblGrid>
               <a:tr h="420624">
                 <a:tc>
@@ -3847,7 +6524,7 @@
                     <a:bodyPr/>
                     <a:lstStyle/>
                     <a:p>
-                      <a:pPr marL="0" indent="0">
+                      <a:pPr indent="0" marL="0">
                         <a:buNone/>
                       </a:pPr>
                       <a:endParaRPr lang="en-US" sz="1250" dirty="0">
@@ -3857,7 +6534,7 @@
                       </a:endParaRPr>
                     </a:p>
                   </a:txBody>
-                  <a:tcPr anchor="ctr">
+                  <a:tcPr marL="91440" marR="91440" marT="45720" marB="45720" anchor="ctr">
                     <a:lnL w="6350" cap="flat" cmpd="sng" algn="ctr">
                       <a:solidFill>
                         <a:srgbClr val="D6DEE3"/>
@@ -3904,7 +6581,7 @@
                     <a:bodyPr/>
                     <a:lstStyle/>
                     <a:p>
-                      <a:pPr marL="0" indent="0">
+                      <a:pPr indent="0" marL="0">
                         <a:buNone/>
                       </a:pPr>
                       <a:r>
@@ -3925,7 +6602,7 @@
                       </a:endParaRPr>
                     </a:p>
                   </a:txBody>
-                  <a:tcPr anchor="ctr">
+                  <a:tcPr marL="91440" marR="91440" marT="45720" marB="45720" anchor="ctr">
                     <a:lnL w="6350" cap="flat" cmpd="sng" algn="ctr">
                       <a:solidFill>
                         <a:srgbClr val="D6DEE3"/>
@@ -3972,7 +6649,7 @@
                     <a:bodyPr/>
                     <a:lstStyle/>
                     <a:p>
-                      <a:pPr marL="0" indent="0">
+                      <a:pPr indent="0" marL="0">
                         <a:buNone/>
                       </a:pPr>
                       <a:r>
@@ -3993,7 +6670,7 @@
                       </a:endParaRPr>
                     </a:p>
                   </a:txBody>
-                  <a:tcPr anchor="ctr">
+                  <a:tcPr marL="91440" marR="91440" marT="45720" marB="45720" anchor="ctr">
                     <a:lnL w="6350" cap="flat" cmpd="sng" algn="ctr">
                       <a:solidFill>
                         <a:srgbClr val="D6DEE3"/>
@@ -4035,11 +6712,6 @@
                     </a:solidFill>
                   </a:tcPr>
                 </a:tc>
-                <a:extLst>
-                  <a:ext uri="{0D108BD9-81ED-4DB2-BD59-A6C34878D82A}">
-                    <a16:rowId xmlns:a16="http://schemas.microsoft.com/office/drawing/2014/main" val="10000"/>
-                  </a:ext>
-                </a:extLst>
               </a:tr>
               <a:tr h="420624">
                 <a:tc>
@@ -4047,7 +6719,7 @@
                     <a:bodyPr/>
                     <a:lstStyle/>
                     <a:p>
-                      <a:pPr marL="0" indent="0">
+                      <a:pPr indent="0" marL="0">
                         <a:buNone/>
                       </a:pPr>
                       <a:r>
@@ -4068,7 +6740,7 @@
                       </a:endParaRPr>
                     </a:p>
                   </a:txBody>
-                  <a:tcPr anchor="ctr">
+                  <a:tcPr marL="91440" marR="91440" marT="45720" marB="45720" anchor="ctr">
                     <a:lnL w="6350" cap="flat" cmpd="sng" algn="ctr">
                       <a:solidFill>
                         <a:srgbClr val="D6DEE3"/>
@@ -4115,7 +6787,7 @@
                     <a:bodyPr/>
                     <a:lstStyle/>
                     <a:p>
-                      <a:pPr marL="0" indent="0">
+                      <a:pPr indent="0" marL="0">
                         <a:buNone/>
                       </a:pPr>
                       <a:r>
@@ -4136,7 +6808,7 @@
                       </a:endParaRPr>
                     </a:p>
                   </a:txBody>
-                  <a:tcPr anchor="ctr">
+                  <a:tcPr marL="91440" marR="91440" marT="45720" marB="45720" anchor="ctr">
                     <a:lnL w="6350" cap="flat" cmpd="sng" algn="ctr">
                       <a:solidFill>
                         <a:srgbClr val="D6DEE3"/>
@@ -4183,7 +6855,7 @@
                     <a:bodyPr/>
                     <a:lstStyle/>
                     <a:p>
-                      <a:pPr marL="0" indent="0">
+                      <a:pPr indent="0" marL="0">
                         <a:buNone/>
                       </a:pPr>
                       <a:r>
@@ -4204,7 +6876,7 @@
                       </a:endParaRPr>
                     </a:p>
                   </a:txBody>
-                  <a:tcPr anchor="ctr">
+                  <a:tcPr marL="91440" marR="91440" marT="45720" marB="45720" anchor="ctr">
                     <a:lnL w="6350" cap="flat" cmpd="sng" algn="ctr">
                       <a:solidFill>
                         <a:srgbClr val="D6DEE3"/>
@@ -4246,11 +6918,6 @@
                     </a:solidFill>
                   </a:tcPr>
                 </a:tc>
-                <a:extLst>
-                  <a:ext uri="{0D108BD9-81ED-4DB2-BD59-A6C34878D82A}">
-                    <a16:rowId xmlns:a16="http://schemas.microsoft.com/office/drawing/2014/main" val="10001"/>
-                  </a:ext>
-                </a:extLst>
               </a:tr>
               <a:tr h="420624">
                 <a:tc>
@@ -4258,7 +6925,7 @@
                     <a:bodyPr/>
                     <a:lstStyle/>
                     <a:p>
-                      <a:pPr marL="0" indent="0">
+                      <a:pPr indent="0" marL="0">
                         <a:buNone/>
                       </a:pPr>
                       <a:r>
@@ -4279,7 +6946,7 @@
                       </a:endParaRPr>
                     </a:p>
                   </a:txBody>
-                  <a:tcPr anchor="ctr">
+                  <a:tcPr marL="91440" marR="91440" marT="45720" marB="45720" anchor="ctr">
                     <a:lnL w="6350" cap="flat" cmpd="sng" algn="ctr">
                       <a:solidFill>
                         <a:srgbClr val="D6DEE3"/>
@@ -4326,7 +6993,7 @@
                     <a:bodyPr/>
                     <a:lstStyle/>
                     <a:p>
-                      <a:pPr marL="0" indent="0">
+                      <a:pPr indent="0" marL="0">
                         <a:buNone/>
                       </a:pPr>
                       <a:r>
@@ -4347,7 +7014,7 @@
                       </a:endParaRPr>
                     </a:p>
                   </a:txBody>
-                  <a:tcPr anchor="ctr">
+                  <a:tcPr marL="91440" marR="91440" marT="45720" marB="45720" anchor="ctr">
                     <a:lnL w="6350" cap="flat" cmpd="sng" algn="ctr">
                       <a:solidFill>
                         <a:srgbClr val="D6DEE3"/>
@@ -4394,7 +7061,7 @@
                     <a:bodyPr/>
                     <a:lstStyle/>
                     <a:p>
-                      <a:pPr marL="0" indent="0">
+                      <a:pPr indent="0" marL="0">
                         <a:buNone/>
                       </a:pPr>
                       <a:r>
@@ -4415,7 +7082,7 @@
                       </a:endParaRPr>
                     </a:p>
                   </a:txBody>
-                  <a:tcPr anchor="ctr">
+                  <a:tcPr marL="91440" marR="91440" marT="45720" marB="45720" anchor="ctr">
                     <a:lnL w="6350" cap="flat" cmpd="sng" algn="ctr">
                       <a:solidFill>
                         <a:srgbClr val="D6DEE3"/>
@@ -4457,11 +7124,6 @@
                     </a:solidFill>
                   </a:tcPr>
                 </a:tc>
-                <a:extLst>
-                  <a:ext uri="{0D108BD9-81ED-4DB2-BD59-A6C34878D82A}">
-                    <a16:rowId xmlns:a16="http://schemas.microsoft.com/office/drawing/2014/main" val="10002"/>
-                  </a:ext>
-                </a:extLst>
               </a:tr>
               <a:tr h="420624">
                 <a:tc>
@@ -4469,7 +7131,7 @@
                     <a:bodyPr/>
                     <a:lstStyle/>
                     <a:p>
-                      <a:pPr marL="0" indent="0">
+                      <a:pPr indent="0" marL="0">
                         <a:buNone/>
                       </a:pPr>
                       <a:r>
@@ -4490,7 +7152,7 @@
                       </a:endParaRPr>
                     </a:p>
                   </a:txBody>
-                  <a:tcPr anchor="ctr">
+                  <a:tcPr marL="91440" marR="91440" marT="45720" marB="45720" anchor="ctr">
                     <a:lnL w="6350" cap="flat" cmpd="sng" algn="ctr">
                       <a:solidFill>
                         <a:srgbClr val="D6DEE3"/>
@@ -4537,7 +7199,7 @@
                     <a:bodyPr/>
                     <a:lstStyle/>
                     <a:p>
-                      <a:pPr marL="0" indent="0">
+                      <a:pPr indent="0" marL="0">
                         <a:buNone/>
                       </a:pPr>
                       <a:r>
@@ -4558,7 +7220,7 @@
                       </a:endParaRPr>
                     </a:p>
                   </a:txBody>
-                  <a:tcPr anchor="ctr">
+                  <a:tcPr marL="91440" marR="91440" marT="45720" marB="45720" anchor="ctr">
                     <a:lnL w="6350" cap="flat" cmpd="sng" algn="ctr">
                       <a:solidFill>
                         <a:srgbClr val="D6DEE3"/>
@@ -4605,7 +7267,7 @@
                     <a:bodyPr/>
                     <a:lstStyle/>
                     <a:p>
-                      <a:pPr marL="0" indent="0">
+                      <a:pPr indent="0" marL="0">
                         <a:buNone/>
                       </a:pPr>
                       <a:r>
@@ -4626,7 +7288,7 @@
                       </a:endParaRPr>
                     </a:p>
                   </a:txBody>
-                  <a:tcPr anchor="ctr">
+                  <a:tcPr marL="91440" marR="91440" marT="45720" marB="45720" anchor="ctr">
                     <a:lnL w="6350" cap="flat" cmpd="sng" algn="ctr">
                       <a:solidFill>
                         <a:srgbClr val="D6DEE3"/>
@@ -4668,11 +7330,6 @@
                     </a:solidFill>
                   </a:tcPr>
                 </a:tc>
-                <a:extLst>
-                  <a:ext uri="{0D108BD9-81ED-4DB2-BD59-A6C34878D82A}">
-                    <a16:rowId xmlns:a16="http://schemas.microsoft.com/office/drawing/2014/main" val="10003"/>
-                  </a:ext>
-                </a:extLst>
               </a:tr>
               <a:tr h="420624">
                 <a:tc>
@@ -4680,7 +7337,7 @@
                     <a:bodyPr/>
                     <a:lstStyle/>
                     <a:p>
-                      <a:pPr marL="0" indent="0">
+                      <a:pPr indent="0" marL="0">
                         <a:buNone/>
                       </a:pPr>
                       <a:r>
@@ -4701,7 +7358,7 @@
                       </a:endParaRPr>
                     </a:p>
                   </a:txBody>
-                  <a:tcPr anchor="ctr">
+                  <a:tcPr marL="91440" marR="91440" marT="45720" marB="45720" anchor="ctr">
                     <a:lnL w="6350" cap="flat" cmpd="sng" algn="ctr">
                       <a:solidFill>
                         <a:srgbClr val="D6DEE3"/>
@@ -4748,7 +7405,7 @@
                     <a:bodyPr/>
                     <a:lstStyle/>
                     <a:p>
-                      <a:pPr marL="0" indent="0">
+                      <a:pPr indent="0" marL="0">
                         <a:buNone/>
                       </a:pPr>
                       <a:r>
@@ -4769,7 +7426,7 @@
                       </a:endParaRPr>
                     </a:p>
                   </a:txBody>
-                  <a:tcPr anchor="ctr">
+                  <a:tcPr marL="91440" marR="91440" marT="45720" marB="45720" anchor="ctr">
                     <a:lnL w="6350" cap="flat" cmpd="sng" algn="ctr">
                       <a:solidFill>
                         <a:srgbClr val="D6DEE3"/>
@@ -4816,7 +7473,7 @@
                     <a:bodyPr/>
                     <a:lstStyle/>
                     <a:p>
-                      <a:pPr marL="0" indent="0">
+                      <a:pPr indent="0" marL="0">
                         <a:buNone/>
                       </a:pPr>
                       <a:r>
@@ -4837,7 +7494,7 @@
                       </a:endParaRPr>
                     </a:p>
                   </a:txBody>
-                  <a:tcPr anchor="ctr">
+                  <a:tcPr marL="91440" marR="91440" marT="45720" marB="45720" anchor="ctr">
                     <a:lnL w="6350" cap="flat" cmpd="sng" algn="ctr">
                       <a:solidFill>
                         <a:srgbClr val="D6DEE3"/>
@@ -4879,11 +7536,6 @@
                     </a:solidFill>
                   </a:tcPr>
                 </a:tc>
-                <a:extLst>
-                  <a:ext uri="{0D108BD9-81ED-4DB2-BD59-A6C34878D82A}">
-                    <a16:rowId xmlns:a16="http://schemas.microsoft.com/office/drawing/2014/main" val="10004"/>
-                  </a:ext>
-                </a:extLst>
               </a:tr>
             </a:tbl>
           </a:graphicData>
@@ -4910,7 +7562,7 @@
           <a:bodyPr wrap="square" lIns="0" tIns="0" rIns="0" bIns="0" rtlCol="0" anchor="ctr"/>
           <a:lstStyle/>
           <a:p>
-            <a:pPr marL="0" indent="0">
+            <a:pPr indent="0" marL="0">
               <a:buNone/>
             </a:pPr>
             <a:r>
@@ -4974,11 +7626,11 @@
           <a:bodyPr wrap="square" lIns="0" tIns="0" rIns="0" bIns="0" rtlCol="0" anchor="ctr"/>
           <a:lstStyle/>
           <a:p>
-            <a:pPr marL="0" indent="0">
+            <a:pPr indent="0" marL="0">
               <a:buNone/>
             </a:pPr>
             <a:r>
-              <a:rPr lang="en-US" sz="1200" b="1" kern="0" spc="200" dirty="0">
+              <a:rPr lang="en-US" sz="1200" b="1" spc="200" kern="0" dirty="0">
                 <a:solidFill>
                   <a:srgbClr val="EB6834"/>
                 </a:solidFill>
@@ -5013,7 +7665,7 @@
           <a:bodyPr wrap="square" lIns="0" tIns="0" rIns="0" bIns="0" rtlCol="0" anchor="ctr"/>
           <a:lstStyle/>
           <a:p>
-            <a:pPr marL="0" indent="0">
+            <a:pPr indent="0" marL="0">
               <a:buNone/>
             </a:pPr>
             <a:r>
@@ -5052,7 +7704,7 @@
           <a:bodyPr wrap="square" lIns="0" tIns="0" rIns="0" bIns="0" rtlCol="0" anchor="ctr"/>
           <a:lstStyle/>
           <a:p>
-            <a:pPr marL="0" indent="0">
+            <a:pPr indent="0" marL="0">
               <a:buNone/>
             </a:pPr>
             <a:r>
@@ -5091,7 +7743,7 @@
           <a:bodyPr wrap="square" lIns="0" tIns="0" rIns="0" bIns="0" rtlCol="0" anchor="ctr"/>
           <a:lstStyle/>
           <a:p>
-            <a:pPr marL="0" indent="0">
+            <a:pPr indent="0" marL="0">
               <a:buNone/>
             </a:pPr>
             <a:r>
@@ -5130,7 +7782,7 @@
           <a:bodyPr wrap="square" lIns="0" tIns="0" rIns="0" bIns="0" rtlCol="0" anchor="ctr"/>
           <a:lstStyle/>
           <a:p>
-            <a:pPr marL="0" indent="0">
+            <a:pPr indent="0" marL="0">
               <a:buNone/>
             </a:pPr>
             <a:r>
@@ -5147,7 +7799,7 @@
             <a:endParaRPr lang="en-US" sz="1200" dirty="0"/>
           </a:p>
           <a:p>
-            <a:pPr marL="0" indent="0">
+            <a:pPr indent="0" marL="0">
               <a:buNone/>
             </a:pPr>
             <a:r>
@@ -5186,7 +7838,7 @@
           <a:bodyPr wrap="square" lIns="0" tIns="0" rIns="0" bIns="0" rtlCol="0" anchor="ctr"/>
           <a:lstStyle/>
           <a:p>
-            <a:pPr marL="0" indent="0">
+            <a:pPr indent="0" marL="0">
               <a:buNone/>
             </a:pPr>
             <a:r>
@@ -5225,7 +7877,7 @@
           <a:bodyPr wrap="square" lIns="0" tIns="0" rIns="0" bIns="0" rtlCol="0" anchor="ctr"/>
           <a:lstStyle/>
           <a:p>
-            <a:pPr marL="0" indent="0">
+            <a:pPr indent="0" marL="0">
               <a:buNone/>
             </a:pPr>
             <a:r>
@@ -5242,7 +7894,7 @@
             <a:endParaRPr lang="en-US" sz="1200" dirty="0"/>
           </a:p>
           <a:p>
-            <a:pPr marL="0" indent="0">
+            <a:pPr indent="0" marL="0">
               <a:buNone/>
             </a:pPr>
             <a:r>
@@ -5281,7 +7933,7 @@
           <a:bodyPr wrap="square" lIns="0" tIns="0" rIns="0" bIns="0" rtlCol="0" anchor="ctr"/>
           <a:lstStyle/>
           <a:p>
-            <a:pPr marL="0" indent="0">
+            <a:pPr indent="0" marL="0">
               <a:buNone/>
             </a:pPr>
             <a:r>
@@ -5320,7 +7972,7 @@
           <a:bodyPr wrap="square" lIns="0" tIns="0" rIns="0" bIns="0" rtlCol="0" anchor="ctr"/>
           <a:lstStyle/>
           <a:p>
-            <a:pPr marL="0" indent="0">
+            <a:pPr indent="0" marL="0">
               <a:buNone/>
             </a:pPr>
             <a:r>
@@ -5337,7 +7989,7 @@
             <a:endParaRPr lang="en-US" sz="1200" dirty="0"/>
           </a:p>
           <a:p>
-            <a:pPr marL="0" indent="0">
+            <a:pPr indent="0" marL="0">
               <a:buNone/>
             </a:pPr>
             <a:r>
@@ -5357,14 +8009,14 @@
       </p:sp>
       <p:pic>
         <p:nvPicPr>
-          <p:cNvPr id="11" name="Image 0" descr="C:\Users\Unipa\Documents\MaltaDT\figures\bathymetry_overview.png"/>
+          <p:cNvPr id="11" name="Image 0" descr="C:\Users\Unipa\Documents\MaltaDT\figures\bathymetry_overview.png">    </p:cNvPr>
           <p:cNvPicPr>
             <a:picLocks noChangeAspect="1"/>
           </p:cNvPicPr>
           <p:nvPr/>
         </p:nvPicPr>
         <p:blipFill>
-          <a:blip r:embed="rId3"/>
+          <a:blip r:embed="rId1"/>
           <a:stretch>
             <a:fillRect/>
           </a:stretch>
@@ -5400,7 +8052,7 @@
           <a:bodyPr wrap="square" lIns="0" tIns="0" rIns="0" bIns="0" rtlCol="0" anchor="ctr"/>
           <a:lstStyle/>
           <a:p>
-            <a:pPr marL="0" indent="0">
+            <a:pPr indent="0" marL="0">
               <a:lnSpc>
                 <a:spcPts val="1600"/>
               </a:lnSpc>
@@ -5421,7 +8073,7 @@
             <a:endParaRPr lang="en-US" sz="1150" dirty="0"/>
           </a:p>
           <a:p>
-            <a:pPr marL="0" indent="0">
+            <a:pPr indent="0" marL="0">
               <a:lnSpc>
                 <a:spcPts val="1600"/>
               </a:lnSpc>
@@ -5442,7 +8094,7 @@
             <a:endParaRPr lang="en-US" sz="1150" dirty="0"/>
           </a:p>
           <a:p>
-            <a:pPr marL="0" indent="0">
+            <a:pPr indent="0" marL="0">
               <a:lnSpc>
                 <a:spcPts val="1600"/>
               </a:lnSpc>
@@ -5484,7 +8136,7 @@
           <a:bodyPr wrap="square" lIns="0" tIns="0" rIns="0" bIns="0" rtlCol="0" anchor="ctr"/>
           <a:lstStyle/>
           <a:p>
-            <a:pPr marL="0" indent="0">
+            <a:pPr indent="0" marL="0">
               <a:buNone/>
             </a:pPr>
             <a:r>
@@ -5548,11 +8200,11 @@
           <a:bodyPr wrap="square" lIns="0" tIns="0" rIns="0" bIns="0" rtlCol="0" anchor="ctr"/>
           <a:lstStyle/>
           <a:p>
-            <a:pPr marL="0" indent="0">
+            <a:pPr indent="0" marL="0">
               <a:buNone/>
             </a:pPr>
             <a:r>
-              <a:rPr lang="en-US" sz="1200" b="1" kern="0" spc="200" dirty="0">
+              <a:rPr lang="en-US" sz="1200" b="1" spc="200" kern="0" dirty="0">
                 <a:solidFill>
                   <a:srgbClr val="EB6834"/>
                 </a:solidFill>
@@ -5587,7 +8239,7 @@
           <a:bodyPr wrap="square" lIns="0" tIns="0" rIns="0" bIns="0" rtlCol="0" anchor="ctr"/>
           <a:lstStyle/>
           <a:p>
-            <a:pPr marL="0" indent="0">
+            <a:pPr indent="0" marL="0">
               <a:buNone/>
             </a:pPr>
             <a:r>
@@ -5626,7 +8278,7 @@
           <a:bodyPr wrap="square" lIns="0" tIns="0" rIns="0" bIns="0" rtlCol="0" anchor="ctr"/>
           <a:lstStyle/>
           <a:p>
-            <a:pPr marL="0" indent="0">
+            <a:pPr indent="0" marL="0">
               <a:buNone/>
             </a:pPr>
             <a:r>
@@ -5665,13 +8317,6 @@
           </a:solidFill>
           <a:ln/>
         </p:spPr>
-        <p:txBody>
-          <a:bodyPr/>
-          <a:lstStyle/>
-          <a:p>
-            <a:endParaRPr lang="it-IT"/>
-          </a:p>
-        </p:txBody>
       </p:sp>
       <p:sp>
         <p:nvSpPr>
@@ -5692,13 +8337,6 @@
           </a:solidFill>
           <a:ln/>
         </p:spPr>
-        <p:txBody>
-          <a:bodyPr/>
-          <a:lstStyle/>
-          <a:p>
-            <a:endParaRPr lang="it-IT"/>
-          </a:p>
-        </p:txBody>
       </p:sp>
       <p:sp>
         <p:nvSpPr>
@@ -5721,7 +8359,7 @@
           <a:bodyPr wrap="square" lIns="0" tIns="0" rIns="0" bIns="0" rtlCol="0" anchor="ctr"/>
           <a:lstStyle/>
           <a:p>
-            <a:pPr marL="0" indent="0" algn="ctr">
+            <a:pPr algn="ctr" indent="0" marL="0">
               <a:buNone/>
             </a:pPr>
             <a:r>
@@ -5760,7 +8398,7 @@
           <a:bodyPr wrap="square" lIns="0" tIns="0" rIns="0" bIns="0" rtlCol="0" anchor="ctr"/>
           <a:lstStyle/>
           <a:p>
-            <a:pPr marL="0" indent="0">
+            <a:pPr indent="0" marL="0">
               <a:buNone/>
             </a:pPr>
             <a:r>
@@ -5799,7 +8437,7 @@
           <a:bodyPr wrap="square" lIns="0" tIns="0" rIns="0" bIns="0" rtlCol="0" anchor="ctr"/>
           <a:lstStyle/>
           <a:p>
-            <a:pPr marL="0" indent="0">
+            <a:pPr indent="0" marL="0">
               <a:lnSpc>
                 <a:spcPts val="1600"/>
               </a:lnSpc>
@@ -5841,7 +8479,7 @@
           <a:bodyPr wrap="square" lIns="0" tIns="0" rIns="0" bIns="0" rtlCol="0" anchor="ctr"/>
           <a:lstStyle/>
           <a:p>
-            <a:pPr marL="0" indent="0">
+            <a:pPr indent="0" marL="0">
               <a:lnSpc>
                 <a:spcPts val="1500"/>
               </a:lnSpc>
@@ -5883,13 +8521,6 @@
           </a:solidFill>
           <a:ln/>
         </p:spPr>
-        <p:txBody>
-          <a:bodyPr/>
-          <a:lstStyle/>
-          <a:p>
-            <a:endParaRPr lang="it-IT"/>
-          </a:p>
-        </p:txBody>
       </p:sp>
       <p:sp>
         <p:nvSpPr>
@@ -5910,13 +8541,6 @@
           </a:solidFill>
           <a:ln/>
         </p:spPr>
-        <p:txBody>
-          <a:bodyPr/>
-          <a:lstStyle/>
-          <a:p>
-            <a:endParaRPr lang="it-IT"/>
-          </a:p>
-        </p:txBody>
       </p:sp>
       <p:sp>
         <p:nvSpPr>
@@ -5939,7 +8563,7 @@
           <a:bodyPr wrap="square" lIns="0" tIns="0" rIns="0" bIns="0" rtlCol="0" anchor="ctr"/>
           <a:lstStyle/>
           <a:p>
-            <a:pPr marL="0" indent="0" algn="ctr">
+            <a:pPr algn="ctr" indent="0" marL="0">
               <a:buNone/>
             </a:pPr>
             <a:r>
@@ -5978,7 +8602,7 @@
           <a:bodyPr wrap="square" lIns="0" tIns="0" rIns="0" bIns="0" rtlCol="0" anchor="ctr"/>
           <a:lstStyle/>
           <a:p>
-            <a:pPr marL="0" indent="0">
+            <a:pPr indent="0" marL="0">
               <a:buNone/>
             </a:pPr>
             <a:r>
@@ -6017,7 +8641,7 @@
           <a:bodyPr wrap="square" lIns="0" tIns="0" rIns="0" bIns="0" rtlCol="0" anchor="ctr"/>
           <a:lstStyle/>
           <a:p>
-            <a:pPr marL="0" indent="0">
+            <a:pPr indent="0" marL="0">
               <a:lnSpc>
                 <a:spcPts val="1600"/>
               </a:lnSpc>
@@ -6059,7 +8683,7 @@
           <a:bodyPr wrap="square" lIns="0" tIns="0" rIns="0" bIns="0" rtlCol="0" anchor="ctr"/>
           <a:lstStyle/>
           <a:p>
-            <a:pPr marL="0" indent="0">
+            <a:pPr indent="0" marL="0">
               <a:lnSpc>
                 <a:spcPts val="1500"/>
               </a:lnSpc>
@@ -6101,13 +8725,6 @@
           </a:solidFill>
           <a:ln/>
         </p:spPr>
-        <p:txBody>
-          <a:bodyPr/>
-          <a:lstStyle/>
-          <a:p>
-            <a:endParaRPr lang="it-IT"/>
-          </a:p>
-        </p:txBody>
       </p:sp>
       <p:sp>
         <p:nvSpPr>
@@ -6128,13 +8745,6 @@
           </a:solidFill>
           <a:ln/>
         </p:spPr>
-        <p:txBody>
-          <a:bodyPr/>
-          <a:lstStyle/>
-          <a:p>
-            <a:endParaRPr lang="it-IT"/>
-          </a:p>
-        </p:txBody>
       </p:sp>
       <p:sp>
         <p:nvSpPr>
@@ -6157,7 +8767,7 @@
           <a:bodyPr wrap="square" lIns="0" tIns="0" rIns="0" bIns="0" rtlCol="0" anchor="ctr"/>
           <a:lstStyle/>
           <a:p>
-            <a:pPr marL="0" indent="0" algn="ctr">
+            <a:pPr algn="ctr" indent="0" marL="0">
               <a:buNone/>
             </a:pPr>
             <a:r>
@@ -6196,7 +8806,7 @@
           <a:bodyPr wrap="square" lIns="0" tIns="0" rIns="0" bIns="0" rtlCol="0" anchor="ctr"/>
           <a:lstStyle/>
           <a:p>
-            <a:pPr marL="0" indent="0">
+            <a:pPr indent="0" marL="0">
               <a:buNone/>
             </a:pPr>
             <a:r>
@@ -6235,7 +8845,7 @@
           <a:bodyPr wrap="square" lIns="0" tIns="0" rIns="0" bIns="0" rtlCol="0" anchor="ctr"/>
           <a:lstStyle/>
           <a:p>
-            <a:pPr marL="0" indent="0">
+            <a:pPr indent="0" marL="0">
               <a:lnSpc>
                 <a:spcPts val="1600"/>
               </a:lnSpc>
@@ -6277,7 +8887,7 @@
           <a:bodyPr wrap="square" lIns="0" tIns="0" rIns="0" bIns="0" rtlCol="0" anchor="ctr"/>
           <a:lstStyle/>
           <a:p>
-            <a:pPr marL="0" indent="0">
+            <a:pPr indent="0" marL="0">
               <a:lnSpc>
                 <a:spcPts val="1500"/>
               </a:lnSpc>
@@ -6319,7 +8929,7 @@
           <a:bodyPr wrap="square" lIns="0" tIns="0" rIns="0" bIns="0" rtlCol="0" anchor="ctr"/>
           <a:lstStyle/>
           <a:p>
-            <a:pPr marL="0" indent="0">
+            <a:pPr indent="0" marL="0">
               <a:buNone/>
             </a:pPr>
             <a:r>
@@ -6383,11 +8993,11 @@
           <a:bodyPr wrap="square" lIns="0" tIns="0" rIns="0" bIns="0" rtlCol="0" anchor="ctr"/>
           <a:lstStyle/>
           <a:p>
-            <a:pPr marL="0" indent="0">
+            <a:pPr indent="0" marL="0">
               <a:buNone/>
             </a:pPr>
             <a:r>
-              <a:rPr lang="en-US" sz="1200" b="1" kern="0" spc="200" dirty="0">
+              <a:rPr lang="en-US" sz="1200" b="1" spc="200" kern="0" dirty="0">
                 <a:solidFill>
                   <a:srgbClr val="EB6834"/>
                 </a:solidFill>
@@ -6422,7 +9032,7 @@
           <a:bodyPr wrap="square" lIns="0" tIns="0" rIns="0" bIns="0" rtlCol="0" anchor="ctr"/>
           <a:lstStyle/>
           <a:p>
-            <a:pPr marL="0" indent="0">
+            <a:pPr indent="0" marL="0">
               <a:buNone/>
             </a:pPr>
             <a:r>
@@ -6461,7 +9071,7 @@
           <a:bodyPr wrap="square" lIns="0" tIns="0" rIns="0" bIns="0" rtlCol="0" anchor="ctr"/>
           <a:lstStyle/>
           <a:p>
-            <a:pPr marL="0" indent="0">
+            <a:pPr indent="0" marL="0">
               <a:buNone/>
             </a:pPr>
             <a:r>
@@ -6495,55 +9105,19 @@
         </p:nvGraphicFramePr>
         <p:xfrm>
           <a:off x="566928" y="2286000"/>
-          <a:ext cx="7772400" cy="2400300"/>
+          <a:ext cx="7772400" cy="914400"/>
         </p:xfrm>
         <a:graphic>
           <a:graphicData uri="http://schemas.openxmlformats.org/drawingml/2006/table">
             <a:tbl>
               <a:tblPr/>
               <a:tblGrid>
-                <a:gridCol w="2743200">
-                  <a:extLst>
-                    <a:ext uri="{9D8B030D-6E8A-4147-A177-3AD203B41FA5}">
-                      <a16:colId xmlns:a16="http://schemas.microsoft.com/office/drawing/2014/main" val="20000"/>
-                    </a:ext>
-                  </a:extLst>
-                </a:gridCol>
-                <a:gridCol w="868680">
-                  <a:extLst>
-                    <a:ext uri="{9D8B030D-6E8A-4147-A177-3AD203B41FA5}">
-                      <a16:colId xmlns:a16="http://schemas.microsoft.com/office/drawing/2014/main" val="20001"/>
-                    </a:ext>
-                  </a:extLst>
-                </a:gridCol>
-                <a:gridCol w="777240">
-                  <a:extLst>
-                    <a:ext uri="{9D8B030D-6E8A-4147-A177-3AD203B41FA5}">
-                      <a16:colId xmlns:a16="http://schemas.microsoft.com/office/drawing/2014/main" val="20002"/>
-                    </a:ext>
-                  </a:extLst>
-                </a:gridCol>
-                <a:gridCol w="960120">
-                  <a:extLst>
-                    <a:ext uri="{9D8B030D-6E8A-4147-A177-3AD203B41FA5}">
-                      <a16:colId xmlns:a16="http://schemas.microsoft.com/office/drawing/2014/main" val="20003"/>
-                    </a:ext>
-                  </a:extLst>
-                </a:gridCol>
-                <a:gridCol w="1051560">
-                  <a:extLst>
-                    <a:ext uri="{9D8B030D-6E8A-4147-A177-3AD203B41FA5}">
-                      <a16:colId xmlns:a16="http://schemas.microsoft.com/office/drawing/2014/main" val="20004"/>
-                    </a:ext>
-                  </a:extLst>
-                </a:gridCol>
-                <a:gridCol w="1371600">
-                  <a:extLst>
-                    <a:ext uri="{9D8B030D-6E8A-4147-A177-3AD203B41FA5}">
-                      <a16:colId xmlns:a16="http://schemas.microsoft.com/office/drawing/2014/main" val="20005"/>
-                    </a:ext>
-                  </a:extLst>
-                </a:gridCol>
+                <a:gridCol w="2743200"/>
+                <a:gridCol w="868680"/>
+                <a:gridCol w="777240"/>
+                <a:gridCol w="960120"/>
+                <a:gridCol w="1051560"/>
+                <a:gridCol w="1371600"/>
               </a:tblGrid>
               <a:tr h="342900">
                 <a:tc>
@@ -6551,7 +9125,7 @@
                     <a:bodyPr/>
                     <a:lstStyle/>
                     <a:p>
-                      <a:pPr marL="0" indent="0" algn="l">
+                      <a:pPr algn="l" indent="0" marL="0">
                         <a:buNone/>
                       </a:pPr>
                       <a:r>
@@ -6572,7 +9146,7 @@
                       </a:endParaRPr>
                     </a:p>
                   </a:txBody>
-                  <a:tcPr anchor="ctr">
+                  <a:tcPr marL="91440" marR="91440" marT="45720" marB="45720" anchor="ctr">
                     <a:lnL w="6350" cap="flat" cmpd="sng" algn="ctr">
                       <a:solidFill>
                         <a:srgbClr val="E2E8EC"/>
@@ -6619,7 +9193,7 @@
                     <a:bodyPr/>
                     <a:lstStyle/>
                     <a:p>
-                      <a:pPr marL="0" indent="0" algn="r">
+                      <a:pPr algn="r" indent="0" marL="0">
                         <a:buNone/>
                       </a:pPr>
                       <a:r>
@@ -6640,7 +9214,7 @@
                       </a:endParaRPr>
                     </a:p>
                   </a:txBody>
-                  <a:tcPr anchor="ctr">
+                  <a:tcPr marL="91440" marR="91440" marT="45720" marB="45720" anchor="ctr">
                     <a:lnL w="6350" cap="flat" cmpd="sng" algn="ctr">
                       <a:solidFill>
                         <a:srgbClr val="E2E8EC"/>
@@ -6687,7 +9261,7 @@
                     <a:bodyPr/>
                     <a:lstStyle/>
                     <a:p>
-                      <a:pPr marL="0" indent="0" algn="r">
+                      <a:pPr algn="r" indent="0" marL="0">
                         <a:buNone/>
                       </a:pPr>
                       <a:r>
@@ -6708,7 +9282,7 @@
                       </a:endParaRPr>
                     </a:p>
                   </a:txBody>
-                  <a:tcPr anchor="ctr">
+                  <a:tcPr marL="91440" marR="91440" marT="45720" marB="45720" anchor="ctr">
                     <a:lnL w="6350" cap="flat" cmpd="sng" algn="ctr">
                       <a:solidFill>
                         <a:srgbClr val="E2E8EC"/>
@@ -6755,7 +9329,7 @@
                     <a:bodyPr/>
                     <a:lstStyle/>
                     <a:p>
-                      <a:pPr marL="0" indent="0" algn="r">
+                      <a:pPr algn="r" indent="0" marL="0">
                         <a:buNone/>
                       </a:pPr>
                       <a:r>
@@ -6776,7 +9350,7 @@
                       </a:endParaRPr>
                     </a:p>
                   </a:txBody>
-                  <a:tcPr anchor="ctr">
+                  <a:tcPr marL="91440" marR="91440" marT="45720" marB="45720" anchor="ctr">
                     <a:lnL w="6350" cap="flat" cmpd="sng" algn="ctr">
                       <a:solidFill>
                         <a:srgbClr val="E2E8EC"/>
@@ -6823,7 +9397,7 @@
                     <a:bodyPr/>
                     <a:lstStyle/>
                     <a:p>
-                      <a:pPr marL="0" indent="0" algn="r">
+                      <a:pPr algn="r" indent="0" marL="0">
                         <a:buNone/>
                       </a:pPr>
                       <a:r>
@@ -6844,7 +9418,7 @@
                       </a:endParaRPr>
                     </a:p>
                   </a:txBody>
-                  <a:tcPr anchor="ctr">
+                  <a:tcPr marL="91440" marR="91440" marT="45720" marB="45720" anchor="ctr">
                     <a:lnL w="6350" cap="flat" cmpd="sng" algn="ctr">
                       <a:solidFill>
                         <a:srgbClr val="E2E8EC"/>
@@ -6891,7 +9465,7 @@
                     <a:bodyPr/>
                     <a:lstStyle/>
                     <a:p>
-                      <a:pPr marL="0" indent="0" algn="l">
+                      <a:pPr algn="l" indent="0" marL="0">
                         <a:buNone/>
                       </a:pPr>
                       <a:endParaRPr lang="en-US" sz="1200" dirty="0">
@@ -6901,7 +9475,7 @@
                       </a:endParaRPr>
                     </a:p>
                   </a:txBody>
-                  <a:tcPr anchor="ctr">
+                  <a:tcPr marL="91440" marR="91440" marT="45720" marB="45720" anchor="ctr">
                     <a:lnL w="6350" cap="flat" cmpd="sng" algn="ctr">
                       <a:solidFill>
                         <a:srgbClr val="E2E8EC"/>
@@ -6943,11 +9517,6 @@
                     </a:solidFill>
                   </a:tcPr>
                 </a:tc>
-                <a:extLst>
-                  <a:ext uri="{0D108BD9-81ED-4DB2-BD59-A6C34878D82A}">
-                    <a16:rowId xmlns:a16="http://schemas.microsoft.com/office/drawing/2014/main" val="10000"/>
-                  </a:ext>
-                </a:extLst>
               </a:tr>
               <a:tr h="342900">
                 <a:tc>
@@ -6955,7 +9524,7 @@
                     <a:bodyPr/>
                     <a:lstStyle/>
                     <a:p>
-                      <a:pPr marL="0" indent="0" algn="l">
+                      <a:pPr algn="l" indent="0" marL="0">
                         <a:buNone/>
                       </a:pPr>
                       <a:r>
@@ -6976,7 +9545,7 @@
                       </a:endParaRPr>
                     </a:p>
                   </a:txBody>
-                  <a:tcPr anchor="ctr">
+                  <a:tcPr marL="91440" marR="91440" marT="45720" marB="45720" anchor="ctr">
                     <a:lnL w="6350" cap="flat" cmpd="sng" algn="ctr">
                       <a:solidFill>
                         <a:srgbClr val="E2E8EC"/>
@@ -7023,7 +9592,7 @@
                     <a:bodyPr/>
                     <a:lstStyle/>
                     <a:p>
-                      <a:pPr marL="0" indent="0" algn="r">
+                      <a:pPr algn="r" indent="0" marL="0">
                         <a:buNone/>
                       </a:pPr>
                       <a:r>
@@ -7044,7 +9613,7 @@
                       </a:endParaRPr>
                     </a:p>
                   </a:txBody>
-                  <a:tcPr anchor="ctr">
+                  <a:tcPr marL="91440" marR="91440" marT="45720" marB="45720" anchor="ctr">
                     <a:lnL w="6350" cap="flat" cmpd="sng" algn="ctr">
                       <a:solidFill>
                         <a:srgbClr val="E2E8EC"/>
@@ -7091,7 +9660,7 @@
                     <a:bodyPr/>
                     <a:lstStyle/>
                     <a:p>
-                      <a:pPr marL="0" indent="0" algn="r">
+                      <a:pPr algn="r" indent="0" marL="0">
                         <a:buNone/>
                       </a:pPr>
                       <a:r>
@@ -7112,7 +9681,7 @@
                       </a:endParaRPr>
                     </a:p>
                   </a:txBody>
-                  <a:tcPr anchor="ctr">
+                  <a:tcPr marL="91440" marR="91440" marT="45720" marB="45720" anchor="ctr">
                     <a:lnL w="6350" cap="flat" cmpd="sng" algn="ctr">
                       <a:solidFill>
                         <a:srgbClr val="E2E8EC"/>
@@ -7159,7 +9728,7 @@
                     <a:bodyPr/>
                     <a:lstStyle/>
                     <a:p>
-                      <a:pPr marL="0" indent="0" algn="r">
+                      <a:pPr algn="r" indent="0" marL="0">
                         <a:buNone/>
                       </a:pPr>
                       <a:r>
@@ -7180,7 +9749,7 @@
                       </a:endParaRPr>
                     </a:p>
                   </a:txBody>
-                  <a:tcPr anchor="ctr">
+                  <a:tcPr marL="91440" marR="91440" marT="45720" marB="45720" anchor="ctr">
                     <a:lnL w="6350" cap="flat" cmpd="sng" algn="ctr">
                       <a:solidFill>
                         <a:srgbClr val="E2E8EC"/>
@@ -7227,7 +9796,7 @@
                     <a:bodyPr/>
                     <a:lstStyle/>
                     <a:p>
-                      <a:pPr marL="0" indent="0" algn="r">
+                      <a:pPr algn="r" indent="0" marL="0">
                         <a:buNone/>
                       </a:pPr>
                       <a:r>
@@ -7248,7 +9817,7 @@
                       </a:endParaRPr>
                     </a:p>
                   </a:txBody>
-                  <a:tcPr anchor="ctr">
+                  <a:tcPr marL="91440" marR="91440" marT="45720" marB="45720" anchor="ctr">
                     <a:lnL w="6350" cap="flat" cmpd="sng" algn="ctr">
                       <a:solidFill>
                         <a:srgbClr val="E2E8EC"/>
@@ -7295,7 +9864,7 @@
                     <a:bodyPr/>
                     <a:lstStyle/>
                     <a:p>
-                      <a:pPr marL="0" indent="0" algn="l">
+                      <a:pPr algn="l" indent="0" marL="0">
                         <a:buNone/>
                       </a:pPr>
                       <a:r>
@@ -7316,7 +9885,7 @@
                       </a:endParaRPr>
                     </a:p>
                   </a:txBody>
-                  <a:tcPr anchor="ctr">
+                  <a:tcPr marL="91440" marR="91440" marT="45720" marB="45720" anchor="ctr">
                     <a:lnL w="6350" cap="flat" cmpd="sng" algn="ctr">
                       <a:solidFill>
                         <a:srgbClr val="E2E8EC"/>
@@ -7358,11 +9927,6 @@
                     </a:solidFill>
                   </a:tcPr>
                 </a:tc>
-                <a:extLst>
-                  <a:ext uri="{0D108BD9-81ED-4DB2-BD59-A6C34878D82A}">
-                    <a16:rowId xmlns:a16="http://schemas.microsoft.com/office/drawing/2014/main" val="10001"/>
-                  </a:ext>
-                </a:extLst>
               </a:tr>
               <a:tr h="342900">
                 <a:tc>
@@ -7370,7 +9934,7 @@
                     <a:bodyPr/>
                     <a:lstStyle/>
                     <a:p>
-                      <a:pPr marL="0" indent="0" algn="l">
+                      <a:pPr algn="l" indent="0" marL="0">
                         <a:buNone/>
                       </a:pPr>
                       <a:r>
@@ -7391,7 +9955,7 @@
                       </a:endParaRPr>
                     </a:p>
                   </a:txBody>
-                  <a:tcPr anchor="ctr">
+                  <a:tcPr marL="91440" marR="91440" marT="45720" marB="45720" anchor="ctr">
                     <a:lnL w="6350" cap="flat" cmpd="sng" algn="ctr">
                       <a:solidFill>
                         <a:srgbClr val="E2E8EC"/>
@@ -7438,7 +10002,7 @@
                     <a:bodyPr/>
                     <a:lstStyle/>
                     <a:p>
-                      <a:pPr marL="0" indent="0" algn="r">
+                      <a:pPr algn="r" indent="0" marL="0">
                         <a:buNone/>
                       </a:pPr>
                       <a:r>
@@ -7459,7 +10023,7 @@
                       </a:endParaRPr>
                     </a:p>
                   </a:txBody>
-                  <a:tcPr anchor="ctr">
+                  <a:tcPr marL="91440" marR="91440" marT="45720" marB="45720" anchor="ctr">
                     <a:lnL w="6350" cap="flat" cmpd="sng" algn="ctr">
                       <a:solidFill>
                         <a:srgbClr val="E2E8EC"/>
@@ -7506,7 +10070,7 @@
                     <a:bodyPr/>
                     <a:lstStyle/>
                     <a:p>
-                      <a:pPr marL="0" indent="0" algn="r">
+                      <a:pPr algn="r" indent="0" marL="0">
                         <a:buNone/>
                       </a:pPr>
                       <a:r>
@@ -7527,7 +10091,7 @@
                       </a:endParaRPr>
                     </a:p>
                   </a:txBody>
-                  <a:tcPr anchor="ctr">
+                  <a:tcPr marL="91440" marR="91440" marT="45720" marB="45720" anchor="ctr">
                     <a:lnL w="6350" cap="flat" cmpd="sng" algn="ctr">
                       <a:solidFill>
                         <a:srgbClr val="E2E8EC"/>
@@ -7574,7 +10138,7 @@
                     <a:bodyPr/>
                     <a:lstStyle/>
                     <a:p>
-                      <a:pPr marL="0" indent="0" algn="r">
+                      <a:pPr algn="r" indent="0" marL="0">
                         <a:buNone/>
                       </a:pPr>
                       <a:r>
@@ -7595,7 +10159,7 @@
                       </a:endParaRPr>
                     </a:p>
                   </a:txBody>
-                  <a:tcPr anchor="ctr">
+                  <a:tcPr marL="91440" marR="91440" marT="45720" marB="45720" anchor="ctr">
                     <a:lnL w="6350" cap="flat" cmpd="sng" algn="ctr">
                       <a:solidFill>
                         <a:srgbClr val="E2E8EC"/>
@@ -7642,7 +10206,7 @@
                     <a:bodyPr/>
                     <a:lstStyle/>
                     <a:p>
-                      <a:pPr marL="0" indent="0" algn="r">
+                      <a:pPr algn="r" indent="0" marL="0">
                         <a:buNone/>
                       </a:pPr>
                       <a:r>
@@ -7663,7 +10227,7 @@
                       </a:endParaRPr>
                     </a:p>
                   </a:txBody>
-                  <a:tcPr anchor="ctr">
+                  <a:tcPr marL="91440" marR="91440" marT="45720" marB="45720" anchor="ctr">
                     <a:lnL w="6350" cap="flat" cmpd="sng" algn="ctr">
                       <a:solidFill>
                         <a:srgbClr val="E2E8EC"/>
@@ -7710,7 +10274,7 @@
                     <a:bodyPr/>
                     <a:lstStyle/>
                     <a:p>
-                      <a:pPr marL="0" indent="0" algn="l">
+                      <a:pPr algn="l" indent="0" marL="0">
                         <a:buNone/>
                       </a:pPr>
                       <a:r>
@@ -7731,7 +10295,7 @@
                       </a:endParaRPr>
                     </a:p>
                   </a:txBody>
-                  <a:tcPr anchor="ctr">
+                  <a:tcPr marL="91440" marR="91440" marT="45720" marB="45720" anchor="ctr">
                     <a:lnL w="6350" cap="flat" cmpd="sng" algn="ctr">
                       <a:solidFill>
                         <a:srgbClr val="E2E8EC"/>
@@ -7773,11 +10337,6 @@
                     </a:solidFill>
                   </a:tcPr>
                 </a:tc>
-                <a:extLst>
-                  <a:ext uri="{0D108BD9-81ED-4DB2-BD59-A6C34878D82A}">
-                    <a16:rowId xmlns:a16="http://schemas.microsoft.com/office/drawing/2014/main" val="10002"/>
-                  </a:ext>
-                </a:extLst>
               </a:tr>
               <a:tr h="342900">
                 <a:tc>
@@ -7785,7 +10344,7 @@
                     <a:bodyPr/>
                     <a:lstStyle/>
                     <a:p>
-                      <a:pPr marL="0" indent="0" algn="l">
+                      <a:pPr algn="l" indent="0" marL="0">
                         <a:buNone/>
                       </a:pPr>
                       <a:r>
@@ -7806,7 +10365,7 @@
                       </a:endParaRPr>
                     </a:p>
                   </a:txBody>
-                  <a:tcPr anchor="ctr">
+                  <a:tcPr marL="91440" marR="91440" marT="45720" marB="45720" anchor="ctr">
                     <a:lnL w="6350" cap="flat" cmpd="sng" algn="ctr">
                       <a:solidFill>
                         <a:srgbClr val="E2E8EC"/>
@@ -7853,7 +10412,7 @@
                     <a:bodyPr/>
                     <a:lstStyle/>
                     <a:p>
-                      <a:pPr marL="0" indent="0" algn="r">
+                      <a:pPr algn="r" indent="0" marL="0">
                         <a:buNone/>
                       </a:pPr>
                       <a:r>
@@ -7874,7 +10433,7 @@
                       </a:endParaRPr>
                     </a:p>
                   </a:txBody>
-                  <a:tcPr anchor="ctr">
+                  <a:tcPr marL="91440" marR="91440" marT="45720" marB="45720" anchor="ctr">
                     <a:lnL w="6350" cap="flat" cmpd="sng" algn="ctr">
                       <a:solidFill>
                         <a:srgbClr val="E2E8EC"/>
@@ -7921,7 +10480,7 @@
                     <a:bodyPr/>
                     <a:lstStyle/>
                     <a:p>
-                      <a:pPr marL="0" indent="0" algn="r">
+                      <a:pPr algn="r" indent="0" marL="0">
                         <a:buNone/>
                       </a:pPr>
                       <a:r>
@@ -7942,7 +10501,7 @@
                       </a:endParaRPr>
                     </a:p>
                   </a:txBody>
-                  <a:tcPr anchor="ctr">
+                  <a:tcPr marL="91440" marR="91440" marT="45720" marB="45720" anchor="ctr">
                     <a:lnL w="6350" cap="flat" cmpd="sng" algn="ctr">
                       <a:solidFill>
                         <a:srgbClr val="E2E8EC"/>
@@ -7989,7 +10548,7 @@
                     <a:bodyPr/>
                     <a:lstStyle/>
                     <a:p>
-                      <a:pPr marL="0" indent="0" algn="r">
+                      <a:pPr algn="r" indent="0" marL="0">
                         <a:buNone/>
                       </a:pPr>
                       <a:r>
@@ -8010,7 +10569,7 @@
                       </a:endParaRPr>
                     </a:p>
                   </a:txBody>
-                  <a:tcPr anchor="ctr">
+                  <a:tcPr marL="91440" marR="91440" marT="45720" marB="45720" anchor="ctr">
                     <a:lnL w="6350" cap="flat" cmpd="sng" algn="ctr">
                       <a:solidFill>
                         <a:srgbClr val="E2E8EC"/>
@@ -8057,7 +10616,7 @@
                     <a:bodyPr/>
                     <a:lstStyle/>
                     <a:p>
-                      <a:pPr marL="0" indent="0" algn="r">
+                      <a:pPr algn="r" indent="0" marL="0">
                         <a:buNone/>
                       </a:pPr>
                       <a:r>
@@ -8078,7 +10637,7 @@
                       </a:endParaRPr>
                     </a:p>
                   </a:txBody>
-                  <a:tcPr anchor="ctr">
+                  <a:tcPr marL="91440" marR="91440" marT="45720" marB="45720" anchor="ctr">
                     <a:lnL w="6350" cap="flat" cmpd="sng" algn="ctr">
                       <a:solidFill>
                         <a:srgbClr val="E2E8EC"/>
@@ -8125,7 +10684,7 @@
                     <a:bodyPr/>
                     <a:lstStyle/>
                     <a:p>
-                      <a:pPr marL="0" indent="0" algn="l">
+                      <a:pPr algn="l" indent="0" marL="0">
                         <a:buNone/>
                       </a:pPr>
                       <a:r>
@@ -8146,7 +10705,7 @@
                       </a:endParaRPr>
                     </a:p>
                   </a:txBody>
-                  <a:tcPr anchor="ctr">
+                  <a:tcPr marL="91440" marR="91440" marT="45720" marB="45720" anchor="ctr">
                     <a:lnL w="6350" cap="flat" cmpd="sng" algn="ctr">
                       <a:solidFill>
                         <a:srgbClr val="E2E8EC"/>
@@ -8188,11 +10747,6 @@
                     </a:solidFill>
                   </a:tcPr>
                 </a:tc>
-                <a:extLst>
-                  <a:ext uri="{0D108BD9-81ED-4DB2-BD59-A6C34878D82A}">
-                    <a16:rowId xmlns:a16="http://schemas.microsoft.com/office/drawing/2014/main" val="10003"/>
-                  </a:ext>
-                </a:extLst>
               </a:tr>
               <a:tr h="342900">
                 <a:tc>
@@ -8200,7 +10754,7 @@
                     <a:bodyPr/>
                     <a:lstStyle/>
                     <a:p>
-                      <a:pPr marL="0" indent="0" algn="l">
+                      <a:pPr algn="l" indent="0" marL="0">
                         <a:buNone/>
                       </a:pPr>
                       <a:r>
@@ -8221,7 +10775,7 @@
                       </a:endParaRPr>
                     </a:p>
                   </a:txBody>
-                  <a:tcPr anchor="ctr">
+                  <a:tcPr marL="91440" marR="91440" marT="45720" marB="45720" anchor="ctr">
                     <a:lnL w="6350" cap="flat" cmpd="sng" algn="ctr">
                       <a:solidFill>
                         <a:srgbClr val="E2E8EC"/>
@@ -8268,7 +10822,7 @@
                     <a:bodyPr/>
                     <a:lstStyle/>
                     <a:p>
-                      <a:pPr marL="0" indent="0" algn="r">
+                      <a:pPr algn="r" indent="0" marL="0">
                         <a:buNone/>
                       </a:pPr>
                       <a:r>
@@ -8289,7 +10843,7 @@
                       </a:endParaRPr>
                     </a:p>
                   </a:txBody>
-                  <a:tcPr anchor="ctr">
+                  <a:tcPr marL="91440" marR="91440" marT="45720" marB="45720" anchor="ctr">
                     <a:lnL w="6350" cap="flat" cmpd="sng" algn="ctr">
                       <a:solidFill>
                         <a:srgbClr val="E2E8EC"/>
@@ -8336,7 +10890,7 @@
                     <a:bodyPr/>
                     <a:lstStyle/>
                     <a:p>
-                      <a:pPr marL="0" indent="0" algn="r">
+                      <a:pPr algn="r" indent="0" marL="0">
                         <a:buNone/>
                       </a:pPr>
                       <a:r>
@@ -8357,7 +10911,7 @@
                       </a:endParaRPr>
                     </a:p>
                   </a:txBody>
-                  <a:tcPr anchor="ctr">
+                  <a:tcPr marL="91440" marR="91440" marT="45720" marB="45720" anchor="ctr">
                     <a:lnL w="6350" cap="flat" cmpd="sng" algn="ctr">
                       <a:solidFill>
                         <a:srgbClr val="E2E8EC"/>
@@ -8404,7 +10958,7 @@
                     <a:bodyPr/>
                     <a:lstStyle/>
                     <a:p>
-                      <a:pPr marL="0" indent="0" algn="r">
+                      <a:pPr algn="r" indent="0" marL="0">
                         <a:buNone/>
                       </a:pPr>
                       <a:r>
@@ -8425,7 +10979,7 @@
                       </a:endParaRPr>
                     </a:p>
                   </a:txBody>
-                  <a:tcPr anchor="ctr">
+                  <a:tcPr marL="91440" marR="91440" marT="45720" marB="45720" anchor="ctr">
                     <a:lnL w="6350" cap="flat" cmpd="sng" algn="ctr">
                       <a:solidFill>
                         <a:srgbClr val="E2E8EC"/>
@@ -8472,7 +11026,7 @@
                     <a:bodyPr/>
                     <a:lstStyle/>
                     <a:p>
-                      <a:pPr marL="0" indent="0" algn="r">
+                      <a:pPr algn="r" indent="0" marL="0">
                         <a:buNone/>
                       </a:pPr>
                       <a:r>
@@ -8493,7 +11047,7 @@
                       </a:endParaRPr>
                     </a:p>
                   </a:txBody>
-                  <a:tcPr anchor="ctr">
+                  <a:tcPr marL="91440" marR="91440" marT="45720" marB="45720" anchor="ctr">
                     <a:lnL w="6350" cap="flat" cmpd="sng" algn="ctr">
                       <a:solidFill>
                         <a:srgbClr val="E2E8EC"/>
@@ -8540,7 +11094,7 @@
                     <a:bodyPr/>
                     <a:lstStyle/>
                     <a:p>
-                      <a:pPr marL="0" indent="0" algn="l">
+                      <a:pPr algn="l" indent="0" marL="0">
                         <a:buNone/>
                       </a:pPr>
                       <a:r>
@@ -8561,7 +11115,7 @@
                       </a:endParaRPr>
                     </a:p>
                   </a:txBody>
-                  <a:tcPr anchor="ctr">
+                  <a:tcPr marL="91440" marR="91440" marT="45720" marB="45720" anchor="ctr">
                     <a:lnL w="6350" cap="flat" cmpd="sng" algn="ctr">
                       <a:solidFill>
                         <a:srgbClr val="E2E8EC"/>
@@ -8603,11 +11157,6 @@
                     </a:solidFill>
                   </a:tcPr>
                 </a:tc>
-                <a:extLst>
-                  <a:ext uri="{0D108BD9-81ED-4DB2-BD59-A6C34878D82A}">
-                    <a16:rowId xmlns:a16="http://schemas.microsoft.com/office/drawing/2014/main" val="10004"/>
-                  </a:ext>
-                </a:extLst>
               </a:tr>
               <a:tr h="342900">
                 <a:tc>
@@ -8615,7 +11164,7 @@
                     <a:bodyPr/>
                     <a:lstStyle/>
                     <a:p>
-                      <a:pPr marL="0" indent="0" algn="l">
+                      <a:pPr algn="l" indent="0" marL="0">
                         <a:buNone/>
                       </a:pPr>
                       <a:r>
@@ -8636,7 +11185,7 @@
                       </a:endParaRPr>
                     </a:p>
                   </a:txBody>
-                  <a:tcPr anchor="ctr">
+                  <a:tcPr marL="91440" marR="91440" marT="45720" marB="45720" anchor="ctr">
                     <a:lnL w="6350" cap="flat" cmpd="sng" algn="ctr">
                       <a:solidFill>
                         <a:srgbClr val="E2E8EC"/>
@@ -8683,7 +11232,7 @@
                     <a:bodyPr/>
                     <a:lstStyle/>
                     <a:p>
-                      <a:pPr marL="0" indent="0" algn="r">
+                      <a:pPr algn="r" indent="0" marL="0">
                         <a:buNone/>
                       </a:pPr>
                       <a:r>
@@ -8704,7 +11253,7 @@
                       </a:endParaRPr>
                     </a:p>
                   </a:txBody>
-                  <a:tcPr anchor="ctr">
+                  <a:tcPr marL="91440" marR="91440" marT="45720" marB="45720" anchor="ctr">
                     <a:lnL w="6350" cap="flat" cmpd="sng" algn="ctr">
                       <a:solidFill>
                         <a:srgbClr val="E2E8EC"/>
@@ -8751,7 +11300,7 @@
                     <a:bodyPr/>
                     <a:lstStyle/>
                     <a:p>
-                      <a:pPr marL="0" indent="0" algn="r">
+                      <a:pPr algn="r" indent="0" marL="0">
                         <a:buNone/>
                       </a:pPr>
                       <a:r>
@@ -8772,7 +11321,7 @@
                       </a:endParaRPr>
                     </a:p>
                   </a:txBody>
-                  <a:tcPr anchor="ctr">
+                  <a:tcPr marL="91440" marR="91440" marT="45720" marB="45720" anchor="ctr">
                     <a:lnL w="6350" cap="flat" cmpd="sng" algn="ctr">
                       <a:solidFill>
                         <a:srgbClr val="E2E8EC"/>
@@ -8819,7 +11368,7 @@
                     <a:bodyPr/>
                     <a:lstStyle/>
                     <a:p>
-                      <a:pPr marL="0" indent="0" algn="r">
+                      <a:pPr algn="r" indent="0" marL="0">
                         <a:buNone/>
                       </a:pPr>
                       <a:r>
@@ -8840,7 +11389,7 @@
                       </a:endParaRPr>
                     </a:p>
                   </a:txBody>
-                  <a:tcPr anchor="ctr">
+                  <a:tcPr marL="91440" marR="91440" marT="45720" marB="45720" anchor="ctr">
                     <a:lnL w="6350" cap="flat" cmpd="sng" algn="ctr">
                       <a:solidFill>
                         <a:srgbClr val="E2E8EC"/>
@@ -8887,7 +11436,7 @@
                     <a:bodyPr/>
                     <a:lstStyle/>
                     <a:p>
-                      <a:pPr marL="0" indent="0" algn="r">
+                      <a:pPr algn="r" indent="0" marL="0">
                         <a:buNone/>
                       </a:pPr>
                       <a:r>
@@ -8908,7 +11457,7 @@
                       </a:endParaRPr>
                     </a:p>
                   </a:txBody>
-                  <a:tcPr anchor="ctr">
+                  <a:tcPr marL="91440" marR="91440" marT="45720" marB="45720" anchor="ctr">
                     <a:lnL w="6350" cap="flat" cmpd="sng" algn="ctr">
                       <a:solidFill>
                         <a:srgbClr val="E2E8EC"/>
@@ -8955,7 +11504,7 @@
                     <a:bodyPr/>
                     <a:lstStyle/>
                     <a:p>
-                      <a:pPr marL="0" indent="0" algn="l">
+                      <a:pPr algn="l" indent="0" marL="0">
                         <a:buNone/>
                       </a:pPr>
                       <a:r>
@@ -8976,7 +11525,7 @@
                       </a:endParaRPr>
                     </a:p>
                   </a:txBody>
-                  <a:tcPr anchor="ctr">
+                  <a:tcPr marL="91440" marR="91440" marT="45720" marB="45720" anchor="ctr">
                     <a:lnL w="6350" cap="flat" cmpd="sng" algn="ctr">
                       <a:solidFill>
                         <a:srgbClr val="E2E8EC"/>
@@ -9018,11 +11567,6 @@
                     </a:solidFill>
                   </a:tcPr>
                 </a:tc>
-                <a:extLst>
-                  <a:ext uri="{0D108BD9-81ED-4DB2-BD59-A6C34878D82A}">
-                    <a16:rowId xmlns:a16="http://schemas.microsoft.com/office/drawing/2014/main" val="10005"/>
-                  </a:ext>
-                </a:extLst>
               </a:tr>
               <a:tr h="342900">
                 <a:tc>
@@ -9030,7 +11574,7 @@
                     <a:bodyPr/>
                     <a:lstStyle/>
                     <a:p>
-                      <a:pPr marL="0" indent="0" algn="l">
+                      <a:pPr algn="l" indent="0" marL="0">
                         <a:buNone/>
                       </a:pPr>
                       <a:r>
@@ -9051,7 +11595,7 @@
                       </a:endParaRPr>
                     </a:p>
                   </a:txBody>
-                  <a:tcPr anchor="ctr">
+                  <a:tcPr marL="91440" marR="91440" marT="45720" marB="45720" anchor="ctr">
                     <a:lnL w="6350" cap="flat" cmpd="sng" algn="ctr">
                       <a:solidFill>
                         <a:srgbClr val="E2E8EC"/>
@@ -9098,7 +11642,7 @@
                     <a:bodyPr/>
                     <a:lstStyle/>
                     <a:p>
-                      <a:pPr marL="0" indent="0" algn="r">
+                      <a:pPr algn="r" indent="0" marL="0">
                         <a:buNone/>
                       </a:pPr>
                       <a:r>
@@ -9119,7 +11663,7 @@
                       </a:endParaRPr>
                     </a:p>
                   </a:txBody>
-                  <a:tcPr anchor="ctr">
+                  <a:tcPr marL="91440" marR="91440" marT="45720" marB="45720" anchor="ctr">
                     <a:lnL w="6350" cap="flat" cmpd="sng" algn="ctr">
                       <a:solidFill>
                         <a:srgbClr val="E2E8EC"/>
@@ -9166,7 +11710,7 @@
                     <a:bodyPr/>
                     <a:lstStyle/>
                     <a:p>
-                      <a:pPr marL="0" indent="0" algn="r">
+                      <a:pPr algn="r" indent="0" marL="0">
                         <a:buNone/>
                       </a:pPr>
                       <a:r>
@@ -9187,7 +11731,7 @@
                       </a:endParaRPr>
                     </a:p>
                   </a:txBody>
-                  <a:tcPr anchor="ctr">
+                  <a:tcPr marL="91440" marR="91440" marT="45720" marB="45720" anchor="ctr">
                     <a:lnL w="6350" cap="flat" cmpd="sng" algn="ctr">
                       <a:solidFill>
                         <a:srgbClr val="E2E8EC"/>
@@ -9234,7 +11778,7 @@
                     <a:bodyPr/>
                     <a:lstStyle/>
                     <a:p>
-                      <a:pPr marL="0" indent="0" algn="r">
+                      <a:pPr algn="r" indent="0" marL="0">
                         <a:buNone/>
                       </a:pPr>
                       <a:r>
@@ -9255,7 +11799,7 @@
                       </a:endParaRPr>
                     </a:p>
                   </a:txBody>
-                  <a:tcPr anchor="ctr">
+                  <a:tcPr marL="91440" marR="91440" marT="45720" marB="45720" anchor="ctr">
                     <a:lnL w="6350" cap="flat" cmpd="sng" algn="ctr">
                       <a:solidFill>
                         <a:srgbClr val="E2E8EC"/>
@@ -9302,7 +11846,7 @@
                     <a:bodyPr/>
                     <a:lstStyle/>
                     <a:p>
-                      <a:pPr marL="0" indent="0" algn="r">
+                      <a:pPr algn="r" indent="0" marL="0">
                         <a:buNone/>
                       </a:pPr>
                       <a:r>
@@ -9323,7 +11867,7 @@
                       </a:endParaRPr>
                     </a:p>
                   </a:txBody>
-                  <a:tcPr anchor="ctr">
+                  <a:tcPr marL="91440" marR="91440" marT="45720" marB="45720" anchor="ctr">
                     <a:lnL w="6350" cap="flat" cmpd="sng" algn="ctr">
                       <a:solidFill>
                         <a:srgbClr val="E2E8EC"/>
@@ -9370,7 +11914,7 @@
                     <a:bodyPr/>
                     <a:lstStyle/>
                     <a:p>
-                      <a:pPr marL="0" indent="0" algn="l">
+                      <a:pPr algn="l" indent="0" marL="0">
                         <a:buNone/>
                       </a:pPr>
                       <a:r>
@@ -9391,7 +11935,7 @@
                       </a:endParaRPr>
                     </a:p>
                   </a:txBody>
-                  <a:tcPr anchor="ctr">
+                  <a:tcPr marL="91440" marR="91440" marT="45720" marB="45720" anchor="ctr">
                     <a:lnL w="6350" cap="flat" cmpd="sng" algn="ctr">
                       <a:solidFill>
                         <a:srgbClr val="E2E8EC"/>
@@ -9433,11 +11977,6 @@
                     </a:solidFill>
                   </a:tcPr>
                 </a:tc>
-                <a:extLst>
-                  <a:ext uri="{0D108BD9-81ED-4DB2-BD59-A6C34878D82A}">
-                    <a16:rowId xmlns:a16="http://schemas.microsoft.com/office/drawing/2014/main" val="10006"/>
-                  </a:ext>
-                </a:extLst>
               </a:tr>
             </a:tbl>
           </a:graphicData>
@@ -9445,7 +11984,7 @@
       </p:graphicFrame>
       <p:sp>
         <p:nvSpPr>
-          <p:cNvPr id="5" name="Shape 3"/>
+          <p:cNvPr id="6" name="Shape 3"/>
           <p:cNvSpPr/>
           <p:nvPr/>
         </p:nvSpPr>
@@ -9464,13 +12003,6 @@
           </a:solidFill>
           <a:ln/>
         </p:spPr>
-        <p:txBody>
-          <a:bodyPr/>
-          <a:lstStyle/>
-          <a:p>
-            <a:endParaRPr lang="it-IT"/>
-          </a:p>
-        </p:txBody>
       </p:sp>
       <p:sp>
         <p:nvSpPr>
@@ -9493,7 +12025,7 @@
           <a:bodyPr wrap="square" lIns="0" tIns="0" rIns="0" bIns="0" rtlCol="0" anchor="ctr"/>
           <a:lstStyle/>
           <a:p>
-            <a:pPr marL="0" indent="0">
+            <a:pPr indent="0" marL="0">
               <a:buNone/>
             </a:pPr>
             <a:r>
@@ -9532,7 +12064,7 @@
           <a:bodyPr wrap="square" lIns="0" tIns="0" rIns="0" bIns="0" rtlCol="0" anchor="ctr"/>
           <a:lstStyle/>
           <a:p>
-            <a:pPr marL="0" indent="0">
+            <a:pPr indent="0" marL="0">
               <a:lnSpc>
                 <a:spcPts val="1500"/>
               </a:lnSpc>
@@ -9553,7 +12085,7 @@
             <a:endParaRPr lang="en-US" sz="1150" dirty="0"/>
           </a:p>
           <a:p>
-            <a:pPr marL="0" indent="0">
+            <a:pPr indent="0" marL="0">
               <a:lnSpc>
                 <a:spcPts val="1500"/>
               </a:lnSpc>
@@ -9574,7 +12106,7 @@
             <a:endParaRPr lang="en-US" sz="1150" dirty="0"/>
           </a:p>
           <a:p>
-            <a:pPr marL="0" indent="0">
+            <a:pPr indent="0" marL="0">
               <a:lnSpc>
                 <a:spcPts val="1500"/>
               </a:lnSpc>
@@ -9616,7 +12148,7 @@
           <a:bodyPr wrap="square" lIns="0" tIns="0" rIns="0" bIns="0" rtlCol="0" anchor="ctr"/>
           <a:lstStyle/>
           <a:p>
-            <a:pPr marL="0" indent="0">
+            <a:pPr indent="0" marL="0">
               <a:buNone/>
             </a:pPr>
             <a:r>
@@ -9628,7 +12160,7 @@
                 <a:ea typeface="Calibri" pitchFamily="34" charset="-122"/>
                 <a:cs typeface="Calibri" pitchFamily="34" charset="-120"/>
               </a:rPr>
-              <a:t>A Helmholtz idealisation returns 12 to 18 minutes likewise, and the harbours amplify by less than a tenth across the band.</a:t>
+              <a:t>A Helmholtz idealisation returns 12 to 18 minutes likewise. The 1910 breakwater partly closes the entrance, which lengthens the period, so the figure awaits the mesh.</a:t>
             </a:r>
             <a:endParaRPr lang="en-US" sz="1050" dirty="0"/>
           </a:p>
@@ -9680,11 +12212,11 @@
           <a:bodyPr wrap="square" lIns="0" tIns="0" rIns="0" bIns="0" rtlCol="0" anchor="ctr"/>
           <a:lstStyle/>
           <a:p>
-            <a:pPr marL="0" indent="0">
+            <a:pPr indent="0" marL="0">
               <a:buNone/>
             </a:pPr>
             <a:r>
-              <a:rPr lang="en-US" sz="1200" b="1" kern="0" spc="200" dirty="0">
+              <a:rPr lang="en-US" sz="1200" b="1" spc="200" kern="0" dirty="0">
                 <a:solidFill>
                   <a:srgbClr val="EB6834"/>
                 </a:solidFill>
@@ -9719,7 +12251,7 @@
           <a:bodyPr wrap="square" lIns="0" tIns="0" rIns="0" bIns="0" rtlCol="0" anchor="ctr"/>
           <a:lstStyle/>
           <a:p>
-            <a:pPr marL="0" indent="0">
+            <a:pPr indent="0" marL="0">
               <a:buNone/>
             </a:pPr>
             <a:r>
@@ -9739,14 +12271,14 @@
       </p:sp>
       <p:pic>
         <p:nvPicPr>
-          <p:cNvPr id="4" name="Image 0" descr="C:\Users\Unipa\Documents\MaltaDT\figures\domain_design.png"/>
+          <p:cNvPr id="4" name="Image 0" descr="C:\Users\Unipa\Documents\MaltaDT\figures\domain_design.png">    </p:cNvPr>
           <p:cNvPicPr>
             <a:picLocks noChangeAspect="1"/>
           </p:cNvPicPr>
           <p:nvPr/>
         </p:nvPicPr>
         <p:blipFill>
-          <a:blip r:embed="rId3"/>
+          <a:blip r:embed="rId1"/>
           <a:stretch>
             <a:fillRect/>
           </a:stretch>
@@ -9807,11 +12339,11 @@
           <a:bodyPr wrap="square" lIns="0" tIns="0" rIns="0" bIns="0" rtlCol="0" anchor="ctr"/>
           <a:lstStyle/>
           <a:p>
-            <a:pPr marL="0" indent="0">
+            <a:pPr indent="0" marL="0">
               <a:buNone/>
             </a:pPr>
             <a:r>
-              <a:rPr lang="en-US" sz="1200" b="1" kern="0" spc="200" dirty="0">
+              <a:rPr lang="en-US" sz="1200" b="1" spc="200" kern="0" dirty="0">
                 <a:solidFill>
                   <a:srgbClr val="EB6834"/>
                 </a:solidFill>
@@ -9846,7 +12378,7 @@
           <a:bodyPr wrap="square" lIns="0" tIns="0" rIns="0" bIns="0" rtlCol="0" anchor="ctr"/>
           <a:lstStyle/>
           <a:p>
-            <a:pPr marL="0" indent="0">
+            <a:pPr indent="0" marL="0">
               <a:buNone/>
             </a:pPr>
             <a:r>
@@ -9885,7 +12417,7 @@
           <a:bodyPr wrap="square" lIns="0" tIns="0" rIns="0" bIns="0" rtlCol="0" anchor="ctr"/>
           <a:lstStyle/>
           <a:p>
-            <a:pPr marL="0" indent="0">
+            <a:pPr indent="0" marL="0">
               <a:buNone/>
             </a:pPr>
             <a:r>
@@ -9924,7 +12456,7 @@
           <a:bodyPr wrap="square" lIns="0" tIns="0" rIns="0" bIns="0" rtlCol="0" anchor="ctr"/>
           <a:lstStyle/>
           <a:p>
-            <a:pPr marL="0" indent="0">
+            <a:pPr indent="0" marL="0">
               <a:buNone/>
             </a:pPr>
             <a:r>
@@ -9963,7 +12495,7 @@
           <a:bodyPr wrap="square" lIns="0" tIns="0" rIns="0" bIns="0" rtlCol="0" anchor="ctr"/>
           <a:lstStyle/>
           <a:p>
-            <a:pPr marL="0" indent="0">
+            <a:pPr indent="0" marL="0">
               <a:lnSpc>
                 <a:spcPts val="1700"/>
               </a:lnSpc>
@@ -9987,7 +12519,7 @@
             <a:endParaRPr lang="en-US" sz="1250" dirty="0"/>
           </a:p>
           <a:p>
-            <a:pPr marL="0" indent="0">
+            <a:pPr indent="0" marL="0">
               <a:lnSpc>
                 <a:spcPts val="1700"/>
               </a:lnSpc>
@@ -10024,27 +12556,15 @@
         </p:nvGraphicFramePr>
         <p:xfrm>
           <a:off x="566928" y="3456432"/>
-          <a:ext cx="4937760" cy="2057400"/>
+          <a:ext cx="4937760" cy="914400"/>
         </p:xfrm>
         <a:graphic>
           <a:graphicData uri="http://schemas.openxmlformats.org/drawingml/2006/table">
             <a:tbl>
               <a:tblPr/>
               <a:tblGrid>
-                <a:gridCol w="3291840">
-                  <a:extLst>
-                    <a:ext uri="{9D8B030D-6E8A-4147-A177-3AD203B41FA5}">
-                      <a16:colId xmlns:a16="http://schemas.microsoft.com/office/drawing/2014/main" val="20000"/>
-                    </a:ext>
-                  </a:extLst>
-                </a:gridCol>
-                <a:gridCol w="1645920">
-                  <a:extLst>
-                    <a:ext uri="{9D8B030D-6E8A-4147-A177-3AD203B41FA5}">
-                      <a16:colId xmlns:a16="http://schemas.microsoft.com/office/drawing/2014/main" val="20001"/>
-                    </a:ext>
-                  </a:extLst>
-                </a:gridCol>
+                <a:gridCol w="3291840"/>
+                <a:gridCol w="1645920"/>
               </a:tblGrid>
               <a:tr h="342900">
                 <a:tc>
@@ -10052,7 +12572,7 @@
                     <a:bodyPr/>
                     <a:lstStyle/>
                     <a:p>
-                      <a:pPr marL="0" indent="0" algn="l">
+                      <a:pPr algn="l" indent="0" marL="0">
                         <a:buNone/>
                       </a:pPr>
                       <a:r>
@@ -10073,7 +12593,7 @@
                       </a:endParaRPr>
                     </a:p>
                   </a:txBody>
-                  <a:tcPr anchor="ctr">
+                  <a:tcPr marL="91440" marR="91440" marT="45720" marB="45720" anchor="ctr">
                     <a:lnL w="6350" cap="flat" cmpd="sng" algn="ctr">
                       <a:solidFill>
                         <a:srgbClr val="E2E8EC"/>
@@ -10120,7 +12640,7 @@
                     <a:bodyPr/>
                     <a:lstStyle/>
                     <a:p>
-                      <a:pPr marL="0" indent="0" algn="r">
+                      <a:pPr algn="r" indent="0" marL="0">
                         <a:buNone/>
                       </a:pPr>
                       <a:r>
@@ -10141,7 +12661,7 @@
                       </a:endParaRPr>
                     </a:p>
                   </a:txBody>
-                  <a:tcPr anchor="ctr">
+                  <a:tcPr marL="91440" marR="91440" marT="45720" marB="45720" anchor="ctr">
                     <a:lnL w="6350" cap="flat" cmpd="sng" algn="ctr">
                       <a:solidFill>
                         <a:srgbClr val="E2E8EC"/>
@@ -10183,11 +12703,6 @@
                     </a:solidFill>
                   </a:tcPr>
                 </a:tc>
-                <a:extLst>
-                  <a:ext uri="{0D108BD9-81ED-4DB2-BD59-A6C34878D82A}">
-                    <a16:rowId xmlns:a16="http://schemas.microsoft.com/office/drawing/2014/main" val="10000"/>
-                  </a:ext>
-                </a:extLst>
               </a:tr>
               <a:tr h="342900">
                 <a:tc>
@@ -10195,7 +12710,7 @@
                     <a:bodyPr/>
                     <a:lstStyle/>
                     <a:p>
-                      <a:pPr marL="0" indent="0" algn="l">
+                      <a:pPr algn="l" indent="0" marL="0">
                         <a:buNone/>
                       </a:pPr>
                       <a:r>
@@ -10216,7 +12731,7 @@
                       </a:endParaRPr>
                     </a:p>
                   </a:txBody>
-                  <a:tcPr anchor="ctr">
+                  <a:tcPr marL="91440" marR="91440" marT="45720" marB="45720" anchor="ctr">
                     <a:lnL w="6350" cap="flat" cmpd="sng" algn="ctr">
                       <a:solidFill>
                         <a:srgbClr val="E2E8EC"/>
@@ -10263,7 +12778,7 @@
                     <a:bodyPr/>
                     <a:lstStyle/>
                     <a:p>
-                      <a:pPr marL="0" indent="0" algn="r">
+                      <a:pPr algn="r" indent="0" marL="0">
                         <a:buNone/>
                       </a:pPr>
                       <a:r>
@@ -10284,7 +12799,7 @@
                       </a:endParaRPr>
                     </a:p>
                   </a:txBody>
-                  <a:tcPr anchor="ctr">
+                  <a:tcPr marL="91440" marR="91440" marT="45720" marB="45720" anchor="ctr">
                     <a:lnL w="6350" cap="flat" cmpd="sng" algn="ctr">
                       <a:solidFill>
                         <a:srgbClr val="E2E8EC"/>
@@ -10326,11 +12841,6 @@
                     </a:solidFill>
                   </a:tcPr>
                 </a:tc>
-                <a:extLst>
-                  <a:ext uri="{0D108BD9-81ED-4DB2-BD59-A6C34878D82A}">
-                    <a16:rowId xmlns:a16="http://schemas.microsoft.com/office/drawing/2014/main" val="10001"/>
-                  </a:ext>
-                </a:extLst>
               </a:tr>
               <a:tr h="342900">
                 <a:tc>
@@ -10338,7 +12848,7 @@
                     <a:bodyPr/>
                     <a:lstStyle/>
                     <a:p>
-                      <a:pPr marL="0" indent="0" algn="l">
+                      <a:pPr algn="l" indent="0" marL="0">
                         <a:buNone/>
                       </a:pPr>
                       <a:r>
@@ -10359,7 +12869,7 @@
                       </a:endParaRPr>
                     </a:p>
                   </a:txBody>
-                  <a:tcPr anchor="ctr">
+                  <a:tcPr marL="91440" marR="91440" marT="45720" marB="45720" anchor="ctr">
                     <a:lnL w="6350" cap="flat" cmpd="sng" algn="ctr">
                       <a:solidFill>
                         <a:srgbClr val="E2E8EC"/>
@@ -10406,7 +12916,7 @@
                     <a:bodyPr/>
                     <a:lstStyle/>
                     <a:p>
-                      <a:pPr marL="0" indent="0" algn="r">
+                      <a:pPr algn="r" indent="0" marL="0">
                         <a:buNone/>
                       </a:pPr>
                       <a:r>
@@ -10427,7 +12937,7 @@
                       </a:endParaRPr>
                     </a:p>
                   </a:txBody>
-                  <a:tcPr anchor="ctr">
+                  <a:tcPr marL="91440" marR="91440" marT="45720" marB="45720" anchor="ctr">
                     <a:lnL w="6350" cap="flat" cmpd="sng" algn="ctr">
                       <a:solidFill>
                         <a:srgbClr val="E2E8EC"/>
@@ -10469,11 +12979,6 @@
                     </a:solidFill>
                   </a:tcPr>
                 </a:tc>
-                <a:extLst>
-                  <a:ext uri="{0D108BD9-81ED-4DB2-BD59-A6C34878D82A}">
-                    <a16:rowId xmlns:a16="http://schemas.microsoft.com/office/drawing/2014/main" val="10002"/>
-                  </a:ext>
-                </a:extLst>
               </a:tr>
               <a:tr h="342900">
                 <a:tc>
@@ -10481,7 +12986,7 @@
                     <a:bodyPr/>
                     <a:lstStyle/>
                     <a:p>
-                      <a:pPr marL="0" indent="0" algn="l">
+                      <a:pPr algn="l" indent="0" marL="0">
                         <a:buNone/>
                       </a:pPr>
                       <a:r>
@@ -10502,7 +13007,7 @@
                       </a:endParaRPr>
                     </a:p>
                   </a:txBody>
-                  <a:tcPr anchor="ctr">
+                  <a:tcPr marL="91440" marR="91440" marT="45720" marB="45720" anchor="ctr">
                     <a:lnL w="6350" cap="flat" cmpd="sng" algn="ctr">
                       <a:solidFill>
                         <a:srgbClr val="E2E8EC"/>
@@ -10549,7 +13054,7 @@
                     <a:bodyPr/>
                     <a:lstStyle/>
                     <a:p>
-                      <a:pPr marL="0" indent="0" algn="r">
+                      <a:pPr algn="r" indent="0" marL="0">
                         <a:buNone/>
                       </a:pPr>
                       <a:r>
@@ -10570,7 +13075,7 @@
                       </a:endParaRPr>
                     </a:p>
                   </a:txBody>
-                  <a:tcPr anchor="ctr">
+                  <a:tcPr marL="91440" marR="91440" marT="45720" marB="45720" anchor="ctr">
                     <a:lnL w="6350" cap="flat" cmpd="sng" algn="ctr">
                       <a:solidFill>
                         <a:srgbClr val="E2E8EC"/>
@@ -10612,11 +13117,6 @@
                     </a:solidFill>
                   </a:tcPr>
                 </a:tc>
-                <a:extLst>
-                  <a:ext uri="{0D108BD9-81ED-4DB2-BD59-A6C34878D82A}">
-                    <a16:rowId xmlns:a16="http://schemas.microsoft.com/office/drawing/2014/main" val="10003"/>
-                  </a:ext>
-                </a:extLst>
               </a:tr>
               <a:tr h="342900">
                 <a:tc>
@@ -10624,7 +13124,7 @@
                     <a:bodyPr/>
                     <a:lstStyle/>
                     <a:p>
-                      <a:pPr marL="0" indent="0" algn="l">
+                      <a:pPr algn="l" indent="0" marL="0">
                         <a:buNone/>
                       </a:pPr>
                       <a:r>
@@ -10645,7 +13145,7 @@
                       </a:endParaRPr>
                     </a:p>
                   </a:txBody>
-                  <a:tcPr anchor="ctr">
+                  <a:tcPr marL="91440" marR="91440" marT="45720" marB="45720" anchor="ctr">
                     <a:lnL w="6350" cap="flat" cmpd="sng" algn="ctr">
                       <a:solidFill>
                         <a:srgbClr val="E2E8EC"/>
@@ -10692,7 +13192,7 @@
                     <a:bodyPr/>
                     <a:lstStyle/>
                     <a:p>
-                      <a:pPr marL="0" indent="0" algn="r">
+                      <a:pPr algn="r" indent="0" marL="0">
                         <a:buNone/>
                       </a:pPr>
                       <a:r>
@@ -10713,7 +13213,7 @@
                       </a:endParaRPr>
                     </a:p>
                   </a:txBody>
-                  <a:tcPr anchor="ctr">
+                  <a:tcPr marL="91440" marR="91440" marT="45720" marB="45720" anchor="ctr">
                     <a:lnL w="6350" cap="flat" cmpd="sng" algn="ctr">
                       <a:solidFill>
                         <a:srgbClr val="E2E8EC"/>
@@ -10755,11 +13255,6 @@
                     </a:solidFill>
                   </a:tcPr>
                 </a:tc>
-                <a:extLst>
-                  <a:ext uri="{0D108BD9-81ED-4DB2-BD59-A6C34878D82A}">
-                    <a16:rowId xmlns:a16="http://schemas.microsoft.com/office/drawing/2014/main" val="10004"/>
-                  </a:ext>
-                </a:extLst>
               </a:tr>
               <a:tr h="342900">
                 <a:tc>
@@ -10767,7 +13262,7 @@
                     <a:bodyPr/>
                     <a:lstStyle/>
                     <a:p>
-                      <a:pPr marL="0" indent="0" algn="l">
+                      <a:pPr algn="l" indent="0" marL="0">
                         <a:buNone/>
                       </a:pPr>
                       <a:r>
@@ -10788,7 +13283,7 @@
                       </a:endParaRPr>
                     </a:p>
                   </a:txBody>
-                  <a:tcPr anchor="ctr">
+                  <a:tcPr marL="91440" marR="91440" marT="45720" marB="45720" anchor="ctr">
                     <a:lnL w="6350" cap="flat" cmpd="sng" algn="ctr">
                       <a:solidFill>
                         <a:srgbClr val="E2E8EC"/>
@@ -10835,7 +13330,7 @@
                     <a:bodyPr/>
                     <a:lstStyle/>
                     <a:p>
-                      <a:pPr marL="0" indent="0" algn="r">
+                      <a:pPr algn="r" indent="0" marL="0">
                         <a:buNone/>
                       </a:pPr>
                       <a:r>
@@ -10856,7 +13351,7 @@
                       </a:endParaRPr>
                     </a:p>
                   </a:txBody>
-                  <a:tcPr anchor="ctr">
+                  <a:tcPr marL="91440" marR="91440" marT="45720" marB="45720" anchor="ctr">
                     <a:lnL w="6350" cap="flat" cmpd="sng" algn="ctr">
                       <a:solidFill>
                         <a:srgbClr val="E2E8EC"/>
@@ -10898,11 +13393,6 @@
                     </a:solidFill>
                   </a:tcPr>
                 </a:tc>
-                <a:extLst>
-                  <a:ext uri="{0D108BD9-81ED-4DB2-BD59-A6C34878D82A}">
-                    <a16:rowId xmlns:a16="http://schemas.microsoft.com/office/drawing/2014/main" val="10005"/>
-                  </a:ext>
-                </a:extLst>
               </a:tr>
             </a:tbl>
           </a:graphicData>
@@ -10910,7 +13400,7 @@
       </p:graphicFrame>
       <p:sp>
         <p:nvSpPr>
-          <p:cNvPr id="7" name="Shape 5"/>
+          <p:cNvPr id="8" name="Shape 5"/>
           <p:cNvSpPr/>
           <p:nvPr/>
         </p:nvSpPr>
@@ -10929,13 +13419,6 @@
           </a:solidFill>
           <a:ln/>
         </p:spPr>
-        <p:txBody>
-          <a:bodyPr/>
-          <a:lstStyle/>
-          <a:p>
-            <a:endParaRPr lang="it-IT"/>
-          </a:p>
-        </p:txBody>
       </p:sp>
       <p:sp>
         <p:nvSpPr>
@@ -10958,7 +13441,7 @@
           <a:bodyPr wrap="square" lIns="0" tIns="0" rIns="0" bIns="0" rtlCol="0" anchor="ctr"/>
           <a:lstStyle/>
           <a:p>
-            <a:pPr marL="0" indent="0">
+            <a:pPr indent="0" marL="0">
               <a:buNone/>
             </a:pPr>
             <a:r>
@@ -10997,7 +13480,7 @@
           <a:bodyPr wrap="square" lIns="0" tIns="0" rIns="0" bIns="0" rtlCol="0" anchor="ctr"/>
           <a:lstStyle/>
           <a:p>
-            <a:pPr marL="0" indent="0">
+            <a:pPr indent="0" marL="0">
               <a:lnSpc>
                 <a:spcPts val="1600"/>
               </a:lnSpc>
@@ -11039,13 +13522,6 @@
           </a:solidFill>
           <a:ln/>
         </p:spPr>
-        <p:txBody>
-          <a:bodyPr/>
-          <a:lstStyle/>
-          <a:p>
-            <a:endParaRPr lang="it-IT"/>
-          </a:p>
-        </p:txBody>
       </p:sp>
       <p:sp>
         <p:nvSpPr>
@@ -11068,7 +13544,7 @@
           <a:bodyPr wrap="square" lIns="0" tIns="0" rIns="0" bIns="0" rtlCol="0" anchor="ctr"/>
           <a:lstStyle/>
           <a:p>
-            <a:pPr marL="0" indent="0">
+            <a:pPr indent="0" marL="0">
               <a:buNone/>
             </a:pPr>
             <a:r>
@@ -11107,7 +13583,7 @@
           <a:bodyPr wrap="square" lIns="0" tIns="0" rIns="0" bIns="0" rtlCol="0" anchor="ctr"/>
           <a:lstStyle/>
           <a:p>
-            <a:pPr marL="0" indent="0">
+            <a:pPr indent="0" marL="0">
               <a:lnSpc>
                 <a:spcPts val="1600"/>
               </a:lnSpc>
@@ -11128,7 +13604,7 @@
             <a:endParaRPr lang="en-US" sz="1200" dirty="0"/>
           </a:p>
           <a:p>
-            <a:pPr marL="0" indent="0">
+            <a:pPr indent="0" marL="0">
               <a:lnSpc>
                 <a:spcPts val="1600"/>
               </a:lnSpc>
@@ -11146,6 +13622,45 @@
               <a:t>Sigma is defensible only because the domain stops short of the escarpment, where the plateau gradient is one part in a thousand.</a:t>
             </a:r>
             <a:endParaRPr lang="en-US" sz="1200" dirty="0"/>
+          </a:p>
+        </p:txBody>
+      </p:sp>
+      <p:sp>
+        <p:nvSpPr>
+          <p:cNvPr id="14" name="Text 11"/>
+          <p:cNvSpPr txBox="1"/>
+          <p:nvPr/>
+        </p:nvSpPr>
+        <p:spPr>
+          <a:xfrm>
+            <a:off x="566928" y="6053328"/>
+            <a:ext cx="11055096" cy="310896"/>
+          </a:xfrm>
+          <a:prstGeom prst="rect">
+            <a:avLst/>
+          </a:prstGeom>
+          <a:noFill/>
+          <a:ln/>
+        </p:spPr>
+        <p:txBody>
+          <a:bodyPr wrap="square" lIns="0" tIns="0" rIns="0" bIns="0" rtlCol="0" anchor="ctr"/>
+          <a:lstStyle/>
+          <a:p>
+            <a:pPr indent="0" marL="0">
+              <a:buNone/>
+            </a:pPr>
+            <a:r>
+              <a:rPr lang="en-US" sz="1050" i="1" dirty="0">
+                <a:solidFill>
+                  <a:srgbClr val="5F6368"/>
+                </a:solidFill>
+                <a:latin typeface="Calibri" pitchFamily="34" charset="0"/>
+                <a:ea typeface="Calibri" pitchFamily="34" charset="-122"/>
+                <a:cs typeface="Calibri" pitchFamily="34" charset="-120"/>
+              </a:rPr>
+              <a:t>On the wave side, two nested SWAN grids at 1200 and 250 m. The finer agrees with the group's own downscaling at 1∕500°, arrived at independently.</a:t>
+            </a:r>
+            <a:endParaRPr lang="en-US" sz="1050" dirty="0"/>
           </a:p>
         </p:txBody>
       </p:sp>
@@ -11195,11 +13710,11 @@
           <a:bodyPr wrap="square" lIns="0" tIns="0" rIns="0" bIns="0" rtlCol="0" anchor="ctr"/>
           <a:lstStyle/>
           <a:p>
-            <a:pPr marL="0" indent="0">
+            <a:pPr indent="0" marL="0">
               <a:buNone/>
             </a:pPr>
             <a:r>
-              <a:rPr lang="en-US" sz="1200" b="1" kern="0" spc="200" dirty="0">
+              <a:rPr lang="en-US" sz="1200" b="1" spc="200" kern="0" dirty="0">
                 <a:solidFill>
                   <a:srgbClr val="EB6834"/>
                 </a:solidFill>
@@ -11207,7 +13722,7 @@
                 <a:ea typeface="Calibri" pitchFamily="34" charset="-122"/>
                 <a:cs typeface="Calibri" pitchFamily="34" charset="-120"/>
               </a:rPr>
-              <a:t>RESEARCH QUESTION</a:t>
+              <a:t>PRIOR WORK AND SETTING</a:t>
             </a:r>
             <a:endParaRPr lang="en-US" sz="1200" dirty="0"/>
           </a:p>
@@ -11234,7 +13749,7 @@
           <a:bodyPr wrap="square" lIns="0" tIns="0" rIns="0" bIns="0" rtlCol="0" anchor="ctr"/>
           <a:lstStyle/>
           <a:p>
-            <a:pPr marL="0" indent="0">
+            <a:pPr indent="0" marL="0">
               <a:buNone/>
             </a:pPr>
             <a:r>
@@ -11246,25 +13761,380 @@
                 <a:ea typeface="Cambria" pitchFamily="34" charset="-122"/>
                 <a:cs typeface="Cambria" pitchFamily="34" charset="-120"/>
               </a:rPr>
-              <a:t>A proposed question</a:t>
-            </a:r>
-          </a:p>
-        </p:txBody>
-      </p:sp>
-      <p:sp>
-        <p:nvSpPr>
-          <p:cNvPr id="5" name="Shape 3"/>
+              <a:t>What exists, and what it leaves untreated</a:t>
+            </a:r>
+            <a:endParaRPr lang="en-US" sz="3200" dirty="0"/>
+          </a:p>
+        </p:txBody>
+      </p:sp>
+      <p:sp>
+        <p:nvSpPr>
+          <p:cNvPr id="4" name="Text 2"/>
+          <p:cNvSpPr txBox="1"/>
+          <p:nvPr/>
+        </p:nvSpPr>
+        <p:spPr>
+          <a:xfrm>
+            <a:off x="566928" y="1408176"/>
+            <a:ext cx="10881360" cy="585216"/>
+          </a:xfrm>
+          <a:prstGeom prst="rect">
+            <a:avLst/>
+          </a:prstGeom>
+          <a:noFill/>
+          <a:ln/>
+        </p:spPr>
+        <p:txBody>
+          <a:bodyPr wrap="square" lIns="0" tIns="0" rIns="0" bIns="0" rtlCol="0" anchor="ctr"/>
+          <a:lstStyle/>
+          <a:p>
+            <a:pPr indent="0" marL="0">
+              <a:buNone/>
+            </a:pPr>
+            <a:r>
+              <a:rPr lang="en-US" sz="1400" dirty="0">
+                <a:solidFill>
+                  <a:srgbClr val="5F6368"/>
+                </a:solidFill>
+                <a:latin typeface="Calibri" pitchFamily="34" charset="0"/>
+                <a:ea typeface="Calibri" pitchFamily="34" charset="-122"/>
+                <a:cs typeface="Calibri" pitchFamily="34" charset="-120"/>
+              </a:rPr>
+              <a:t>The Grand Harbour has been modelled before, and the host group operates a forecasting system over the same waters.</a:t>
+            </a:r>
+            <a:endParaRPr lang="en-US" sz="1400" dirty="0"/>
+          </a:p>
+        </p:txBody>
+      </p:sp>
+      <p:sp>
+        <p:nvSpPr>
+          <p:cNvPr id="5" name="Text 3"/>
+          <p:cNvSpPr txBox="1"/>
+          <p:nvPr/>
+        </p:nvSpPr>
+        <p:spPr>
+          <a:xfrm>
+            <a:off x="566928" y="2103120"/>
+            <a:ext cx="5394960" cy="292608"/>
+          </a:xfrm>
+          <a:prstGeom prst="rect">
+            <a:avLst/>
+          </a:prstGeom>
+          <a:noFill/>
+          <a:ln/>
+        </p:spPr>
+        <p:txBody>
+          <a:bodyPr wrap="square" lIns="0" tIns="0" rIns="0" bIns="0" rtlCol="0" anchor="ctr"/>
+          <a:lstStyle/>
+          <a:p>
+            <a:pPr indent="0" marL="0">
+              <a:buNone/>
+            </a:pPr>
+            <a:r>
+              <a:rPr lang="en-US" sz="1400" b="1" dirty="0">
+                <a:solidFill>
+                  <a:srgbClr val="065A82"/>
+                </a:solidFill>
+                <a:latin typeface="Cambria" pitchFamily="34" charset="0"/>
+                <a:ea typeface="Cambria" pitchFamily="34" charset="-122"/>
+                <a:cs typeface="Cambria" pitchFamily="34" charset="-120"/>
+              </a:rPr>
+              <a:t>The two studies that bear on the site</a:t>
+            </a:r>
+            <a:endParaRPr lang="en-US" sz="1400" dirty="0"/>
+          </a:p>
+        </p:txBody>
+      </p:sp>
+      <p:sp>
+        <p:nvSpPr>
+          <p:cNvPr id="6" name="Text 4"/>
+          <p:cNvSpPr txBox="1"/>
+          <p:nvPr/>
+        </p:nvSpPr>
+        <p:spPr>
+          <a:xfrm>
+            <a:off x="566928" y="2468880"/>
+            <a:ext cx="5394960" cy="2651760"/>
+          </a:xfrm>
+          <a:prstGeom prst="rect">
+            <a:avLst/>
+          </a:prstGeom>
+          <a:noFill/>
+          <a:ln/>
+        </p:spPr>
+        <p:txBody>
+          <a:bodyPr wrap="square" lIns="0" tIns="0" rIns="0" bIns="0" rtlCol="0" anchor="ctr"/>
+          <a:lstStyle/>
+          <a:p>
+            <a:pPr indent="0" marL="0">
+              <a:lnSpc>
+                <a:spcPts val="1650"/>
+              </a:lnSpc>
+              <a:buNone/>
+            </a:pPr>
+            <a:r>
+              <a:rPr lang="en-US" sz="1200" b="1" dirty="0">
+                <a:solidFill>
+                  <a:srgbClr val="1A1A1A"/>
+                </a:solidFill>
+                <a:latin typeface="Calibri" pitchFamily="34" charset="0"/>
+                <a:ea typeface="Calibri" pitchFamily="34" charset="-122"/>
+                <a:cs typeface="Calibri" pitchFamily="34" charset="-120"/>
+              </a:rPr>
+              <a:t>Mazas and Farrugia, ARTELIA and Infrastructure Malta. </a:t>
+            </a:r>
+            <a:pPr indent="0" marL="0">
+              <a:lnSpc>
+                <a:spcPts val="1650"/>
+              </a:lnSpc>
+              <a:spcAft>
+                <a:spcPts val="1000"/>
+              </a:spcAft>
+              <a:buNone/>
+            </a:pPr>
+            <a:r>
+              <a:rPr lang="en-US" sz="1200" dirty="0">
+                <a:solidFill>
+                  <a:srgbClr val="1A1A1A"/>
+                </a:solidFill>
+                <a:latin typeface="Calibri" pitchFamily="34" charset="0"/>
+                <a:ea typeface="Calibri" pitchFamily="34" charset="-122"/>
+                <a:cs typeface="Calibri" pitchFamily="34" charset="-120"/>
+              </a:rPr>
+              <a:t>The Grand Harbour modelled for wind-wave agitation in PHAROS, against a directional climate hindcast from 1992 to 2019. Damage in the port documented for the storms of February 2019 and February 2023.
+</a:t>
+            </a:r>
+            <a:endParaRPr lang="en-US" sz="1200" dirty="0"/>
+          </a:p>
+          <a:p>
+            <a:pPr indent="0" marL="0">
+              <a:lnSpc>
+                <a:spcPts val="1650"/>
+              </a:lnSpc>
+              <a:buNone/>
+            </a:pPr>
+            <a:r>
+              <a:rPr lang="en-US" sz="1200" b="1" dirty="0">
+                <a:solidFill>
+                  <a:srgbClr val="1A1A1A"/>
+                </a:solidFill>
+                <a:latin typeface="Calibri" pitchFamily="34" charset="0"/>
+                <a:ea typeface="Calibri" pitchFamily="34" charset="-122"/>
+                <a:cs typeface="Calibri" pitchFamily="34" charset="-120"/>
+              </a:rPr>
+              <a:t>Drago, 2018, the design report of the host group. </a:t>
+            </a:r>
+            <a:pPr indent="0" marL="0">
+              <a:lnSpc>
+                <a:spcPts val="1650"/>
+              </a:lnSpc>
+              <a:buNone/>
+            </a:pPr>
+            <a:r>
+              <a:rPr lang="en-US" sz="1200" dirty="0">
+                <a:solidFill>
+                  <a:srgbClr val="1A1A1A"/>
+                </a:solidFill>
+                <a:latin typeface="Calibri" pitchFamily="34" charset="0"/>
+                <a:ea typeface="Calibri" pitchFamily="34" charset="-122"/>
+                <a:cs typeface="Calibri" pitchFamily="34" charset="-120"/>
+              </a:rPr>
+              <a:t>A relocatable model setup is requested for ad hoc local domains, and harbour flushing at the five principal harbours appears among the process-model targets, with the Deltares suite among the families to review.</a:t>
+            </a:r>
+            <a:endParaRPr lang="en-US" sz="1200" dirty="0"/>
+          </a:p>
+        </p:txBody>
+      </p:sp>
+      <p:sp>
+        <p:nvSpPr>
+          <p:cNvPr id="7" name="Shape 5"/>
           <p:cNvSpPr/>
           <p:nvPr/>
         </p:nvSpPr>
         <p:spPr>
           <a:xfrm>
-            <a:off x="566928" y="2139696"/>
-            <a:ext cx="11055096" cy="1298448"/>
+            <a:off x="6355080" y="2103120"/>
+            <a:ext cx="5266944" cy="3035808"/>
           </a:xfrm>
           <a:prstGeom prst="roundRect">
             <a:avLst>
-              <a:gd name="adj" fmla="val 4225"/>
+              <a:gd name="adj" fmla="val 1807"/>
+            </a:avLst>
+          </a:prstGeom>
+          <a:solidFill>
+            <a:srgbClr val="21295C"/>
+          </a:solidFill>
+          <a:ln/>
+        </p:spPr>
+      </p:sp>
+      <p:sp>
+        <p:nvSpPr>
+          <p:cNvPr id="8" name="Text 6"/>
+          <p:cNvSpPr txBox="1"/>
+          <p:nvPr/>
+        </p:nvSpPr>
+        <p:spPr>
+          <a:xfrm>
+            <a:off x="6629400" y="2304288"/>
+            <a:ext cx="4754880" cy="274320"/>
+          </a:xfrm>
+          <a:prstGeom prst="rect">
+            <a:avLst/>
+          </a:prstGeom>
+          <a:noFill/>
+          <a:ln/>
+        </p:spPr>
+        <p:txBody>
+          <a:bodyPr wrap="square" lIns="0" tIns="0" rIns="0" bIns="0" rtlCol="0" anchor="ctr"/>
+          <a:lstStyle/>
+          <a:p>
+            <a:pPr indent="0" marL="0">
+              <a:buNone/>
+            </a:pPr>
+            <a:r>
+              <a:rPr lang="en-US" sz="1400" b="1" dirty="0">
+                <a:solidFill>
+                  <a:srgbClr val="EB6834"/>
+                </a:solidFill>
+                <a:latin typeface="Cambria" pitchFamily="34" charset="0"/>
+                <a:ea typeface="Cambria" pitchFamily="34" charset="-122"/>
+                <a:cs typeface="Cambria" pitchFamily="34" charset="-120"/>
+              </a:rPr>
+              <a:t>Operated by the host group</a:t>
+            </a:r>
+            <a:endParaRPr lang="en-US" sz="1400" dirty="0"/>
+          </a:p>
+        </p:txBody>
+      </p:sp>
+      <p:sp>
+        <p:nvSpPr>
+          <p:cNvPr id="9" name="Text 7"/>
+          <p:cNvSpPr txBox="1"/>
+          <p:nvPr/>
+        </p:nvSpPr>
+        <p:spPr>
+          <a:xfrm>
+            <a:off x="6629400" y="2651760"/>
+            <a:ext cx="4754880" cy="2331720"/>
+          </a:xfrm>
+          <a:prstGeom prst="rect">
+            <a:avLst/>
+          </a:prstGeom>
+          <a:noFill/>
+          <a:ln/>
+        </p:spPr>
+        <p:txBody>
+          <a:bodyPr wrap="square" lIns="0" tIns="0" rIns="0" bIns="0" rtlCol="0" anchor="ctr"/>
+          <a:lstStyle/>
+          <a:p>
+            <a:pPr marL="342900" indent="-342900">
+              <a:lnSpc>
+                <a:spcPts val="1500"/>
+              </a:lnSpc>
+              <a:spcAft>
+                <a:spcPts val="800"/>
+              </a:spcAft>
+              <a:buSzPct val="100000"/>
+              <a:buChar char="•"/>
+            </a:pPr>
+            <a:r>
+              <a:rPr lang="en-US" sz="1150" dirty="0">
+                <a:solidFill>
+                  <a:srgbClr val="CADCFC"/>
+                </a:solidFill>
+                <a:latin typeface="Calibri" pitchFamily="34" charset="0"/>
+                <a:ea typeface="Calibri" pitchFamily="34" charset="-122"/>
+                <a:cs typeface="Calibri" pitchFamily="34" charset="-120"/>
+              </a:rPr>
+              <a:t>ROSARIO, Princeton Ocean Model, 1∕64° and 1∕96°, nested into CMEMS.</a:t>
+            </a:r>
+            <a:endParaRPr lang="en-US" sz="1150" dirty="0"/>
+          </a:p>
+          <a:p>
+            <a:pPr marL="342900" indent="-342900">
+              <a:lnSpc>
+                <a:spcPts val="1500"/>
+              </a:lnSpc>
+              <a:spcAft>
+                <a:spcPts val="800"/>
+              </a:spcAft>
+              <a:buSzPct val="100000"/>
+              <a:buChar char="•"/>
+            </a:pPr>
+            <a:r>
+              <a:rPr lang="en-US" sz="1150" dirty="0">
+                <a:solidFill>
+                  <a:srgbClr val="CADCFC"/>
+                </a:solidFill>
+                <a:latin typeface="Calibri" pitchFamily="34" charset="0"/>
+                <a:ea typeface="Calibri" pitchFamily="34" charset="-122"/>
+                <a:cs typeface="Calibri" pitchFamily="34" charset="-120"/>
+              </a:rPr>
+              <a:t>SWAN downscaled to the embayments at 1∕500°, about 200 m.</a:t>
+            </a:r>
+            <a:endParaRPr lang="en-US" sz="1150" dirty="0"/>
+          </a:p>
+          <a:p>
+            <a:pPr marL="342900" indent="-342900">
+              <a:lnSpc>
+                <a:spcPts val="1500"/>
+              </a:lnSpc>
+              <a:spcAft>
+                <a:spcPts val="800"/>
+              </a:spcAft>
+              <a:buSzPct val="100000"/>
+              <a:buChar char="•"/>
+            </a:pPr>
+            <a:r>
+              <a:rPr lang="en-US" sz="1150" dirty="0">
+                <a:solidFill>
+                  <a:srgbClr val="CADCFC"/>
+                </a:solidFill>
+                <a:latin typeface="Calibri" pitchFamily="34" charset="0"/>
+                <a:ea typeface="Calibri" pitchFamily="34" charset="-122"/>
+                <a:cs typeface="Calibri" pitchFamily="34" charset="-120"/>
+              </a:rPr>
+              <a:t>ROSARIO-SHYFEM, unstructured, three-dimensional, operational to a four-day forecast, from a few kilometres to 50 m at the coast, with Lagrangian particle tracking.</a:t>
+            </a:r>
+            <a:endParaRPr lang="en-US" sz="1150" dirty="0"/>
+          </a:p>
+          <a:p>
+            <a:pPr marL="342900" indent="-342900">
+              <a:lnSpc>
+                <a:spcPts val="1500"/>
+              </a:lnSpc>
+              <a:buSzPct val="100000"/>
+              <a:buChar char="•"/>
+            </a:pPr>
+            <a:r>
+              <a:rPr lang="en-US" sz="1150" dirty="0">
+                <a:solidFill>
+                  <a:srgbClr val="CADCFC"/>
+                </a:solidFill>
+                <a:latin typeface="Calibri" pitchFamily="34" charset="0"/>
+                <a:ea typeface="Calibri" pitchFamily="34" charset="-122"/>
+                <a:cs typeface="Calibri" pitchFamily="34" charset="-120"/>
+              </a:rPr>
+              <a:t>Boundary conditions derived from CMEMS, which is what this project does also.</a:t>
+            </a:r>
+            <a:endParaRPr lang="en-US" sz="1150" dirty="0"/>
+          </a:p>
+        </p:txBody>
+      </p:sp>
+      <p:sp>
+        <p:nvSpPr>
+          <p:cNvPr id="10" name="Shape 8"/>
+          <p:cNvSpPr/>
+          <p:nvPr/>
+        </p:nvSpPr>
+        <p:spPr>
+          <a:xfrm>
+            <a:off x="566928" y="5321808"/>
+            <a:ext cx="11055096" cy="841248"/>
+          </a:xfrm>
+          <a:prstGeom prst="roundRect">
+            <a:avLst>
+              <a:gd name="adj" fmla="val 6522"/>
             </a:avLst>
           </a:prstGeom>
           <a:solidFill>
@@ -11272,24 +14142,17 @@
           </a:solidFill>
           <a:ln/>
         </p:spPr>
-        <p:txBody>
-          <a:bodyPr/>
-          <a:lstStyle/>
-          <a:p>
-            <a:endParaRPr lang="it-IT"/>
-          </a:p>
-        </p:txBody>
-      </p:sp>
-      <p:sp>
-        <p:nvSpPr>
-          <p:cNvPr id="6" name="Text 4"/>
+      </p:sp>
+      <p:sp>
+        <p:nvSpPr>
+          <p:cNvPr id="11" name="Text 9"/>
           <p:cNvSpPr txBox="1"/>
           <p:nvPr/>
         </p:nvSpPr>
         <p:spPr>
           <a:xfrm>
-            <a:off x="886968" y="2350008"/>
-            <a:ext cx="10424160" cy="914400"/>
+            <a:off x="886968" y="5477256"/>
+            <a:ext cx="10424160" cy="566928"/>
           </a:xfrm>
           <a:prstGeom prst="rect">
             <a:avLst/>
@@ -11301,99 +14164,14 @@
           <a:bodyPr wrap="square" lIns="0" tIns="0" rIns="0" bIns="0" rtlCol="0" anchor="ctr"/>
           <a:lstStyle/>
           <a:p>
-            <a:pPr marL="0" indent="0">
-              <a:lnSpc>
-                <a:spcPts val="2100"/>
-              </a:lnSpc>
-              <a:buNone/>
-            </a:pPr>
-            <a:r>
-              <a:rPr lang="en-US" sz="1500" i="1" dirty="0">
-                <a:solidFill>
-                  <a:srgbClr val="1A1A1A"/>
-                </a:solidFill>
-                <a:latin typeface="Cambria" pitchFamily="34" charset="0"/>
-                <a:ea typeface="Cambria" pitchFamily="34" charset="-122"/>
-                <a:cs typeface="Cambria" pitchFamily="34" charset="-120"/>
-              </a:rPr>
-              <a:t>Of the amplification between the open sea and the heads of the Valletta harbours, how is it partitioned between Proudman resonance over the plateau, shoaling on the approach, and resonance of the basins themselves, and which atmospheric disturbance speeds and directions maximise that chain?</a:t>
-            </a:r>
-            <a:endParaRPr lang="en-US" sz="1500" dirty="0"/>
-          </a:p>
-        </p:txBody>
-      </p:sp>
-      <p:sp>
-        <p:nvSpPr>
-          <p:cNvPr id="7" name="Text 5"/>
-          <p:cNvSpPr txBox="1"/>
-          <p:nvPr/>
-        </p:nvSpPr>
-        <p:spPr>
-          <a:xfrm>
-            <a:off x="566928" y="3721608"/>
-            <a:ext cx="5212080" cy="292608"/>
-          </a:xfrm>
-          <a:prstGeom prst="rect">
-            <a:avLst/>
-          </a:prstGeom>
-          <a:noFill/>
-          <a:ln/>
-        </p:spPr>
-        <p:txBody>
-          <a:bodyPr wrap="square" lIns="0" tIns="0" rIns="0" bIns="0" rtlCol="0" anchor="ctr"/>
-          <a:lstStyle/>
-          <a:p>
-            <a:pPr marL="0" indent="0">
-              <a:buNone/>
-            </a:pPr>
-            <a:r>
-              <a:rPr lang="en-US" sz="1400" b="1" dirty="0">
-                <a:solidFill>
-                  <a:srgbClr val="065A82"/>
-                </a:solidFill>
-                <a:latin typeface="Cambria" pitchFamily="34" charset="0"/>
-                <a:ea typeface="Cambria" pitchFamily="34" charset="-122"/>
-                <a:cs typeface="Cambria" pitchFamily="34" charset="-120"/>
-              </a:rPr>
-              <a:t>Basis for the formulation</a:t>
-            </a:r>
-            <a:endParaRPr lang="en-US" sz="1400" dirty="0"/>
-          </a:p>
-        </p:txBody>
-      </p:sp>
-      <p:sp>
-        <p:nvSpPr>
-          <p:cNvPr id="8" name="Text 6"/>
-          <p:cNvSpPr txBox="1"/>
-          <p:nvPr/>
-        </p:nvSpPr>
-        <p:spPr>
-          <a:xfrm>
-            <a:off x="566928" y="4069080"/>
-            <a:ext cx="5212080" cy="1737360"/>
-          </a:xfrm>
-          <a:prstGeom prst="rect">
-            <a:avLst/>
-          </a:prstGeom>
-          <a:noFill/>
-          <a:ln/>
-        </p:spPr>
-        <p:txBody>
-          <a:bodyPr wrap="square" lIns="0" tIns="0" rIns="0" bIns="0" rtlCol="0" anchor="ctr"/>
-          <a:lstStyle/>
-          <a:p>
-            <a:pPr marL="342900" indent="-342900">
+            <a:pPr indent="0" marL="0">
               <a:lnSpc>
                 <a:spcPts val="1600"/>
               </a:lnSpc>
-              <a:spcAft>
-                <a:spcPts val="700"/>
-              </a:spcAft>
-              <a:buSzPct val="100000"/>
-              <a:buChar char="•"/>
-            </a:pPr>
-            <a:r>
-              <a:rPr lang="en-US" sz="1200" dirty="0">
+              <a:buNone/>
+            </a:pPr>
+            <a:r>
+              <a:rPr lang="en-US" sz="1200" b="1" dirty="0">
                 <a:solidFill>
                   <a:srgbClr val="1A1A1A"/>
                 </a:solidFill>
@@ -11401,20 +14179,13 @@
                 <a:ea typeface="Calibri" pitchFamily="34" charset="-122"/>
                 <a:cs typeface="Calibri" pitchFamily="34" charset="-120"/>
               </a:rPr>
-              <a:t>It is framed so that answering it requires a model. No arrangement of gauges separates the three stages of amplification from one another.</a:t>
-            </a:r>
-            <a:endParaRPr lang="en-US" sz="1200" dirty="0"/>
-          </a:p>
-          <a:p>
-            <a:pPr marL="342900" indent="-342900">
+              <a:t>The present work is an independent exercise for the research period. </a:t>
+            </a:r>
+            <a:pPr indent="0" marL="0">
               <a:lnSpc>
                 <a:spcPts val="1600"/>
               </a:lnSpc>
-              <a:spcAft>
-                <a:spcPts val="700"/>
-              </a:spcAft>
-              <a:buSzPct val="100000"/>
-              <a:buChar char="•"/>
+              <a:buNone/>
             </a:pPr>
             <a:r>
               <a:rPr lang="en-US" sz="1200" dirty="0">
@@ -11425,158 +14196,7 @@
                 <a:ea typeface="Calibri" pitchFamily="34" charset="-122"/>
                 <a:cs typeface="Calibri" pitchFamily="34" charset="-120"/>
               </a:rPr>
-              <a:t>It is framed so that it does not repeat the prior work, which treats the response of a basin to a wave already present at its boundary.</a:t>
-            </a:r>
-            <a:endParaRPr lang="en-US" sz="1200" dirty="0"/>
-          </a:p>
-          <a:p>
-            <a:pPr marL="342900" indent="-342900">
-              <a:lnSpc>
-                <a:spcPts val="1600"/>
-              </a:lnSpc>
-              <a:buSzPct val="100000"/>
-              <a:buChar char="•"/>
-            </a:pPr>
-            <a:r>
-              <a:rPr lang="en-US" sz="1200" dirty="0">
-                <a:solidFill>
-                  <a:srgbClr val="1A1A1A"/>
-                </a:solidFill>
-                <a:latin typeface="Calibri" pitchFamily="34" charset="0"/>
-                <a:ea typeface="Calibri" pitchFamily="34" charset="-122"/>
-                <a:cs typeface="Calibri" pitchFamily="34" charset="-120"/>
-              </a:rPr>
-              <a:t>Should the group judge the standing of that prior work differently, the formulation changes with it.</a:t>
-            </a:r>
-            <a:endParaRPr lang="en-US" sz="1200" dirty="0"/>
-          </a:p>
-        </p:txBody>
-      </p:sp>
-      <p:sp>
-        <p:nvSpPr>
-          <p:cNvPr id="9" name="Text 7"/>
-          <p:cNvSpPr txBox="1"/>
-          <p:nvPr/>
-        </p:nvSpPr>
-        <p:spPr>
-          <a:xfrm>
-            <a:off x="6355080" y="3721608"/>
-            <a:ext cx="5212080" cy="292608"/>
-          </a:xfrm>
-          <a:prstGeom prst="rect">
-            <a:avLst/>
-          </a:prstGeom>
-          <a:noFill/>
-          <a:ln/>
-        </p:spPr>
-        <p:txBody>
-          <a:bodyPr wrap="square" lIns="0" tIns="0" rIns="0" bIns="0" rtlCol="0" anchor="ctr"/>
-          <a:lstStyle/>
-          <a:p>
-            <a:pPr marL="0" indent="0">
-              <a:buNone/>
-            </a:pPr>
-            <a:r>
-              <a:rPr lang="en-US" sz="1400" b="1" dirty="0">
-                <a:solidFill>
-                  <a:srgbClr val="EB6834"/>
-                </a:solidFill>
-                <a:latin typeface="Cambria" pitchFamily="34" charset="0"/>
-                <a:ea typeface="Cambria" pitchFamily="34" charset="-122"/>
-                <a:cs typeface="Cambria" pitchFamily="34" charset="-120"/>
-              </a:rPr>
-              <a:t>Prior work the study must clear</a:t>
-            </a:r>
-            <a:endParaRPr lang="en-US" sz="1400" dirty="0"/>
-          </a:p>
-        </p:txBody>
-      </p:sp>
-      <p:sp>
-        <p:nvSpPr>
-          <p:cNvPr id="10" name="Text 8"/>
-          <p:cNvSpPr txBox="1"/>
-          <p:nvPr/>
-        </p:nvSpPr>
-        <p:spPr>
-          <a:xfrm>
-            <a:off x="6355080" y="4069080"/>
-            <a:ext cx="5266944" cy="1737360"/>
-          </a:xfrm>
-          <a:prstGeom prst="rect">
-            <a:avLst/>
-          </a:prstGeom>
-          <a:noFill/>
-          <a:ln/>
-        </p:spPr>
-        <p:txBody>
-          <a:bodyPr wrap="square" lIns="0" tIns="0" rIns="0" bIns="0" rtlCol="0" anchor="ctr"/>
-          <a:lstStyle/>
-          <a:p>
-            <a:pPr marL="342900" indent="-342900">
-              <a:lnSpc>
-                <a:spcPts val="1600"/>
-              </a:lnSpc>
-              <a:spcAft>
-                <a:spcPts val="700"/>
-              </a:spcAft>
-              <a:buSzPct val="100000"/>
-              <a:buChar char="•"/>
-            </a:pPr>
-            <a:r>
-              <a:rPr lang="en-US" sz="1200" dirty="0">
-                <a:solidFill>
-                  <a:srgbClr val="1A1A1A"/>
-                </a:solidFill>
-                <a:latin typeface="Calibri" pitchFamily="34" charset="0"/>
-                <a:ea typeface="Calibri" pitchFamily="34" charset="-122"/>
-                <a:cs typeface="Calibri" pitchFamily="34" charset="-120"/>
-              </a:rPr>
-              <a:t>Maltese coastal seiches were modelled in 2007, in a two-dimensional depth-averaged POM, for Mellieħa and St Paul's Bay, forced by a prescribed offshore long wave.</a:t>
-            </a:r>
-            <a:endParaRPr lang="en-US" sz="1200" dirty="0"/>
-          </a:p>
-          <a:p>
-            <a:pPr marL="342900" indent="-342900">
-              <a:lnSpc>
-                <a:spcPts val="1600"/>
-              </a:lnSpc>
-              <a:spcAft>
-                <a:spcPts val="700"/>
-              </a:spcAft>
-              <a:buSzPct val="100000"/>
-              <a:buChar char="•"/>
-            </a:pPr>
-            <a:r>
-              <a:rPr lang="en-US" sz="1200" dirty="0">
-                <a:solidFill>
-                  <a:srgbClr val="1A1A1A"/>
-                </a:solidFill>
-                <a:latin typeface="Calibri" pitchFamily="34" charset="0"/>
-                <a:ea typeface="Calibri" pitchFamily="34" charset="-122"/>
-                <a:cs typeface="Calibri" pitchFamily="34" charset="-120"/>
-              </a:rPr>
-              <a:t>A repetition at Valletta in three dimensions would be incremental.</a:t>
-            </a:r>
-            <a:endParaRPr lang="en-US" sz="1200" dirty="0"/>
-          </a:p>
-          <a:p>
-            <a:pPr marL="342900" indent="-342900">
-              <a:lnSpc>
-                <a:spcPts val="1600"/>
-              </a:lnSpc>
-              <a:buSzPct val="100000"/>
-              <a:buChar char="•"/>
-            </a:pPr>
-            <a:r>
-              <a:rPr lang="en-US" sz="1200" dirty="0">
-                <a:solidFill>
-                  <a:srgbClr val="1A1A1A"/>
-                </a:solidFill>
-                <a:latin typeface="Calibri" pitchFamily="34" charset="0"/>
-                <a:ea typeface="Calibri" pitchFamily="34" charset="-122"/>
-                <a:cs typeface="Calibri" pitchFamily="34" charset="-120"/>
-              </a:rPr>
-              <a:t>The generation side is untreated, since the prior work imposes the offshore wave rather than producing it.</a:t>
+              <a:t>It differs in the resolution inside the basins, 15 to 30 m against 50 m, in the coupling to a spectral wave model, and in the frequency band it addresses.</a:t>
             </a:r>
             <a:endParaRPr lang="en-US" sz="1200" dirty="0"/>
           </a:p>
@@ -11628,11 +14248,11 @@
           <a:bodyPr wrap="square" lIns="0" tIns="0" rIns="0" bIns="0" rtlCol="0" anchor="ctr"/>
           <a:lstStyle/>
           <a:p>
-            <a:pPr marL="0" indent="0">
+            <a:pPr indent="0" marL="0">
               <a:buNone/>
             </a:pPr>
             <a:r>
-              <a:rPr lang="en-US" sz="1200" b="1" kern="0" spc="200" dirty="0">
+              <a:rPr lang="en-US" sz="1200" b="1" spc="200" kern="0" dirty="0">
                 <a:solidFill>
                   <a:srgbClr val="EB6834"/>
                 </a:solidFill>
@@ -11640,7 +14260,7 @@
                 <a:ea typeface="Calibri" pitchFamily="34" charset="-122"/>
                 <a:cs typeface="Calibri" pitchFamily="34" charset="-120"/>
               </a:rPr>
-              <a:t>EXPERIMENTAL DESIGN</a:t>
+              <a:t>RESEARCH QUESTION</a:t>
             </a:r>
             <a:endParaRPr lang="en-US" sz="1200" dirty="0"/>
           </a:p>
@@ -11667,7 +14287,7 @@
           <a:bodyPr wrap="square" lIns="0" tIns="0" rIns="0" bIns="0" rtlCol="0" anchor="ctr"/>
           <a:lstStyle/>
           <a:p>
-            <a:pPr marL="0" indent="0">
+            <a:pPr indent="0" marL="0">
               <a:buNone/>
             </a:pPr>
             <a:r>
@@ -11679,7 +14299,7 @@
                 <a:ea typeface="Cambria" pitchFamily="34" charset="-122"/>
                 <a:cs typeface="Cambria" pitchFamily="34" charset="-120"/>
               </a:rPr>
-              <a:t>A parametric sweep in place of a hindcast</a:t>
+              <a:t>A proposed question, for the group to judge</a:t>
             </a:r>
             <a:endParaRPr lang="en-US" sz="3200" dirty="0"/>
           </a:p>
@@ -11706,7 +14326,7 @@
           <a:bodyPr wrap="square" lIns="0" tIns="0" rIns="0" bIns="0" rtlCol="0" anchor="ctr"/>
           <a:lstStyle/>
           <a:p>
-            <a:pPr marL="0" indent="0">
+            <a:pPr indent="0" marL="0">
               <a:buNone/>
             </a:pPr>
             <a:r>
@@ -11718,7 +14338,7 @@
                 <a:ea typeface="Calibri" pitchFamily="34" charset="-122"/>
                 <a:cs typeface="Calibri" pitchFamily="34" charset="-120"/>
               </a:rPr>
-              <a:t>ERA5 does not resolve the atmospheric gravity waves that trigger the phenomenon, which has constituted the largest standing risk in the project.</a:t>
+              <a:t>Drafted this week and put to the group before it is committed to.</a:t>
             </a:r>
             <a:endParaRPr lang="en-US" sz="1400" dirty="0"/>
           </a:p>
@@ -11732,24 +14352,19 @@
         </p:nvSpPr>
         <p:spPr>
           <a:xfrm>
-            <a:off x="566928" y="2331720"/>
-            <a:ext cx="402336" cy="402336"/>
-          </a:xfrm>
-          <a:prstGeom prst="ellipse">
-            <a:avLst/>
+            <a:off x="566928" y="2139696"/>
+            <a:ext cx="11055096" cy="1298448"/>
+          </a:xfrm>
+          <a:prstGeom prst="roundRect">
+            <a:avLst>
+              <a:gd name="adj" fmla="val 4225"/>
+            </a:avLst>
           </a:prstGeom>
           <a:solidFill>
-            <a:srgbClr val="065A82"/>
+            <a:srgbClr val="EEF3F6"/>
           </a:solidFill>
           <a:ln/>
         </p:spPr>
-        <p:txBody>
-          <a:bodyPr/>
-          <a:lstStyle/>
-          <a:p>
-            <a:endParaRPr lang="it-IT"/>
-          </a:p>
-        </p:txBody>
       </p:sp>
       <p:sp>
         <p:nvSpPr>
@@ -11759,8 +14374,8 @@
         </p:nvSpPr>
         <p:spPr>
           <a:xfrm>
-            <a:off x="566928" y="2331720"/>
-            <a:ext cx="402336" cy="402336"/>
+            <a:off x="886968" y="2350008"/>
+            <a:ext cx="10424160" cy="914400"/>
           </a:xfrm>
           <a:prstGeom prst="rect">
             <a:avLst/>
@@ -11772,34 +14387,167 @@
           <a:bodyPr wrap="square" lIns="0" tIns="0" rIns="0" bIns="0" rtlCol="0" anchor="ctr"/>
           <a:lstStyle/>
           <a:p>
-            <a:pPr marL="0" indent="0" algn="ctr">
+            <a:pPr indent="0" marL="0">
+              <a:lnSpc>
+                <a:spcPts val="2100"/>
+              </a:lnSpc>
               <a:buNone/>
             </a:pPr>
             <a:r>
-              <a:rPr lang="en-US" sz="1500" b="1" dirty="0">
-                <a:solidFill>
-                  <a:srgbClr val="FFFFFF"/>
+              <a:rPr lang="en-US" sz="1500" i="1" dirty="0">
+                <a:solidFill>
+                  <a:srgbClr val="1A1A1A"/>
+                </a:solidFill>
+                <a:latin typeface="Cambria" pitchFamily="34" charset="0"/>
+                <a:ea typeface="Cambria" pitchFamily="34" charset="-122"/>
+                <a:cs typeface="Cambria" pitchFamily="34" charset="-120"/>
+              </a:rPr>
+              <a:t>Of the amplification between the open sea and the heads of the Valletta harbours, how is it partitioned between Proudman resonance over the plateau, shoaling on the approach, and resonance of the basins themselves, and which atmospheric disturbance speeds and directions maximise that chain?</a:t>
+            </a:r>
+            <a:endParaRPr lang="en-US" sz="1500" dirty="0"/>
+          </a:p>
+        </p:txBody>
+      </p:sp>
+      <p:sp>
+        <p:nvSpPr>
+          <p:cNvPr id="7" name="Text 5"/>
+          <p:cNvSpPr txBox="1"/>
+          <p:nvPr/>
+        </p:nvSpPr>
+        <p:spPr>
+          <a:xfrm>
+            <a:off x="566928" y="3721608"/>
+            <a:ext cx="5212080" cy="292608"/>
+          </a:xfrm>
+          <a:prstGeom prst="rect">
+            <a:avLst/>
+          </a:prstGeom>
+          <a:noFill/>
+          <a:ln/>
+        </p:spPr>
+        <p:txBody>
+          <a:bodyPr wrap="square" lIns="0" tIns="0" rIns="0" bIns="0" rtlCol="0" anchor="ctr"/>
+          <a:lstStyle/>
+          <a:p>
+            <a:pPr indent="0" marL="0">
+              <a:buNone/>
+            </a:pPr>
+            <a:r>
+              <a:rPr lang="en-US" sz="1400" b="1" dirty="0">
+                <a:solidFill>
+                  <a:srgbClr val="065A82"/>
+                </a:solidFill>
+                <a:latin typeface="Cambria" pitchFamily="34" charset="0"/>
+                <a:ea typeface="Cambria" pitchFamily="34" charset="-122"/>
+                <a:cs typeface="Cambria" pitchFamily="34" charset="-120"/>
+              </a:rPr>
+              <a:t>Basis for the formulation</a:t>
+            </a:r>
+            <a:endParaRPr lang="en-US" sz="1400" dirty="0"/>
+          </a:p>
+        </p:txBody>
+      </p:sp>
+      <p:sp>
+        <p:nvSpPr>
+          <p:cNvPr id="8" name="Text 6"/>
+          <p:cNvSpPr txBox="1"/>
+          <p:nvPr/>
+        </p:nvSpPr>
+        <p:spPr>
+          <a:xfrm>
+            <a:off x="566928" y="4069080"/>
+            <a:ext cx="5212080" cy="1737360"/>
+          </a:xfrm>
+          <a:prstGeom prst="rect">
+            <a:avLst/>
+          </a:prstGeom>
+          <a:noFill/>
+          <a:ln/>
+        </p:spPr>
+        <p:txBody>
+          <a:bodyPr wrap="square" lIns="0" tIns="0" rIns="0" bIns="0" rtlCol="0" anchor="ctr"/>
+          <a:lstStyle/>
+          <a:p>
+            <a:pPr marL="342900" indent="-342900">
+              <a:lnSpc>
+                <a:spcPts val="1600"/>
+              </a:lnSpc>
+              <a:spcAft>
+                <a:spcPts val="700"/>
+              </a:spcAft>
+              <a:buSzPct val="100000"/>
+              <a:buChar char="•"/>
+            </a:pPr>
+            <a:r>
+              <a:rPr lang="en-US" sz="1200" dirty="0">
+                <a:solidFill>
+                  <a:srgbClr val="1A1A1A"/>
                 </a:solidFill>
                 <a:latin typeface="Calibri" pitchFamily="34" charset="0"/>
                 <a:ea typeface="Calibri" pitchFamily="34" charset="-122"/>
                 <a:cs typeface="Calibri" pitchFamily="34" charset="-120"/>
               </a:rPr>
-              <a:t>1</a:t>
-            </a:r>
-            <a:endParaRPr lang="en-US" sz="1500" dirty="0"/>
-          </a:p>
-        </p:txBody>
-      </p:sp>
-      <p:sp>
-        <p:nvSpPr>
-          <p:cNvPr id="7" name="Text 5"/>
+              <a:t>It is framed so that answering it requires a model. No arrangement of gauges separates the three stages of amplification from one another.</a:t>
+            </a:r>
+            <a:endParaRPr lang="en-US" sz="1200" dirty="0"/>
+          </a:p>
+          <a:p>
+            <a:pPr marL="342900" indent="-342900">
+              <a:lnSpc>
+                <a:spcPts val="1600"/>
+              </a:lnSpc>
+              <a:spcAft>
+                <a:spcPts val="700"/>
+              </a:spcAft>
+              <a:buSzPct val="100000"/>
+              <a:buChar char="•"/>
+            </a:pPr>
+            <a:r>
+              <a:rPr lang="en-US" sz="1200" dirty="0">
+                <a:solidFill>
+                  <a:srgbClr val="1A1A1A"/>
+                </a:solidFill>
+                <a:latin typeface="Calibri" pitchFamily="34" charset="0"/>
+                <a:ea typeface="Calibri" pitchFamily="34" charset="-122"/>
+                <a:cs typeface="Calibri" pitchFamily="34" charset="-120"/>
+              </a:rPr>
+              <a:t>It is framed so that it does not repeat the prior work, which treats the response of a basin to a wave already present at its boundary.</a:t>
+            </a:r>
+            <a:endParaRPr lang="en-US" sz="1200" dirty="0"/>
+          </a:p>
+          <a:p>
+            <a:pPr marL="342900" indent="-342900">
+              <a:lnSpc>
+                <a:spcPts val="1600"/>
+              </a:lnSpc>
+              <a:buSzPct val="100000"/>
+              <a:buChar char="•"/>
+            </a:pPr>
+            <a:r>
+              <a:rPr lang="en-US" sz="1200" dirty="0">
+                <a:solidFill>
+                  <a:srgbClr val="1A1A1A"/>
+                </a:solidFill>
+                <a:latin typeface="Calibri" pitchFamily="34" charset="0"/>
+                <a:ea typeface="Calibri" pitchFamily="34" charset="-122"/>
+                <a:cs typeface="Calibri" pitchFamily="34" charset="-120"/>
+              </a:rPr>
+              <a:t>Should the group judge the standing of that prior work differently, the formulation changes with it.</a:t>
+            </a:r>
+            <a:endParaRPr lang="en-US" sz="1200" dirty="0"/>
+          </a:p>
+        </p:txBody>
+      </p:sp>
+      <p:sp>
+        <p:nvSpPr>
+          <p:cNvPr id="9" name="Text 7"/>
           <p:cNvSpPr txBox="1"/>
           <p:nvPr/>
         </p:nvSpPr>
         <p:spPr>
           <a:xfrm>
-            <a:off x="1188720" y="2313432"/>
-            <a:ext cx="3383280" cy="292608"/>
+            <a:off x="6355080" y="3721608"/>
+            <a:ext cx="5212080" cy="292608"/>
           </a:xfrm>
           <a:prstGeom prst="rect">
             <a:avLst/>
@@ -11811,34 +14559,34 @@
           <a:bodyPr wrap="square" lIns="0" tIns="0" rIns="0" bIns="0" rtlCol="0" anchor="ctr"/>
           <a:lstStyle/>
           <a:p>
-            <a:pPr marL="0" indent="0">
+            <a:pPr indent="0" marL="0">
               <a:buNone/>
             </a:pPr>
             <a:r>
-              <a:rPr lang="en-US" sz="1450" b="1" dirty="0">
-                <a:solidFill>
-                  <a:srgbClr val="1A1A1A"/>
+              <a:rPr lang="en-US" sz="1400" b="1" dirty="0">
+                <a:solidFill>
+                  <a:srgbClr val="EB6834"/>
                 </a:solidFill>
                 <a:latin typeface="Cambria" pitchFamily="34" charset="0"/>
                 <a:ea typeface="Cambria" pitchFamily="34" charset="-122"/>
                 <a:cs typeface="Cambria" pitchFamily="34" charset="-120"/>
               </a:rPr>
-              <a:t>Sweep</a:t>
-            </a:r>
-            <a:endParaRPr lang="en-US" sz="1450" dirty="0"/>
-          </a:p>
-        </p:txBody>
-      </p:sp>
-      <p:sp>
-        <p:nvSpPr>
-          <p:cNvPr id="8" name="Text 6"/>
+              <a:t>What the prior work already covers</a:t>
+            </a:r>
+            <a:endParaRPr lang="en-US" sz="1400" dirty="0"/>
+          </a:p>
+        </p:txBody>
+      </p:sp>
+      <p:sp>
+        <p:nvSpPr>
+          <p:cNvPr id="10" name="Text 8"/>
           <p:cNvSpPr txBox="1"/>
           <p:nvPr/>
         </p:nvSpPr>
         <p:spPr>
           <a:xfrm>
-            <a:off x="1188720" y="2624328"/>
-            <a:ext cx="6035040" cy="658368"/>
+            <a:off x="6355080" y="4069080"/>
+            <a:ext cx="5266944" cy="1737360"/>
           </a:xfrm>
           <a:prstGeom prst="rect">
             <a:avLst/>
@@ -11850,509 +14598,73 @@
           <a:bodyPr wrap="square" lIns="0" tIns="0" rIns="0" bIns="0" rtlCol="0" anchor="ctr"/>
           <a:lstStyle/>
           <a:p>
-            <a:pPr marL="0" indent="0">
+            <a:pPr marL="342900" indent="-342900">
               <a:lnSpc>
-                <a:spcPts val="1700"/>
+                <a:spcPts val="1600"/>
               </a:lnSpc>
-              <a:buNone/>
-            </a:pPr>
-            <a:r>
-              <a:rPr lang="en-US" sz="1250" dirty="0">
-                <a:solidFill>
-                  <a:srgbClr val="5F6368"/>
+              <a:spcAft>
+                <a:spcPts val="700"/>
+              </a:spcAft>
+              <a:buSzPct val="100000"/>
+              <a:buChar char="•"/>
+            </a:pPr>
+            <a:r>
+              <a:rPr lang="en-US" sz="1200" dirty="0">
+                <a:solidFill>
+                  <a:srgbClr val="1A1A1A"/>
                 </a:solidFill>
                 <a:latin typeface="Calibri" pitchFamily="34" charset="0"/>
                 <a:ea typeface="Calibri" pitchFamily="34" charset="-122"/>
                 <a:cs typeface="Calibri" pitchFamily="34" charset="-120"/>
               </a:rPr>
-              <a:t>Impose a moving pressure disturbance and vary its speed, direction, width and duration.</a:t>
-            </a:r>
-            <a:endParaRPr lang="en-US" sz="1250" dirty="0"/>
-          </a:p>
-        </p:txBody>
-      </p:sp>
-      <p:sp>
-        <p:nvSpPr>
-          <p:cNvPr id="9" name="Shape 7"/>
-          <p:cNvSpPr/>
-          <p:nvPr/>
-        </p:nvSpPr>
-        <p:spPr>
-          <a:xfrm>
-            <a:off x="566928" y="3502152"/>
-            <a:ext cx="402336" cy="402336"/>
-          </a:xfrm>
-          <a:prstGeom prst="ellipse">
-            <a:avLst/>
-          </a:prstGeom>
-          <a:solidFill>
-            <a:srgbClr val="065A82"/>
-          </a:solidFill>
-          <a:ln/>
-        </p:spPr>
-        <p:txBody>
-          <a:bodyPr/>
-          <a:lstStyle/>
-          <a:p>
-            <a:endParaRPr lang="it-IT"/>
-          </a:p>
-        </p:txBody>
-      </p:sp>
-      <p:sp>
-        <p:nvSpPr>
-          <p:cNvPr id="10" name="Text 8"/>
-          <p:cNvSpPr txBox="1"/>
-          <p:nvPr/>
-        </p:nvSpPr>
-        <p:spPr>
-          <a:xfrm>
-            <a:off x="566928" y="3502152"/>
-            <a:ext cx="402336" cy="402336"/>
-          </a:xfrm>
-          <a:prstGeom prst="rect">
-            <a:avLst/>
-          </a:prstGeom>
-          <a:noFill/>
-          <a:ln/>
-        </p:spPr>
-        <p:txBody>
-          <a:bodyPr wrap="square" lIns="0" tIns="0" rIns="0" bIns="0" rtlCol="0" anchor="ctr"/>
-          <a:lstStyle/>
-          <a:p>
-            <a:pPr marL="0" indent="0" algn="ctr">
-              <a:buNone/>
-            </a:pPr>
-            <a:r>
-              <a:rPr lang="en-US" sz="1500" b="1" dirty="0">
-                <a:solidFill>
-                  <a:srgbClr val="FFFFFF"/>
+              <a:t>Maltese coastal seiches were modelled in 2007, in a two-dimensional depth-averaged POM, for Mellieħa and St Paul's Bay, forced by a prescribed offshore long wave.</a:t>
+            </a:r>
+            <a:endParaRPr lang="en-US" sz="1200" dirty="0"/>
+          </a:p>
+          <a:p>
+            <a:pPr marL="342900" indent="-342900">
+              <a:lnSpc>
+                <a:spcPts val="1600"/>
+              </a:lnSpc>
+              <a:spcAft>
+                <a:spcPts val="700"/>
+              </a:spcAft>
+              <a:buSzPct val="100000"/>
+              <a:buChar char="•"/>
+            </a:pPr>
+            <a:r>
+              <a:rPr lang="en-US" sz="1200" dirty="0">
+                <a:solidFill>
+                  <a:srgbClr val="1A1A1A"/>
                 </a:solidFill>
                 <a:latin typeface="Calibri" pitchFamily="34" charset="0"/>
                 <a:ea typeface="Calibri" pitchFamily="34" charset="-122"/>
                 <a:cs typeface="Calibri" pitchFamily="34" charset="-120"/>
               </a:rPr>
-              <a:t>2</a:t>
-            </a:r>
-            <a:endParaRPr lang="en-US" sz="1500" dirty="0"/>
-          </a:p>
-        </p:txBody>
-      </p:sp>
-      <p:sp>
-        <p:nvSpPr>
-          <p:cNvPr id="11" name="Text 9"/>
-          <p:cNvSpPr txBox="1"/>
-          <p:nvPr/>
-        </p:nvSpPr>
-        <p:spPr>
-          <a:xfrm>
-            <a:off x="1188720" y="3483864"/>
-            <a:ext cx="3383280" cy="292608"/>
-          </a:xfrm>
-          <a:prstGeom prst="rect">
-            <a:avLst/>
-          </a:prstGeom>
-          <a:noFill/>
-          <a:ln/>
-        </p:spPr>
-        <p:txBody>
-          <a:bodyPr wrap="square" lIns="0" tIns="0" rIns="0" bIns="0" rtlCol="0" anchor="ctr"/>
-          <a:lstStyle/>
-          <a:p>
-            <a:pPr marL="0" indent="0">
-              <a:buNone/>
-            </a:pPr>
-            <a:r>
-              <a:rPr lang="en-US" sz="1450" b="1" dirty="0">
+              <a:t>The Grand Harbour itself was modelled by ARTELIA in PHAROS, for wind-wave agitation, against a directional climate hindcast from 1992 to 2019.</a:t>
+            </a:r>
+            <a:endParaRPr lang="en-US" sz="1200" dirty="0"/>
+          </a:p>
+          <a:p>
+            <a:pPr marL="342900" indent="-342900">
+              <a:lnSpc>
+                <a:spcPts val="1600"/>
+              </a:lnSpc>
+              <a:buSzPct val="100000"/>
+              <a:buChar char="•"/>
+            </a:pPr>
+            <a:r>
+              <a:rPr lang="en-US" sz="1200" dirty="0">
                 <a:solidFill>
                   <a:srgbClr val="1A1A1A"/>
-                </a:solidFill>
-                <a:latin typeface="Cambria" pitchFamily="34" charset="0"/>
-                <a:ea typeface="Cambria" pitchFamily="34" charset="-122"/>
-                <a:cs typeface="Cambria" pitchFamily="34" charset="-120"/>
-              </a:rPr>
-              <a:t>Response surface</a:t>
-            </a:r>
-            <a:endParaRPr lang="en-US" sz="1450" dirty="0"/>
-          </a:p>
-        </p:txBody>
-      </p:sp>
-      <p:sp>
-        <p:nvSpPr>
-          <p:cNvPr id="12" name="Text 10"/>
-          <p:cNvSpPr txBox="1"/>
-          <p:nvPr/>
-        </p:nvSpPr>
-        <p:spPr>
-          <a:xfrm>
-            <a:off x="1188720" y="3794760"/>
-            <a:ext cx="6035040" cy="658368"/>
-          </a:xfrm>
-          <a:prstGeom prst="rect">
-            <a:avLst/>
-          </a:prstGeom>
-          <a:noFill/>
-          <a:ln/>
-        </p:spPr>
-        <p:txBody>
-          <a:bodyPr wrap="square" lIns="0" tIns="0" rIns="0" bIns="0" rtlCol="0" anchor="ctr"/>
-          <a:lstStyle/>
-          <a:p>
-            <a:pPr marL="0" indent="0">
-              <a:lnSpc>
-                <a:spcPts val="1700"/>
-              </a:lnSpc>
-              <a:buNone/>
-            </a:pPr>
-            <a:r>
-              <a:rPr lang="en-US" sz="1250" dirty="0">
-                <a:solidFill>
-                  <a:srgbClr val="5F6368"/>
                 </a:solidFill>
                 <a:latin typeface="Calibri" pitchFamily="34" charset="0"/>
                 <a:ea typeface="Calibri" pitchFamily="34" charset="-122"/>
                 <a:cs typeface="Calibri" pitchFamily="34" charset="-120"/>
               </a:rPr>
-              <a:t>The output is a transfer function of the geometry, independent of any particular storm.</a:t>
-            </a:r>
-            <a:endParaRPr lang="en-US" sz="1250" dirty="0"/>
-          </a:p>
-        </p:txBody>
-      </p:sp>
-      <p:sp>
-        <p:nvSpPr>
-          <p:cNvPr id="13" name="Shape 11"/>
-          <p:cNvSpPr/>
-          <p:nvPr/>
-        </p:nvSpPr>
-        <p:spPr>
-          <a:xfrm>
-            <a:off x="566928" y="4672584"/>
-            <a:ext cx="402336" cy="402336"/>
-          </a:xfrm>
-          <a:prstGeom prst="ellipse">
-            <a:avLst/>
-          </a:prstGeom>
-          <a:solidFill>
-            <a:srgbClr val="EB6834"/>
-          </a:solidFill>
-          <a:ln/>
-        </p:spPr>
-        <p:txBody>
-          <a:bodyPr/>
-          <a:lstStyle/>
-          <a:p>
-            <a:endParaRPr lang="it-IT"/>
-          </a:p>
-        </p:txBody>
-      </p:sp>
-      <p:sp>
-        <p:nvSpPr>
-          <p:cNvPr id="14" name="Text 12"/>
-          <p:cNvSpPr txBox="1"/>
-          <p:nvPr/>
-        </p:nvSpPr>
-        <p:spPr>
-          <a:xfrm>
-            <a:off x="566928" y="4672584"/>
-            <a:ext cx="402336" cy="402336"/>
-          </a:xfrm>
-          <a:prstGeom prst="rect">
-            <a:avLst/>
-          </a:prstGeom>
-          <a:noFill/>
-          <a:ln/>
-        </p:spPr>
-        <p:txBody>
-          <a:bodyPr wrap="square" lIns="0" tIns="0" rIns="0" bIns="0" rtlCol="0" anchor="ctr"/>
-          <a:lstStyle/>
-          <a:p>
-            <a:pPr marL="0" indent="0" algn="ctr">
-              <a:buNone/>
-            </a:pPr>
-            <a:r>
-              <a:rPr lang="en-US" sz="1500" b="1" dirty="0">
-                <a:solidFill>
-                  <a:srgbClr val="FFFFFF"/>
-                </a:solidFill>
-                <a:latin typeface="Calibri" pitchFamily="34" charset="0"/>
-                <a:ea typeface="Calibri" pitchFamily="34" charset="-122"/>
-                <a:cs typeface="Calibri" pitchFamily="34" charset="-120"/>
-              </a:rPr>
-              <a:t>3</a:t>
-            </a:r>
-            <a:endParaRPr lang="en-US" sz="1500" dirty="0"/>
-          </a:p>
-        </p:txBody>
-      </p:sp>
-      <p:sp>
-        <p:nvSpPr>
-          <p:cNvPr id="15" name="Text 13"/>
-          <p:cNvSpPr txBox="1"/>
-          <p:nvPr/>
-        </p:nvSpPr>
-        <p:spPr>
-          <a:xfrm>
-            <a:off x="1188720" y="4654296"/>
-            <a:ext cx="3383280" cy="292608"/>
-          </a:xfrm>
-          <a:prstGeom prst="rect">
-            <a:avLst/>
-          </a:prstGeom>
-          <a:noFill/>
-          <a:ln/>
-        </p:spPr>
-        <p:txBody>
-          <a:bodyPr wrap="square" lIns="0" tIns="0" rIns="0" bIns="0" rtlCol="0" anchor="ctr"/>
-          <a:lstStyle/>
-          <a:p>
-            <a:pPr marL="0" indent="0">
-              <a:buNone/>
-            </a:pPr>
-            <a:r>
-              <a:rPr lang="en-US" sz="1450" b="1" dirty="0">
-                <a:solidFill>
-                  <a:srgbClr val="1A1A1A"/>
-                </a:solidFill>
-                <a:latin typeface="Cambria" pitchFamily="34" charset="0"/>
-                <a:ea typeface="Cambria" pitchFamily="34" charset="-122"/>
-                <a:cs typeface="Cambria" pitchFamily="34" charset="-120"/>
-              </a:rPr>
-              <a:t>Inversion of the observations</a:t>
-            </a:r>
-            <a:endParaRPr lang="en-US" sz="1450" dirty="0"/>
-          </a:p>
-        </p:txBody>
-      </p:sp>
-      <p:sp>
-        <p:nvSpPr>
-          <p:cNvPr id="16" name="Text 14"/>
-          <p:cNvSpPr txBox="1"/>
-          <p:nvPr/>
-        </p:nvSpPr>
-        <p:spPr>
-          <a:xfrm>
-            <a:off x="1188720" y="4965192"/>
-            <a:ext cx="6035040" cy="658368"/>
-          </a:xfrm>
-          <a:prstGeom prst="rect">
-            <a:avLst/>
-          </a:prstGeom>
-          <a:noFill/>
-          <a:ln/>
-        </p:spPr>
-        <p:txBody>
-          <a:bodyPr wrap="square" lIns="0" tIns="0" rIns="0" bIns="0" rtlCol="0" anchor="ctr"/>
-          <a:lstStyle/>
-          <a:p>
-            <a:pPr marL="0" indent="0">
-              <a:lnSpc>
-                <a:spcPts val="1700"/>
-              </a:lnSpc>
-              <a:buNone/>
-            </a:pPr>
-            <a:r>
-              <a:rPr lang="en-US" sz="1250" dirty="0">
-                <a:solidFill>
-                  <a:srgbClr val="5F6368"/>
-                </a:solidFill>
-                <a:latin typeface="Calibri" pitchFamily="34" charset="0"/>
-                <a:ea typeface="Calibri" pitchFamily="34" charset="-122"/>
-                <a:cs typeface="Calibri" pitchFamily="34" charset="-120"/>
-              </a:rPr>
-              <a:t>The observations cease to be the forcing and become the test, addressing whether recorded events occur under the conditions identified as resonant.</a:t>
-            </a:r>
-            <a:endParaRPr lang="en-US" sz="1250" dirty="0"/>
-          </a:p>
-        </p:txBody>
-      </p:sp>
-      <p:sp>
-        <p:nvSpPr>
-          <p:cNvPr id="17" name="Shape 15"/>
-          <p:cNvSpPr/>
-          <p:nvPr/>
-        </p:nvSpPr>
-        <p:spPr>
-          <a:xfrm>
-            <a:off x="7680960" y="2286000"/>
-            <a:ext cx="3941064" cy="3108960"/>
-          </a:xfrm>
-          <a:prstGeom prst="roundRect">
-            <a:avLst>
-              <a:gd name="adj" fmla="val 1765"/>
-            </a:avLst>
-          </a:prstGeom>
-          <a:solidFill>
-            <a:srgbClr val="21295C"/>
-          </a:solidFill>
-          <a:ln/>
-        </p:spPr>
-        <p:txBody>
-          <a:bodyPr/>
-          <a:lstStyle/>
-          <a:p>
-            <a:endParaRPr lang="it-IT"/>
-          </a:p>
-        </p:txBody>
-      </p:sp>
-      <p:sp>
-        <p:nvSpPr>
-          <p:cNvPr id="18" name="Text 16"/>
-          <p:cNvSpPr txBox="1"/>
-          <p:nvPr/>
-        </p:nvSpPr>
-        <p:spPr>
-          <a:xfrm>
-            <a:off x="7955280" y="2487168"/>
-            <a:ext cx="3429000" cy="548640"/>
-          </a:xfrm>
-          <a:prstGeom prst="rect">
-            <a:avLst/>
-          </a:prstGeom>
-          <a:noFill/>
-          <a:ln/>
-        </p:spPr>
-        <p:txBody>
-          <a:bodyPr wrap="square" lIns="0" tIns="0" rIns="0" bIns="0" rtlCol="0" anchor="ctr"/>
-          <a:lstStyle/>
-          <a:p>
-            <a:pPr marL="0" indent="0">
-              <a:buNone/>
-            </a:pPr>
-            <a:r>
-              <a:rPr lang="en-US" sz="1400" b="1" dirty="0">
-                <a:solidFill>
-                  <a:srgbClr val="EB6834"/>
-                </a:solidFill>
-                <a:latin typeface="Cambria" pitchFamily="34" charset="0"/>
-                <a:ea typeface="Cambria" pitchFamily="34" charset="-122"/>
-                <a:cs typeface="Cambria" pitchFamily="34" charset="-120"/>
-              </a:rPr>
-              <a:t>Bearing beyond the present study</a:t>
-            </a:r>
-            <a:endParaRPr lang="en-US" sz="1400" dirty="0"/>
-          </a:p>
-        </p:txBody>
-      </p:sp>
-      <p:sp>
-        <p:nvSpPr>
-          <p:cNvPr id="19" name="Text 17"/>
-          <p:cNvSpPr txBox="1"/>
-          <p:nvPr/>
-        </p:nvSpPr>
-        <p:spPr>
-          <a:xfrm>
-            <a:off x="7955280" y="3063240"/>
-            <a:ext cx="3429000" cy="2103120"/>
-          </a:xfrm>
-          <a:prstGeom prst="rect">
-            <a:avLst/>
-          </a:prstGeom>
-          <a:noFill/>
-          <a:ln/>
-        </p:spPr>
-        <p:txBody>
-          <a:bodyPr wrap="square" lIns="0" tIns="0" rIns="0" bIns="0" rtlCol="0" anchor="ctr"/>
-          <a:lstStyle/>
-          <a:p>
-            <a:pPr marL="0" indent="0">
-              <a:lnSpc>
-                <a:spcPts val="1550"/>
-              </a:lnSpc>
-              <a:buNone/>
-            </a:pPr>
-            <a:r>
-              <a:rPr lang="en-US" sz="1150" dirty="0">
-                <a:solidFill>
-                  <a:srgbClr val="CADCFC"/>
-                </a:solidFill>
-                <a:latin typeface="Calibri" pitchFamily="34" charset="0"/>
-                <a:ea typeface="Calibri" pitchFamily="34" charset="-122"/>
-                <a:cs typeface="Calibri" pitchFamily="34" charset="-120"/>
-              </a:rPr>
-              <a:t>A response surface is a property of the geometry, whereas climate change acts on the distribution of the forcing.
-</a:t>
-            </a:r>
-            <a:endParaRPr lang="en-US" sz="1150" dirty="0"/>
-          </a:p>
-          <a:p>
-            <a:pPr marL="0" indent="0">
-              <a:lnSpc>
-                <a:spcPts val="1550"/>
-              </a:lnSpc>
-              <a:buNone/>
-            </a:pPr>
-            <a:r>
-              <a:rPr lang="en-US" sz="1150" dirty="0">
-                <a:solidFill>
-                  <a:srgbClr val="CADCFC"/>
-                </a:solidFill>
-                <a:latin typeface="Calibri" pitchFamily="34" charset="0"/>
-                <a:ea typeface="Calibri" pitchFamily="34" charset="-122"/>
-                <a:cs typeface="Calibri" pitchFamily="34" charset="-120"/>
-              </a:rPr>
-              <a:t>The two separate, so the surface is computed once and any later study with synoptic projections may convolve them without repeating the hydrodynamics.
-</a:t>
-            </a:r>
-            <a:endParaRPr lang="en-US" sz="1150" dirty="0"/>
-          </a:p>
-          <a:p>
-            <a:pPr marL="0" indent="0">
-              <a:lnSpc>
-                <a:spcPts val="1550"/>
-              </a:lnSpc>
-              <a:buNone/>
-            </a:pPr>
-            <a:r>
-              <a:rPr lang="en-US" sz="1150" b="1" dirty="0">
-                <a:solidFill>
-                  <a:srgbClr val="FFFFFF"/>
-                </a:solidFill>
-                <a:latin typeface="Calibri" pitchFamily="34" charset="0"/>
-                <a:ea typeface="Calibri" pitchFamily="34" charset="-122"/>
-                <a:cs typeface="Calibri" pitchFamily="34" charset="-120"/>
-              </a:rPr>
-              <a:t>No climate scenario need be run through the model.</a:t>
-            </a:r>
-            <a:endParaRPr lang="en-US" sz="1150" dirty="0"/>
-          </a:p>
-        </p:txBody>
-      </p:sp>
-      <p:sp>
-        <p:nvSpPr>
-          <p:cNvPr id="20" name="Text 18"/>
-          <p:cNvSpPr txBox="1"/>
-          <p:nvPr/>
-        </p:nvSpPr>
-        <p:spPr>
-          <a:xfrm>
-            <a:off x="566928" y="6053328"/>
-            <a:ext cx="11055096" cy="310896"/>
-          </a:xfrm>
-          <a:prstGeom prst="rect">
-            <a:avLst/>
-          </a:prstGeom>
-          <a:noFill/>
-          <a:ln/>
-        </p:spPr>
-        <p:txBody>
-          <a:bodyPr wrap="square" lIns="0" tIns="0" rIns="0" bIns="0" rtlCol="0" anchor="ctr"/>
-          <a:lstStyle/>
-          <a:p>
-            <a:pPr marL="0" indent="0">
-              <a:buNone/>
-            </a:pPr>
-            <a:r>
-              <a:rPr lang="en-US" sz="1050" i="1" dirty="0">
-                <a:solidFill>
-                  <a:srgbClr val="5F6368"/>
-                </a:solidFill>
-                <a:latin typeface="Calibri" pitchFamily="34" charset="0"/>
-                <a:ea typeface="Calibri" pitchFamily="34" charset="-122"/>
-                <a:cs typeface="Calibri" pitchFamily="34" charset="-120"/>
-              </a:rPr>
-              <a:t>The milgħuba floods Msida, at the head of Msida Creek inside Marsamxett, together with Marsaskala, Xemxija, Marsaxlokk and Sliema.</a:t>
-            </a:r>
-            <a:endParaRPr lang="en-US" sz="1050" dirty="0"/>
+              <a:t>What neither treats is the generation of the long wave, the circulation of the harbour, or its renewal.</a:t>
+            </a:r>
+            <a:endParaRPr lang="en-US" sz="1200" dirty="0"/>
           </a:p>
         </p:txBody>
       </p:sp>
@@ -12657,319 +14969,4 @@
     </a:ext>
   </a:extLst>
 </a:theme>
-</file>
-
-<file path=ppt/theme/theme2.xml><?xml version="1.0" encoding="utf-8"?>
-<a:theme xmlns:a="http://schemas.openxmlformats.org/drawingml/2006/main" name="Office Theme">
-  <a:themeElements>
-    <a:clrScheme name="Office">
-      <a:dk1>
-        <a:sysClr val="windowText" lastClr="000000"/>
-      </a:dk1>
-      <a:lt1>
-        <a:sysClr val="window" lastClr="FFFFFF"/>
-      </a:lt1>
-      <a:dk2>
-        <a:srgbClr val="0E2841"/>
-      </a:dk2>
-      <a:lt2>
-        <a:srgbClr val="E8E8E8"/>
-      </a:lt2>
-      <a:accent1>
-        <a:srgbClr val="156082"/>
-      </a:accent1>
-      <a:accent2>
-        <a:srgbClr val="E97132"/>
-      </a:accent2>
-      <a:accent3>
-        <a:srgbClr val="196B24"/>
-      </a:accent3>
-      <a:accent4>
-        <a:srgbClr val="0F9ED5"/>
-      </a:accent4>
-      <a:accent5>
-        <a:srgbClr val="A02B93"/>
-      </a:accent5>
-      <a:accent6>
-        <a:srgbClr val="4EA72E"/>
-      </a:accent6>
-      <a:hlink>
-        <a:srgbClr val="467886"/>
-      </a:hlink>
-      <a:folHlink>
-        <a:srgbClr val="96607D"/>
-      </a:folHlink>
-    </a:clrScheme>
-    <a:fontScheme name="Office">
-      <a:majorFont>
-        <a:latin typeface="Aptos Display" panose="02110004020202020204"/>
-        <a:ea typeface=""/>
-        <a:cs typeface=""/>
-        <a:font script="Jpan" typeface="游ゴシック Light"/>
-        <a:font script="Hang" typeface="맑은 고딕"/>
-        <a:font script="Hans" typeface="等线 Light"/>
-        <a:font script="Hant" typeface="新細明體"/>
-        <a:font script="Arab" typeface="Times New Roman"/>
-        <a:font script="Hebr" typeface="Times New Roman"/>
-        <a:font script="Thai" typeface="Angsana New"/>
-        <a:font script="Ethi" typeface="Nyala"/>
-        <a:font script="Beng" typeface="Vrinda"/>
-        <a:font script="Gujr" typeface="Shruti"/>
-        <a:font script="Khmr" typeface="MoolBoran"/>
-        <a:font script="Knda" typeface="Tunga"/>
-        <a:font script="Guru" typeface="Raavi"/>
-        <a:font script="Cans" typeface="Euphemia"/>
-        <a:font script="Cher" typeface="Plantagenet Cherokee"/>
-        <a:font script="Yiii" typeface="Microsoft Yi Baiti"/>
-        <a:font script="Tibt" typeface="Microsoft Himalaya"/>
-        <a:font script="Thaa" typeface="MV Boli"/>
-        <a:font script="Deva" typeface="Mangal"/>
-        <a:font script="Telu" typeface="Gautami"/>
-        <a:font script="Taml" typeface="Latha"/>
-        <a:font script="Syrc" typeface="Estrangelo Edessa"/>
-        <a:font script="Orya" typeface="Kalinga"/>
-        <a:font script="Mlym" typeface="Kartika"/>
-        <a:font script="Laoo" typeface="DokChampa"/>
-        <a:font script="Sinh" typeface="Iskoola Pota"/>
-        <a:font script="Mong" typeface="Mongolian Baiti"/>
-        <a:font script="Viet" typeface="Times New Roman"/>
-        <a:font script="Uigh" typeface="Microsoft Uighur"/>
-        <a:font script="Geor" typeface="Sylfaen"/>
-        <a:font script="Armn" typeface="Arial"/>
-        <a:font script="Bugi" typeface="Leelawadee UI"/>
-        <a:font script="Bopo" typeface="Microsoft JhengHei"/>
-        <a:font script="Java" typeface="Javanese Text"/>
-        <a:font script="Lisu" typeface="Segoe UI"/>
-        <a:font script="Mymr" typeface="Myanmar Text"/>
-        <a:font script="Nkoo" typeface="Ebrima"/>
-        <a:font script="Olck" typeface="Nirmala UI"/>
-        <a:font script="Osma" typeface="Ebrima"/>
-        <a:font script="Phag" typeface="Phagspa"/>
-        <a:font script="Syrn" typeface="Estrangelo Edessa"/>
-        <a:font script="Syrj" typeface="Estrangelo Edessa"/>
-        <a:font script="Syre" typeface="Estrangelo Edessa"/>
-        <a:font script="Sora" typeface="Nirmala UI"/>
-        <a:font script="Tale" typeface="Microsoft Tai Le"/>
-        <a:font script="Talu" typeface="Microsoft New Tai Lue"/>
-        <a:font script="Tfng" typeface="Ebrima"/>
-      </a:majorFont>
-      <a:minorFont>
-        <a:latin typeface="Aptos" panose="02110004020202020204"/>
-        <a:ea typeface=""/>
-        <a:cs typeface=""/>
-        <a:font script="Jpan" typeface="游ゴシック"/>
-        <a:font script="Hang" typeface="맑은 고딕"/>
-        <a:font script="Hans" typeface="等线"/>
-        <a:font script="Hant" typeface="新細明體"/>
-        <a:font script="Arab" typeface="Arial"/>
-        <a:font script="Hebr" typeface="Arial"/>
-        <a:font script="Thai" typeface="Cordia New"/>
-        <a:font script="Ethi" typeface="Nyala"/>
-        <a:font script="Beng" typeface="Vrinda"/>
-        <a:font script="Gujr" typeface="Shruti"/>
-        <a:font script="Khmr" typeface="DaunPenh"/>
-        <a:font script="Knda" typeface="Tunga"/>
-        <a:font script="Guru" typeface="Raavi"/>
-        <a:font script="Cans" typeface="Euphemia"/>
-        <a:font script="Cher" typeface="Plantagenet Cherokee"/>
-        <a:font script="Yiii" typeface="Microsoft Yi Baiti"/>
-        <a:font script="Tibt" typeface="Microsoft Himalaya"/>
-        <a:font script="Thaa" typeface="MV Boli"/>
-        <a:font script="Deva" typeface="Mangal"/>
-        <a:font script="Telu" typeface="Gautami"/>
-        <a:font script="Taml" typeface="Latha"/>
-        <a:font script="Syrc" typeface="Estrangelo Edessa"/>
-        <a:font script="Orya" typeface="Kalinga"/>
-        <a:font script="Mlym" typeface="Kartika"/>
-        <a:font script="Laoo" typeface="DokChampa"/>
-        <a:font script="Sinh" typeface="Iskoola Pota"/>
-        <a:font script="Mong" typeface="Mongolian Baiti"/>
-        <a:font script="Viet" typeface="Arial"/>
-        <a:font script="Uigh" typeface="Microsoft Uighur"/>
-        <a:font script="Geor" typeface="Sylfaen"/>
-        <a:font script="Armn" typeface="Arial"/>
-        <a:font script="Bugi" typeface="Leelawadee UI"/>
-        <a:font script="Bopo" typeface="Microsoft JhengHei"/>
-        <a:font script="Java" typeface="Javanese Text"/>
-        <a:font script="Lisu" typeface="Segoe UI"/>
-        <a:font script="Mymr" typeface="Myanmar Text"/>
-        <a:font script="Nkoo" typeface="Ebrima"/>
-        <a:font script="Olck" typeface="Nirmala UI"/>
-        <a:font script="Osma" typeface="Ebrima"/>
-        <a:font script="Phag" typeface="Phagspa"/>
-        <a:font script="Syrn" typeface="Estrangelo Edessa"/>
-        <a:font script="Syrj" typeface="Estrangelo Edessa"/>
-        <a:font script="Syre" typeface="Estrangelo Edessa"/>
-        <a:font script="Sora" typeface="Nirmala UI"/>
-        <a:font script="Tale" typeface="Microsoft Tai Le"/>
-        <a:font script="Talu" typeface="Microsoft New Tai Lue"/>
-        <a:font script="Tfng" typeface="Ebrima"/>
-      </a:minorFont>
-    </a:fontScheme>
-    <a:fmtScheme name="Office">
-      <a:fillStyleLst>
-        <a:solidFill>
-          <a:schemeClr val="phClr"/>
-        </a:solidFill>
-        <a:gradFill rotWithShape="1">
-          <a:gsLst>
-            <a:gs pos="0">
-              <a:schemeClr val="phClr">
-                <a:lumMod val="110000"/>
-                <a:satMod val="105000"/>
-                <a:tint val="67000"/>
-              </a:schemeClr>
-            </a:gs>
-            <a:gs pos="50000">
-              <a:schemeClr val="phClr">
-                <a:lumMod val="105000"/>
-                <a:satMod val="103000"/>
-                <a:tint val="73000"/>
-              </a:schemeClr>
-            </a:gs>
-            <a:gs pos="100000">
-              <a:schemeClr val="phClr">
-                <a:lumMod val="105000"/>
-                <a:satMod val="109000"/>
-                <a:tint val="81000"/>
-              </a:schemeClr>
-            </a:gs>
-          </a:gsLst>
-          <a:lin ang="5400000" scaled="0"/>
-        </a:gradFill>
-        <a:gradFill rotWithShape="1">
-          <a:gsLst>
-            <a:gs pos="0">
-              <a:schemeClr val="phClr">
-                <a:satMod val="103000"/>
-                <a:lumMod val="102000"/>
-                <a:tint val="94000"/>
-              </a:schemeClr>
-            </a:gs>
-            <a:gs pos="50000">
-              <a:schemeClr val="phClr">
-                <a:satMod val="110000"/>
-                <a:lumMod val="100000"/>
-                <a:shade val="100000"/>
-              </a:schemeClr>
-            </a:gs>
-            <a:gs pos="100000">
-              <a:schemeClr val="phClr">
-                <a:lumMod val="99000"/>
-                <a:satMod val="120000"/>
-                <a:shade val="78000"/>
-              </a:schemeClr>
-            </a:gs>
-          </a:gsLst>
-          <a:lin ang="5400000" scaled="0"/>
-        </a:gradFill>
-      </a:fillStyleLst>
-      <a:lnStyleLst>
-        <a:ln w="12700" cap="flat" cmpd="sng" algn="ctr">
-          <a:solidFill>
-            <a:schemeClr val="phClr"/>
-          </a:solidFill>
-          <a:prstDash val="solid"/>
-          <a:miter lim="800000"/>
-        </a:ln>
-        <a:ln w="19050" cap="flat" cmpd="sng" algn="ctr">
-          <a:solidFill>
-            <a:schemeClr val="phClr"/>
-          </a:solidFill>
-          <a:prstDash val="solid"/>
-          <a:miter lim="800000"/>
-        </a:ln>
-        <a:ln w="25400" cap="flat" cmpd="sng" algn="ctr">
-          <a:solidFill>
-            <a:schemeClr val="phClr"/>
-          </a:solidFill>
-          <a:prstDash val="solid"/>
-          <a:miter lim="800000"/>
-        </a:ln>
-      </a:lnStyleLst>
-      <a:effectStyleLst>
-        <a:effectStyle>
-          <a:effectLst/>
-        </a:effectStyle>
-        <a:effectStyle>
-          <a:effectLst/>
-        </a:effectStyle>
-        <a:effectStyle>
-          <a:effectLst>
-            <a:outerShdw blurRad="57150" dist="19050" dir="5400000" algn="ctr" rotWithShape="0">
-              <a:srgbClr val="000000">
-                <a:alpha val="63000"/>
-              </a:srgbClr>
-            </a:outerShdw>
-          </a:effectLst>
-        </a:effectStyle>
-      </a:effectStyleLst>
-      <a:bgFillStyleLst>
-        <a:solidFill>
-          <a:schemeClr val="phClr"/>
-        </a:solidFill>
-        <a:solidFill>
-          <a:schemeClr val="phClr">
-            <a:tint val="95000"/>
-            <a:satMod val="170000"/>
-          </a:schemeClr>
-        </a:solidFill>
-        <a:gradFill rotWithShape="1">
-          <a:gsLst>
-            <a:gs pos="0">
-              <a:schemeClr val="phClr">
-                <a:tint val="93000"/>
-                <a:satMod val="150000"/>
-                <a:shade val="98000"/>
-                <a:lumMod val="102000"/>
-              </a:schemeClr>
-            </a:gs>
-            <a:gs pos="50000">
-              <a:schemeClr val="phClr">
-                <a:tint val="98000"/>
-                <a:satMod val="130000"/>
-                <a:shade val="90000"/>
-                <a:lumMod val="103000"/>
-              </a:schemeClr>
-            </a:gs>
-            <a:gs pos="100000">
-              <a:schemeClr val="phClr">
-                <a:shade val="63000"/>
-                <a:satMod val="120000"/>
-              </a:schemeClr>
-            </a:gs>
-          </a:gsLst>
-          <a:lin ang="5400000" scaled="0"/>
-        </a:gradFill>
-      </a:bgFillStyleLst>
-    </a:fmtScheme>
-  </a:themeElements>
-  <a:objectDefaults>
-    <a:lnDef>
-      <a:spPr/>
-      <a:bodyPr/>
-      <a:lstStyle/>
-      <a:style>
-        <a:lnRef idx="2">
-          <a:schemeClr val="accent1"/>
-        </a:lnRef>
-        <a:fillRef idx="0">
-          <a:schemeClr val="accent1"/>
-        </a:fillRef>
-        <a:effectRef idx="1">
-          <a:schemeClr val="accent1"/>
-        </a:effectRef>
-        <a:fontRef idx="minor">
-          <a:schemeClr val="tx1"/>
-        </a:fontRef>
-      </a:style>
-    </a:lnDef>
-  </a:objectDefaults>
-  <a:extraClrSchemeLst/>
-  <a:extLst>
-    <a:ext uri="{05A4C25C-085E-4340-85A3-A5531E510DB2}">
-      <thm15:themeFamily xmlns:thm15="http://schemas.microsoft.com/office/thememl/2012/main" name="Office Theme" id="{2E142A2C-CD16-42D6-873A-C26D2A0506FA}" vid="{1BDDFF52-6CD6-40A5-AB3C-68EB2F1E4D0A}"/>
-    </a:ext>
-  </a:extLst>
-</a:theme>
 </file>
--- a/docs/valletta_model_concept_2026-09-25.pptx
+++ b/docs/valletta_model_concept_2026-09-25.pptx
@@ -1218,7 +1218,7 @@
           <a:p>
             <a:r>
               <a:rPr lang="en-US" dirty="0"/>
-              <a:t>The estimate was tested against its two plausible failures, the Helmholtz idealisation and excitation below resonance. The domain follows from this table. One correction is outstanding and it is not conservative: the coastline carries the St Elmo breakwater as a detached polygon of 378 m, so the mouth is not the single 400 m opening assumed, and a smaller section lengthens the period toward the observed band. Whether the group's harbour records carry energy near 17 minutes is the first outstanding question.</a:t>
+              <a:t>The estimate was tested against its two plausible failures, the Helmholtz idealisation and excitation below resonance. The domain follows from this table. One correction is outstanding and it is not conservative: the coastline carries the St Elmo breakwater as a detached polygon of 378 m, so the mouth is not the single 400 m opening assumed, and a smaller section lengthens the period toward the observed band. Whether the basins carry energy near 17 minutes no longer has to be inferred, since the Senglea gauge inside the Grand Harbour has recorded at five seconds since June 2021 and a spectrum from it settles the matter.</a:t>
             </a:r>
             <a:endParaRPr lang="en-US" dirty="0"/>
           </a:p>
@@ -4812,7 +4812,7 @@
                 <a:ea typeface="Calibri" pitchFamily="34" charset="-122"/>
                 <a:cs typeface="Calibri" pitchFamily="34" charset="-120"/>
               </a:rPr>
-              <a:t>Is there a sea level record inside the Grand Harbour, and at what sampling interval?</a:t>
+              <a:t>What is the extent and availability of the Senglea record, and its device id on the TAD server?</a:t>
             </a:r>
             <a:endParaRPr lang="en-US" sz="1280" dirty="0"/>
           </a:p>
@@ -4854,7 +4854,7 @@
                 <a:ea typeface="Calibri" pitchFamily="34" charset="-122"/>
                 <a:cs typeface="Calibri" pitchFamily="34" charset="-120"/>
               </a:rPr>
-              <a:t>A spectrum would establish whether the basins carry energy near 17 minutes. The 0.2 to 2 cph band is observed at Mellieħa, on another coast, so the present analysis can only infer the Valletta response.</a:t>
+              <a:t>The gauge inside the Grand Harbour has recorded at five seconds since June 2021, so the band is resolved and the question is one of access rather than existence. The retrieval route is the one the project already uses for Marettimo.</a:t>
             </a:r>
             <a:endParaRPr lang="en-US" sz="1100" dirty="0"/>
           </a:p>
@@ -5098,7 +5098,7 @@
                 <a:ea typeface="Calibri" pitchFamily="34" charset="-122"/>
                 <a:cs typeface="Calibri" pitchFamily="34" charset="-120"/>
               </a:rPr>
-              <a:t>What is the sampling interval of the PORTO sea level stations?</a:t>
+              <a:t>Is there a current or stratification record inside the harbours, in any form?</a:t>
             </a:r>
             <a:endParaRPr lang="en-US" sz="1280" dirty="0"/>
           </a:p>
@@ -5140,7 +5140,7 @@
                 <a:ea typeface="Calibri" pitchFamily="34" charset="-122"/>
                 <a:cs typeface="Calibri" pitchFamily="34" charset="-120"/>
               </a:rPr>
-              <a:t>The seiche band is 0.2 to 2 cph. At an interval coarser than one minute the model has no observational target within its own frequency range.</a:t>
+              <a:t>Sea level inside the basin is now covered by Senglea. What no instrument reports is the current field, the stratification of the inner inlets, or the mouth-to-head amplification, which one interior point cannot resolve.</a:t>
             </a:r>
             <a:endParaRPr lang="en-US" sz="1100" dirty="0"/>
           </a:p>
@@ -5659,7 +5659,7 @@
                 <a:ea typeface="Calibri" pitchFamily="34" charset="-122"/>
                 <a:cs typeface="Calibri" pitchFamily="34" charset="-120"/>
               </a:rPr>
-              <a:t>Seiche climatology from the Portomaso and PORTO archives. No model is required.</a:t>
+              <a:t>Seiche climatology from Senglea, inside the harbour, against Portomaso outside. No model is required.</a:t>
             </a:r>
             <a:endParaRPr lang="en-US" sz="1200" dirty="0"/>
           </a:p>
